--- a/slides/C24_Métricas_de_Classificação.pptx
+++ b/slides/C24_Métricas_de_Classificação.pptx
@@ -5,10 +5,10 @@
     <p:sldMasterId id="2147483648" r:id="rId1"/>
   </p:sldMasterIdLst>
   <p:notesMasterIdLst>
-    <p:notesMasterId r:id="rId33"/>
+    <p:notesMasterId r:id="rId34"/>
   </p:notesMasterIdLst>
   <p:handoutMasterIdLst>
-    <p:handoutMasterId r:id="rId34"/>
+    <p:handoutMasterId r:id="rId35"/>
   </p:handoutMasterIdLst>
   <p:sldIdLst>
     <p:sldId id="256" r:id="rId2"/>
@@ -24,24 +24,25 @@
     <p:sldId id="324" r:id="rId12"/>
     <p:sldId id="325" r:id="rId13"/>
     <p:sldId id="326" r:id="rId14"/>
-    <p:sldId id="327" r:id="rId15"/>
-    <p:sldId id="458" r:id="rId16"/>
-    <p:sldId id="328" r:id="rId17"/>
-    <p:sldId id="459" r:id="rId18"/>
-    <p:sldId id="332" r:id="rId19"/>
-    <p:sldId id="333" r:id="rId20"/>
-    <p:sldId id="329" r:id="rId21"/>
-    <p:sldId id="330" r:id="rId22"/>
-    <p:sldId id="381" r:id="rId23"/>
-    <p:sldId id="460" r:id="rId24"/>
-    <p:sldId id="331" r:id="rId25"/>
-    <p:sldId id="463" r:id="rId26"/>
-    <p:sldId id="462" r:id="rId27"/>
-    <p:sldId id="461" r:id="rId28"/>
-    <p:sldId id="334" r:id="rId29"/>
-    <p:sldId id="457" r:id="rId30"/>
-    <p:sldId id="336" r:id="rId31"/>
-    <p:sldId id="337" r:id="rId32"/>
+    <p:sldId id="464" r:id="rId15"/>
+    <p:sldId id="327" r:id="rId16"/>
+    <p:sldId id="458" r:id="rId17"/>
+    <p:sldId id="328" r:id="rId18"/>
+    <p:sldId id="459" r:id="rId19"/>
+    <p:sldId id="332" r:id="rId20"/>
+    <p:sldId id="333" r:id="rId21"/>
+    <p:sldId id="329" r:id="rId22"/>
+    <p:sldId id="330" r:id="rId23"/>
+    <p:sldId id="381" r:id="rId24"/>
+    <p:sldId id="460" r:id="rId25"/>
+    <p:sldId id="331" r:id="rId26"/>
+    <p:sldId id="463" r:id="rId27"/>
+    <p:sldId id="462" r:id="rId28"/>
+    <p:sldId id="461" r:id="rId29"/>
+    <p:sldId id="334" r:id="rId30"/>
+    <p:sldId id="457" r:id="rId31"/>
+    <p:sldId id="336" r:id="rId32"/>
+    <p:sldId id="337" r:id="rId33"/>
   </p:sldIdLst>
   <p:sldSz cx="12192000" cy="6858000"/>
   <p:notesSz cx="7315200" cy="9601200"/>
@@ -925,7 +926,7 @@
           <a:p>
             <a:fld id="{6FC8D850-966F-45A6-8DE7-15B891E7D40D}" type="slidenum">
               <a:rPr lang="pt-BR" smtClean="0"/>
-              <a:t>14</a:t>
+              <a:t>15</a:t>
             </a:fld>
             <a:endParaRPr lang="pt-BR"/>
           </a:p>
@@ -1029,7 +1030,7 @@
           <a:p>
             <a:fld id="{6FC8D850-966F-45A6-8DE7-15B891E7D40D}" type="slidenum">
               <a:rPr lang="pt-BR" smtClean="0"/>
-              <a:t>28</a:t>
+              <a:t>29</a:t>
             </a:fld>
             <a:endParaRPr lang="pt-BR"/>
           </a:p>
@@ -2102,6 +2103,120 @@
         <p:txBody>
           <a:bodyPr/>
           <a:lstStyle/>
+          <a:p>
+            <a:r>
+              <a:rPr lang="pt-BR" sz="1200" b="0" i="0" kern="1200" dirty="0">
+                <a:solidFill>
+                  <a:schemeClr val="tx1"/>
+                </a:solidFill>
+                <a:effectLst/>
+                <a:latin typeface="+mn-lt"/>
+                <a:ea typeface="+mn-ea"/>
+                <a:cs typeface="+mn-cs"/>
+              </a:rPr>
+              <a:t>A acurácia pode tender à 1 (100%) </a:t>
+            </a:r>
+            <a:r>
+              <a:rPr lang="en-US" dirty="0" err="1"/>
+              <a:t>mesmo</a:t>
+            </a:r>
+            <a:r>
+              <a:rPr lang="en-US" dirty="0"/>
+              <a:t> </a:t>
+            </a:r>
+            <a:r>
+              <a:rPr lang="en-US" dirty="0" err="1"/>
+              <a:t>que</a:t>
+            </a:r>
+            <a:r>
+              <a:rPr lang="en-US" dirty="0"/>
+              <a:t> o </a:t>
+            </a:r>
+            <a:r>
+              <a:rPr lang="en-US" dirty="0" err="1"/>
+              <a:t>modelo</a:t>
+            </a:r>
+            <a:r>
+              <a:rPr lang="en-US" dirty="0"/>
+              <a:t> </a:t>
+            </a:r>
+            <a:r>
+              <a:rPr lang="en-US" dirty="0" err="1"/>
+              <a:t>esteja</a:t>
+            </a:r>
+            <a:r>
+              <a:rPr lang="en-US" dirty="0"/>
+              <a:t> tendo um </a:t>
+            </a:r>
+            <a:r>
+              <a:rPr lang="en-US" dirty="0" err="1"/>
+              <a:t>desempenho</a:t>
+            </a:r>
+            <a:r>
+              <a:rPr lang="en-US" dirty="0"/>
+              <a:t> </a:t>
+            </a:r>
+            <a:r>
+              <a:rPr lang="en-US" dirty="0" err="1"/>
+              <a:t>ruim</a:t>
+            </a:r>
+            <a:r>
+              <a:rPr lang="en-US" dirty="0"/>
+              <a:t> </a:t>
+            </a:r>
+            <a:r>
+              <a:rPr lang="en-US" dirty="0" err="1"/>
+              <a:t>na</a:t>
+            </a:r>
+            <a:r>
+              <a:rPr lang="en-US" dirty="0"/>
+              <a:t> </a:t>
+            </a:r>
+            <a:r>
+              <a:rPr lang="en-US" dirty="0" err="1"/>
+              <a:t>identificação</a:t>
+            </a:r>
+            <a:r>
+              <a:rPr lang="en-US" dirty="0"/>
+              <a:t> da </a:t>
+            </a:r>
+            <a:r>
+              <a:rPr lang="en-US" dirty="0" err="1"/>
+              <a:t>classe</a:t>
+            </a:r>
+            <a:r>
+              <a:rPr lang="en-US" dirty="0"/>
+              <a:t> </a:t>
+            </a:r>
+            <a:r>
+              <a:rPr lang="en-US" dirty="0" err="1"/>
+              <a:t>negativa</a:t>
+            </a:r>
+            <a:r>
+              <a:rPr lang="en-US" dirty="0"/>
+              <a:t>.</a:t>
+            </a:r>
+            <a:endParaRPr lang="pt-BR" sz="1200" b="0" i="0" kern="1200" dirty="0">
+              <a:solidFill>
+                <a:schemeClr val="tx1"/>
+              </a:solidFill>
+              <a:effectLst/>
+              <a:latin typeface="+mn-lt"/>
+              <a:ea typeface="+mn-ea"/>
+              <a:cs typeface="+mn-cs"/>
+            </a:endParaRPr>
+          </a:p>
+          <a:p>
+            <a:endParaRPr lang="pt-BR" sz="1200" b="0" i="0" kern="1200" dirty="0">
+              <a:solidFill>
+                <a:schemeClr val="tx1"/>
+              </a:solidFill>
+              <a:effectLst/>
+              <a:latin typeface="+mn-lt"/>
+              <a:ea typeface="+mn-ea"/>
+              <a:cs typeface="+mn-cs"/>
+            </a:endParaRPr>
+          </a:p>
           <a:p>
             <a:r>
               <a:rPr lang="pt-BR" sz="1200" b="0" i="0" kern="1200" dirty="0">
@@ -6495,8 +6610,8 @@
           </a:p>
         </p:txBody>
       </p:sp>
-      <mc:AlternateContent xmlns:mc="http://schemas.openxmlformats.org/markup-compatibility/2006" xmlns:a14="http://schemas.microsoft.com/office/drawing/2010/main">
-        <mc:Choice Requires="a14">
+      <mc:AlternateContent xmlns:mc="http://schemas.openxmlformats.org/markup-compatibility/2006">
+        <mc:Choice xmlns:a14="http://schemas.microsoft.com/office/drawing/2010/main" Requires="a14">
           <p:sp>
             <p:nvSpPr>
               <p:cNvPr id="3" name="Espaço Reservado para Conteúdo 2">
@@ -6526,19 +6641,14 @@
               <a:lstStyle/>
               <a:p>
                 <a:r>
-                  <a:rPr lang="pt-BR" dirty="0">
+                  <a:rPr lang="pt-BR" noProof="0" dirty="0">
                     <a:solidFill>
                       <a:schemeClr val="tx1"/>
                     </a:solidFill>
                   </a:rPr>
                   <a:t>Analisando a equação da acurácia, o que aconteceria se TP fosse muito maior do que TN, FN e FP?</a:t>
                 </a:r>
-              </a:p>
-              <a:p>
-                <a:pPr marL="0" indent="0">
-                  <a:buNone/>
-                </a:pPr>
-                <a:endParaRPr lang="pt-BR" sz="800" dirty="0">
+                <a:endParaRPr lang="pt-BR" sz="800" noProof="0" dirty="0">
                   <a:solidFill>
                     <a:schemeClr val="tx1"/>
                   </a:solidFill>
@@ -6554,7 +6664,7 @@
                       <m:func>
                         <m:funcPr>
                           <m:ctrlPr>
-                            <a:rPr lang="pt-BR" i="1" smtClean="0">
+                            <a:rPr lang="pt-BR" i="1" noProof="0" smtClean="0">
                               <a:solidFill>
                                 <a:schemeClr val="tx1"/>
                               </a:solidFill>
@@ -6566,7 +6676,7 @@
                           <m:limLow>
                             <m:limLowPr>
                               <m:ctrlPr>
-                                <a:rPr lang="pt-BR" i="0" smtClean="0">
+                                <a:rPr lang="pt-BR" i="0" noProof="0" smtClean="0">
                                   <a:solidFill>
                                     <a:schemeClr val="tx1"/>
                                   </a:solidFill>
@@ -6579,7 +6689,7 @@
                                 <m:rPr>
                                   <m:sty m:val="p"/>
                                 </m:rPr>
-                                <a:rPr lang="pt-BR" i="0" smtClean="0">
+                                <a:rPr lang="pt-BR" i="0" noProof="0" smtClean="0">
                                   <a:solidFill>
                                     <a:schemeClr val="tx1"/>
                                   </a:solidFill>
@@ -6593,7 +6703,7 @@
                                 <m:rPr>
                                   <m:sty m:val="p"/>
                                 </m:rPr>
-                                <a:rPr lang="pt-BR" b="0" i="0" smtClean="0">
+                                <a:rPr lang="pt-BR" b="0" i="0" noProof="0" smtClean="0">
                                   <a:solidFill>
                                     <a:schemeClr val="tx1"/>
                                   </a:solidFill>
@@ -6602,7 +6712,7 @@
                                 <m:t>TP</m:t>
                               </m:r>
                               <m:r>
-                                <a:rPr lang="pt-BR" b="0" i="1" smtClean="0">
+                                <a:rPr lang="pt-BR" b="0" i="1" noProof="0" smtClean="0">
                                   <a:solidFill>
                                     <a:schemeClr val="tx1"/>
                                   </a:solidFill>
@@ -6619,7 +6729,7 @@
                             <m:rPr>
                               <m:sty m:val="p"/>
                             </m:rPr>
-                            <a:rPr lang="pt-BR" b="0" i="0" smtClean="0">
+                            <a:rPr lang="pt-BR" b="0" i="0" noProof="0" smtClean="0">
                               <a:solidFill>
                                 <a:schemeClr val="tx1"/>
                               </a:solidFill>
@@ -6629,7 +6739,7 @@
                             <m:t>acur</m:t>
                           </m:r>
                           <m:r>
-                            <a:rPr lang="pt-BR" b="0" i="0" smtClean="0">
+                            <a:rPr lang="pt-BR" b="0" i="0" noProof="0" smtClean="0">
                               <a:solidFill>
                                 <a:schemeClr val="tx1"/>
                               </a:solidFill>
@@ -6642,7 +6752,7 @@
                             <m:rPr>
                               <m:sty m:val="p"/>
                             </m:rPr>
-                            <a:rPr lang="pt-BR" b="0" i="0" smtClean="0">
+                            <a:rPr lang="pt-BR" b="0" i="0" noProof="0" smtClean="0">
                               <a:solidFill>
                                 <a:schemeClr val="tx1"/>
                               </a:solidFill>
@@ -6654,7 +6764,7 @@
                         </m:e>
                       </m:func>
                       <m:r>
-                        <a:rPr lang="pt-BR">
+                        <a:rPr lang="pt-BR" noProof="0">
                           <a:solidFill>
                             <a:schemeClr val="tx1"/>
                           </a:solidFill>
@@ -6665,7 +6775,7 @@
                       <m:limLow>
                         <m:limLowPr>
                           <m:ctrlPr>
-                            <a:rPr lang="pt-BR">
+                            <a:rPr lang="pt-BR" noProof="0">
                               <a:solidFill>
                                 <a:schemeClr val="tx1"/>
                               </a:solidFill>
@@ -6678,7 +6788,7 @@
                             <m:rPr>
                               <m:sty m:val="p"/>
                             </m:rPr>
-                            <a:rPr lang="pt-BR">
+                            <a:rPr lang="pt-BR" noProof="0">
                               <a:solidFill>
                                 <a:schemeClr val="tx1"/>
                               </a:solidFill>
@@ -6692,7 +6802,7 @@
                             <m:rPr>
                               <m:sty m:val="p"/>
                             </m:rPr>
-                            <a:rPr lang="pt-BR">
+                            <a:rPr lang="pt-BR" noProof="0">
                               <a:solidFill>
                                 <a:schemeClr val="tx1"/>
                               </a:solidFill>
@@ -6701,7 +6811,7 @@
                             <m:t>TP</m:t>
                           </m:r>
                           <m:r>
-                            <a:rPr lang="pt-BR" i="1">
+                            <a:rPr lang="pt-BR" i="1" noProof="0">
                               <a:solidFill>
                                 <a:schemeClr val="tx1"/>
                               </a:solidFill>
@@ -6715,7 +6825,7 @@
                       <m:d>
                         <m:dPr>
                           <m:ctrlPr>
-                            <a:rPr lang="pt-BR" i="1">
+                            <a:rPr lang="pt-BR" i="1" noProof="0">
                               <a:solidFill>
                                 <a:schemeClr val="tx1"/>
                               </a:solidFill>
@@ -6727,7 +6837,7 @@
                           <m:f>
                             <m:fPr>
                               <m:ctrlPr>
-                                <a:rPr lang="pt-BR">
+                                <a:rPr lang="pt-BR" noProof="0">
                                   <a:solidFill>
                                     <a:schemeClr val="tx1"/>
                                   </a:solidFill>
@@ -6740,7 +6850,7 @@
                                 <m:rPr>
                                   <m:sty m:val="p"/>
                                 </m:rPr>
-                                <a:rPr lang="pt-BR">
+                                <a:rPr lang="pt-BR" noProof="0">
                                   <a:solidFill>
                                     <a:schemeClr val="tx1"/>
                                   </a:solidFill>
@@ -6749,7 +6859,7 @@
                                 <m:t>TP</m:t>
                               </m:r>
                               <m:r>
-                                <a:rPr lang="pt-BR">
+                                <a:rPr lang="pt-BR" noProof="0">
                                   <a:solidFill>
                                     <a:schemeClr val="tx1"/>
                                   </a:solidFill>
@@ -6761,7 +6871,7 @@
                                 <m:rPr>
                                   <m:sty m:val="p"/>
                                 </m:rPr>
-                                <a:rPr lang="pt-BR">
+                                <a:rPr lang="pt-BR" noProof="0">
                                   <a:solidFill>
                                     <a:schemeClr val="tx1"/>
                                   </a:solidFill>
@@ -6775,7 +6885,7 @@
                                 <m:rPr>
                                   <m:sty m:val="p"/>
                                 </m:rPr>
-                                <a:rPr lang="pt-BR">
+                                <a:rPr lang="pt-BR" noProof="0">
                                   <a:solidFill>
                                     <a:schemeClr val="tx1"/>
                                   </a:solidFill>
@@ -6784,7 +6894,7 @@
                                 <m:t>TP</m:t>
                               </m:r>
                               <m:r>
-                                <a:rPr lang="pt-BR">
+                                <a:rPr lang="pt-BR" noProof="0">
                                   <a:solidFill>
                                     <a:schemeClr val="tx1"/>
                                   </a:solidFill>
@@ -6796,7 +6906,7 @@
                                 <m:rPr>
                                   <m:sty m:val="p"/>
                                 </m:rPr>
-                                <a:rPr lang="pt-BR">
+                                <a:rPr lang="pt-BR" noProof="0">
                                   <a:solidFill>
                                     <a:schemeClr val="tx1"/>
                                   </a:solidFill>
@@ -6805,7 +6915,7 @@
                                 <m:t>TN</m:t>
                               </m:r>
                               <m:r>
-                                <a:rPr lang="pt-BR" i="1">
+                                <a:rPr lang="pt-BR" i="1" noProof="0">
                                   <a:solidFill>
                                     <a:schemeClr val="tx1"/>
                                   </a:solidFill>
@@ -6817,7 +6927,7 @@
                                 <m:rPr>
                                   <m:sty m:val="p"/>
                                 </m:rPr>
-                                <a:rPr lang="pt-BR">
+                                <a:rPr lang="pt-BR" noProof="0">
                                   <a:solidFill>
                                     <a:schemeClr val="tx1"/>
                                   </a:solidFill>
@@ -6826,7 +6936,7 @@
                                 <m:t>FN</m:t>
                               </m:r>
                               <m:r>
-                                <a:rPr lang="pt-BR">
+                                <a:rPr lang="pt-BR" noProof="0">
                                   <a:solidFill>
                                     <a:schemeClr val="tx1"/>
                                   </a:solidFill>
@@ -6838,7 +6948,7 @@
                                 <m:rPr>
                                   <m:sty m:val="p"/>
                                 </m:rPr>
-                                <a:rPr lang="pt-BR">
+                                <a:rPr lang="pt-BR" noProof="0">
                                   <a:solidFill>
                                     <a:schemeClr val="tx1"/>
                                   </a:solidFill>
@@ -6851,19 +6961,19 @@
                         </m:e>
                       </m:d>
                       <m:r>
-                        <a:rPr lang="pt-BR" b="0" i="1" smtClean="0">
+                        <a:rPr lang="pt-BR" i="1" noProof="0" smtClean="0">
                           <a:solidFill>
                             <a:schemeClr val="tx1"/>
                           </a:solidFill>
                           <a:latin typeface="Cambria Math" panose="02040503050406030204" pitchFamily="18" charset="0"/>
                           <a:ea typeface="Cambria Math" panose="02040503050406030204" pitchFamily="18" charset="0"/>
                         </a:rPr>
-                        <m:t>=</m:t>
+                        <m:t>→</m:t>
                       </m:r>
                       <m:f>
                         <m:fPr>
                           <m:ctrlPr>
-                            <a:rPr lang="pt-BR">
+                            <a:rPr lang="pt-BR" noProof="0">
                               <a:solidFill>
                                 <a:schemeClr val="tx1"/>
                               </a:solidFill>
@@ -6876,7 +6986,7 @@
                             <m:rPr>
                               <m:sty m:val="p"/>
                             </m:rPr>
-                            <a:rPr lang="pt-BR">
+                            <a:rPr lang="pt-BR" noProof="0">
                               <a:solidFill>
                                 <a:schemeClr val="tx1"/>
                               </a:solidFill>
@@ -6890,7 +7000,7 @@
                             <m:rPr>
                               <m:sty m:val="p"/>
                             </m:rPr>
-                            <a:rPr lang="pt-BR">
+                            <a:rPr lang="pt-BR" noProof="0">
                               <a:solidFill>
                                 <a:schemeClr val="tx1"/>
                               </a:solidFill>
@@ -6901,7 +7011,7 @@
                         </m:den>
                       </m:f>
                       <m:r>
-                        <a:rPr lang="pt-BR" b="0" i="1" smtClean="0">
+                        <a:rPr lang="pt-BR" b="0" i="1" noProof="0" smtClean="0">
                           <a:solidFill>
                             <a:schemeClr val="tx1"/>
                           </a:solidFill>
@@ -6910,7 +7020,7 @@
                         <m:t>=1</m:t>
                       </m:r>
                       <m:r>
-                        <a:rPr lang="pt-BR" b="0" i="0" smtClean="0">
+                        <a:rPr lang="pt-BR" b="0" i="0" noProof="0" smtClean="0">
                           <a:solidFill>
                             <a:schemeClr val="tx1"/>
                           </a:solidFill>
@@ -6921,7 +7031,7 @@
                     </m:oMath>
                   </m:oMathPara>
                 </a14:m>
-                <a:endParaRPr lang="pt-BR" dirty="0">
+                <a:endParaRPr lang="pt-BR" sz="800" noProof="0" dirty="0">
                   <a:solidFill>
                     <a:schemeClr val="tx1"/>
                   </a:solidFill>
@@ -6931,15 +7041,25 @@
                 <a:pPr marL="0" indent="0">
                   <a:buNone/>
                 </a:pPr>
-                <a:endParaRPr lang="pt-BR" sz="800" dirty="0">
+                <a:endParaRPr lang="pt-BR" sz="800" noProof="0" dirty="0">
                   <a:solidFill>
                     <a:schemeClr val="tx1"/>
                   </a:solidFill>
                 </a:endParaRPr>
               </a:p>
               <a:p>
+                <a:pPr lvl="1">
+                  <a:buFont typeface="Wingdings" panose="05000000000000000000" pitchFamily="2" charset="2"/>
+                  <a:buChar char="§"/>
+                </a:pPr>
                 <a:r>
-                  <a:rPr lang="pt-BR" dirty="0">
+                  <a:rPr lang="pt-BR" noProof="0" dirty="0"/>
+                  <a:t>A acurácia pode tender à 1 mesmo que o modelo tenha um desempenho ruim na identificação da classe negativa.</a:t>
+                </a:r>
+              </a:p>
+              <a:p>
+                <a:r>
+                  <a:rPr lang="pt-BR" noProof="0" dirty="0">
                     <a:solidFill>
                       <a:schemeClr val="tx1"/>
                     </a:solidFill>
@@ -6949,41 +7069,7 @@
               </a:p>
               <a:p>
                 <a:r>
-                  <a:rPr lang="pt-BR" dirty="0">
-                    <a:solidFill>
-                      <a:schemeClr val="tx1"/>
-                    </a:solidFill>
-                  </a:rPr>
-                  <a:t>Portanto, quando temos </a:t>
-                </a:r>
-                <a:r>
-                  <a:rPr lang="pt-BR" b="1" dirty="0">
-                    <a:solidFill>
-                      <a:srgbClr val="00B050"/>
-                    </a:solidFill>
-                  </a:rPr>
-                  <a:t>classes desbalanceadas, precisamos </a:t>
-                </a:r>
-                <a:r>
-                  <a:rPr lang="pt-BR" b="1" dirty="0">
-                    <a:solidFill>
-                      <a:srgbClr val="7030A0"/>
-                    </a:solidFill>
-                  </a:rPr>
-                  <a:t>analisar outras métricas</a:t>
-                </a:r>
-                <a:r>
-                  <a:rPr lang="pt-BR" dirty="0">
-                    <a:solidFill>
-                      <a:schemeClr val="tx1"/>
-                    </a:solidFill>
-                  </a:rPr>
-                  <a:t>.</a:t>
-                </a:r>
-              </a:p>
-              <a:p>
-                <a:r>
-                  <a:rPr lang="pt-BR" b="0" dirty="0">
+                  <a:rPr lang="pt-BR" b="0" noProof="0" dirty="0">
                     <a:solidFill>
                       <a:schemeClr val="tx1"/>
                     </a:solidFill>
@@ -6998,14 +7084,14 @@
                   <a:buChar char="§"/>
                 </a:pPr>
                 <a:r>
-                  <a:rPr lang="pt-BR" dirty="0"/>
+                  <a:rPr lang="pt-BR" noProof="0" dirty="0"/>
                   <a:t>Por exemplo, para um modelo de classificação de doenças contagiosas, o custo de um FN (tem a doença, mas o modelo diz que não) é mais alto do que o de um FP.</a:t>
                 </a:r>
               </a:p>
             </p:txBody>
           </p:sp>
         </mc:Choice>
-        <mc:Fallback xmlns="">
+        <mc:Fallback>
           <p:sp>
             <p:nvSpPr>
               <p:cNvPr id="3" name="Espaço Reservado para Conteúdo 2">
@@ -7030,7 +7116,7 @@
               <a:blipFill>
                 <a:blip r:embed="rId3"/>
                 <a:stretch>
-                  <a:fillRect l="-913" t="-1887" b="-1061"/>
+                  <a:fillRect l="-913" t="-1887"/>
                 </a:stretch>
               </a:blipFill>
             </p:spPr>
@@ -7063,6 +7149,91 @@
 </file>
 
 <file path=ppt/slides/slide14.xml><?xml version="1.0" encoding="utf-8"?>
+<p:sld xmlns:a="http://schemas.openxmlformats.org/drawingml/2006/main" xmlns:r="http://schemas.openxmlformats.org/officeDocument/2006/relationships" xmlns:p="http://schemas.openxmlformats.org/presentationml/2006/main">
+  <p:cSld>
+    <p:spTree>
+      <p:nvGrpSpPr>
+        <p:cNvPr id="1" name=""/>
+        <p:cNvGrpSpPr/>
+        <p:nvPr/>
+      </p:nvGrpSpPr>
+      <p:grpSpPr>
+        <a:xfrm>
+          <a:off x="0" y="0"/>
+          <a:ext cx="0" cy="0"/>
+          <a:chOff x="0" y="0"/>
+          <a:chExt cx="0" cy="0"/>
+        </a:xfrm>
+      </p:grpSpPr>
+      <p:sp>
+        <p:nvSpPr>
+          <p:cNvPr id="3" name="Espaço Reservado para Conteúdo 2">
+            <a:extLst>
+              <a:ext uri="{FF2B5EF4-FFF2-40B4-BE49-F238E27FC236}">
+                <a16:creationId xmlns:a16="http://schemas.microsoft.com/office/drawing/2014/main" id="{B0351861-7A86-07B3-5514-F1B15497FB0D}"/>
+              </a:ext>
+            </a:extLst>
+          </p:cNvPr>
+          <p:cNvSpPr>
+            <a:spLocks noGrp="1"/>
+          </p:cNvSpPr>
+          <p:nvPr>
+            <p:ph idx="1"/>
+          </p:nvPr>
+        </p:nvSpPr>
+        <p:spPr>
+          <a:xfrm>
+            <a:off x="442912" y="2217737"/>
+            <a:ext cx="11306175" cy="2422525"/>
+          </a:xfrm>
+        </p:spPr>
+        <p:txBody>
+          <a:bodyPr>
+            <a:normAutofit/>
+          </a:bodyPr>
+          <a:lstStyle/>
+          <a:p>
+            <a:pPr marL="0" indent="0" algn="ctr">
+              <a:buNone/>
+            </a:pPr>
+            <a:r>
+              <a:rPr lang="pt-BR" sz="5400" dirty="0"/>
+              <a:t>Portanto, quando temos </a:t>
+            </a:r>
+            <a:r>
+              <a:rPr lang="pt-BR" sz="5400" b="1" dirty="0">
+                <a:solidFill>
+                  <a:srgbClr val="00B050"/>
+                </a:solidFill>
+              </a:rPr>
+              <a:t>classes desbalanceadas ou custos diferentes, devemos </a:t>
+            </a:r>
+            <a:r>
+              <a:rPr lang="pt-BR" sz="5400" b="1" dirty="0">
+                <a:solidFill>
+                  <a:srgbClr val="7030A0"/>
+                </a:solidFill>
+              </a:rPr>
+              <a:t>analisar outras métricas</a:t>
+            </a:r>
+            <a:endParaRPr lang="pt-BR" sz="5400" dirty="0"/>
+          </a:p>
+        </p:txBody>
+      </p:sp>
+    </p:spTree>
+    <p:extLst>
+      <p:ext uri="{BB962C8B-B14F-4D97-AF65-F5344CB8AC3E}">
+        <p14:creationId xmlns:p14="http://schemas.microsoft.com/office/powerpoint/2010/main" val="2112176840"/>
+      </p:ext>
+    </p:extLst>
+  </p:cSld>
+  <p:clrMapOvr>
+    <a:masterClrMapping/>
+  </p:clrMapOvr>
+</p:sld>
+</file>
+
+<file path=ppt/slides/slide15.xml><?xml version="1.0" encoding="utf-8"?>
 <p:sld xmlns:a="http://schemas.openxmlformats.org/drawingml/2006/main" xmlns:r="http://schemas.openxmlformats.org/officeDocument/2006/relationships" xmlns:p="http://schemas.openxmlformats.org/presentationml/2006/main">
   <p:cSld>
     <p:spTree>
@@ -7156,92 +7327,12 @@
               <a:buChar char="§"/>
             </a:pPr>
             <a:r>
-              <a:rPr lang="en-US" b="1" dirty="0">
+              <a:rPr lang="pt-BR" b="1" dirty="0">
                 <a:solidFill>
                   <a:srgbClr val="7030A0"/>
                 </a:solidFill>
               </a:rPr>
-              <a:t>Quando </a:t>
-            </a:r>
-            <a:r>
-              <a:rPr lang="en-US" b="1" dirty="0" err="1">
-                <a:solidFill>
-                  <a:srgbClr val="7030A0"/>
-                </a:solidFill>
-              </a:rPr>
-              <a:t>ele</a:t>
-            </a:r>
-            <a:r>
-              <a:rPr lang="en-US" b="1" dirty="0">
-                <a:solidFill>
-                  <a:srgbClr val="7030A0"/>
-                </a:solidFill>
-              </a:rPr>
-              <a:t> </a:t>
-            </a:r>
-            <a:r>
-              <a:rPr lang="en-US" b="1" dirty="0" err="1">
-                <a:solidFill>
-                  <a:srgbClr val="7030A0"/>
-                </a:solidFill>
-              </a:rPr>
-              <a:t>prediz</a:t>
-            </a:r>
-            <a:r>
-              <a:rPr lang="en-US" b="1" dirty="0">
-                <a:solidFill>
-                  <a:srgbClr val="7030A0"/>
-                </a:solidFill>
-              </a:rPr>
-              <a:t> </a:t>
-            </a:r>
-            <a:r>
-              <a:rPr lang="en-US" b="1" dirty="0" err="1">
-                <a:solidFill>
-                  <a:srgbClr val="7030A0"/>
-                </a:solidFill>
-              </a:rPr>
-              <a:t>positivo</a:t>
-            </a:r>
-            <a:r>
-              <a:rPr lang="en-US" b="1" dirty="0">
-                <a:solidFill>
-                  <a:srgbClr val="7030A0"/>
-                </a:solidFill>
-              </a:rPr>
-              <a:t>, </a:t>
-            </a:r>
-            <a:r>
-              <a:rPr lang="en-US" b="1" dirty="0" err="1">
-                <a:solidFill>
-                  <a:srgbClr val="7030A0"/>
-                </a:solidFill>
-              </a:rPr>
-              <a:t>podemos</a:t>
-            </a:r>
-            <a:r>
-              <a:rPr lang="en-US" b="1" dirty="0">
-                <a:solidFill>
-                  <a:srgbClr val="7030A0"/>
-                </a:solidFill>
-              </a:rPr>
-              <a:t> </a:t>
-            </a:r>
-            <a:r>
-              <a:rPr lang="en-US" b="1" dirty="0" err="1">
-                <a:solidFill>
-                  <a:srgbClr val="7030A0"/>
-                </a:solidFill>
-              </a:rPr>
-              <a:t>confiar</a:t>
-            </a:r>
-            <a:r>
-              <a:rPr lang="en-US" b="1" dirty="0">
-                <a:solidFill>
-                  <a:srgbClr val="7030A0"/>
-                </a:solidFill>
-              </a:rPr>
-              <a:t>?</a:t>
+              <a:t>Quando ele prediz positivo, podemos confiar?</a:t>
             </a:r>
             <a:endParaRPr lang="pt-BR" b="1" noProof="0" dirty="0">
               <a:solidFill>
@@ -7842,8 +7933,8 @@
         </p:nvSpPr>
         <p:spPr>
           <a:xfrm rot="16200000">
-            <a:off x="2438401" y="4876801"/>
-            <a:ext cx="609602" cy="2081050"/>
+            <a:off x="2443164" y="4941012"/>
+            <a:ext cx="609602" cy="1952628"/>
           </a:xfrm>
           <a:prstGeom prst="rect">
             <a:avLst/>
@@ -7880,6 +7971,150 @@
           </a:p>
         </p:txBody>
       </p:sp>
+      <p:sp>
+        <p:nvSpPr>
+          <p:cNvPr id="7" name="CaixaDeTexto 6">
+            <a:extLst>
+              <a:ext uri="{FF2B5EF4-FFF2-40B4-BE49-F238E27FC236}">
+                <a16:creationId xmlns:a16="http://schemas.microsoft.com/office/drawing/2014/main" id="{D1154846-7200-8A13-7CE3-866E0423AC95}"/>
+              </a:ext>
+            </a:extLst>
+          </p:cNvPr>
+          <p:cNvSpPr txBox="1"/>
+          <p:nvPr/>
+        </p:nvSpPr>
+        <p:spPr>
+          <a:xfrm>
+            <a:off x="2200275" y="6157592"/>
+            <a:ext cx="255198" cy="369332"/>
+          </a:xfrm>
+          <a:prstGeom prst="rect">
+            <a:avLst/>
+          </a:prstGeom>
+          <a:noFill/>
+        </p:spPr>
+        <p:txBody>
+          <a:bodyPr wrap="none" rtlCol="0">
+            <a:spAutoFit/>
+          </a:bodyPr>
+          <a:lstStyle/>
+          <a:p>
+            <a:r>
+              <a:rPr lang="pt-BR" dirty="0"/>
+              <a:t>-</a:t>
+            </a:r>
+            <a:endParaRPr lang="en-US" dirty="0"/>
+          </a:p>
+        </p:txBody>
+      </p:sp>
+      <p:sp>
+        <p:nvSpPr>
+          <p:cNvPr id="9" name="CaixaDeTexto 8">
+            <a:extLst>
+              <a:ext uri="{FF2B5EF4-FFF2-40B4-BE49-F238E27FC236}">
+                <a16:creationId xmlns:a16="http://schemas.microsoft.com/office/drawing/2014/main" id="{D5BECE90-0299-928D-2937-BAD69964EB36}"/>
+              </a:ext>
+            </a:extLst>
+          </p:cNvPr>
+          <p:cNvSpPr txBox="1"/>
+          <p:nvPr/>
+        </p:nvSpPr>
+        <p:spPr>
+          <a:xfrm>
+            <a:off x="3070353" y="6170130"/>
+            <a:ext cx="300082" cy="369332"/>
+          </a:xfrm>
+          <a:prstGeom prst="rect">
+            <a:avLst/>
+          </a:prstGeom>
+          <a:noFill/>
+        </p:spPr>
+        <p:txBody>
+          <a:bodyPr wrap="none" rtlCol="0">
+            <a:spAutoFit/>
+          </a:bodyPr>
+          <a:lstStyle/>
+          <a:p>
+            <a:r>
+              <a:rPr lang="pt-BR" dirty="0"/>
+              <a:t>+</a:t>
+            </a:r>
+            <a:endParaRPr lang="en-US" dirty="0"/>
+          </a:p>
+        </p:txBody>
+      </p:sp>
+      <p:sp>
+        <p:nvSpPr>
+          <p:cNvPr id="11" name="CaixaDeTexto 10">
+            <a:extLst>
+              <a:ext uri="{FF2B5EF4-FFF2-40B4-BE49-F238E27FC236}">
+                <a16:creationId xmlns:a16="http://schemas.microsoft.com/office/drawing/2014/main" id="{4E5240CA-203C-851E-7E56-73BFF976FA1B}"/>
+              </a:ext>
+            </a:extLst>
+          </p:cNvPr>
+          <p:cNvSpPr txBox="1"/>
+          <p:nvPr/>
+        </p:nvSpPr>
+        <p:spPr>
+          <a:xfrm>
+            <a:off x="1469270" y="5688013"/>
+            <a:ext cx="300082" cy="369332"/>
+          </a:xfrm>
+          <a:prstGeom prst="rect">
+            <a:avLst/>
+          </a:prstGeom>
+          <a:noFill/>
+        </p:spPr>
+        <p:txBody>
+          <a:bodyPr wrap="none" rtlCol="0">
+            <a:spAutoFit/>
+          </a:bodyPr>
+          <a:lstStyle/>
+          <a:p>
+            <a:r>
+              <a:rPr lang="pt-BR" dirty="0"/>
+              <a:t>+</a:t>
+            </a:r>
+            <a:endParaRPr lang="en-US" dirty="0"/>
+          </a:p>
+        </p:txBody>
+      </p:sp>
+      <p:sp>
+        <p:nvSpPr>
+          <p:cNvPr id="13" name="CaixaDeTexto 12">
+            <a:extLst>
+              <a:ext uri="{FF2B5EF4-FFF2-40B4-BE49-F238E27FC236}">
+                <a16:creationId xmlns:a16="http://schemas.microsoft.com/office/drawing/2014/main" id="{08DF3936-009E-86E3-DA9B-9C242B4A2046}"/>
+              </a:ext>
+            </a:extLst>
+          </p:cNvPr>
+          <p:cNvSpPr txBox="1"/>
+          <p:nvPr/>
+        </p:nvSpPr>
+        <p:spPr>
+          <a:xfrm>
+            <a:off x="1491712" y="5280937"/>
+            <a:ext cx="255198" cy="369332"/>
+          </a:xfrm>
+          <a:prstGeom prst="rect">
+            <a:avLst/>
+          </a:prstGeom>
+          <a:noFill/>
+        </p:spPr>
+        <p:txBody>
+          <a:bodyPr wrap="none" rtlCol="0">
+            <a:spAutoFit/>
+          </a:bodyPr>
+          <a:lstStyle/>
+          <a:p>
+            <a:r>
+              <a:rPr lang="pt-BR" dirty="0"/>
+              <a:t>-</a:t>
+            </a:r>
+            <a:endParaRPr lang="en-US" dirty="0"/>
+          </a:p>
+        </p:txBody>
+      </p:sp>
     </p:spTree>
     <p:extLst>
       <p:ext uri="{BB962C8B-B14F-4D97-AF65-F5344CB8AC3E}">
@@ -7893,7 +8128,7 @@
 </p:sld>
 </file>
 
-<file path=ppt/slides/slide15.xml><?xml version="1.0" encoding="utf-8"?>
+<file path=ppt/slides/slide16.xml><?xml version="1.0" encoding="utf-8"?>
 <p:sld xmlns:a="http://schemas.openxmlformats.org/drawingml/2006/main" xmlns:r="http://schemas.openxmlformats.org/officeDocument/2006/relationships" xmlns:p="http://schemas.openxmlformats.org/presentationml/2006/main">
   <p:cSld>
     <p:spTree>
@@ -8831,7 +9066,7 @@
 </p:sld>
 </file>
 
-<file path=ppt/slides/slide16.xml><?xml version="1.0" encoding="utf-8"?>
+<file path=ppt/slides/slide17.xml><?xml version="1.0" encoding="utf-8"?>
 <p:sld xmlns:a="http://schemas.openxmlformats.org/drawingml/2006/main" xmlns:r="http://schemas.openxmlformats.org/officeDocument/2006/relationships" xmlns:p="http://schemas.openxmlformats.org/presentationml/2006/main">
   <p:cSld>
     <p:spTree>
@@ -9572,7 +9807,7 @@
 </p:sld>
 </file>
 
-<file path=ppt/slides/slide17.xml><?xml version="1.0" encoding="utf-8"?>
+<file path=ppt/slides/slide18.xml><?xml version="1.0" encoding="utf-8"?>
 <p:sld xmlns:a="http://schemas.openxmlformats.org/drawingml/2006/main" xmlns:r="http://schemas.openxmlformats.org/officeDocument/2006/relationships" xmlns:p="http://schemas.openxmlformats.org/presentationml/2006/main">
   <p:cSld>
     <p:spTree>
@@ -10432,7 +10667,7 @@
 </p:sld>
 </file>
 
-<file path=ppt/slides/slide18.xml><?xml version="1.0" encoding="utf-8"?>
+<file path=ppt/slides/slide19.xml><?xml version="1.0" encoding="utf-8"?>
 <p:sld xmlns:a="http://schemas.openxmlformats.org/drawingml/2006/main" xmlns:r="http://schemas.openxmlformats.org/officeDocument/2006/relationships" xmlns:p="http://schemas.openxmlformats.org/presentationml/2006/main">
   <p:cSld>
     <p:spTree>
@@ -10945,7 +11180,112 @@
 </p:sld>
 </file>
 
-<file path=ppt/slides/slide19.xml><?xml version="1.0" encoding="utf-8"?>
+<file path=ppt/slides/slide2.xml><?xml version="1.0" encoding="utf-8"?>
+<p:sld xmlns:a="http://schemas.openxmlformats.org/drawingml/2006/main" xmlns:r="http://schemas.openxmlformats.org/officeDocument/2006/relationships" xmlns:p="http://schemas.openxmlformats.org/presentationml/2006/main">
+  <p:cSld>
+    <p:spTree>
+      <p:nvGrpSpPr>
+        <p:cNvPr id="1" name=""/>
+        <p:cNvGrpSpPr/>
+        <p:nvPr/>
+      </p:nvGrpSpPr>
+      <p:grpSpPr>
+        <a:xfrm>
+          <a:off x="0" y="0"/>
+          <a:ext cx="0" cy="0"/>
+          <a:chOff x="0" y="0"/>
+          <a:chExt cx="0" cy="0"/>
+        </a:xfrm>
+      </p:grpSpPr>
+      <p:sp>
+        <p:nvSpPr>
+          <p:cNvPr id="2" name="Título 1">
+            <a:extLst>
+              <a:ext uri="{FF2B5EF4-FFF2-40B4-BE49-F238E27FC236}">
+                <a16:creationId xmlns:a16="http://schemas.microsoft.com/office/drawing/2014/main" id="{EECB3FED-5D1A-7084-5333-A3B2FA75F608}"/>
+              </a:ext>
+            </a:extLst>
+          </p:cNvPr>
+          <p:cNvSpPr>
+            <a:spLocks noGrp="1"/>
+          </p:cNvSpPr>
+          <p:nvPr>
+            <p:ph type="title"/>
+          </p:nvPr>
+        </p:nvSpPr>
+        <p:spPr/>
+        <p:txBody>
+          <a:bodyPr/>
+          <a:lstStyle/>
+          <a:p>
+            <a:r>
+              <a:rPr lang="pt-BR" dirty="0"/>
+              <a:t>O que vamos ver?</a:t>
+            </a:r>
+          </a:p>
+        </p:txBody>
+      </p:sp>
+      <p:sp>
+        <p:nvSpPr>
+          <p:cNvPr id="3" name="Espaço Reservado para Conteúdo 2">
+            <a:extLst>
+              <a:ext uri="{FF2B5EF4-FFF2-40B4-BE49-F238E27FC236}">
+                <a16:creationId xmlns:a16="http://schemas.microsoft.com/office/drawing/2014/main" id="{25FE7774-7186-A846-D8DE-518B2CBF4EBD}"/>
+              </a:ext>
+            </a:extLst>
+          </p:cNvPr>
+          <p:cNvSpPr>
+            <a:spLocks noGrp="1"/>
+          </p:cNvSpPr>
+          <p:nvPr>
+            <p:ph idx="1"/>
+          </p:nvPr>
+        </p:nvSpPr>
+        <p:spPr>
+          <a:xfrm>
+            <a:off x="838200" y="1825624"/>
+            <a:ext cx="11190514" cy="5032376"/>
+          </a:xfrm>
+        </p:spPr>
+        <p:txBody>
+          <a:bodyPr>
+            <a:normAutofit/>
+          </a:bodyPr>
+          <a:lstStyle/>
+          <a:p>
+            <a:r>
+              <a:rPr lang="pt-BR" dirty="0"/>
+              <a:t>Anteriormente, para analisar o desempenho de um classificador, usamos apenas a acurácia. </a:t>
+            </a:r>
+          </a:p>
+          <a:p>
+            <a:r>
+              <a:rPr lang="pt-BR" dirty="0"/>
+              <a:t>Porém, existem outras métricas que podem ser usadas para se medir a qualidade de um classificador.</a:t>
+            </a:r>
+          </a:p>
+          <a:p>
+            <a:r>
+              <a:rPr lang="pt-BR" dirty="0"/>
+              <a:t>Portanto, neste tópico, veremos algumas outras métricas.</a:t>
+            </a:r>
+          </a:p>
+        </p:txBody>
+      </p:sp>
+    </p:spTree>
+    <p:extLst>
+      <p:ext uri="{BB962C8B-B14F-4D97-AF65-F5344CB8AC3E}">
+        <p14:creationId xmlns:p14="http://schemas.microsoft.com/office/powerpoint/2010/main" val="2177516599"/>
+      </p:ext>
+    </p:extLst>
+  </p:cSld>
+  <p:clrMapOvr>
+    <a:masterClrMapping/>
+  </p:clrMapOvr>
+</p:sld>
+</file>
+
+<file path=ppt/slides/slide20.xml><?xml version="1.0" encoding="utf-8"?>
 <p:sld xmlns:a="http://schemas.openxmlformats.org/drawingml/2006/main" xmlns:r="http://schemas.openxmlformats.org/officeDocument/2006/relationships" xmlns:p="http://schemas.openxmlformats.org/presentationml/2006/main">
   <p:cSld>
     <p:spTree>
@@ -11599,112 +11939,7 @@
 </p:sld>
 </file>
 
-<file path=ppt/slides/slide2.xml><?xml version="1.0" encoding="utf-8"?>
-<p:sld xmlns:a="http://schemas.openxmlformats.org/drawingml/2006/main" xmlns:r="http://schemas.openxmlformats.org/officeDocument/2006/relationships" xmlns:p="http://schemas.openxmlformats.org/presentationml/2006/main">
-  <p:cSld>
-    <p:spTree>
-      <p:nvGrpSpPr>
-        <p:cNvPr id="1" name=""/>
-        <p:cNvGrpSpPr/>
-        <p:nvPr/>
-      </p:nvGrpSpPr>
-      <p:grpSpPr>
-        <a:xfrm>
-          <a:off x="0" y="0"/>
-          <a:ext cx="0" cy="0"/>
-          <a:chOff x="0" y="0"/>
-          <a:chExt cx="0" cy="0"/>
-        </a:xfrm>
-      </p:grpSpPr>
-      <p:sp>
-        <p:nvSpPr>
-          <p:cNvPr id="2" name="Título 1">
-            <a:extLst>
-              <a:ext uri="{FF2B5EF4-FFF2-40B4-BE49-F238E27FC236}">
-                <a16:creationId xmlns:a16="http://schemas.microsoft.com/office/drawing/2014/main" id="{EECB3FED-5D1A-7084-5333-A3B2FA75F608}"/>
-              </a:ext>
-            </a:extLst>
-          </p:cNvPr>
-          <p:cNvSpPr>
-            <a:spLocks noGrp="1"/>
-          </p:cNvSpPr>
-          <p:nvPr>
-            <p:ph type="title"/>
-          </p:nvPr>
-        </p:nvSpPr>
-        <p:spPr/>
-        <p:txBody>
-          <a:bodyPr/>
-          <a:lstStyle/>
-          <a:p>
-            <a:r>
-              <a:rPr lang="pt-BR" dirty="0"/>
-              <a:t>O que vamos ver?</a:t>
-            </a:r>
-          </a:p>
-        </p:txBody>
-      </p:sp>
-      <p:sp>
-        <p:nvSpPr>
-          <p:cNvPr id="3" name="Espaço Reservado para Conteúdo 2">
-            <a:extLst>
-              <a:ext uri="{FF2B5EF4-FFF2-40B4-BE49-F238E27FC236}">
-                <a16:creationId xmlns:a16="http://schemas.microsoft.com/office/drawing/2014/main" id="{25FE7774-7186-A846-D8DE-518B2CBF4EBD}"/>
-              </a:ext>
-            </a:extLst>
-          </p:cNvPr>
-          <p:cNvSpPr>
-            <a:spLocks noGrp="1"/>
-          </p:cNvSpPr>
-          <p:nvPr>
-            <p:ph idx="1"/>
-          </p:nvPr>
-        </p:nvSpPr>
-        <p:spPr>
-          <a:xfrm>
-            <a:off x="838200" y="1825624"/>
-            <a:ext cx="11190514" cy="5032376"/>
-          </a:xfrm>
-        </p:spPr>
-        <p:txBody>
-          <a:bodyPr>
-            <a:normAutofit/>
-          </a:bodyPr>
-          <a:lstStyle/>
-          <a:p>
-            <a:r>
-              <a:rPr lang="pt-BR" dirty="0"/>
-              <a:t>Anteriormente, para analisar o desempenho de um classificador, usamos apenas a acurácia. </a:t>
-            </a:r>
-          </a:p>
-          <a:p>
-            <a:r>
-              <a:rPr lang="pt-BR" dirty="0"/>
-              <a:t>Porém, existem outras métricas que podem ser usadas para se medir a qualidade de um classificador.</a:t>
-            </a:r>
-          </a:p>
-          <a:p>
-            <a:r>
-              <a:rPr lang="pt-BR" dirty="0"/>
-              <a:t>Portanto, neste tópico, veremos algumas outras métricas.</a:t>
-            </a:r>
-          </a:p>
-        </p:txBody>
-      </p:sp>
-    </p:spTree>
-    <p:extLst>
-      <p:ext uri="{BB962C8B-B14F-4D97-AF65-F5344CB8AC3E}">
-        <p14:creationId xmlns:p14="http://schemas.microsoft.com/office/powerpoint/2010/main" val="2177516599"/>
-      </p:ext>
-    </p:extLst>
-  </p:cSld>
-  <p:clrMapOvr>
-    <a:masterClrMapping/>
-  </p:clrMapOvr>
-</p:sld>
-</file>
-
-<file path=ppt/slides/slide20.xml><?xml version="1.0" encoding="utf-8"?>
+<file path=ppt/slides/slide21.xml><?xml version="1.0" encoding="utf-8"?>
 <p:sld xmlns:a="http://schemas.openxmlformats.org/drawingml/2006/main" xmlns:r="http://schemas.openxmlformats.org/officeDocument/2006/relationships" xmlns:p="http://schemas.openxmlformats.org/presentationml/2006/main">
   <p:cSld>
     <p:spTree>
@@ -11833,7 +12068,7 @@
 </p:sld>
 </file>
 
-<file path=ppt/slides/slide21.xml><?xml version="1.0" encoding="utf-8"?>
+<file path=ppt/slides/slide22.xml><?xml version="1.0" encoding="utf-8"?>
 <p:sld xmlns:a="http://schemas.openxmlformats.org/drawingml/2006/main" xmlns:r="http://schemas.openxmlformats.org/officeDocument/2006/relationships" xmlns:p="http://schemas.openxmlformats.org/presentationml/2006/main">
   <p:cSld>
     <p:spTree>
@@ -12385,7 +12620,7 @@
 </p:sld>
 </file>
 
-<file path=ppt/slides/slide22.xml><?xml version="1.0" encoding="utf-8"?>
+<file path=ppt/slides/slide23.xml><?xml version="1.0" encoding="utf-8"?>
 <p:sld xmlns:a="http://schemas.openxmlformats.org/drawingml/2006/main" xmlns:r="http://schemas.openxmlformats.org/officeDocument/2006/relationships" xmlns:p="http://schemas.openxmlformats.org/presentationml/2006/main">
   <p:cSld>
     <p:spTree>
@@ -18518,7 +18753,7 @@
 </p:sld>
 </file>
 
-<file path=ppt/slides/slide23.xml><?xml version="1.0" encoding="utf-8"?>
+<file path=ppt/slides/slide24.xml><?xml version="1.0" encoding="utf-8"?>
 <p:sld xmlns:a="http://schemas.openxmlformats.org/drawingml/2006/main" xmlns:r="http://schemas.openxmlformats.org/officeDocument/2006/relationships" xmlns:p="http://schemas.openxmlformats.org/presentationml/2006/main">
   <p:cSld>
     <p:spTree>
@@ -22014,7 +22249,7 @@
 </p:sld>
 </file>
 
-<file path=ppt/slides/slide24.xml><?xml version="1.0" encoding="utf-8"?>
+<file path=ppt/slides/slide25.xml><?xml version="1.0" encoding="utf-8"?>
 <p:sld xmlns:a="http://schemas.openxmlformats.org/drawingml/2006/main" xmlns:r="http://schemas.openxmlformats.org/officeDocument/2006/relationships" xmlns:p="http://schemas.openxmlformats.org/presentationml/2006/main">
   <p:cSld>
     <p:spTree>
@@ -25665,7 +25900,7 @@
 </p:sld>
 </file>
 
-<file path=ppt/slides/slide25.xml><?xml version="1.0" encoding="utf-8"?>
+<file path=ppt/slides/slide26.xml><?xml version="1.0" encoding="utf-8"?>
 <p:sld xmlns:a="http://schemas.openxmlformats.org/drawingml/2006/main" xmlns:r="http://schemas.openxmlformats.org/officeDocument/2006/relationships" xmlns:p="http://schemas.openxmlformats.org/presentationml/2006/main">
   <p:cSld>
     <p:spTree>
@@ -29490,7 +29725,7 @@
 </p:sld>
 </file>
 
-<file path=ppt/slides/slide26.xml><?xml version="1.0" encoding="utf-8"?>
+<file path=ppt/slides/slide27.xml><?xml version="1.0" encoding="utf-8"?>
 <p:sld xmlns:a="http://schemas.openxmlformats.org/drawingml/2006/main" xmlns:r="http://schemas.openxmlformats.org/officeDocument/2006/relationships" xmlns:p="http://schemas.openxmlformats.org/presentationml/2006/main">
   <p:cSld>
     <p:spTree>
@@ -30765,7 +31000,7 @@
 </p:sld>
 </file>
 
-<file path=ppt/slides/slide27.xml><?xml version="1.0" encoding="utf-8"?>
+<file path=ppt/slides/slide28.xml><?xml version="1.0" encoding="utf-8"?>
 <p:sld xmlns:a="http://schemas.openxmlformats.org/drawingml/2006/main" xmlns:r="http://schemas.openxmlformats.org/officeDocument/2006/relationships" xmlns:p="http://schemas.openxmlformats.org/presentationml/2006/main">
   <p:cSld>
     <p:spTree>
@@ -30896,7 +31131,7 @@
 </p:sld>
 </file>
 
-<file path=ppt/slides/slide28.xml><?xml version="1.0" encoding="utf-8"?>
+<file path=ppt/slides/slide29.xml><?xml version="1.0" encoding="utf-8"?>
 <p:sld xmlns:a="http://schemas.openxmlformats.org/drawingml/2006/main" xmlns:r="http://schemas.openxmlformats.org/officeDocument/2006/relationships" xmlns:p="http://schemas.openxmlformats.org/presentationml/2006/main">
   <p:cSld>
     <p:spTree>
@@ -31223,117 +31458,6 @@
 </p:sld>
 </file>
 
-<file path=ppt/slides/slide29.xml><?xml version="1.0" encoding="utf-8"?>
-<p:sld xmlns:a="http://schemas.openxmlformats.org/drawingml/2006/main" xmlns:r="http://schemas.openxmlformats.org/officeDocument/2006/relationships" xmlns:p="http://schemas.openxmlformats.org/presentationml/2006/main">
-  <p:cSld>
-    <p:spTree>
-      <p:nvGrpSpPr>
-        <p:cNvPr id="1" name=""/>
-        <p:cNvGrpSpPr/>
-        <p:nvPr/>
-      </p:nvGrpSpPr>
-      <p:grpSpPr>
-        <a:xfrm>
-          <a:off x="0" y="0"/>
-          <a:ext cx="0" cy="0"/>
-          <a:chOff x="0" y="0"/>
-          <a:chExt cx="0" cy="0"/>
-        </a:xfrm>
-      </p:grpSpPr>
-      <p:sp>
-        <p:nvSpPr>
-          <p:cNvPr id="2" name="Title 1">
-            <a:extLst>
-              <a:ext uri="{FF2B5EF4-FFF2-40B4-BE49-F238E27FC236}">
-                <a16:creationId xmlns:a16="http://schemas.microsoft.com/office/drawing/2014/main" id="{CF49AE95-3E0A-F9BB-A3FD-4C328EF25334}"/>
-              </a:ext>
-            </a:extLst>
-          </p:cNvPr>
-          <p:cNvSpPr>
-            <a:spLocks noGrp="1"/>
-          </p:cNvSpPr>
-          <p:nvPr>
-            <p:ph type="title"/>
-          </p:nvPr>
-        </p:nvSpPr>
-        <p:spPr/>
-        <p:txBody>
-          <a:bodyPr/>
-          <a:lstStyle/>
-          <a:p>
-            <a:r>
-              <a:rPr lang="pt-BR" dirty="0"/>
-              <a:t>Lista de exercícios</a:t>
-            </a:r>
-            <a:endParaRPr lang="en-US" dirty="0"/>
-          </a:p>
-        </p:txBody>
-      </p:sp>
-      <p:sp>
-        <p:nvSpPr>
-          <p:cNvPr id="3" name="Content Placeholder 2">
-            <a:extLst>
-              <a:ext uri="{FF2B5EF4-FFF2-40B4-BE49-F238E27FC236}">
-                <a16:creationId xmlns:a16="http://schemas.microsoft.com/office/drawing/2014/main" id="{A431927B-FE56-CB25-3ECF-AB5E92A7DC71}"/>
-              </a:ext>
-            </a:extLst>
-          </p:cNvPr>
-          <p:cNvSpPr>
-            <a:spLocks noGrp="1"/>
-          </p:cNvSpPr>
-          <p:nvPr>
-            <p:ph idx="1"/>
-          </p:nvPr>
-        </p:nvSpPr>
-        <p:spPr/>
-        <p:txBody>
-          <a:bodyPr/>
-          <a:lstStyle/>
-          <a:p>
-            <a:pPr marL="0" indent="0">
-              <a:buNone/>
-            </a:pPr>
-            <a:r>
-              <a:rPr lang="en-US" dirty="0">
-                <a:hlinkClick r:id="rId2"/>
-              </a:rPr>
-              <a:t>Lista #8 – </a:t>
-            </a:r>
-            <a:r>
-              <a:rPr lang="en-US" dirty="0" err="1">
-                <a:hlinkClick r:id="rId2"/>
-              </a:rPr>
-              <a:t>Métricas</a:t>
-            </a:r>
-            <a:r>
-              <a:rPr lang="en-US" dirty="0">
-                <a:hlinkClick r:id="rId2"/>
-              </a:rPr>
-              <a:t> de </a:t>
-            </a:r>
-            <a:r>
-              <a:rPr lang="en-US" dirty="0" err="1">
-                <a:hlinkClick r:id="rId2"/>
-              </a:rPr>
-              <a:t>classificação</a:t>
-            </a:r>
-            <a:endParaRPr lang="en-US" dirty="0"/>
-          </a:p>
-        </p:txBody>
-      </p:sp>
-    </p:spTree>
-    <p:extLst>
-      <p:ext uri="{BB962C8B-B14F-4D97-AF65-F5344CB8AC3E}">
-        <p14:creationId xmlns:p14="http://schemas.microsoft.com/office/powerpoint/2010/main" val="2392053112"/>
-      </p:ext>
-    </p:extLst>
-  </p:cSld>
-  <p:clrMapOvr>
-    <a:masterClrMapping/>
-  </p:clrMapOvr>
-</p:sld>
-</file>
-
 <file path=ppt/slides/slide3.xml><?xml version="1.0" encoding="utf-8"?>
 <p:sld xmlns:a="http://schemas.openxmlformats.org/drawingml/2006/main" xmlns:r="http://schemas.openxmlformats.org/officeDocument/2006/relationships" xmlns:p="http://schemas.openxmlformats.org/presentationml/2006/main">
   <p:cSld>
@@ -31549,6 +31673,117 @@
       </p:grpSpPr>
       <p:sp>
         <p:nvSpPr>
+          <p:cNvPr id="2" name="Title 1">
+            <a:extLst>
+              <a:ext uri="{FF2B5EF4-FFF2-40B4-BE49-F238E27FC236}">
+                <a16:creationId xmlns:a16="http://schemas.microsoft.com/office/drawing/2014/main" id="{CF49AE95-3E0A-F9BB-A3FD-4C328EF25334}"/>
+              </a:ext>
+            </a:extLst>
+          </p:cNvPr>
+          <p:cNvSpPr>
+            <a:spLocks noGrp="1"/>
+          </p:cNvSpPr>
+          <p:nvPr>
+            <p:ph type="title"/>
+          </p:nvPr>
+        </p:nvSpPr>
+        <p:spPr/>
+        <p:txBody>
+          <a:bodyPr/>
+          <a:lstStyle/>
+          <a:p>
+            <a:r>
+              <a:rPr lang="pt-BR" dirty="0"/>
+              <a:t>Lista de exercícios</a:t>
+            </a:r>
+            <a:endParaRPr lang="en-US" dirty="0"/>
+          </a:p>
+        </p:txBody>
+      </p:sp>
+      <p:sp>
+        <p:nvSpPr>
+          <p:cNvPr id="3" name="Content Placeholder 2">
+            <a:extLst>
+              <a:ext uri="{FF2B5EF4-FFF2-40B4-BE49-F238E27FC236}">
+                <a16:creationId xmlns:a16="http://schemas.microsoft.com/office/drawing/2014/main" id="{A431927B-FE56-CB25-3ECF-AB5E92A7DC71}"/>
+              </a:ext>
+            </a:extLst>
+          </p:cNvPr>
+          <p:cNvSpPr>
+            <a:spLocks noGrp="1"/>
+          </p:cNvSpPr>
+          <p:nvPr>
+            <p:ph idx="1"/>
+          </p:nvPr>
+        </p:nvSpPr>
+        <p:spPr/>
+        <p:txBody>
+          <a:bodyPr/>
+          <a:lstStyle/>
+          <a:p>
+            <a:pPr marL="0" indent="0">
+              <a:buNone/>
+            </a:pPr>
+            <a:r>
+              <a:rPr lang="en-US" dirty="0">
+                <a:hlinkClick r:id="rId2"/>
+              </a:rPr>
+              <a:t>Lista #8 – </a:t>
+            </a:r>
+            <a:r>
+              <a:rPr lang="en-US" dirty="0" err="1">
+                <a:hlinkClick r:id="rId2"/>
+              </a:rPr>
+              <a:t>Métricas</a:t>
+            </a:r>
+            <a:r>
+              <a:rPr lang="en-US" dirty="0">
+                <a:hlinkClick r:id="rId2"/>
+              </a:rPr>
+              <a:t> de </a:t>
+            </a:r>
+            <a:r>
+              <a:rPr lang="en-US" dirty="0" err="1">
+                <a:hlinkClick r:id="rId2"/>
+              </a:rPr>
+              <a:t>classificação</a:t>
+            </a:r>
+            <a:endParaRPr lang="en-US" dirty="0"/>
+          </a:p>
+        </p:txBody>
+      </p:sp>
+    </p:spTree>
+    <p:extLst>
+      <p:ext uri="{BB962C8B-B14F-4D97-AF65-F5344CB8AC3E}">
+        <p14:creationId xmlns:p14="http://schemas.microsoft.com/office/powerpoint/2010/main" val="2392053112"/>
+      </p:ext>
+    </p:extLst>
+  </p:cSld>
+  <p:clrMapOvr>
+    <a:masterClrMapping/>
+  </p:clrMapOvr>
+</p:sld>
+</file>
+
+<file path=ppt/slides/slide31.xml><?xml version="1.0" encoding="utf-8"?>
+<p:sld xmlns:a="http://schemas.openxmlformats.org/drawingml/2006/main" xmlns:r="http://schemas.openxmlformats.org/officeDocument/2006/relationships" xmlns:p="http://schemas.openxmlformats.org/presentationml/2006/main">
+  <p:cSld>
+    <p:spTree>
+      <p:nvGrpSpPr>
+        <p:cNvPr id="1" name=""/>
+        <p:cNvGrpSpPr/>
+        <p:nvPr/>
+      </p:nvGrpSpPr>
+      <p:grpSpPr>
+        <a:xfrm>
+          <a:off x="0" y="0"/>
+          <a:ext cx="0" cy="0"/>
+          <a:chOff x="0" y="0"/>
+          <a:chExt cx="0" cy="0"/>
+        </a:xfrm>
+      </p:grpSpPr>
+      <p:sp>
+        <p:nvSpPr>
           <p:cNvPr id="4" name="Título 1">
             <a:extLst>
               <a:ext uri="{FF2B5EF4-FFF2-40B4-BE49-F238E27FC236}">
@@ -31616,7 +31851,7 @@
 </p:sld>
 </file>
 
-<file path=ppt/slides/slide31.xml><?xml version="1.0" encoding="utf-8"?>
+<file path=ppt/slides/slide32.xml><?xml version="1.0" encoding="utf-8"?>
 <p:sld xmlns:a="http://schemas.openxmlformats.org/drawingml/2006/main" xmlns:r="http://schemas.openxmlformats.org/officeDocument/2006/relationships" xmlns:p="http://schemas.openxmlformats.org/presentationml/2006/main">
   <p:cSld>
     <p:spTree>
@@ -34420,8 +34655,8 @@
           </a:p>
         </p:txBody>
       </p:sp>
-      <mc:AlternateContent xmlns:mc="http://schemas.openxmlformats.org/markup-compatibility/2006" xmlns:a14="http://schemas.microsoft.com/office/drawing/2010/main">
-        <mc:Choice Requires="a14">
+      <mc:AlternateContent xmlns:mc="http://schemas.openxmlformats.org/markup-compatibility/2006">
+        <mc:Choice xmlns:a14="http://schemas.microsoft.com/office/drawing/2010/main" Requires="a14">
           <p:sp>
             <p:nvSpPr>
               <p:cNvPr id="5" name="CaixaDeTexto 4">
@@ -34436,7 +34671,7 @@
             </p:nvSpPr>
             <p:spPr>
               <a:xfrm>
-                <a:off x="3036709" y="2488766"/>
+                <a:off x="3036709" y="2098241"/>
                 <a:ext cx="4854223" cy="2122312"/>
               </a:xfrm>
               <a:prstGeom prst="rect">
@@ -34944,7 +35179,7 @@
             </p:txBody>
           </p:sp>
         </mc:Choice>
-        <mc:Fallback xmlns="">
+        <mc:Fallback>
           <p:sp>
             <p:nvSpPr>
               <p:cNvPr id="5" name="CaixaDeTexto 4">
@@ -34961,7 +35196,7 @@
             </p:nvSpPr>
             <p:spPr>
               <a:xfrm>
-                <a:off x="3036709" y="2488766"/>
+                <a:off x="3036709" y="2098241"/>
                 <a:ext cx="4854223" cy="2122312"/>
               </a:xfrm>
               <a:prstGeom prst="rect">
@@ -34979,7 +35214,7 @@
               <a:lstStyle/>
               <a:p>
                 <a:r>
-                  <a:rPr lang="pt-BR">
+                  <a:rPr lang="en-US">
                     <a:noFill/>
                   </a:rPr>
                   <a:t> </a:t>
@@ -35003,7 +35238,7 @@
         </p:nvSpPr>
         <p:spPr>
           <a:xfrm>
-            <a:off x="3794234" y="2523792"/>
+            <a:off x="3794234" y="2133267"/>
             <a:ext cx="4096698" cy="526285"/>
           </a:xfrm>
           <a:prstGeom prst="ellipse">
@@ -35055,7 +35290,7 @@
         </p:nvSpPr>
         <p:spPr>
           <a:xfrm>
-            <a:off x="7894389" y="2452160"/>
+            <a:off x="7894389" y="2061635"/>
             <a:ext cx="3401321" cy="707886"/>
           </a:xfrm>
           <a:prstGeom prst="rect">
@@ -35091,7 +35326,7 @@
         </p:nvSpPr>
         <p:spPr>
           <a:xfrm rot="5400000">
-            <a:off x="3302270" y="3141648"/>
+            <a:off x="3302270" y="2751123"/>
             <a:ext cx="2251700" cy="792259"/>
           </a:xfrm>
           <a:prstGeom prst="ellipse">
@@ -35143,7 +35378,7 @@
         </p:nvSpPr>
         <p:spPr>
           <a:xfrm>
-            <a:off x="7525012" y="2452160"/>
+            <a:off x="7525012" y="2061635"/>
             <a:ext cx="577516" cy="145253"/>
           </a:xfrm>
           <a:custGeom>
@@ -35235,7 +35470,7 @@
         </p:nvSpPr>
         <p:spPr>
           <a:xfrm>
-            <a:off x="1260491" y="4807062"/>
+            <a:off x="1260491" y="4416537"/>
             <a:ext cx="3921108" cy="707886"/>
           </a:xfrm>
           <a:prstGeom prst="rect">
@@ -35252,7 +35487,7 @@
             <a:pPr algn="ctr"/>
             <a:r>
               <a:rPr lang="pt-BR" sz="2000" dirty="0"/>
-              <a:t>Quantidade de exemplos que realmente pertencentes à classe 1.</a:t>
+              <a:t>Quantidade de exemplos que realmente pertencem à classe 1.</a:t>
             </a:r>
           </a:p>
         </p:txBody>
@@ -35271,7 +35506,7 @@
         </p:nvSpPr>
         <p:spPr>
           <a:xfrm rot="871324">
-            <a:off x="3488790" y="4556114"/>
+            <a:off x="3488790" y="4165589"/>
             <a:ext cx="792260" cy="501897"/>
           </a:xfrm>
           <a:custGeom>
@@ -35339,8 +35574,8 @@
           </a:p>
         </p:txBody>
       </p:sp>
-      <mc:AlternateContent xmlns:mc="http://schemas.openxmlformats.org/markup-compatibility/2006" xmlns:a14="http://schemas.microsoft.com/office/drawing/2010/main">
-        <mc:Choice Requires="a14">
+      <mc:AlternateContent xmlns:mc="http://schemas.openxmlformats.org/markup-compatibility/2006">
+        <mc:Choice xmlns:a14="http://schemas.microsoft.com/office/drawing/2010/main" Requires="a14">
           <p:sp>
             <p:nvSpPr>
               <p:cNvPr id="12" name="Rectangle 9">
@@ -35355,8 +35590,8 @@
             </p:nvSpPr>
             <p:spPr>
               <a:xfrm>
-                <a:off x="5757333" y="5298131"/>
-                <a:ext cx="6242319" cy="1323439"/>
+                <a:off x="838200" y="5506851"/>
+                <a:ext cx="11201400" cy="1200329"/>
               </a:xfrm>
               <a:prstGeom prst="rect">
                 <a:avLst/>
@@ -35377,14 +35612,14 @@
                     <m:sSub>
                       <m:sSubPr>
                         <m:ctrlPr>
-                          <a:rPr lang="pt-BR" sz="2000" i="1">
+                          <a:rPr lang="pt-BR" sz="2400" i="1">
                             <a:latin typeface="Cambria Math" panose="02040503050406030204" pitchFamily="18" charset="0"/>
                           </a:rPr>
                         </m:ctrlPr>
                       </m:sSubPr>
                       <m:e>
                         <m:r>
-                          <a:rPr lang="pt-BR" sz="2000" i="1">
+                          <a:rPr lang="pt-BR" sz="2400" i="1">
                             <a:latin typeface="Cambria Math" panose="02040503050406030204" pitchFamily="18" charset="0"/>
                           </a:rPr>
                           <m:t>𝐶</m:t>
@@ -35392,13 +35627,13 @@
                       </m:e>
                       <m:sub>
                         <m:r>
-                          <a:rPr lang="pt-BR" sz="2000" i="1">
+                          <a:rPr lang="pt-BR" sz="2400" i="1">
                             <a:latin typeface="Cambria Math" panose="02040503050406030204" pitchFamily="18" charset="0"/>
                           </a:rPr>
                           <m:t>1</m:t>
                         </m:r>
                         <m:r>
-                          <a:rPr lang="pt-BR" sz="2000" b="0" i="1" smtClean="0">
+                          <a:rPr lang="pt-BR" sz="2400" b="0" i="1" smtClean="0">
                             <a:latin typeface="Cambria Math" panose="02040503050406030204" pitchFamily="18" charset="0"/>
                           </a:rPr>
                           <m:t>1</m:t>
@@ -35408,7 +35643,7 @@
                   </m:oMath>
                 </a14:m>
                 <a:r>
-                  <a:rPr lang="pt-BR" sz="2000" dirty="0"/>
+                  <a:rPr lang="pt-BR" sz="2400" dirty="0"/>
                   <a:t> indica quantos exemplos da classe 1 foram corretamente atribuídos à classe 1.</a:t>
                 </a:r>
               </a:p>
@@ -35422,14 +35657,14 @@
                     <m:sSub>
                       <m:sSubPr>
                         <m:ctrlPr>
-                          <a:rPr lang="pt-BR" sz="2000" i="1">
+                          <a:rPr lang="pt-BR" sz="2400" i="1">
                             <a:latin typeface="Cambria Math" panose="02040503050406030204" pitchFamily="18" charset="0"/>
                           </a:rPr>
                         </m:ctrlPr>
                       </m:sSubPr>
                       <m:e>
                         <m:r>
-                          <a:rPr lang="pt-BR" sz="2000" i="1">
+                          <a:rPr lang="pt-BR" sz="2400" i="1">
                             <a:latin typeface="Cambria Math" panose="02040503050406030204" pitchFamily="18" charset="0"/>
                           </a:rPr>
                           <m:t>𝐶</m:t>
@@ -35437,7 +35672,7 @@
                       </m:e>
                       <m:sub>
                         <m:r>
-                          <a:rPr lang="pt-BR" sz="2000" i="1">
+                          <a:rPr lang="pt-BR" sz="2400" i="1">
                             <a:latin typeface="Cambria Math" panose="02040503050406030204" pitchFamily="18" charset="0"/>
                           </a:rPr>
                           <m:t>12</m:t>
@@ -35447,14 +35682,28 @@
                   </m:oMath>
                 </a14:m>
                 <a:r>
-                  <a:rPr lang="pt-BR" sz="2000" dirty="0"/>
+                  <a:rPr lang="pt-BR" sz="2400" dirty="0"/>
                   <a:t> indica quantos exemplos da classe 2 foram atribuídos à classe 1.</a:t>
+                </a:r>
+              </a:p>
+              <a:p>
+                <a:pPr marL="285750" indent="-285750">
+                  <a:buFont typeface="Arial" panose="020B0604020202020204" pitchFamily="34" charset="0"/>
+                  <a:buChar char="•"/>
+                </a:pPr>
+                <a:r>
+                  <a:rPr lang="pt-BR" sz="2400" b="1" dirty="0"/>
+                  <a:t>OBS</a:t>
+                </a:r>
+                <a:r>
+                  <a:rPr lang="pt-BR" sz="2400" dirty="0"/>
+                  <a:t>.: Algumas versões da matriz apresentam porcentagens ao invés de contagens.</a:t>
                 </a:r>
               </a:p>
             </p:txBody>
           </p:sp>
         </mc:Choice>
-        <mc:Fallback xmlns="">
+        <mc:Fallback>
           <p:sp>
             <p:nvSpPr>
               <p:cNvPr id="12" name="Rectangle 9">
@@ -35471,8 +35720,8 @@
             </p:nvSpPr>
             <p:spPr>
               <a:xfrm>
-                <a:off x="5757333" y="5298131"/>
-                <a:ext cx="6242319" cy="1323439"/>
+                <a:off x="838200" y="5506851"/>
+                <a:ext cx="11201400" cy="1200329"/>
               </a:xfrm>
               <a:prstGeom prst="rect">
                 <a:avLst/>
@@ -35480,7 +35729,7 @@
               <a:blipFill>
                 <a:blip r:embed="rId3"/>
                 <a:stretch>
-                  <a:fillRect l="-879" t="-2304" b="-7373"/>
+                  <a:fillRect l="-762" t="-4061" b="-10660"/>
                 </a:stretch>
               </a:blipFill>
             </p:spPr>
@@ -35489,7 +35738,7 @@
               <a:lstStyle/>
               <a:p>
                 <a:r>
-                  <a:rPr lang="pt-BR">
+                  <a:rPr lang="en-US">
                     <a:noFill/>
                   </a:rPr>
                   <a:t> </a:t>
@@ -35620,8 +35869,8 @@
           </p:sp>
         </mc:Fallback>
       </mc:AlternateContent>
-      <mc:AlternateContent xmlns:mc="http://schemas.openxmlformats.org/markup-compatibility/2006" xmlns:a14="http://schemas.microsoft.com/office/drawing/2010/main">
-        <mc:Choice Requires="a14">
+      <mc:AlternateContent xmlns:mc="http://schemas.openxmlformats.org/markup-compatibility/2006">
+        <mc:Choice xmlns:a14="http://schemas.microsoft.com/office/drawing/2010/main" Requires="a14">
           <p:sp>
             <p:nvSpPr>
               <p:cNvPr id="3" name="Espaço Reservado para Conteúdo 2">
@@ -35652,7 +35901,36 @@
               <a:p>
                 <a:r>
                   <a:rPr lang="pt-BR" b="1" dirty="0"/>
-                  <a:t>Matriz com dimensão: 2x2</a:t>
+                  <a:t>Matriz com dimensão: </a:t>
+                </a:r>
+                <a14:m>
+                  <m:oMath xmlns:m="http://schemas.openxmlformats.org/officeDocument/2006/math">
+                    <m:r>
+                      <a:rPr lang="pt-BR" b="0" i="0" smtClean="0">
+                        <a:latin typeface="Cambria Math" panose="02040503050406030204" pitchFamily="18" charset="0"/>
+                        <a:ea typeface="Cambria Math" panose="02040503050406030204" pitchFamily="18" charset="0"/>
+                      </a:rPr>
+                      <m:t>2</m:t>
+                    </m:r>
+                    <m:r>
+                      <a:rPr lang="pt-BR" i="1">
+                        <a:latin typeface="Cambria Math" panose="02040503050406030204" pitchFamily="18" charset="0"/>
+                        <a:ea typeface="Cambria Math" panose="02040503050406030204" pitchFamily="18" charset="0"/>
+                      </a:rPr>
+                      <m:t>×</m:t>
+                    </m:r>
+                    <m:r>
+                      <a:rPr lang="pt-BR" b="0" i="1" smtClean="0">
+                        <a:latin typeface="Cambria Math" panose="02040503050406030204" pitchFamily="18" charset="0"/>
+                        <a:ea typeface="Cambria Math" panose="02040503050406030204" pitchFamily="18" charset="0"/>
+                      </a:rPr>
+                      <m:t>2</m:t>
+                    </m:r>
+                  </m:oMath>
+                </a14:m>
+                <a:r>
+                  <a:rPr lang="pt-BR" dirty="0"/>
+                  <a:t>.</a:t>
                 </a:r>
               </a:p>
               <a:p>
@@ -35764,7 +36042,7 @@
             </p:txBody>
           </p:sp>
         </mc:Choice>
-        <mc:Fallback xmlns="">
+        <mc:Fallback>
           <p:sp>
             <p:nvSpPr>
               <p:cNvPr id="3" name="Espaço Reservado para Conteúdo 2">
@@ -35823,7 +36101,7 @@
           <p:nvPr>
             <p:extLst>
               <p:ext uri="{D42A27DB-BD31-4B8C-83A1-F6EECF244321}">
-                <p14:modId xmlns:p14="http://schemas.microsoft.com/office/powerpoint/2010/main" val="2363756910"/>
+                <p14:modId xmlns:p14="http://schemas.microsoft.com/office/powerpoint/2010/main" val="3664361054"/>
               </p:ext>
             </p:extLst>
           </p:nvPr>
@@ -36076,7 +36354,7 @@
                       <a:r>
                         <a:rPr lang="pt-BR" sz="2000" b="1" dirty="0">
                           <a:solidFill>
-                            <a:srgbClr val="0000FF"/>
+                            <a:srgbClr val="7030A0"/>
                           </a:solidFill>
                           <a:effectLst/>
                         </a:rPr>
@@ -36085,7 +36363,7 @@
                       <a:br>
                         <a:rPr lang="pt-BR" sz="2000" b="1" dirty="0">
                           <a:solidFill>
-                            <a:srgbClr val="0000FF"/>
+                            <a:srgbClr val="7030A0"/>
                           </a:solidFill>
                           <a:effectLst/>
                         </a:rPr>
@@ -36093,7 +36371,7 @@
                       <a:r>
                         <a:rPr lang="pt-BR" sz="2000" b="1" dirty="0">
                           <a:solidFill>
-                            <a:srgbClr val="0000FF"/>
+                            <a:srgbClr val="7030A0"/>
                           </a:solidFill>
                           <a:effectLst/>
                         </a:rPr>
@@ -36101,7 +36379,7 @@
                       </a:r>
                       <a:endParaRPr lang="pt-BR" sz="2000" b="1" kern="1200" dirty="0">
                         <a:solidFill>
-                          <a:srgbClr val="0000FF"/>
+                          <a:srgbClr val="7030A0"/>
                         </a:solidFill>
                         <a:effectLst/>
                         <a:latin typeface="+mn-lt"/>

--- a/slides/C24_Métricas_de_Classificação.pptx
+++ b/slides/C24_Métricas_de_Classificação.pptx
@@ -5,10 +5,10 @@
     <p:sldMasterId id="2147483648" r:id="rId1"/>
   </p:sldMasterIdLst>
   <p:notesMasterIdLst>
-    <p:notesMasterId r:id="rId34"/>
+    <p:notesMasterId r:id="rId35"/>
   </p:notesMasterIdLst>
   <p:handoutMasterIdLst>
-    <p:handoutMasterId r:id="rId35"/>
+    <p:handoutMasterId r:id="rId36"/>
   </p:handoutMasterIdLst>
   <p:sldIdLst>
     <p:sldId id="256" r:id="rId2"/>
@@ -29,20 +29,21 @@
     <p:sldId id="458" r:id="rId17"/>
     <p:sldId id="328" r:id="rId18"/>
     <p:sldId id="459" r:id="rId19"/>
-    <p:sldId id="332" r:id="rId20"/>
-    <p:sldId id="333" r:id="rId21"/>
-    <p:sldId id="329" r:id="rId22"/>
-    <p:sldId id="330" r:id="rId23"/>
-    <p:sldId id="381" r:id="rId24"/>
-    <p:sldId id="460" r:id="rId25"/>
-    <p:sldId id="331" r:id="rId26"/>
-    <p:sldId id="463" r:id="rId27"/>
-    <p:sldId id="462" r:id="rId28"/>
-    <p:sldId id="461" r:id="rId29"/>
-    <p:sldId id="334" r:id="rId30"/>
-    <p:sldId id="457" r:id="rId31"/>
-    <p:sldId id="336" r:id="rId32"/>
-    <p:sldId id="337" r:id="rId33"/>
+    <p:sldId id="465" r:id="rId20"/>
+    <p:sldId id="332" r:id="rId21"/>
+    <p:sldId id="333" r:id="rId22"/>
+    <p:sldId id="329" r:id="rId23"/>
+    <p:sldId id="330" r:id="rId24"/>
+    <p:sldId id="381" r:id="rId25"/>
+    <p:sldId id="460" r:id="rId26"/>
+    <p:sldId id="331" r:id="rId27"/>
+    <p:sldId id="463" r:id="rId28"/>
+    <p:sldId id="462" r:id="rId29"/>
+    <p:sldId id="461" r:id="rId30"/>
+    <p:sldId id="334" r:id="rId31"/>
+    <p:sldId id="457" r:id="rId32"/>
+    <p:sldId id="336" r:id="rId33"/>
+    <p:sldId id="337" r:id="rId34"/>
   </p:sldIdLst>
   <p:sldSz cx="12192000" cy="6858000"/>
   <p:notesSz cx="7315200" cy="9601200"/>
@@ -867,6 +868,95 @@
           <a:lstStyle/>
           <a:p>
             <a:r>
+              <a:rPr lang="en-US" dirty="0"/>
+              <a:t>De </a:t>
+            </a:r>
+            <a:r>
+              <a:rPr lang="en-US" dirty="0" err="1"/>
+              <a:t>tudo</a:t>
+            </a:r>
+            <a:r>
+              <a:rPr lang="en-US" dirty="0"/>
+              <a:t> </a:t>
+            </a:r>
+            <a:r>
+              <a:rPr lang="en-US" dirty="0" err="1"/>
+              <a:t>aquilo</a:t>
+            </a:r>
+            <a:r>
+              <a:rPr lang="en-US" dirty="0"/>
+              <a:t> </a:t>
+            </a:r>
+            <a:r>
+              <a:rPr lang="en-US" dirty="0" err="1"/>
+              <a:t>que</a:t>
+            </a:r>
+            <a:r>
+              <a:rPr lang="en-US" dirty="0"/>
+              <a:t> o </a:t>
+            </a:r>
+            <a:r>
+              <a:rPr lang="en-US" dirty="0" err="1"/>
+              <a:t>modelo</a:t>
+            </a:r>
+            <a:r>
+              <a:rPr lang="en-US" dirty="0"/>
+              <a:t> </a:t>
+            </a:r>
+            <a:r>
+              <a:rPr lang="en-US" dirty="0" err="1"/>
+              <a:t>classificou</a:t>
+            </a:r>
+            <a:r>
+              <a:rPr lang="en-US" dirty="0"/>
+              <a:t> </a:t>
+            </a:r>
+            <a:r>
+              <a:rPr lang="en-US" dirty="0" err="1"/>
+              <a:t>como</a:t>
+            </a:r>
+            <a:r>
+              <a:rPr lang="en-US" dirty="0"/>
+              <a:t> </a:t>
+            </a:r>
+            <a:r>
+              <a:rPr lang="en-US" dirty="0" err="1"/>
+              <a:t>positivo</a:t>
+            </a:r>
+            <a:r>
+              <a:rPr lang="en-US" dirty="0"/>
+              <a:t>, o </a:t>
+            </a:r>
+            <a:r>
+              <a:rPr lang="en-US" dirty="0" err="1"/>
+              <a:t>quanto</a:t>
+            </a:r>
+            <a:r>
+              <a:rPr lang="en-US" dirty="0"/>
+              <a:t> é </a:t>
+            </a:r>
+            <a:r>
+              <a:rPr lang="en-US" dirty="0" err="1"/>
+              <a:t>realmente</a:t>
+            </a:r>
+            <a:r>
+              <a:rPr lang="en-US" dirty="0"/>
+              <a:t> </a:t>
+            </a:r>
+            <a:r>
+              <a:rPr lang="en-US" dirty="0" err="1"/>
+              <a:t>positivo</a:t>
+            </a:r>
+            <a:r>
+              <a:rPr lang="en-US" dirty="0"/>
+              <a:t>?</a:t>
+            </a:r>
+          </a:p>
+          <a:p>
+            <a:endParaRPr lang="en-US" dirty="0"/>
+          </a:p>
+          <a:p>
+            <a:r>
               <a:rPr lang="en-US" dirty="0" err="1"/>
               <a:t>Precisão</a:t>
             </a:r>
@@ -1030,7 +1120,7 @@
           <a:p>
             <a:fld id="{6FC8D850-966F-45A6-8DE7-15B891E7D40D}" type="slidenum">
               <a:rPr lang="pt-BR" smtClean="0"/>
-              <a:t>29</a:t>
+              <a:t>30</a:t>
             </a:fld>
             <a:endParaRPr lang="pt-BR"/>
           </a:p>
@@ -6610,8 +6700,8 @@
           </a:p>
         </p:txBody>
       </p:sp>
-      <mc:AlternateContent xmlns:mc="http://schemas.openxmlformats.org/markup-compatibility/2006">
-        <mc:Choice xmlns:a14="http://schemas.microsoft.com/office/drawing/2010/main" Requires="a14">
+      <mc:AlternateContent xmlns:mc="http://schemas.openxmlformats.org/markup-compatibility/2006" xmlns:a14="http://schemas.microsoft.com/office/drawing/2010/main">
+        <mc:Choice Requires="a14">
           <p:sp>
             <p:nvSpPr>
               <p:cNvPr id="3" name="Espaço Reservado para Conteúdo 2">
@@ -7091,7 +7181,7 @@
             </p:txBody>
           </p:sp>
         </mc:Choice>
-        <mc:Fallback>
+        <mc:Fallback xmlns="">
           <p:sp>
             <p:nvSpPr>
               <p:cNvPr id="3" name="Espaço Reservado para Conteúdo 2">
@@ -7318,7 +7408,7 @@
           <a:p>
             <a:r>
               <a:rPr lang="pt-BR" noProof="0" dirty="0"/>
-              <a:t>Ou seja, de tudo aquilo que o modelo classificou como positivo, quanto realmente era positivo?</a:t>
+              <a:t>Ou seja, de tudo aquilo que o modelo classificou como positivo, quanto realmente é positivo?</a:t>
             </a:r>
           </a:p>
           <a:p>
@@ -9159,7 +9249,7 @@
           <a:p>
             <a:r>
               <a:rPr lang="pt-BR" noProof="0" dirty="0"/>
-              <a:t>Dos exemplos que realmente são positivos, quantos o modelo conseguiu encontrar?</a:t>
+              <a:t>Dos exemplos que realmente são positivos, quantos o modelo conseguiu acertar?</a:t>
             </a:r>
           </a:p>
           <a:p>
@@ -9173,7 +9263,7 @@
                   <a:srgbClr val="7030A0"/>
                 </a:solidFill>
               </a:rPr>
-              <a:t>O modelo conseguiu encontrar os positivos?</a:t>
+              <a:t>O modelo conseguiu encontrar todos os positivos?</a:t>
             </a:r>
             <a:endParaRPr lang="pt-BR" b="1" noProof="0" dirty="0">
               <a:solidFill>
@@ -10686,6 +10776,180 @@
       </p:grpSpPr>
       <p:sp>
         <p:nvSpPr>
+          <p:cNvPr id="3" name="Espaço Reservado para Conteúdo 2">
+            <a:extLst>
+              <a:ext uri="{FF2B5EF4-FFF2-40B4-BE49-F238E27FC236}">
+                <a16:creationId xmlns:a16="http://schemas.microsoft.com/office/drawing/2014/main" id="{171E3951-9049-F65B-B03A-1DB6F4600ADB}"/>
+              </a:ext>
+            </a:extLst>
+          </p:cNvPr>
+          <p:cNvSpPr>
+            <a:spLocks noGrp="1"/>
+          </p:cNvSpPr>
+          <p:nvPr>
+            <p:ph idx="1"/>
+          </p:nvPr>
+        </p:nvSpPr>
+        <p:spPr>
+          <a:xfrm>
+            <a:off x="838200" y="2192337"/>
+            <a:ext cx="10515600" cy="2473326"/>
+          </a:xfrm>
+        </p:spPr>
+        <p:txBody>
+          <a:bodyPr>
+            <a:normAutofit/>
+          </a:bodyPr>
+          <a:lstStyle/>
+          <a:p>
+            <a:pPr marL="0" indent="0" algn="ctr">
+              <a:buNone/>
+            </a:pPr>
+            <a:r>
+              <a:rPr lang="pt-BR" sz="5400" dirty="0"/>
+              <a:t>Mas e se falsos positivos e falsos negativos tiverem custos iguais, que métrica usar?</a:t>
+            </a:r>
+            <a:endParaRPr lang="en-US" sz="5400" dirty="0"/>
+          </a:p>
+        </p:txBody>
+      </p:sp>
+    </p:spTree>
+    <p:extLst>
+      <p:ext uri="{BB962C8B-B14F-4D97-AF65-F5344CB8AC3E}">
+        <p14:creationId xmlns:p14="http://schemas.microsoft.com/office/powerpoint/2010/main" val="2665855652"/>
+      </p:ext>
+    </p:extLst>
+  </p:cSld>
+  <p:clrMapOvr>
+    <a:masterClrMapping/>
+  </p:clrMapOvr>
+</p:sld>
+</file>
+
+<file path=ppt/slides/slide2.xml><?xml version="1.0" encoding="utf-8"?>
+<p:sld xmlns:a="http://schemas.openxmlformats.org/drawingml/2006/main" xmlns:r="http://schemas.openxmlformats.org/officeDocument/2006/relationships" xmlns:p="http://schemas.openxmlformats.org/presentationml/2006/main">
+  <p:cSld>
+    <p:spTree>
+      <p:nvGrpSpPr>
+        <p:cNvPr id="1" name=""/>
+        <p:cNvGrpSpPr/>
+        <p:nvPr/>
+      </p:nvGrpSpPr>
+      <p:grpSpPr>
+        <a:xfrm>
+          <a:off x="0" y="0"/>
+          <a:ext cx="0" cy="0"/>
+          <a:chOff x="0" y="0"/>
+          <a:chExt cx="0" cy="0"/>
+        </a:xfrm>
+      </p:grpSpPr>
+      <p:sp>
+        <p:nvSpPr>
+          <p:cNvPr id="2" name="Título 1">
+            <a:extLst>
+              <a:ext uri="{FF2B5EF4-FFF2-40B4-BE49-F238E27FC236}">
+                <a16:creationId xmlns:a16="http://schemas.microsoft.com/office/drawing/2014/main" id="{EECB3FED-5D1A-7084-5333-A3B2FA75F608}"/>
+              </a:ext>
+            </a:extLst>
+          </p:cNvPr>
+          <p:cNvSpPr>
+            <a:spLocks noGrp="1"/>
+          </p:cNvSpPr>
+          <p:nvPr>
+            <p:ph type="title"/>
+          </p:nvPr>
+        </p:nvSpPr>
+        <p:spPr/>
+        <p:txBody>
+          <a:bodyPr/>
+          <a:lstStyle/>
+          <a:p>
+            <a:r>
+              <a:rPr lang="pt-BR" dirty="0"/>
+              <a:t>O que vamos ver?</a:t>
+            </a:r>
+          </a:p>
+        </p:txBody>
+      </p:sp>
+      <p:sp>
+        <p:nvSpPr>
+          <p:cNvPr id="3" name="Espaço Reservado para Conteúdo 2">
+            <a:extLst>
+              <a:ext uri="{FF2B5EF4-FFF2-40B4-BE49-F238E27FC236}">
+                <a16:creationId xmlns:a16="http://schemas.microsoft.com/office/drawing/2014/main" id="{25FE7774-7186-A846-D8DE-518B2CBF4EBD}"/>
+              </a:ext>
+            </a:extLst>
+          </p:cNvPr>
+          <p:cNvSpPr>
+            <a:spLocks noGrp="1"/>
+          </p:cNvSpPr>
+          <p:nvPr>
+            <p:ph idx="1"/>
+          </p:nvPr>
+        </p:nvSpPr>
+        <p:spPr>
+          <a:xfrm>
+            <a:off x="838200" y="1825624"/>
+            <a:ext cx="11190514" cy="5032376"/>
+          </a:xfrm>
+        </p:spPr>
+        <p:txBody>
+          <a:bodyPr>
+            <a:normAutofit/>
+          </a:bodyPr>
+          <a:lstStyle/>
+          <a:p>
+            <a:r>
+              <a:rPr lang="pt-BR" dirty="0"/>
+              <a:t>Anteriormente, para analisar o desempenho de um classificador, usamos apenas a acurácia. </a:t>
+            </a:r>
+          </a:p>
+          <a:p>
+            <a:r>
+              <a:rPr lang="pt-BR" dirty="0"/>
+              <a:t>Porém, existem outras métricas que podem ser usadas para se medir a qualidade de um classificador.</a:t>
+            </a:r>
+          </a:p>
+          <a:p>
+            <a:r>
+              <a:rPr lang="pt-BR" dirty="0"/>
+              <a:t>Portanto, neste tópico, veremos algumas outras métricas.</a:t>
+            </a:r>
+          </a:p>
+        </p:txBody>
+      </p:sp>
+    </p:spTree>
+    <p:extLst>
+      <p:ext uri="{BB962C8B-B14F-4D97-AF65-F5344CB8AC3E}">
+        <p14:creationId xmlns:p14="http://schemas.microsoft.com/office/powerpoint/2010/main" val="2177516599"/>
+      </p:ext>
+    </p:extLst>
+  </p:cSld>
+  <p:clrMapOvr>
+    <a:masterClrMapping/>
+  </p:clrMapOvr>
+</p:sld>
+</file>
+
+<file path=ppt/slides/slide20.xml><?xml version="1.0" encoding="utf-8"?>
+<p:sld xmlns:a="http://schemas.openxmlformats.org/drawingml/2006/main" xmlns:r="http://schemas.openxmlformats.org/officeDocument/2006/relationships" xmlns:p="http://schemas.openxmlformats.org/presentationml/2006/main">
+  <p:cSld>
+    <p:spTree>
+      <p:nvGrpSpPr>
+        <p:cNvPr id="1" name=""/>
+        <p:cNvGrpSpPr/>
+        <p:nvPr/>
+      </p:nvGrpSpPr>
+      <p:grpSpPr>
+        <a:xfrm>
+          <a:off x="0" y="0"/>
+          <a:ext cx="0" cy="0"/>
+          <a:chOff x="0" y="0"/>
+          <a:chExt cx="0" cy="0"/>
+        </a:xfrm>
+      </p:grpSpPr>
+      <p:sp>
+        <p:nvSpPr>
           <p:cNvPr id="2" name="Título 1">
             <a:extLst>
               <a:ext uri="{FF2B5EF4-FFF2-40B4-BE49-F238E27FC236}">
@@ -10734,8 +10998,8 @@
         </p:nvSpPr>
         <p:spPr>
           <a:xfrm>
-            <a:off x="5018314" y="1825624"/>
-            <a:ext cx="7021286" cy="5032375"/>
+            <a:off x="5018313" y="1825624"/>
+            <a:ext cx="7087961" cy="5032375"/>
           </a:xfrm>
         </p:spPr>
         <p:txBody>
@@ -11180,112 +11444,7 @@
 </p:sld>
 </file>
 
-<file path=ppt/slides/slide2.xml><?xml version="1.0" encoding="utf-8"?>
-<p:sld xmlns:a="http://schemas.openxmlformats.org/drawingml/2006/main" xmlns:r="http://schemas.openxmlformats.org/officeDocument/2006/relationships" xmlns:p="http://schemas.openxmlformats.org/presentationml/2006/main">
-  <p:cSld>
-    <p:spTree>
-      <p:nvGrpSpPr>
-        <p:cNvPr id="1" name=""/>
-        <p:cNvGrpSpPr/>
-        <p:nvPr/>
-      </p:nvGrpSpPr>
-      <p:grpSpPr>
-        <a:xfrm>
-          <a:off x="0" y="0"/>
-          <a:ext cx="0" cy="0"/>
-          <a:chOff x="0" y="0"/>
-          <a:chExt cx="0" cy="0"/>
-        </a:xfrm>
-      </p:grpSpPr>
-      <p:sp>
-        <p:nvSpPr>
-          <p:cNvPr id="2" name="Título 1">
-            <a:extLst>
-              <a:ext uri="{FF2B5EF4-FFF2-40B4-BE49-F238E27FC236}">
-                <a16:creationId xmlns:a16="http://schemas.microsoft.com/office/drawing/2014/main" id="{EECB3FED-5D1A-7084-5333-A3B2FA75F608}"/>
-              </a:ext>
-            </a:extLst>
-          </p:cNvPr>
-          <p:cNvSpPr>
-            <a:spLocks noGrp="1"/>
-          </p:cNvSpPr>
-          <p:nvPr>
-            <p:ph type="title"/>
-          </p:nvPr>
-        </p:nvSpPr>
-        <p:spPr/>
-        <p:txBody>
-          <a:bodyPr/>
-          <a:lstStyle/>
-          <a:p>
-            <a:r>
-              <a:rPr lang="pt-BR" dirty="0"/>
-              <a:t>O que vamos ver?</a:t>
-            </a:r>
-          </a:p>
-        </p:txBody>
-      </p:sp>
-      <p:sp>
-        <p:nvSpPr>
-          <p:cNvPr id="3" name="Espaço Reservado para Conteúdo 2">
-            <a:extLst>
-              <a:ext uri="{FF2B5EF4-FFF2-40B4-BE49-F238E27FC236}">
-                <a16:creationId xmlns:a16="http://schemas.microsoft.com/office/drawing/2014/main" id="{25FE7774-7186-A846-D8DE-518B2CBF4EBD}"/>
-              </a:ext>
-            </a:extLst>
-          </p:cNvPr>
-          <p:cNvSpPr>
-            <a:spLocks noGrp="1"/>
-          </p:cNvSpPr>
-          <p:nvPr>
-            <p:ph idx="1"/>
-          </p:nvPr>
-        </p:nvSpPr>
-        <p:spPr>
-          <a:xfrm>
-            <a:off x="838200" y="1825624"/>
-            <a:ext cx="11190514" cy="5032376"/>
-          </a:xfrm>
-        </p:spPr>
-        <p:txBody>
-          <a:bodyPr>
-            <a:normAutofit/>
-          </a:bodyPr>
-          <a:lstStyle/>
-          <a:p>
-            <a:r>
-              <a:rPr lang="pt-BR" dirty="0"/>
-              <a:t>Anteriormente, para analisar o desempenho de um classificador, usamos apenas a acurácia. </a:t>
-            </a:r>
-          </a:p>
-          <a:p>
-            <a:r>
-              <a:rPr lang="pt-BR" dirty="0"/>
-              <a:t>Porém, existem outras métricas que podem ser usadas para se medir a qualidade de um classificador.</a:t>
-            </a:r>
-          </a:p>
-          <a:p>
-            <a:r>
-              <a:rPr lang="pt-BR" dirty="0"/>
-              <a:t>Portanto, neste tópico, veremos algumas outras métricas.</a:t>
-            </a:r>
-          </a:p>
-        </p:txBody>
-      </p:sp>
-    </p:spTree>
-    <p:extLst>
-      <p:ext uri="{BB962C8B-B14F-4D97-AF65-F5344CB8AC3E}">
-        <p14:creationId xmlns:p14="http://schemas.microsoft.com/office/powerpoint/2010/main" val="2177516599"/>
-      </p:ext>
-    </p:extLst>
-  </p:cSld>
-  <p:clrMapOvr>
-    <a:masterClrMapping/>
-  </p:clrMapOvr>
-</p:sld>
-</file>
-
-<file path=ppt/slides/slide20.xml><?xml version="1.0" encoding="utf-8"?>
+<file path=ppt/slides/slide21.xml><?xml version="1.0" encoding="utf-8"?>
 <p:sld xmlns:a="http://schemas.openxmlformats.org/drawingml/2006/main" xmlns:r="http://schemas.openxmlformats.org/officeDocument/2006/relationships" xmlns:p="http://schemas.openxmlformats.org/presentationml/2006/main">
   <p:cSld>
     <p:spTree>
@@ -11334,8 +11493,8 @@
           </a:p>
         </p:txBody>
       </p:sp>
-      <mc:AlternateContent xmlns:mc="http://schemas.openxmlformats.org/markup-compatibility/2006" xmlns:a14="http://schemas.microsoft.com/office/drawing/2010/main">
-        <mc:Choice Requires="a14">
+      <mc:AlternateContent xmlns:mc="http://schemas.openxmlformats.org/markup-compatibility/2006">
+        <mc:Choice xmlns:a14="http://schemas.microsoft.com/office/drawing/2010/main" Requires="a14">
           <p:sp>
             <p:nvSpPr>
               <p:cNvPr id="3" name="Espaço Reservado para Conteúdo 2">
@@ -11380,7 +11539,19 @@
               <a:p>
                 <a:r>
                   <a:rPr lang="pt-BR" dirty="0"/>
-                  <a:t>A métrica dá a mesma importância à </a:t>
+                  <a:t>A métrica dá a </a:t>
+                </a:r>
+                <a:r>
+                  <a:rPr lang="pt-BR" b="1" dirty="0">
+                    <a:solidFill>
+                      <a:schemeClr val="accent2"/>
+                    </a:solidFill>
+                  </a:rPr>
+                  <a:t>mesma importância </a:t>
+                </a:r>
+                <a:r>
+                  <a:rPr lang="pt-BR" dirty="0"/>
+                  <a:t>à </a:t>
                 </a:r>
                 <a:r>
                   <a:rPr lang="pt-BR" b="1" dirty="0"/>
@@ -11582,7 +11753,7 @@
             </p:txBody>
           </p:sp>
         </mc:Choice>
-        <mc:Fallback xmlns="">
+        <mc:Fallback>
           <p:sp>
             <p:nvSpPr>
               <p:cNvPr id="3" name="Espaço Reservado para Conteúdo 2">
@@ -11939,7 +12110,7 @@
 </p:sld>
 </file>
 
-<file path=ppt/slides/slide21.xml><?xml version="1.0" encoding="utf-8"?>
+<file path=ppt/slides/slide22.xml><?xml version="1.0" encoding="utf-8"?>
 <p:sld xmlns:a="http://schemas.openxmlformats.org/drawingml/2006/main" xmlns:r="http://schemas.openxmlformats.org/officeDocument/2006/relationships" xmlns:p="http://schemas.openxmlformats.org/presentationml/2006/main">
   <p:cSld>
     <p:spTree>
@@ -11956,8 +12127,8 @@
           <a:chExt cx="0" cy="0"/>
         </a:xfrm>
       </p:grpSpPr>
-      <mc:AlternateContent xmlns:mc="http://schemas.openxmlformats.org/markup-compatibility/2006" xmlns:a14="http://schemas.microsoft.com/office/drawing/2010/main">
-        <mc:Choice Requires="a14">
+      <mc:AlternateContent xmlns:mc="http://schemas.openxmlformats.org/markup-compatibility/2006">
+        <mc:Choice xmlns:a14="http://schemas.microsoft.com/office/drawing/2010/main" Requires="a14">
           <p:sp>
             <p:nvSpPr>
               <p:cNvPr id="3" name="Espaço Reservado para Conteúdo 2">
@@ -11976,13 +12147,13 @@
             </p:nvSpPr>
             <p:spPr>
               <a:xfrm>
-                <a:off x="728254" y="2533701"/>
-                <a:ext cx="10735491" cy="1755270"/>
+                <a:off x="200025" y="2505100"/>
+                <a:ext cx="11791950" cy="1847799"/>
               </a:xfrm>
             </p:spPr>
             <p:txBody>
               <a:bodyPr>
-                <a:normAutofit/>
+                <a:noAutofit/>
               </a:bodyPr>
               <a:lstStyle/>
               <a:p>
@@ -11990,13 +12161,13 @@
                   <a:buNone/>
                 </a:pPr>
                 <a:r>
-                  <a:rPr lang="pt-BR" sz="4800" dirty="0"/>
+                  <a:rPr lang="pt-BR" sz="5400" dirty="0"/>
                   <a:t>OK, consigo calcular as métricas para problemas binários, mas e quando </a:t>
                 </a:r>
                 <a14:m>
                   <m:oMath xmlns:m="http://schemas.openxmlformats.org/officeDocument/2006/math">
                     <m:r>
-                      <a:rPr lang="pt-BR" sz="4800" b="0" i="1" smtClean="0">
+                      <a:rPr lang="pt-BR" sz="5400" b="0" i="1" smtClean="0">
                         <a:latin typeface="Cambria Math" panose="02040503050406030204" pitchFamily="18" charset="0"/>
                       </a:rPr>
                       <m:t>𝑄</m:t>
@@ -12004,14 +12175,14 @@
                   </m:oMath>
                 </a14:m>
                 <a:r>
-                  <a:rPr lang="pt-BR" sz="4800" dirty="0"/>
+                  <a:rPr lang="pt-BR" sz="5400" dirty="0"/>
                   <a:t> &gt; 2?</a:t>
                 </a:r>
               </a:p>
             </p:txBody>
           </p:sp>
         </mc:Choice>
-        <mc:Fallback xmlns="">
+        <mc:Fallback>
           <p:sp>
             <p:nvSpPr>
               <p:cNvPr id="3" name="Espaço Reservado para Conteúdo 2">
@@ -12030,13 +12201,13 @@
             </p:nvSpPr>
             <p:spPr>
               <a:xfrm>
-                <a:off x="728254" y="2533701"/>
-                <a:ext cx="10735491" cy="1755270"/>
+                <a:off x="200025" y="2505100"/>
+                <a:ext cx="11791950" cy="1847799"/>
               </a:xfrm>
               <a:blipFill>
                 <a:blip r:embed="rId2"/>
                 <a:stretch>
-                  <a:fillRect l="-1305" t="-11806" r="-1249"/>
+                  <a:fillRect l="-2585" t="-13531" r="-2482" b="-5611"/>
                 </a:stretch>
               </a:blipFill>
             </p:spPr>
@@ -12068,7 +12239,7 @@
 </p:sld>
 </file>
 
-<file path=ppt/slides/slide22.xml><?xml version="1.0" encoding="utf-8"?>
+<file path=ppt/slides/slide23.xml><?xml version="1.0" encoding="utf-8"?>
 <p:sld xmlns:a="http://schemas.openxmlformats.org/drawingml/2006/main" xmlns:r="http://schemas.openxmlformats.org/officeDocument/2006/relationships" xmlns:p="http://schemas.openxmlformats.org/presentationml/2006/main">
   <p:cSld>
     <p:spTree>
@@ -12085,106 +12256,39 @@
           <a:chExt cx="0" cy="0"/>
         </a:xfrm>
       </p:grpSpPr>
-      <mc:AlternateContent xmlns:mc="http://schemas.openxmlformats.org/markup-compatibility/2006" xmlns:a14="http://schemas.microsoft.com/office/drawing/2010/main">
-        <mc:Choice Requires="a14">
-          <p:sp>
-            <p:nvSpPr>
-              <p:cNvPr id="2" name="Título 1">
-                <a:extLst>
-                  <a:ext uri="{FF2B5EF4-FFF2-40B4-BE49-F238E27FC236}">
-                    <a16:creationId xmlns:a16="http://schemas.microsoft.com/office/drawing/2014/main" id="{44F6D18B-0399-55B9-FD83-C7EDF77FF08A}"/>
-                  </a:ext>
-                </a:extLst>
-              </p:cNvPr>
-              <p:cNvSpPr>
-                <a:spLocks noGrp="1"/>
-              </p:cNvSpPr>
-              <p:nvPr>
-                <p:ph type="title"/>
-              </p:nvPr>
-            </p:nvSpPr>
-            <p:spPr>
-              <a:xfrm>
-                <a:off x="838200" y="365125"/>
-                <a:ext cx="10789356" cy="1325563"/>
-              </a:xfrm>
-            </p:spPr>
-            <p:txBody>
-              <a:bodyPr/>
-              <a:lstStyle/>
-              <a:p>
-                <a:r>
-                  <a:rPr lang="pt-BR" dirty="0"/>
-                  <a:t>Matriz de confusão para caso multiclasses (</a:t>
-                </a:r>
-                <a14:m>
-                  <m:oMath xmlns:m="http://schemas.openxmlformats.org/officeDocument/2006/math">
-                    <m:r>
-                      <a:rPr lang="pt-BR" b="0" i="1" smtClean="0">
-                        <a:latin typeface="Cambria Math" panose="02040503050406030204" pitchFamily="18" charset="0"/>
-                      </a:rPr>
-                      <m:t>𝑄</m:t>
-                    </m:r>
-                    <m:r>
-                      <a:rPr lang="pt-BR" b="0" i="1" smtClean="0">
-                        <a:latin typeface="Cambria Math" panose="02040503050406030204" pitchFamily="18" charset="0"/>
-                      </a:rPr>
-                      <m:t>&gt;2</m:t>
-                    </m:r>
-                  </m:oMath>
-                </a14:m>
-                <a:r>
-                  <a:rPr lang="pt-BR" dirty="0"/>
-                  <a:t>)</a:t>
-                </a:r>
-              </a:p>
-            </p:txBody>
-          </p:sp>
-        </mc:Choice>
-        <mc:Fallback xmlns="">
-          <p:sp>
-            <p:nvSpPr>
-              <p:cNvPr id="2" name="Título 1">
-                <a:extLst>
-                  <a:ext uri="{FF2B5EF4-FFF2-40B4-BE49-F238E27FC236}">
-                    <a16:creationId xmlns:a16="http://schemas.microsoft.com/office/drawing/2014/main" id="{44F6D18B-0399-55B9-FD83-C7EDF77FF08A}"/>
-                  </a:ext>
-                </a:extLst>
-              </p:cNvPr>
-              <p:cNvSpPr>
-                <a:spLocks noGrp="1" noRot="1" noChangeAspect="1" noMove="1" noResize="1" noEditPoints="1" noAdjustHandles="1" noChangeArrowheads="1" noChangeShapeType="1" noTextEdit="1"/>
-              </p:cNvSpPr>
-              <p:nvPr>
-                <p:ph type="title"/>
-              </p:nvPr>
-            </p:nvSpPr>
-            <p:spPr>
-              <a:xfrm>
-                <a:off x="838200" y="365125"/>
-                <a:ext cx="10789356" cy="1325563"/>
-              </a:xfrm>
-              <a:blipFill>
-                <a:blip r:embed="rId2"/>
-                <a:stretch>
-                  <a:fillRect l="-2318" t="-13364" b="-21198"/>
-                </a:stretch>
-              </a:blipFill>
-            </p:spPr>
-            <p:txBody>
-              <a:bodyPr/>
-              <a:lstStyle/>
-              <a:p>
-                <a:r>
-                  <a:rPr lang="en-US">
-                    <a:noFill/>
-                  </a:rPr>
-                  <a:t> </a:t>
-                </a:r>
-              </a:p>
-            </p:txBody>
-          </p:sp>
-        </mc:Fallback>
-      </mc:AlternateContent>
+      <p:sp>
+        <p:nvSpPr>
+          <p:cNvPr id="2" name="Título 1">
+            <a:extLst>
+              <a:ext uri="{FF2B5EF4-FFF2-40B4-BE49-F238E27FC236}">
+                <a16:creationId xmlns:a16="http://schemas.microsoft.com/office/drawing/2014/main" id="{44F6D18B-0399-55B9-FD83-C7EDF77FF08A}"/>
+              </a:ext>
+            </a:extLst>
+          </p:cNvPr>
+          <p:cNvSpPr>
+            <a:spLocks noGrp="1"/>
+          </p:cNvSpPr>
+          <p:nvPr>
+            <p:ph type="title"/>
+          </p:nvPr>
+        </p:nvSpPr>
+        <p:spPr>
+          <a:xfrm>
+            <a:off x="838200" y="365125"/>
+            <a:ext cx="10789356" cy="1325563"/>
+          </a:xfrm>
+        </p:spPr>
+        <p:txBody>
+          <a:bodyPr/>
+          <a:lstStyle/>
+          <a:p>
+            <a:r>
+              <a:rPr lang="pt-BR" dirty="0"/>
+              <a:t>Matriz de confusão para caso multiclasses</a:t>
+            </a:r>
+          </a:p>
+        </p:txBody>
+      </p:sp>
       <mc:AlternateContent xmlns:mc="http://schemas.openxmlformats.org/markup-compatibility/2006" xmlns:a14="http://schemas.microsoft.com/office/drawing/2010/main">
         <mc:Choice Requires="a14">
           <p:sp>
@@ -12620,7 +12724,7 @@
 </p:sld>
 </file>
 
-<file path=ppt/slides/slide23.xml><?xml version="1.0" encoding="utf-8"?>
+<file path=ppt/slides/slide24.xml><?xml version="1.0" encoding="utf-8"?>
 <p:sld xmlns:a="http://schemas.openxmlformats.org/drawingml/2006/main" xmlns:r="http://schemas.openxmlformats.org/officeDocument/2006/relationships" xmlns:p="http://schemas.openxmlformats.org/presentationml/2006/main">
   <p:cSld>
     <p:spTree>
@@ -18753,7 +18857,7 @@
 </p:sld>
 </file>
 
-<file path=ppt/slides/slide24.xml><?xml version="1.0" encoding="utf-8"?>
+<file path=ppt/slides/slide25.xml><?xml version="1.0" encoding="utf-8"?>
 <p:sld xmlns:a="http://schemas.openxmlformats.org/drawingml/2006/main" xmlns:r="http://schemas.openxmlformats.org/officeDocument/2006/relationships" xmlns:p="http://schemas.openxmlformats.org/presentationml/2006/main">
   <p:cSld>
     <p:spTree>
@@ -22249,7 +22353,7 @@
 </p:sld>
 </file>
 
-<file path=ppt/slides/slide25.xml><?xml version="1.0" encoding="utf-8"?>
+<file path=ppt/slides/slide26.xml><?xml version="1.0" encoding="utf-8"?>
 <p:sld xmlns:a="http://schemas.openxmlformats.org/drawingml/2006/main" xmlns:r="http://schemas.openxmlformats.org/officeDocument/2006/relationships" xmlns:p="http://schemas.openxmlformats.org/presentationml/2006/main">
   <p:cSld>
     <p:spTree>
@@ -25900,7 +26004,7 @@
 </p:sld>
 </file>
 
-<file path=ppt/slides/slide26.xml><?xml version="1.0" encoding="utf-8"?>
+<file path=ppt/slides/slide27.xml><?xml version="1.0" encoding="utf-8"?>
 <p:sld xmlns:a="http://schemas.openxmlformats.org/drawingml/2006/main" xmlns:r="http://schemas.openxmlformats.org/officeDocument/2006/relationships" xmlns:p="http://schemas.openxmlformats.org/presentationml/2006/main">
   <p:cSld>
     <p:spTree>
@@ -29442,8 +29546,8 @@
           </p:sp>
         </mc:Fallback>
       </mc:AlternateContent>
-      <mc:AlternateContent xmlns:mc="http://schemas.openxmlformats.org/markup-compatibility/2006" xmlns:a14="http://schemas.microsoft.com/office/drawing/2010/main">
-        <mc:Choice Requires="a14">
+      <mc:AlternateContent xmlns:mc="http://schemas.openxmlformats.org/markup-compatibility/2006">
+        <mc:Choice xmlns:a14="http://schemas.microsoft.com/office/drawing/2010/main" Requires="a14">
           <p:sp>
             <p:nvSpPr>
               <p:cNvPr id="3" name="Espaço Reservado para Conteúdo 2">
@@ -29618,7 +29722,7 @@
               <a:p>
                 <a:r>
                   <a:rPr lang="pt-BR" dirty="0"/>
-                  <a:t>Percebam que teremos um </a:t>
+                  <a:t>Percebam que, ao final, teremos um </a:t>
                 </a:r>
                 <a:r>
                   <a:rPr lang="pt-BR" b="1" dirty="0">
@@ -29668,7 +29772,7 @@
             </p:txBody>
           </p:sp>
         </mc:Choice>
-        <mc:Fallback xmlns="">
+        <mc:Fallback>
           <p:sp>
             <p:nvSpPr>
               <p:cNvPr id="3" name="Espaço Reservado para Conteúdo 2">
@@ -29693,7 +29797,7 @@
               <a:blipFill>
                 <a:blip r:embed="rId5"/>
                 <a:stretch>
-                  <a:fillRect l="-2027" t="-1951" r="-2815"/>
+                  <a:fillRect l="-2027" t="-1951" r="-2815" b="-2561"/>
                 </a:stretch>
               </a:blipFill>
             </p:spPr>
@@ -29725,7 +29829,7 @@
 </p:sld>
 </file>
 
-<file path=ppt/slides/slide27.xml><?xml version="1.0" encoding="utf-8"?>
+<file path=ppt/slides/slide28.xml><?xml version="1.0" encoding="utf-8"?>
 <p:sld xmlns:a="http://schemas.openxmlformats.org/drawingml/2006/main" xmlns:r="http://schemas.openxmlformats.org/officeDocument/2006/relationships" xmlns:p="http://schemas.openxmlformats.org/presentationml/2006/main">
   <p:cSld>
     <p:spTree>
@@ -29799,14 +29903,14 @@
           <a:p>
             <a:r>
               <a:rPr lang="pt-BR" dirty="0"/>
-              <a:t>Para o caso multiclasses, a acurácia é calculada como razão entre a soma de todos os acertos e o total de exemplos (i.e., a soma erros e acertos).</a:t>
+              <a:t>Para o caso multiclasses, a acurácia é calculada como razão entre a soma de todos os acertos e o total de exemplos avaliados (i.e., a soma erros e acertos).</a:t>
             </a:r>
             <a:endParaRPr lang="en-US" dirty="0"/>
           </a:p>
         </p:txBody>
       </p:sp>
-      <mc:AlternateContent xmlns:mc="http://schemas.openxmlformats.org/markup-compatibility/2006" xmlns:a14="http://schemas.microsoft.com/office/drawing/2010/main">
-        <mc:Choice Requires="a14">
+      <mc:AlternateContent xmlns:mc="http://schemas.openxmlformats.org/markup-compatibility/2006">
+        <mc:Choice xmlns:a14="http://schemas.microsoft.com/office/drawing/2010/main" Requires="a14">
           <p:sp>
             <p:nvSpPr>
               <p:cNvPr id="4" name="CaixaDeTexto 3">
@@ -29821,8 +29925,8 @@
             </p:nvSpPr>
             <p:spPr>
               <a:xfrm>
-                <a:off x="1458685" y="5418979"/>
-                <a:ext cx="9274629" cy="1027525"/>
+                <a:off x="731383" y="5421759"/>
+                <a:ext cx="10729233" cy="1114857"/>
               </a:xfrm>
               <a:prstGeom prst="rect">
                 <a:avLst/>
@@ -29969,7 +30073,7 @@
                             <a:rPr lang="pt-BR" sz="3200" b="0" i="0" smtClean="0">
                               <a:latin typeface="Cambria Math" panose="02040503050406030204" pitchFamily="18" charset="0"/>
                             </a:rPr>
-                            <m:t>princial</m:t>
+                            <m:t>principal</m:t>
                           </m:r>
                         </m:num>
                         <m:den>
@@ -30042,6 +30146,42 @@
                             </a:rPr>
                             <m:t>elementos</m:t>
                           </m:r>
+                          <m:r>
+                            <a:rPr lang="pt-BR" sz="3200" b="0" i="1" smtClean="0">
+                              <a:latin typeface="Cambria Math" panose="02040503050406030204" pitchFamily="18" charset="0"/>
+                            </a:rPr>
+                            <m:t> (</m:t>
+                          </m:r>
+                          <m:r>
+                            <m:rPr>
+                              <m:sty m:val="p"/>
+                            </m:rPr>
+                            <a:rPr lang="pt-BR" sz="3200" b="0" i="0" smtClean="0">
+                              <a:latin typeface="Cambria Math" panose="02040503050406030204" pitchFamily="18" charset="0"/>
+                            </a:rPr>
+                            <m:t>erros</m:t>
+                          </m:r>
+                          <m:r>
+                            <a:rPr lang="pt-BR" sz="3200" b="0" i="0" smtClean="0">
+                              <a:latin typeface="Cambria Math" panose="02040503050406030204" pitchFamily="18" charset="0"/>
+                            </a:rPr>
+                            <m:t>+</m:t>
+                          </m:r>
+                          <m:r>
+                            <m:rPr>
+                              <m:sty m:val="p"/>
+                            </m:rPr>
+                            <a:rPr lang="pt-BR" sz="3200" b="0" i="0" smtClean="0">
+                              <a:latin typeface="Cambria Math" panose="02040503050406030204" pitchFamily="18" charset="0"/>
+                            </a:rPr>
+                            <m:t>acertos</m:t>
+                          </m:r>
+                          <m:r>
+                            <a:rPr lang="pt-BR" sz="3200" b="0" i="1" smtClean="0">
+                              <a:latin typeface="Cambria Math" panose="02040503050406030204" pitchFamily="18" charset="0"/>
+                            </a:rPr>
+                            <m:t>)</m:t>
+                          </m:r>
                         </m:den>
                       </m:f>
                     </m:oMath>
@@ -30052,7 +30192,7 @@
             </p:txBody>
           </p:sp>
         </mc:Choice>
-        <mc:Fallback xmlns="">
+        <mc:Fallback>
           <p:sp>
             <p:nvSpPr>
               <p:cNvPr id="4" name="CaixaDeTexto 3">
@@ -30069,8 +30209,8 @@
             </p:nvSpPr>
             <p:spPr>
               <a:xfrm>
-                <a:off x="1458685" y="5418979"/>
-                <a:ext cx="9274629" cy="1027525"/>
+                <a:off x="731383" y="5421759"/>
+                <a:ext cx="10729233" cy="1114857"/>
               </a:xfrm>
               <a:prstGeom prst="rect">
                 <a:avLst/>
@@ -31000,7 +31140,7 @@
 </p:sld>
 </file>
 
-<file path=ppt/slides/slide28.xml><?xml version="1.0" encoding="utf-8"?>
+<file path=ppt/slides/slide29.xml><?xml version="1.0" encoding="utf-8"?>
 <p:sld xmlns:a="http://schemas.openxmlformats.org/drawingml/2006/main" xmlns:r="http://schemas.openxmlformats.org/officeDocument/2006/relationships" xmlns:p="http://schemas.openxmlformats.org/presentationml/2006/main">
   <p:cSld>
     <p:spTree>
@@ -31131,7 +31271,203 @@
 </p:sld>
 </file>
 
-<file path=ppt/slides/slide29.xml><?xml version="1.0" encoding="utf-8"?>
+<file path=ppt/slides/slide3.xml><?xml version="1.0" encoding="utf-8"?>
+<p:sld xmlns:a="http://schemas.openxmlformats.org/drawingml/2006/main" xmlns:r="http://schemas.openxmlformats.org/officeDocument/2006/relationships" xmlns:p="http://schemas.openxmlformats.org/presentationml/2006/main">
+  <p:cSld>
+    <p:spTree>
+      <p:nvGrpSpPr>
+        <p:cNvPr id="1" name=""/>
+        <p:cNvGrpSpPr/>
+        <p:nvPr/>
+      </p:nvGrpSpPr>
+      <p:grpSpPr>
+        <a:xfrm>
+          <a:off x="0" y="0"/>
+          <a:ext cx="0" cy="0"/>
+          <a:chOff x="0" y="0"/>
+          <a:chExt cx="0" cy="0"/>
+        </a:xfrm>
+      </p:grpSpPr>
+      <p:sp>
+        <p:nvSpPr>
+          <p:cNvPr id="2" name="Title 1">
+            <a:extLst>
+              <a:ext uri="{FF2B5EF4-FFF2-40B4-BE49-F238E27FC236}">
+                <a16:creationId xmlns:a16="http://schemas.microsoft.com/office/drawing/2014/main" id="{F1CB30D0-D052-EC03-3C25-35C106AA1077}"/>
+              </a:ext>
+            </a:extLst>
+          </p:cNvPr>
+          <p:cNvSpPr>
+            <a:spLocks noGrp="1"/>
+          </p:cNvSpPr>
+          <p:nvPr>
+            <p:ph type="title"/>
+          </p:nvPr>
+        </p:nvSpPr>
+        <p:spPr/>
+        <p:txBody>
+          <a:bodyPr/>
+          <a:lstStyle/>
+          <a:p>
+            <a:r>
+              <a:rPr lang="pt-BR" dirty="0"/>
+              <a:t>Matriz de confusão</a:t>
+            </a:r>
+            <a:endParaRPr lang="en-US" dirty="0"/>
+          </a:p>
+        </p:txBody>
+      </p:sp>
+      <p:pic>
+        <p:nvPicPr>
+          <p:cNvPr id="2050" name="Picture 2" descr="Validate me Constructive criticism permitted – @gallusrostromegalus on  Tumblr">
+            <a:extLst>
+              <a:ext uri="{FF2B5EF4-FFF2-40B4-BE49-F238E27FC236}">
+                <a16:creationId xmlns:a16="http://schemas.microsoft.com/office/drawing/2014/main" id="{A9C68C0F-3A42-8D60-0B8A-979695E4072E}"/>
+              </a:ext>
+            </a:extLst>
+          </p:cNvPr>
+          <p:cNvPicPr>
+            <a:picLocks noChangeAspect="1" noChangeArrowheads="1"/>
+          </p:cNvPicPr>
+          <p:nvPr/>
+        </p:nvPicPr>
+        <p:blipFill>
+          <a:blip r:embed="rId2">
+            <a:extLst>
+              <a:ext uri="{28A0092B-C50C-407E-A947-70E740481C1C}">
+                <a14:useLocalDpi xmlns:a14="http://schemas.microsoft.com/office/drawing/2010/main" val="0"/>
+              </a:ext>
+            </a:extLst>
+          </a:blip>
+          <a:srcRect/>
+          <a:stretch>
+            <a:fillRect/>
+          </a:stretch>
+        </p:blipFill>
+        <p:spPr bwMode="auto">
+          <a:xfrm>
+            <a:off x="130630" y="1556497"/>
+            <a:ext cx="5635002" cy="5167312"/>
+          </a:xfrm>
+          <a:prstGeom prst="rect">
+            <a:avLst/>
+          </a:prstGeom>
+          <a:noFill/>
+          <a:extLst>
+            <a:ext uri="{909E8E84-426E-40DD-AFC4-6F175D3DCCD1}">
+              <a14:hiddenFill xmlns:a14="http://schemas.microsoft.com/office/drawing/2010/main">
+                <a:solidFill>
+                  <a:srgbClr val="FFFFFF"/>
+                </a:solidFill>
+              </a14:hiddenFill>
+            </a:ext>
+          </a:extLst>
+        </p:spPr>
+      </p:pic>
+      <p:sp>
+        <p:nvSpPr>
+          <p:cNvPr id="3" name="Retângulo 2"/>
+          <p:cNvSpPr/>
+          <p:nvPr/>
+        </p:nvSpPr>
+        <p:spPr>
+          <a:xfrm>
+            <a:off x="5998028" y="2708302"/>
+            <a:ext cx="5965370" cy="2677656"/>
+          </a:xfrm>
+          <a:prstGeom prst="rect">
+            <a:avLst/>
+          </a:prstGeom>
+        </p:spPr>
+        <p:txBody>
+          <a:bodyPr wrap="square">
+            <a:spAutoFit/>
+          </a:bodyPr>
+          <a:lstStyle/>
+          <a:p>
+            <a:pPr marL="457200" indent="-457200">
+              <a:buFont typeface="Arial" panose="020B0604020202020204" pitchFamily="34" charset="0"/>
+              <a:buChar char="•"/>
+            </a:pPr>
+            <a:r>
+              <a:rPr lang="pt-BR" sz="2800" dirty="0"/>
+              <a:t>Como o próprio nome diz, a </a:t>
+            </a:r>
+            <a:r>
+              <a:rPr lang="pt-BR" sz="2800" b="1" dirty="0"/>
+              <a:t>matriz de confusão </a:t>
+            </a:r>
+            <a:r>
+              <a:rPr lang="pt-BR" sz="2800" dirty="0"/>
+              <a:t>mostra o </a:t>
+            </a:r>
+            <a:r>
+              <a:rPr lang="pt-BR" sz="2800" b="1" dirty="0">
+                <a:solidFill>
+                  <a:schemeClr val="accent2"/>
+                </a:solidFill>
+              </a:rPr>
+              <a:t>quanto</a:t>
+            </a:r>
+            <a:r>
+              <a:rPr lang="pt-BR" sz="2800" dirty="0"/>
+              <a:t> um classificador está se </a:t>
+            </a:r>
+            <a:r>
+              <a:rPr lang="pt-BR" sz="2800" b="1" dirty="0"/>
+              <a:t>confundindo</a:t>
+            </a:r>
+            <a:r>
+              <a:rPr lang="pt-BR" sz="2800" dirty="0"/>
+              <a:t>.</a:t>
+            </a:r>
+          </a:p>
+          <a:p>
+            <a:pPr marL="457200" indent="-457200">
+              <a:buFont typeface="Arial" panose="020B0604020202020204" pitchFamily="34" charset="0"/>
+              <a:buChar char="•"/>
+            </a:pPr>
+            <a:r>
+              <a:rPr lang="pt-BR" sz="2800" dirty="0"/>
+              <a:t>A matriz permite verificar quais classes o </a:t>
+            </a:r>
+            <a:r>
+              <a:rPr lang="pt-BR" sz="2800" b="1" dirty="0"/>
+              <a:t>classificador</a:t>
+            </a:r>
+            <a:r>
+              <a:rPr lang="pt-BR" sz="2800" dirty="0"/>
+              <a:t> tem </a:t>
+            </a:r>
+            <a:r>
+              <a:rPr lang="pt-BR" sz="2800" b="1" dirty="0">
+                <a:solidFill>
+                  <a:srgbClr val="00B050"/>
+                </a:solidFill>
+              </a:rPr>
+              <a:t>maior dificuldade em classificar</a:t>
+            </a:r>
+            <a:r>
+              <a:rPr lang="pt-BR" sz="2800" dirty="0"/>
+              <a:t>.</a:t>
+            </a:r>
+          </a:p>
+        </p:txBody>
+      </p:sp>
+    </p:spTree>
+    <p:extLst>
+      <p:ext uri="{BB962C8B-B14F-4D97-AF65-F5344CB8AC3E}">
+        <p14:creationId xmlns:p14="http://schemas.microsoft.com/office/powerpoint/2010/main" val="2135253180"/>
+      </p:ext>
+    </p:extLst>
+  </p:cSld>
+  <p:clrMapOvr>
+    <a:masterClrMapping/>
+  </p:clrMapOvr>
+</p:sld>
+</file>
+
+<file path=ppt/slides/slide30.xml><?xml version="1.0" encoding="utf-8"?>
 <p:sld xmlns:a="http://schemas.openxmlformats.org/drawingml/2006/main" xmlns:r="http://schemas.openxmlformats.org/officeDocument/2006/relationships" xmlns:p="http://schemas.openxmlformats.org/presentationml/2006/main">
   <p:cSld>
     <p:spTree>
@@ -31458,203 +31794,7 @@
 </p:sld>
 </file>
 
-<file path=ppt/slides/slide3.xml><?xml version="1.0" encoding="utf-8"?>
-<p:sld xmlns:a="http://schemas.openxmlformats.org/drawingml/2006/main" xmlns:r="http://schemas.openxmlformats.org/officeDocument/2006/relationships" xmlns:p="http://schemas.openxmlformats.org/presentationml/2006/main">
-  <p:cSld>
-    <p:spTree>
-      <p:nvGrpSpPr>
-        <p:cNvPr id="1" name=""/>
-        <p:cNvGrpSpPr/>
-        <p:nvPr/>
-      </p:nvGrpSpPr>
-      <p:grpSpPr>
-        <a:xfrm>
-          <a:off x="0" y="0"/>
-          <a:ext cx="0" cy="0"/>
-          <a:chOff x="0" y="0"/>
-          <a:chExt cx="0" cy="0"/>
-        </a:xfrm>
-      </p:grpSpPr>
-      <p:sp>
-        <p:nvSpPr>
-          <p:cNvPr id="2" name="Title 1">
-            <a:extLst>
-              <a:ext uri="{FF2B5EF4-FFF2-40B4-BE49-F238E27FC236}">
-                <a16:creationId xmlns:a16="http://schemas.microsoft.com/office/drawing/2014/main" id="{F1CB30D0-D052-EC03-3C25-35C106AA1077}"/>
-              </a:ext>
-            </a:extLst>
-          </p:cNvPr>
-          <p:cNvSpPr>
-            <a:spLocks noGrp="1"/>
-          </p:cNvSpPr>
-          <p:nvPr>
-            <p:ph type="title"/>
-          </p:nvPr>
-        </p:nvSpPr>
-        <p:spPr/>
-        <p:txBody>
-          <a:bodyPr/>
-          <a:lstStyle/>
-          <a:p>
-            <a:r>
-              <a:rPr lang="pt-BR" dirty="0"/>
-              <a:t>Matriz de confusão</a:t>
-            </a:r>
-            <a:endParaRPr lang="en-US" dirty="0"/>
-          </a:p>
-        </p:txBody>
-      </p:sp>
-      <p:pic>
-        <p:nvPicPr>
-          <p:cNvPr id="2050" name="Picture 2" descr="Validate me Constructive criticism permitted – @gallusrostromegalus on  Tumblr">
-            <a:extLst>
-              <a:ext uri="{FF2B5EF4-FFF2-40B4-BE49-F238E27FC236}">
-                <a16:creationId xmlns:a16="http://schemas.microsoft.com/office/drawing/2014/main" id="{A9C68C0F-3A42-8D60-0B8A-979695E4072E}"/>
-              </a:ext>
-            </a:extLst>
-          </p:cNvPr>
-          <p:cNvPicPr>
-            <a:picLocks noChangeAspect="1" noChangeArrowheads="1"/>
-          </p:cNvPicPr>
-          <p:nvPr/>
-        </p:nvPicPr>
-        <p:blipFill>
-          <a:blip r:embed="rId2">
-            <a:extLst>
-              <a:ext uri="{28A0092B-C50C-407E-A947-70E740481C1C}">
-                <a14:useLocalDpi xmlns:a14="http://schemas.microsoft.com/office/drawing/2010/main" val="0"/>
-              </a:ext>
-            </a:extLst>
-          </a:blip>
-          <a:srcRect/>
-          <a:stretch>
-            <a:fillRect/>
-          </a:stretch>
-        </p:blipFill>
-        <p:spPr bwMode="auto">
-          <a:xfrm>
-            <a:off x="130630" y="1556497"/>
-            <a:ext cx="5635002" cy="5167312"/>
-          </a:xfrm>
-          <a:prstGeom prst="rect">
-            <a:avLst/>
-          </a:prstGeom>
-          <a:noFill/>
-          <a:extLst>
-            <a:ext uri="{909E8E84-426E-40DD-AFC4-6F175D3DCCD1}">
-              <a14:hiddenFill xmlns:a14="http://schemas.microsoft.com/office/drawing/2010/main">
-                <a:solidFill>
-                  <a:srgbClr val="FFFFFF"/>
-                </a:solidFill>
-              </a14:hiddenFill>
-            </a:ext>
-          </a:extLst>
-        </p:spPr>
-      </p:pic>
-      <p:sp>
-        <p:nvSpPr>
-          <p:cNvPr id="3" name="Retângulo 2"/>
-          <p:cNvSpPr/>
-          <p:nvPr/>
-        </p:nvSpPr>
-        <p:spPr>
-          <a:xfrm>
-            <a:off x="5998028" y="2708302"/>
-            <a:ext cx="5965370" cy="2677656"/>
-          </a:xfrm>
-          <a:prstGeom prst="rect">
-            <a:avLst/>
-          </a:prstGeom>
-        </p:spPr>
-        <p:txBody>
-          <a:bodyPr wrap="square">
-            <a:spAutoFit/>
-          </a:bodyPr>
-          <a:lstStyle/>
-          <a:p>
-            <a:pPr marL="457200" indent="-457200">
-              <a:buFont typeface="Arial" panose="020B0604020202020204" pitchFamily="34" charset="0"/>
-              <a:buChar char="•"/>
-            </a:pPr>
-            <a:r>
-              <a:rPr lang="pt-BR" sz="2800" dirty="0"/>
-              <a:t>Como o próprio nome diz, a </a:t>
-            </a:r>
-            <a:r>
-              <a:rPr lang="pt-BR" sz="2800" b="1" dirty="0"/>
-              <a:t>matriz de confusão </a:t>
-            </a:r>
-            <a:r>
-              <a:rPr lang="pt-BR" sz="2800" dirty="0"/>
-              <a:t>mostra o </a:t>
-            </a:r>
-            <a:r>
-              <a:rPr lang="pt-BR" sz="2800" b="1" dirty="0">
-                <a:solidFill>
-                  <a:schemeClr val="accent2"/>
-                </a:solidFill>
-              </a:rPr>
-              <a:t>quanto</a:t>
-            </a:r>
-            <a:r>
-              <a:rPr lang="pt-BR" sz="2800" dirty="0"/>
-              <a:t> um classificador está se </a:t>
-            </a:r>
-            <a:r>
-              <a:rPr lang="pt-BR" sz="2800" b="1" dirty="0"/>
-              <a:t>confundindo</a:t>
-            </a:r>
-            <a:r>
-              <a:rPr lang="pt-BR" sz="2800" dirty="0"/>
-              <a:t>.</a:t>
-            </a:r>
-          </a:p>
-          <a:p>
-            <a:pPr marL="457200" indent="-457200">
-              <a:buFont typeface="Arial" panose="020B0604020202020204" pitchFamily="34" charset="0"/>
-              <a:buChar char="•"/>
-            </a:pPr>
-            <a:r>
-              <a:rPr lang="pt-BR" sz="2800" dirty="0"/>
-              <a:t>A matriz permite verificar quais classes o </a:t>
-            </a:r>
-            <a:r>
-              <a:rPr lang="pt-BR" sz="2800" b="1" dirty="0"/>
-              <a:t>classificador</a:t>
-            </a:r>
-            <a:r>
-              <a:rPr lang="pt-BR" sz="2800" dirty="0"/>
-              <a:t> tem </a:t>
-            </a:r>
-            <a:r>
-              <a:rPr lang="pt-BR" sz="2800" b="1" dirty="0">
-                <a:solidFill>
-                  <a:srgbClr val="00B050"/>
-                </a:solidFill>
-              </a:rPr>
-              <a:t>maior dificuldade em classificar</a:t>
-            </a:r>
-            <a:r>
-              <a:rPr lang="pt-BR" sz="2800" dirty="0"/>
-              <a:t>.</a:t>
-            </a:r>
-          </a:p>
-        </p:txBody>
-      </p:sp>
-    </p:spTree>
-    <p:extLst>
-      <p:ext uri="{BB962C8B-B14F-4D97-AF65-F5344CB8AC3E}">
-        <p14:creationId xmlns:p14="http://schemas.microsoft.com/office/powerpoint/2010/main" val="2135253180"/>
-      </p:ext>
-    </p:extLst>
-  </p:cSld>
-  <p:clrMapOvr>
-    <a:masterClrMapping/>
-  </p:clrMapOvr>
-</p:sld>
-</file>
-
-<file path=ppt/slides/slide30.xml><?xml version="1.0" encoding="utf-8"?>
+<file path=ppt/slides/slide31.xml><?xml version="1.0" encoding="utf-8"?>
 <p:sld xmlns:a="http://schemas.openxmlformats.org/drawingml/2006/main" xmlns:r="http://schemas.openxmlformats.org/officeDocument/2006/relationships" xmlns:p="http://schemas.openxmlformats.org/presentationml/2006/main">
   <p:cSld>
     <p:spTree>
@@ -31765,7 +31905,7 @@
 </p:sld>
 </file>
 
-<file path=ppt/slides/slide31.xml><?xml version="1.0" encoding="utf-8"?>
+<file path=ppt/slides/slide32.xml><?xml version="1.0" encoding="utf-8"?>
 <p:sld xmlns:a="http://schemas.openxmlformats.org/drawingml/2006/main" xmlns:r="http://schemas.openxmlformats.org/officeDocument/2006/relationships" xmlns:p="http://schemas.openxmlformats.org/presentationml/2006/main">
   <p:cSld>
     <p:spTree>
@@ -31851,7 +31991,7 @@
 </p:sld>
 </file>
 
-<file path=ppt/slides/slide32.xml><?xml version="1.0" encoding="utf-8"?>
+<file path=ppt/slides/slide33.xml><?xml version="1.0" encoding="utf-8"?>
 <p:sld xmlns:a="http://schemas.openxmlformats.org/drawingml/2006/main" xmlns:r="http://schemas.openxmlformats.org/officeDocument/2006/relationships" xmlns:p="http://schemas.openxmlformats.org/presentationml/2006/main">
   <p:cSld>
     <p:spTree>
@@ -34655,8 +34795,8 @@
           </a:p>
         </p:txBody>
       </p:sp>
-      <mc:AlternateContent xmlns:mc="http://schemas.openxmlformats.org/markup-compatibility/2006">
-        <mc:Choice xmlns:a14="http://schemas.microsoft.com/office/drawing/2010/main" Requires="a14">
+      <mc:AlternateContent xmlns:mc="http://schemas.openxmlformats.org/markup-compatibility/2006" xmlns:a14="http://schemas.microsoft.com/office/drawing/2010/main">
+        <mc:Choice Requires="a14">
           <p:sp>
             <p:nvSpPr>
               <p:cNvPr id="5" name="CaixaDeTexto 4">
@@ -35179,7 +35319,7 @@
             </p:txBody>
           </p:sp>
         </mc:Choice>
-        <mc:Fallback>
+        <mc:Fallback xmlns="">
           <p:sp>
             <p:nvSpPr>
               <p:cNvPr id="5" name="CaixaDeTexto 4">
@@ -35574,8 +35714,8 @@
           </a:p>
         </p:txBody>
       </p:sp>
-      <mc:AlternateContent xmlns:mc="http://schemas.openxmlformats.org/markup-compatibility/2006">
-        <mc:Choice xmlns:a14="http://schemas.microsoft.com/office/drawing/2010/main" Requires="a14">
+      <mc:AlternateContent xmlns:mc="http://schemas.openxmlformats.org/markup-compatibility/2006" xmlns:a14="http://schemas.microsoft.com/office/drawing/2010/main">
+        <mc:Choice Requires="a14">
           <p:sp>
             <p:nvSpPr>
               <p:cNvPr id="12" name="Rectangle 9">
@@ -35703,7 +35843,7 @@
             </p:txBody>
           </p:sp>
         </mc:Choice>
-        <mc:Fallback>
+        <mc:Fallback xmlns="">
           <p:sp>
             <p:nvSpPr>
               <p:cNvPr id="12" name="Rectangle 9">
@@ -35869,8 +36009,8 @@
           </p:sp>
         </mc:Fallback>
       </mc:AlternateContent>
-      <mc:AlternateContent xmlns:mc="http://schemas.openxmlformats.org/markup-compatibility/2006">
-        <mc:Choice xmlns:a14="http://schemas.microsoft.com/office/drawing/2010/main" Requires="a14">
+      <mc:AlternateContent xmlns:mc="http://schemas.openxmlformats.org/markup-compatibility/2006" xmlns:a14="http://schemas.microsoft.com/office/drawing/2010/main">
+        <mc:Choice Requires="a14">
           <p:sp>
             <p:nvSpPr>
               <p:cNvPr id="3" name="Espaço Reservado para Conteúdo 2">
@@ -36042,7 +36182,7 @@
             </p:txBody>
           </p:sp>
         </mc:Choice>
-        <mc:Fallback>
+        <mc:Fallback xmlns="">
           <p:sp>
             <p:nvSpPr>
               <p:cNvPr id="3" name="Espaço Reservado para Conteúdo 2">

--- a/slides/C24_Métricas_de_Classificação.pptx
+++ b/slides/C24_Métricas_de_Classificação.pptx
@@ -2451,7 +2451,7 @@
           <p:cNvPr id="2" name="Título 1">
             <a:extLst>
               <a:ext uri="{FF2B5EF4-FFF2-40B4-BE49-F238E27FC236}">
-                <a16:creationId xmlns:a16="http://schemas.microsoft.com/office/drawing/2014/main" id="{1DB9B4FF-B06E-403C-A326-BDC64D8FF94E}"/>
+                <a16:creationId xmlns:a16="http://schemas.microsoft.com/office/drawing/2014/main" xmlns="" id="{1DB9B4FF-B06E-403C-A326-BDC64D8FF94E}"/>
               </a:ext>
             </a:extLst>
           </p:cNvPr>
@@ -2488,7 +2488,7 @@
           <p:cNvPr id="3" name="Subtítulo 2">
             <a:extLst>
               <a:ext uri="{FF2B5EF4-FFF2-40B4-BE49-F238E27FC236}">
-                <a16:creationId xmlns:a16="http://schemas.microsoft.com/office/drawing/2014/main" id="{247BDFCE-746E-45BF-A319-4733D58D1632}"/>
+                <a16:creationId xmlns:a16="http://schemas.microsoft.com/office/drawing/2014/main" xmlns="" id="{247BDFCE-746E-45BF-A319-4733D58D1632}"/>
               </a:ext>
             </a:extLst>
           </p:cNvPr>
@@ -2558,7 +2558,7 @@
           <p:cNvPr id="4" name="Espaço Reservado para Data 3">
             <a:extLst>
               <a:ext uri="{FF2B5EF4-FFF2-40B4-BE49-F238E27FC236}">
-                <a16:creationId xmlns:a16="http://schemas.microsoft.com/office/drawing/2014/main" id="{9EDE2778-5372-4104-B96D-968184DA8288}"/>
+                <a16:creationId xmlns:a16="http://schemas.microsoft.com/office/drawing/2014/main" xmlns="" id="{9EDE2778-5372-4104-B96D-968184DA8288}"/>
               </a:ext>
             </a:extLst>
           </p:cNvPr>
@@ -2587,7 +2587,7 @@
           <p:cNvPr id="5" name="Espaço Reservado para Rodapé 4">
             <a:extLst>
               <a:ext uri="{FF2B5EF4-FFF2-40B4-BE49-F238E27FC236}">
-                <a16:creationId xmlns:a16="http://schemas.microsoft.com/office/drawing/2014/main" id="{C1DD0F41-C861-4051-988D-3024A37A4B93}"/>
+                <a16:creationId xmlns:a16="http://schemas.microsoft.com/office/drawing/2014/main" xmlns="" id="{C1DD0F41-C861-4051-988D-3024A37A4B93}"/>
               </a:ext>
             </a:extLst>
           </p:cNvPr>
@@ -2612,7 +2612,7 @@
           <p:cNvPr id="6" name="Espaço Reservado para Número de Slide 5">
             <a:extLst>
               <a:ext uri="{FF2B5EF4-FFF2-40B4-BE49-F238E27FC236}">
-                <a16:creationId xmlns:a16="http://schemas.microsoft.com/office/drawing/2014/main" id="{07E5967E-D980-431A-A5DB-3F0C5030A81E}"/>
+                <a16:creationId xmlns:a16="http://schemas.microsoft.com/office/drawing/2014/main" xmlns="" id="{07E5967E-D980-431A-A5DB-3F0C5030A81E}"/>
               </a:ext>
             </a:extLst>
           </p:cNvPr>
@@ -2671,7 +2671,7 @@
           <p:cNvPr id="2" name="Título 1">
             <a:extLst>
               <a:ext uri="{FF2B5EF4-FFF2-40B4-BE49-F238E27FC236}">
-                <a16:creationId xmlns:a16="http://schemas.microsoft.com/office/drawing/2014/main" id="{9036C49F-3E68-4175-81BA-3C3FEE44308A}"/>
+                <a16:creationId xmlns:a16="http://schemas.microsoft.com/office/drawing/2014/main" xmlns="" id="{9036C49F-3E68-4175-81BA-3C3FEE44308A}"/>
               </a:ext>
             </a:extLst>
           </p:cNvPr>
@@ -2699,7 +2699,7 @@
           <p:cNvPr id="3" name="Espaço Reservado para Texto Vertical 2">
             <a:extLst>
               <a:ext uri="{FF2B5EF4-FFF2-40B4-BE49-F238E27FC236}">
-                <a16:creationId xmlns:a16="http://schemas.microsoft.com/office/drawing/2014/main" id="{426FA736-3DD3-4D4E-B57B-BBE1D8F7D424}"/>
+                <a16:creationId xmlns:a16="http://schemas.microsoft.com/office/drawing/2014/main" xmlns="" id="{426FA736-3DD3-4D4E-B57B-BBE1D8F7D424}"/>
               </a:ext>
             </a:extLst>
           </p:cNvPr>
@@ -2756,7 +2756,7 @@
           <p:cNvPr id="4" name="Espaço Reservado para Data 3">
             <a:extLst>
               <a:ext uri="{FF2B5EF4-FFF2-40B4-BE49-F238E27FC236}">
-                <a16:creationId xmlns:a16="http://schemas.microsoft.com/office/drawing/2014/main" id="{99E8855C-D8FD-48F6-B14E-861E0DE4D915}"/>
+                <a16:creationId xmlns:a16="http://schemas.microsoft.com/office/drawing/2014/main" xmlns="" id="{99E8855C-D8FD-48F6-B14E-861E0DE4D915}"/>
               </a:ext>
             </a:extLst>
           </p:cNvPr>
@@ -2785,7 +2785,7 @@
           <p:cNvPr id="5" name="Espaço Reservado para Rodapé 4">
             <a:extLst>
               <a:ext uri="{FF2B5EF4-FFF2-40B4-BE49-F238E27FC236}">
-                <a16:creationId xmlns:a16="http://schemas.microsoft.com/office/drawing/2014/main" id="{97C0BB88-2F21-42A5-ACFF-83DA47F2D340}"/>
+                <a16:creationId xmlns:a16="http://schemas.microsoft.com/office/drawing/2014/main" xmlns="" id="{97C0BB88-2F21-42A5-ACFF-83DA47F2D340}"/>
               </a:ext>
             </a:extLst>
           </p:cNvPr>
@@ -2810,7 +2810,7 @@
           <p:cNvPr id="6" name="Espaço Reservado para Número de Slide 5">
             <a:extLst>
               <a:ext uri="{FF2B5EF4-FFF2-40B4-BE49-F238E27FC236}">
-                <a16:creationId xmlns:a16="http://schemas.microsoft.com/office/drawing/2014/main" id="{6CB462B3-1F22-4C05-B4B8-7A279FB7D5E9}"/>
+                <a16:creationId xmlns:a16="http://schemas.microsoft.com/office/drawing/2014/main" xmlns="" id="{6CB462B3-1F22-4C05-B4B8-7A279FB7D5E9}"/>
               </a:ext>
             </a:extLst>
           </p:cNvPr>
@@ -2869,7 +2869,7 @@
           <p:cNvPr id="2" name="Título Vertical 1">
             <a:extLst>
               <a:ext uri="{FF2B5EF4-FFF2-40B4-BE49-F238E27FC236}">
-                <a16:creationId xmlns:a16="http://schemas.microsoft.com/office/drawing/2014/main" id="{EAEAB728-701C-4207-A9D5-23FF45C60502}"/>
+                <a16:creationId xmlns:a16="http://schemas.microsoft.com/office/drawing/2014/main" xmlns="" id="{EAEAB728-701C-4207-A9D5-23FF45C60502}"/>
               </a:ext>
             </a:extLst>
           </p:cNvPr>
@@ -2902,7 +2902,7 @@
           <p:cNvPr id="3" name="Espaço Reservado para Texto Vertical 2">
             <a:extLst>
               <a:ext uri="{FF2B5EF4-FFF2-40B4-BE49-F238E27FC236}">
-                <a16:creationId xmlns:a16="http://schemas.microsoft.com/office/drawing/2014/main" id="{BA8C8CCF-7823-480A-9A19-0F664DD17E3B}"/>
+                <a16:creationId xmlns:a16="http://schemas.microsoft.com/office/drawing/2014/main" xmlns="" id="{BA8C8CCF-7823-480A-9A19-0F664DD17E3B}"/>
               </a:ext>
             </a:extLst>
           </p:cNvPr>
@@ -2964,7 +2964,7 @@
           <p:cNvPr id="4" name="Espaço Reservado para Data 3">
             <a:extLst>
               <a:ext uri="{FF2B5EF4-FFF2-40B4-BE49-F238E27FC236}">
-                <a16:creationId xmlns:a16="http://schemas.microsoft.com/office/drawing/2014/main" id="{721D5734-7B1F-425D-942F-6EB73344027C}"/>
+                <a16:creationId xmlns:a16="http://schemas.microsoft.com/office/drawing/2014/main" xmlns="" id="{721D5734-7B1F-425D-942F-6EB73344027C}"/>
               </a:ext>
             </a:extLst>
           </p:cNvPr>
@@ -2993,7 +2993,7 @@
           <p:cNvPr id="5" name="Espaço Reservado para Rodapé 4">
             <a:extLst>
               <a:ext uri="{FF2B5EF4-FFF2-40B4-BE49-F238E27FC236}">
-                <a16:creationId xmlns:a16="http://schemas.microsoft.com/office/drawing/2014/main" id="{1E1AAEAC-F08D-45FE-89EC-B1B349A868C9}"/>
+                <a16:creationId xmlns:a16="http://schemas.microsoft.com/office/drawing/2014/main" xmlns="" id="{1E1AAEAC-F08D-45FE-89EC-B1B349A868C9}"/>
               </a:ext>
             </a:extLst>
           </p:cNvPr>
@@ -3018,7 +3018,7 @@
           <p:cNvPr id="6" name="Espaço Reservado para Número de Slide 5">
             <a:extLst>
               <a:ext uri="{FF2B5EF4-FFF2-40B4-BE49-F238E27FC236}">
-                <a16:creationId xmlns:a16="http://schemas.microsoft.com/office/drawing/2014/main" id="{BAA44493-9911-47B2-87A6-C2141A972BC8}"/>
+                <a16:creationId xmlns:a16="http://schemas.microsoft.com/office/drawing/2014/main" xmlns="" id="{BAA44493-9911-47B2-87A6-C2141A972BC8}"/>
               </a:ext>
             </a:extLst>
           </p:cNvPr>
@@ -3077,7 +3077,7 @@
           <p:cNvPr id="2" name="Título 1">
             <a:extLst>
               <a:ext uri="{FF2B5EF4-FFF2-40B4-BE49-F238E27FC236}">
-                <a16:creationId xmlns:a16="http://schemas.microsoft.com/office/drawing/2014/main" id="{71BD44A5-8F21-4626-A01D-48A1C874B1D5}"/>
+                <a16:creationId xmlns:a16="http://schemas.microsoft.com/office/drawing/2014/main" xmlns="" id="{71BD44A5-8F21-4626-A01D-48A1C874B1D5}"/>
               </a:ext>
             </a:extLst>
           </p:cNvPr>
@@ -3105,7 +3105,7 @@
           <p:cNvPr id="3" name="Espaço Reservado para Conteúdo 2">
             <a:extLst>
               <a:ext uri="{FF2B5EF4-FFF2-40B4-BE49-F238E27FC236}">
-                <a16:creationId xmlns:a16="http://schemas.microsoft.com/office/drawing/2014/main" id="{B79E8085-65A9-48AA-951D-71D978BFF4ED}"/>
+                <a16:creationId xmlns:a16="http://schemas.microsoft.com/office/drawing/2014/main" xmlns="" id="{B79E8085-65A9-48AA-951D-71D978BFF4ED}"/>
               </a:ext>
             </a:extLst>
           </p:cNvPr>
@@ -3162,7 +3162,7 @@
           <p:cNvPr id="4" name="Espaço Reservado para Data 3">
             <a:extLst>
               <a:ext uri="{FF2B5EF4-FFF2-40B4-BE49-F238E27FC236}">
-                <a16:creationId xmlns:a16="http://schemas.microsoft.com/office/drawing/2014/main" id="{F05BE1AF-51EA-425D-B188-DE7BD675009F}"/>
+                <a16:creationId xmlns:a16="http://schemas.microsoft.com/office/drawing/2014/main" xmlns="" id="{F05BE1AF-51EA-425D-B188-DE7BD675009F}"/>
               </a:ext>
             </a:extLst>
           </p:cNvPr>
@@ -3191,7 +3191,7 @@
           <p:cNvPr id="5" name="Espaço Reservado para Rodapé 4">
             <a:extLst>
               <a:ext uri="{FF2B5EF4-FFF2-40B4-BE49-F238E27FC236}">
-                <a16:creationId xmlns:a16="http://schemas.microsoft.com/office/drawing/2014/main" id="{121BE632-29CF-4CB9-B365-C9EF38F89BE6}"/>
+                <a16:creationId xmlns:a16="http://schemas.microsoft.com/office/drawing/2014/main" xmlns="" id="{121BE632-29CF-4CB9-B365-C9EF38F89BE6}"/>
               </a:ext>
             </a:extLst>
           </p:cNvPr>
@@ -3216,7 +3216,7 @@
           <p:cNvPr id="6" name="Espaço Reservado para Número de Slide 5">
             <a:extLst>
               <a:ext uri="{FF2B5EF4-FFF2-40B4-BE49-F238E27FC236}">
-                <a16:creationId xmlns:a16="http://schemas.microsoft.com/office/drawing/2014/main" id="{60CF3DD1-9AEC-4A57-B461-4E4DD86FAC18}"/>
+                <a16:creationId xmlns:a16="http://schemas.microsoft.com/office/drawing/2014/main" xmlns="" id="{60CF3DD1-9AEC-4A57-B461-4E4DD86FAC18}"/>
               </a:ext>
             </a:extLst>
           </p:cNvPr>
@@ -3275,7 +3275,7 @@
           <p:cNvPr id="2" name="Título 1">
             <a:extLst>
               <a:ext uri="{FF2B5EF4-FFF2-40B4-BE49-F238E27FC236}">
-                <a16:creationId xmlns:a16="http://schemas.microsoft.com/office/drawing/2014/main" id="{34AB2FF0-A4D7-4E28-991D-FF26140D5988}"/>
+                <a16:creationId xmlns:a16="http://schemas.microsoft.com/office/drawing/2014/main" xmlns="" id="{34AB2FF0-A4D7-4E28-991D-FF26140D5988}"/>
               </a:ext>
             </a:extLst>
           </p:cNvPr>
@@ -3312,7 +3312,7 @@
           <p:cNvPr id="3" name="Espaço Reservado para Texto 2">
             <a:extLst>
               <a:ext uri="{FF2B5EF4-FFF2-40B4-BE49-F238E27FC236}">
-                <a16:creationId xmlns:a16="http://schemas.microsoft.com/office/drawing/2014/main" id="{E2AC45B0-4145-40DB-8E61-105461170604}"/>
+                <a16:creationId xmlns:a16="http://schemas.microsoft.com/office/drawing/2014/main" xmlns="" id="{E2AC45B0-4145-40DB-8E61-105461170604}"/>
               </a:ext>
             </a:extLst>
           </p:cNvPr>
@@ -3437,7 +3437,7 @@
           <p:cNvPr id="4" name="Espaço Reservado para Data 3">
             <a:extLst>
               <a:ext uri="{FF2B5EF4-FFF2-40B4-BE49-F238E27FC236}">
-                <a16:creationId xmlns:a16="http://schemas.microsoft.com/office/drawing/2014/main" id="{50F1D3FB-740A-4EBA-A309-2CE71D12ECFB}"/>
+                <a16:creationId xmlns:a16="http://schemas.microsoft.com/office/drawing/2014/main" xmlns="" id="{50F1D3FB-740A-4EBA-A309-2CE71D12ECFB}"/>
               </a:ext>
             </a:extLst>
           </p:cNvPr>
@@ -3466,7 +3466,7 @@
           <p:cNvPr id="5" name="Espaço Reservado para Rodapé 4">
             <a:extLst>
               <a:ext uri="{FF2B5EF4-FFF2-40B4-BE49-F238E27FC236}">
-                <a16:creationId xmlns:a16="http://schemas.microsoft.com/office/drawing/2014/main" id="{BDCAB18F-8715-4465-A940-F9C193A2ACE9}"/>
+                <a16:creationId xmlns:a16="http://schemas.microsoft.com/office/drawing/2014/main" xmlns="" id="{BDCAB18F-8715-4465-A940-F9C193A2ACE9}"/>
               </a:ext>
             </a:extLst>
           </p:cNvPr>
@@ -3491,7 +3491,7 @@
           <p:cNvPr id="6" name="Espaço Reservado para Número de Slide 5">
             <a:extLst>
               <a:ext uri="{FF2B5EF4-FFF2-40B4-BE49-F238E27FC236}">
-                <a16:creationId xmlns:a16="http://schemas.microsoft.com/office/drawing/2014/main" id="{353466C6-8248-429F-8056-FF040BF509EB}"/>
+                <a16:creationId xmlns:a16="http://schemas.microsoft.com/office/drawing/2014/main" xmlns="" id="{353466C6-8248-429F-8056-FF040BF509EB}"/>
               </a:ext>
             </a:extLst>
           </p:cNvPr>
@@ -3550,7 +3550,7 @@
           <p:cNvPr id="2" name="Título 1">
             <a:extLst>
               <a:ext uri="{FF2B5EF4-FFF2-40B4-BE49-F238E27FC236}">
-                <a16:creationId xmlns:a16="http://schemas.microsoft.com/office/drawing/2014/main" id="{BC7BB9F0-F14B-4A91-B2B7-35BC47FE4DE7}"/>
+                <a16:creationId xmlns:a16="http://schemas.microsoft.com/office/drawing/2014/main" xmlns="" id="{BC7BB9F0-F14B-4A91-B2B7-35BC47FE4DE7}"/>
               </a:ext>
             </a:extLst>
           </p:cNvPr>
@@ -3578,7 +3578,7 @@
           <p:cNvPr id="3" name="Espaço Reservado para Conteúdo 2">
             <a:extLst>
               <a:ext uri="{FF2B5EF4-FFF2-40B4-BE49-F238E27FC236}">
-                <a16:creationId xmlns:a16="http://schemas.microsoft.com/office/drawing/2014/main" id="{EC1FC1C4-73DA-47A6-8496-B0B457F7D39A}"/>
+                <a16:creationId xmlns:a16="http://schemas.microsoft.com/office/drawing/2014/main" xmlns="" id="{EC1FC1C4-73DA-47A6-8496-B0B457F7D39A}"/>
               </a:ext>
             </a:extLst>
           </p:cNvPr>
@@ -3640,7 +3640,7 @@
           <p:cNvPr id="4" name="Espaço Reservado para Conteúdo 3">
             <a:extLst>
               <a:ext uri="{FF2B5EF4-FFF2-40B4-BE49-F238E27FC236}">
-                <a16:creationId xmlns:a16="http://schemas.microsoft.com/office/drawing/2014/main" id="{E92F06A8-A449-4D92-9912-76873E529B38}"/>
+                <a16:creationId xmlns:a16="http://schemas.microsoft.com/office/drawing/2014/main" xmlns="" id="{E92F06A8-A449-4D92-9912-76873E529B38}"/>
               </a:ext>
             </a:extLst>
           </p:cNvPr>
@@ -3702,7 +3702,7 @@
           <p:cNvPr id="5" name="Espaço Reservado para Data 4">
             <a:extLst>
               <a:ext uri="{FF2B5EF4-FFF2-40B4-BE49-F238E27FC236}">
-                <a16:creationId xmlns:a16="http://schemas.microsoft.com/office/drawing/2014/main" id="{938070A4-BC2F-4D55-BD8D-DEAF11BB9EE9}"/>
+                <a16:creationId xmlns:a16="http://schemas.microsoft.com/office/drawing/2014/main" xmlns="" id="{938070A4-BC2F-4D55-BD8D-DEAF11BB9EE9}"/>
               </a:ext>
             </a:extLst>
           </p:cNvPr>
@@ -3731,7 +3731,7 @@
           <p:cNvPr id="6" name="Espaço Reservado para Rodapé 5">
             <a:extLst>
               <a:ext uri="{FF2B5EF4-FFF2-40B4-BE49-F238E27FC236}">
-                <a16:creationId xmlns:a16="http://schemas.microsoft.com/office/drawing/2014/main" id="{45CC2DB8-844A-465F-BA9A-7734C80C7F43}"/>
+                <a16:creationId xmlns:a16="http://schemas.microsoft.com/office/drawing/2014/main" xmlns="" id="{45CC2DB8-844A-465F-BA9A-7734C80C7F43}"/>
               </a:ext>
             </a:extLst>
           </p:cNvPr>
@@ -3756,7 +3756,7 @@
           <p:cNvPr id="7" name="Espaço Reservado para Número de Slide 6">
             <a:extLst>
               <a:ext uri="{FF2B5EF4-FFF2-40B4-BE49-F238E27FC236}">
-                <a16:creationId xmlns:a16="http://schemas.microsoft.com/office/drawing/2014/main" id="{4CC606A8-097B-4040-94E0-CD8C88280D8F}"/>
+                <a16:creationId xmlns:a16="http://schemas.microsoft.com/office/drawing/2014/main" xmlns="" id="{4CC606A8-097B-4040-94E0-CD8C88280D8F}"/>
               </a:ext>
             </a:extLst>
           </p:cNvPr>
@@ -3815,7 +3815,7 @@
           <p:cNvPr id="2" name="Título 1">
             <a:extLst>
               <a:ext uri="{FF2B5EF4-FFF2-40B4-BE49-F238E27FC236}">
-                <a16:creationId xmlns:a16="http://schemas.microsoft.com/office/drawing/2014/main" id="{76D66686-0143-4CB6-8C09-BA326F1E7ACA}"/>
+                <a16:creationId xmlns:a16="http://schemas.microsoft.com/office/drawing/2014/main" xmlns="" id="{76D66686-0143-4CB6-8C09-BA326F1E7ACA}"/>
               </a:ext>
             </a:extLst>
           </p:cNvPr>
@@ -3848,7 +3848,7 @@
           <p:cNvPr id="3" name="Espaço Reservado para Texto 2">
             <a:extLst>
               <a:ext uri="{FF2B5EF4-FFF2-40B4-BE49-F238E27FC236}">
-                <a16:creationId xmlns:a16="http://schemas.microsoft.com/office/drawing/2014/main" id="{0227AB85-F59E-4BCE-B846-4FA0992C2F23}"/>
+                <a16:creationId xmlns:a16="http://schemas.microsoft.com/office/drawing/2014/main" xmlns="" id="{0227AB85-F59E-4BCE-B846-4FA0992C2F23}"/>
               </a:ext>
             </a:extLst>
           </p:cNvPr>
@@ -3919,7 +3919,7 @@
           <p:cNvPr id="4" name="Espaço Reservado para Conteúdo 3">
             <a:extLst>
               <a:ext uri="{FF2B5EF4-FFF2-40B4-BE49-F238E27FC236}">
-                <a16:creationId xmlns:a16="http://schemas.microsoft.com/office/drawing/2014/main" id="{3373456C-7319-4D0A-827D-D29F6B083F5D}"/>
+                <a16:creationId xmlns:a16="http://schemas.microsoft.com/office/drawing/2014/main" xmlns="" id="{3373456C-7319-4D0A-827D-D29F6B083F5D}"/>
               </a:ext>
             </a:extLst>
           </p:cNvPr>
@@ -3981,7 +3981,7 @@
           <p:cNvPr id="5" name="Espaço Reservado para Texto 4">
             <a:extLst>
               <a:ext uri="{FF2B5EF4-FFF2-40B4-BE49-F238E27FC236}">
-                <a16:creationId xmlns:a16="http://schemas.microsoft.com/office/drawing/2014/main" id="{4CD109D0-2E83-4262-8029-A871CEC47406}"/>
+                <a16:creationId xmlns:a16="http://schemas.microsoft.com/office/drawing/2014/main" xmlns="" id="{4CD109D0-2E83-4262-8029-A871CEC47406}"/>
               </a:ext>
             </a:extLst>
           </p:cNvPr>
@@ -4052,7 +4052,7 @@
           <p:cNvPr id="6" name="Espaço Reservado para Conteúdo 5">
             <a:extLst>
               <a:ext uri="{FF2B5EF4-FFF2-40B4-BE49-F238E27FC236}">
-                <a16:creationId xmlns:a16="http://schemas.microsoft.com/office/drawing/2014/main" id="{AD706E3A-CFBB-4A6C-A65F-D0360A9E74FE}"/>
+                <a16:creationId xmlns:a16="http://schemas.microsoft.com/office/drawing/2014/main" xmlns="" id="{AD706E3A-CFBB-4A6C-A65F-D0360A9E74FE}"/>
               </a:ext>
             </a:extLst>
           </p:cNvPr>
@@ -4114,7 +4114,7 @@
           <p:cNvPr id="7" name="Espaço Reservado para Data 6">
             <a:extLst>
               <a:ext uri="{FF2B5EF4-FFF2-40B4-BE49-F238E27FC236}">
-                <a16:creationId xmlns:a16="http://schemas.microsoft.com/office/drawing/2014/main" id="{4172C0E5-5AF0-4805-BB51-443733CD2BD5}"/>
+                <a16:creationId xmlns:a16="http://schemas.microsoft.com/office/drawing/2014/main" xmlns="" id="{4172C0E5-5AF0-4805-BB51-443733CD2BD5}"/>
               </a:ext>
             </a:extLst>
           </p:cNvPr>
@@ -4143,7 +4143,7 @@
           <p:cNvPr id="8" name="Espaço Reservado para Rodapé 7">
             <a:extLst>
               <a:ext uri="{FF2B5EF4-FFF2-40B4-BE49-F238E27FC236}">
-                <a16:creationId xmlns:a16="http://schemas.microsoft.com/office/drawing/2014/main" id="{0E801648-156F-497E-99CF-797DF48051E1}"/>
+                <a16:creationId xmlns:a16="http://schemas.microsoft.com/office/drawing/2014/main" xmlns="" id="{0E801648-156F-497E-99CF-797DF48051E1}"/>
               </a:ext>
             </a:extLst>
           </p:cNvPr>
@@ -4168,7 +4168,7 @@
           <p:cNvPr id="9" name="Espaço Reservado para Número de Slide 8">
             <a:extLst>
               <a:ext uri="{FF2B5EF4-FFF2-40B4-BE49-F238E27FC236}">
-                <a16:creationId xmlns:a16="http://schemas.microsoft.com/office/drawing/2014/main" id="{EEE23D32-80E7-4796-A137-66BF842E4B53}"/>
+                <a16:creationId xmlns:a16="http://schemas.microsoft.com/office/drawing/2014/main" xmlns="" id="{EEE23D32-80E7-4796-A137-66BF842E4B53}"/>
               </a:ext>
             </a:extLst>
           </p:cNvPr>
@@ -4227,7 +4227,7 @@
           <p:cNvPr id="2" name="Título 1">
             <a:extLst>
               <a:ext uri="{FF2B5EF4-FFF2-40B4-BE49-F238E27FC236}">
-                <a16:creationId xmlns:a16="http://schemas.microsoft.com/office/drawing/2014/main" id="{2BCE2379-C78F-47E1-8CFC-B846E7AF148D}"/>
+                <a16:creationId xmlns:a16="http://schemas.microsoft.com/office/drawing/2014/main" xmlns="" id="{2BCE2379-C78F-47E1-8CFC-B846E7AF148D}"/>
               </a:ext>
             </a:extLst>
           </p:cNvPr>
@@ -4255,7 +4255,7 @@
           <p:cNvPr id="3" name="Espaço Reservado para Data 2">
             <a:extLst>
               <a:ext uri="{FF2B5EF4-FFF2-40B4-BE49-F238E27FC236}">
-                <a16:creationId xmlns:a16="http://schemas.microsoft.com/office/drawing/2014/main" id="{342600A9-7F92-4E22-9D94-E4717252A817}"/>
+                <a16:creationId xmlns:a16="http://schemas.microsoft.com/office/drawing/2014/main" xmlns="" id="{342600A9-7F92-4E22-9D94-E4717252A817}"/>
               </a:ext>
             </a:extLst>
           </p:cNvPr>
@@ -4284,7 +4284,7 @@
           <p:cNvPr id="4" name="Espaço Reservado para Rodapé 3">
             <a:extLst>
               <a:ext uri="{FF2B5EF4-FFF2-40B4-BE49-F238E27FC236}">
-                <a16:creationId xmlns:a16="http://schemas.microsoft.com/office/drawing/2014/main" id="{192E6BED-F546-40CC-A2DF-99CBA853654E}"/>
+                <a16:creationId xmlns:a16="http://schemas.microsoft.com/office/drawing/2014/main" xmlns="" id="{192E6BED-F546-40CC-A2DF-99CBA853654E}"/>
               </a:ext>
             </a:extLst>
           </p:cNvPr>
@@ -4309,7 +4309,7 @@
           <p:cNvPr id="5" name="Espaço Reservado para Número de Slide 4">
             <a:extLst>
               <a:ext uri="{FF2B5EF4-FFF2-40B4-BE49-F238E27FC236}">
-                <a16:creationId xmlns:a16="http://schemas.microsoft.com/office/drawing/2014/main" id="{6091CC40-A8C4-4063-80EB-CC5099621678}"/>
+                <a16:creationId xmlns:a16="http://schemas.microsoft.com/office/drawing/2014/main" xmlns="" id="{6091CC40-A8C4-4063-80EB-CC5099621678}"/>
               </a:ext>
             </a:extLst>
           </p:cNvPr>
@@ -4368,7 +4368,7 @@
           <p:cNvPr id="2" name="Espaço Reservado para Data 1">
             <a:extLst>
               <a:ext uri="{FF2B5EF4-FFF2-40B4-BE49-F238E27FC236}">
-                <a16:creationId xmlns:a16="http://schemas.microsoft.com/office/drawing/2014/main" id="{DD19515C-212C-4EAE-84A3-8FF4BC844F1B}"/>
+                <a16:creationId xmlns:a16="http://schemas.microsoft.com/office/drawing/2014/main" xmlns="" id="{DD19515C-212C-4EAE-84A3-8FF4BC844F1B}"/>
               </a:ext>
             </a:extLst>
           </p:cNvPr>
@@ -4397,7 +4397,7 @@
           <p:cNvPr id="3" name="Espaço Reservado para Rodapé 2">
             <a:extLst>
               <a:ext uri="{FF2B5EF4-FFF2-40B4-BE49-F238E27FC236}">
-                <a16:creationId xmlns:a16="http://schemas.microsoft.com/office/drawing/2014/main" id="{94D3D120-B3E8-4C96-861D-7A4F12F49B3A}"/>
+                <a16:creationId xmlns:a16="http://schemas.microsoft.com/office/drawing/2014/main" xmlns="" id="{94D3D120-B3E8-4C96-861D-7A4F12F49B3A}"/>
               </a:ext>
             </a:extLst>
           </p:cNvPr>
@@ -4422,7 +4422,7 @@
           <p:cNvPr id="4" name="Espaço Reservado para Número de Slide 3">
             <a:extLst>
               <a:ext uri="{FF2B5EF4-FFF2-40B4-BE49-F238E27FC236}">
-                <a16:creationId xmlns:a16="http://schemas.microsoft.com/office/drawing/2014/main" id="{42E49B68-FA1B-468B-9F17-D5C09243D454}"/>
+                <a16:creationId xmlns:a16="http://schemas.microsoft.com/office/drawing/2014/main" xmlns="" id="{42E49B68-FA1B-468B-9F17-D5C09243D454}"/>
               </a:ext>
             </a:extLst>
           </p:cNvPr>
@@ -4481,7 +4481,7 @@
           <p:cNvPr id="2" name="Título 1">
             <a:extLst>
               <a:ext uri="{FF2B5EF4-FFF2-40B4-BE49-F238E27FC236}">
-                <a16:creationId xmlns:a16="http://schemas.microsoft.com/office/drawing/2014/main" id="{1C17BCBE-A897-4319-85EC-D87909C24980}"/>
+                <a16:creationId xmlns:a16="http://schemas.microsoft.com/office/drawing/2014/main" xmlns="" id="{1C17BCBE-A897-4319-85EC-D87909C24980}"/>
               </a:ext>
             </a:extLst>
           </p:cNvPr>
@@ -4518,7 +4518,7 @@
           <p:cNvPr id="3" name="Espaço Reservado para Conteúdo 2">
             <a:extLst>
               <a:ext uri="{FF2B5EF4-FFF2-40B4-BE49-F238E27FC236}">
-                <a16:creationId xmlns:a16="http://schemas.microsoft.com/office/drawing/2014/main" id="{4226F885-0204-4913-868B-4B8B82576F17}"/>
+                <a16:creationId xmlns:a16="http://schemas.microsoft.com/office/drawing/2014/main" xmlns="" id="{4226F885-0204-4913-868B-4B8B82576F17}"/>
               </a:ext>
             </a:extLst>
           </p:cNvPr>
@@ -4608,7 +4608,7 @@
           <p:cNvPr id="4" name="Espaço Reservado para Texto 3">
             <a:extLst>
               <a:ext uri="{FF2B5EF4-FFF2-40B4-BE49-F238E27FC236}">
-                <a16:creationId xmlns:a16="http://schemas.microsoft.com/office/drawing/2014/main" id="{00F9F784-A858-441B-8AB5-697098141751}"/>
+                <a16:creationId xmlns:a16="http://schemas.microsoft.com/office/drawing/2014/main" xmlns="" id="{00F9F784-A858-441B-8AB5-697098141751}"/>
               </a:ext>
             </a:extLst>
           </p:cNvPr>
@@ -4679,7 +4679,7 @@
           <p:cNvPr id="5" name="Espaço Reservado para Data 4">
             <a:extLst>
               <a:ext uri="{FF2B5EF4-FFF2-40B4-BE49-F238E27FC236}">
-                <a16:creationId xmlns:a16="http://schemas.microsoft.com/office/drawing/2014/main" id="{A4DC363A-5000-472E-8B17-02E7DCB8840A}"/>
+                <a16:creationId xmlns:a16="http://schemas.microsoft.com/office/drawing/2014/main" xmlns="" id="{A4DC363A-5000-472E-8B17-02E7DCB8840A}"/>
               </a:ext>
             </a:extLst>
           </p:cNvPr>
@@ -4708,7 +4708,7 @@
           <p:cNvPr id="6" name="Espaço Reservado para Rodapé 5">
             <a:extLst>
               <a:ext uri="{FF2B5EF4-FFF2-40B4-BE49-F238E27FC236}">
-                <a16:creationId xmlns:a16="http://schemas.microsoft.com/office/drawing/2014/main" id="{5548425D-2C21-4C56-BAD4-662978775C28}"/>
+                <a16:creationId xmlns:a16="http://schemas.microsoft.com/office/drawing/2014/main" xmlns="" id="{5548425D-2C21-4C56-BAD4-662978775C28}"/>
               </a:ext>
             </a:extLst>
           </p:cNvPr>
@@ -4733,7 +4733,7 @@
           <p:cNvPr id="7" name="Espaço Reservado para Número de Slide 6">
             <a:extLst>
               <a:ext uri="{FF2B5EF4-FFF2-40B4-BE49-F238E27FC236}">
-                <a16:creationId xmlns:a16="http://schemas.microsoft.com/office/drawing/2014/main" id="{C63E9726-E64C-42B2-AE8A-8C235A956B48}"/>
+                <a16:creationId xmlns:a16="http://schemas.microsoft.com/office/drawing/2014/main" xmlns="" id="{C63E9726-E64C-42B2-AE8A-8C235A956B48}"/>
               </a:ext>
             </a:extLst>
           </p:cNvPr>
@@ -4792,7 +4792,7 @@
           <p:cNvPr id="2" name="Título 1">
             <a:extLst>
               <a:ext uri="{FF2B5EF4-FFF2-40B4-BE49-F238E27FC236}">
-                <a16:creationId xmlns:a16="http://schemas.microsoft.com/office/drawing/2014/main" id="{11086A78-3E74-450C-96A6-CA8AC37AF772}"/>
+                <a16:creationId xmlns:a16="http://schemas.microsoft.com/office/drawing/2014/main" xmlns="" id="{11086A78-3E74-450C-96A6-CA8AC37AF772}"/>
               </a:ext>
             </a:extLst>
           </p:cNvPr>
@@ -4829,7 +4829,7 @@
           <p:cNvPr id="3" name="Espaço Reservado para Imagem 2">
             <a:extLst>
               <a:ext uri="{FF2B5EF4-FFF2-40B4-BE49-F238E27FC236}">
-                <a16:creationId xmlns:a16="http://schemas.microsoft.com/office/drawing/2014/main" id="{5F5B7312-975A-4DBC-9B2F-3652ADA006FD}"/>
+                <a16:creationId xmlns:a16="http://schemas.microsoft.com/office/drawing/2014/main" xmlns="" id="{5F5B7312-975A-4DBC-9B2F-3652ADA006FD}"/>
               </a:ext>
             </a:extLst>
           </p:cNvPr>
@@ -4896,7 +4896,7 @@
           <p:cNvPr id="4" name="Espaço Reservado para Texto 3">
             <a:extLst>
               <a:ext uri="{FF2B5EF4-FFF2-40B4-BE49-F238E27FC236}">
-                <a16:creationId xmlns:a16="http://schemas.microsoft.com/office/drawing/2014/main" id="{AAF805F5-1DFF-41C6-944C-7D79FE0D0963}"/>
+                <a16:creationId xmlns:a16="http://schemas.microsoft.com/office/drawing/2014/main" xmlns="" id="{AAF805F5-1DFF-41C6-944C-7D79FE0D0963}"/>
               </a:ext>
             </a:extLst>
           </p:cNvPr>
@@ -4967,7 +4967,7 @@
           <p:cNvPr id="5" name="Espaço Reservado para Data 4">
             <a:extLst>
               <a:ext uri="{FF2B5EF4-FFF2-40B4-BE49-F238E27FC236}">
-                <a16:creationId xmlns:a16="http://schemas.microsoft.com/office/drawing/2014/main" id="{02113D81-8665-4516-BD81-C6A1F254EECD}"/>
+                <a16:creationId xmlns:a16="http://schemas.microsoft.com/office/drawing/2014/main" xmlns="" id="{02113D81-8665-4516-BD81-C6A1F254EECD}"/>
               </a:ext>
             </a:extLst>
           </p:cNvPr>
@@ -4996,7 +4996,7 @@
           <p:cNvPr id="6" name="Espaço Reservado para Rodapé 5">
             <a:extLst>
               <a:ext uri="{FF2B5EF4-FFF2-40B4-BE49-F238E27FC236}">
-                <a16:creationId xmlns:a16="http://schemas.microsoft.com/office/drawing/2014/main" id="{2B00C88B-FF32-40AA-A187-727D96FD7862}"/>
+                <a16:creationId xmlns:a16="http://schemas.microsoft.com/office/drawing/2014/main" xmlns="" id="{2B00C88B-FF32-40AA-A187-727D96FD7862}"/>
               </a:ext>
             </a:extLst>
           </p:cNvPr>
@@ -5021,7 +5021,7 @@
           <p:cNvPr id="7" name="Espaço Reservado para Número de Slide 6">
             <a:extLst>
               <a:ext uri="{FF2B5EF4-FFF2-40B4-BE49-F238E27FC236}">
-                <a16:creationId xmlns:a16="http://schemas.microsoft.com/office/drawing/2014/main" id="{A04D1A2D-69F7-4B8F-A730-BC26DC340BA6}"/>
+                <a16:creationId xmlns:a16="http://schemas.microsoft.com/office/drawing/2014/main" xmlns="" id="{A04D1A2D-69F7-4B8F-A730-BC26DC340BA6}"/>
               </a:ext>
             </a:extLst>
           </p:cNvPr>
@@ -5085,7 +5085,7 @@
           <p:cNvPr id="2" name="Espaço Reservado para Título 1">
             <a:extLst>
               <a:ext uri="{FF2B5EF4-FFF2-40B4-BE49-F238E27FC236}">
-                <a16:creationId xmlns:a16="http://schemas.microsoft.com/office/drawing/2014/main" id="{E69A0273-1966-4A1B-9370-4C1CE5036371}"/>
+                <a16:creationId xmlns:a16="http://schemas.microsoft.com/office/drawing/2014/main" xmlns="" id="{E69A0273-1966-4A1B-9370-4C1CE5036371}"/>
               </a:ext>
             </a:extLst>
           </p:cNvPr>
@@ -5123,7 +5123,7 @@
           <p:cNvPr id="3" name="Espaço Reservado para Texto 2">
             <a:extLst>
               <a:ext uri="{FF2B5EF4-FFF2-40B4-BE49-F238E27FC236}">
-                <a16:creationId xmlns:a16="http://schemas.microsoft.com/office/drawing/2014/main" id="{3B9CF87A-0448-49A7-AB25-EBC1D56A40EF}"/>
+                <a16:creationId xmlns:a16="http://schemas.microsoft.com/office/drawing/2014/main" xmlns="" id="{3B9CF87A-0448-49A7-AB25-EBC1D56A40EF}"/>
               </a:ext>
             </a:extLst>
           </p:cNvPr>
@@ -5190,7 +5190,7 @@
           <p:cNvPr id="4" name="Espaço Reservado para Data 3">
             <a:extLst>
               <a:ext uri="{FF2B5EF4-FFF2-40B4-BE49-F238E27FC236}">
-                <a16:creationId xmlns:a16="http://schemas.microsoft.com/office/drawing/2014/main" id="{2EF7B1F2-BB5A-44D0-816D-16AD2C71430E}"/>
+                <a16:creationId xmlns:a16="http://schemas.microsoft.com/office/drawing/2014/main" xmlns="" id="{2EF7B1F2-BB5A-44D0-816D-16AD2C71430E}"/>
               </a:ext>
             </a:extLst>
           </p:cNvPr>
@@ -5237,7 +5237,7 @@
           <p:cNvPr id="5" name="Espaço Reservado para Rodapé 4">
             <a:extLst>
               <a:ext uri="{FF2B5EF4-FFF2-40B4-BE49-F238E27FC236}">
-                <a16:creationId xmlns:a16="http://schemas.microsoft.com/office/drawing/2014/main" id="{C703F94C-2CC8-4DAA-BC35-14FC3E841DCD}"/>
+                <a16:creationId xmlns:a16="http://schemas.microsoft.com/office/drawing/2014/main" xmlns="" id="{C703F94C-2CC8-4DAA-BC35-14FC3E841DCD}"/>
               </a:ext>
             </a:extLst>
           </p:cNvPr>
@@ -5280,7 +5280,7 @@
           <p:cNvPr id="6" name="Espaço Reservado para Número de Slide 5">
             <a:extLst>
               <a:ext uri="{FF2B5EF4-FFF2-40B4-BE49-F238E27FC236}">
-                <a16:creationId xmlns:a16="http://schemas.microsoft.com/office/drawing/2014/main" id="{64051336-7048-457A-8B61-D94291D71648}"/>
+                <a16:creationId xmlns:a16="http://schemas.microsoft.com/office/drawing/2014/main" xmlns="" id="{64051336-7048-457A-8B61-D94291D71648}"/>
               </a:ext>
             </a:extLst>
           </p:cNvPr>
@@ -5648,7 +5648,7 @@
           <p:cNvPr id="4" name="CaixaDeTexto 3">
             <a:extLst>
               <a:ext uri="{FF2B5EF4-FFF2-40B4-BE49-F238E27FC236}">
-                <a16:creationId xmlns:a16="http://schemas.microsoft.com/office/drawing/2014/main" id="{430EB894-B7D4-434C-9D1A-A14094D9BEEC}"/>
+                <a16:creationId xmlns:a16="http://schemas.microsoft.com/office/drawing/2014/main" xmlns="" id="{430EB894-B7D4-434C-9D1A-A14094D9BEEC}"/>
               </a:ext>
             </a:extLst>
           </p:cNvPr>
@@ -5692,7 +5692,7 @@
           <p:cNvPr id="1026" name="Picture 2" descr="Logo">
             <a:extLst>
               <a:ext uri="{FF2B5EF4-FFF2-40B4-BE49-F238E27FC236}">
-                <a16:creationId xmlns:a16="http://schemas.microsoft.com/office/drawing/2014/main" id="{3F2642E0-4F6A-4196-8F58-E77D36E9A33F}"/>
+                <a16:creationId xmlns:a16="http://schemas.microsoft.com/office/drawing/2014/main" xmlns="" id="{3F2642E0-4F6A-4196-8F58-E77D36E9A33F}"/>
               </a:ext>
             </a:extLst>
           </p:cNvPr>
@@ -5737,7 +5737,7 @@
           <p:cNvPr id="5122" name="Picture 2" descr="Image result for machine learning">
             <a:extLst>
               <a:ext uri="{FF2B5EF4-FFF2-40B4-BE49-F238E27FC236}">
-                <a16:creationId xmlns:a16="http://schemas.microsoft.com/office/drawing/2014/main" id="{810CE0A2-4102-44A6-A370-175E7896CDCB}"/>
+                <a16:creationId xmlns:a16="http://schemas.microsoft.com/office/drawing/2014/main" xmlns="" id="{810CE0A2-4102-44A6-A370-175E7896CDCB}"/>
               </a:ext>
             </a:extLst>
           </p:cNvPr>
@@ -5782,7 +5782,7 @@
           <p:cNvPr id="7" name="Título 1">
             <a:extLst>
               <a:ext uri="{FF2B5EF4-FFF2-40B4-BE49-F238E27FC236}">
-                <a16:creationId xmlns:a16="http://schemas.microsoft.com/office/drawing/2014/main" id="{32666AC8-2E17-4DB4-B0F5-60C640CCFD2E}"/>
+                <a16:creationId xmlns:a16="http://schemas.microsoft.com/office/drawing/2014/main" xmlns="" id="{32666AC8-2E17-4DB4-B0F5-60C640CCFD2E}"/>
               </a:ext>
             </a:extLst>
           </p:cNvPr>
@@ -5808,6 +5808,10 @@
             <a:r>
               <a:rPr lang="pt-BR" sz="6600" dirty="0"/>
               <a:t>C24 – Inteligência Artificial:</a:t>
+            </a:r>
+            <a:r>
+              <a:rPr lang="pt-BR" sz="7200" dirty="0"/>
+              <a:t/>
             </a:r>
             <a:br>
               <a:rPr lang="pt-BR" sz="7200" dirty="0"/>
@@ -5854,7 +5858,7 @@
           <p:cNvPr id="3" name="Espaço Reservado para Conteúdo 2">
             <a:extLst>
               <a:ext uri="{FF2B5EF4-FFF2-40B4-BE49-F238E27FC236}">
-                <a16:creationId xmlns:a16="http://schemas.microsoft.com/office/drawing/2014/main" id="{0F418656-538C-BBD9-47FA-40A924A669E5}"/>
+                <a16:creationId xmlns:a16="http://schemas.microsoft.com/office/drawing/2014/main" xmlns="" id="{0F418656-538C-BBD9-47FA-40A924A669E5}"/>
               </a:ext>
             </a:extLst>
           </p:cNvPr>
@@ -5934,7 +5938,7 @@
           <p:cNvPr id="2" name="Título 1">
             <a:extLst>
               <a:ext uri="{FF2B5EF4-FFF2-40B4-BE49-F238E27FC236}">
-                <a16:creationId xmlns:a16="http://schemas.microsoft.com/office/drawing/2014/main" id="{88C76DB9-C5DB-DAD2-5D1D-F064916FE36F}"/>
+                <a16:creationId xmlns:a16="http://schemas.microsoft.com/office/drawing/2014/main" xmlns="" id="{88C76DB9-C5DB-DAD2-5D1D-F064916FE36F}"/>
               </a:ext>
             </a:extLst>
           </p:cNvPr>
@@ -5962,7 +5966,7 @@
           <p:cNvPr id="3" name="Espaço Reservado para Conteúdo 2">
             <a:extLst>
               <a:ext uri="{FF2B5EF4-FFF2-40B4-BE49-F238E27FC236}">
-                <a16:creationId xmlns:a16="http://schemas.microsoft.com/office/drawing/2014/main" id="{0243F063-09F2-F192-E084-325BC503299F}"/>
+                <a16:creationId xmlns:a16="http://schemas.microsoft.com/office/drawing/2014/main" xmlns="" id="{0243F063-09F2-F192-E084-325BC503299F}"/>
               </a:ext>
             </a:extLst>
           </p:cNvPr>
@@ -6096,7 +6100,7 @@
               <p:cNvPr id="5" name="CaixaDeTexto 4">
                 <a:extLst>
                   <a:ext uri="{FF2B5EF4-FFF2-40B4-BE49-F238E27FC236}">
-                    <a16:creationId xmlns:a16="http://schemas.microsoft.com/office/drawing/2014/main" id="{A1A8E5FE-3F01-AAA0-2326-F47AA1AC18B9}"/>
+                    <a16:creationId xmlns:a16="http://schemas.microsoft.com/office/drawing/2014/main" xmlns="" id="{A1A8E5FE-3F01-AAA0-2326-F47AA1AC18B9}"/>
                   </a:ext>
                 </a:extLst>
               </p:cNvPr>
@@ -6122,7 +6126,10 @@
                 <a:pPr/>
                 <a14:m>
                   <m:oMathPara xmlns:m="http://schemas.openxmlformats.org/officeDocument/2006/math">
-                    <m:oMath>
+                    <m:oMathParaPr>
+                      <m:jc m:val="centerGroup"/>
+                    </m:oMathParaPr>
+                    <m:oMath xmlns:m="http://schemas.openxmlformats.org/officeDocument/2006/math">
                       <m:r>
                         <m:rPr>
                           <m:sty m:val="p"/>
@@ -6165,7 +6172,7 @@
                       <m:f>
                         <m:fPr>
                           <m:ctrlPr>
-                            <a:rPr lang="pt-BR" sz="3200">
+                            <a:rPr lang="pt-BR" sz="3200" i="1">
                               <a:latin typeface="Cambria Math" panose="02040503050406030204" pitchFamily="18" charset="0"/>
                             </a:rPr>
                           </m:ctrlPr>
@@ -6202,7 +6209,49 @@
                               <m:nor/>
                             </m:rPr>
                             <a:rPr lang="pt-BR" sz="3200" i="0" dirty="0"/>
-                            <m:t>TP + FN + FP + TN</m:t>
+                            <m:t>TP</m:t>
+                          </m:r>
+                          <m:r>
+                            <m:rPr>
+                              <m:nor/>
+                            </m:rPr>
+                            <a:rPr lang="pt-BR" sz="3200" i="0" dirty="0"/>
+                            <m:t> + </m:t>
+                          </m:r>
+                          <m:r>
+                            <m:rPr>
+                              <m:nor/>
+                            </m:rPr>
+                            <a:rPr lang="pt-BR" sz="3200" i="0" dirty="0"/>
+                            <m:t>FN</m:t>
+                          </m:r>
+                          <m:r>
+                            <m:rPr>
+                              <m:nor/>
+                            </m:rPr>
+                            <a:rPr lang="pt-BR" sz="3200" i="0" dirty="0"/>
+                            <m:t> + </m:t>
+                          </m:r>
+                          <m:r>
+                            <m:rPr>
+                              <m:nor/>
+                            </m:rPr>
+                            <a:rPr lang="pt-BR" sz="3200" i="0" dirty="0"/>
+                            <m:t>FP</m:t>
+                          </m:r>
+                          <m:r>
+                            <m:rPr>
+                              <m:nor/>
+                            </m:rPr>
+                            <a:rPr lang="pt-BR" sz="3200" i="0" dirty="0"/>
+                            <m:t> + </m:t>
+                          </m:r>
+                          <m:r>
+                            <m:rPr>
+                              <m:nor/>
+                            </m:rPr>
+                            <a:rPr lang="pt-BR" sz="3200" i="0" dirty="0"/>
+                            <m:t>TN</m:t>
                           </m:r>
                         </m:den>
                       </m:f>
@@ -6294,7 +6343,7 @@
           <p:cNvPr id="2" name="Título 1">
             <a:extLst>
               <a:ext uri="{FF2B5EF4-FFF2-40B4-BE49-F238E27FC236}">
-                <a16:creationId xmlns:a16="http://schemas.microsoft.com/office/drawing/2014/main" id="{C364D5D3-A9ED-9B8B-0474-AF3EF62241C0}"/>
+                <a16:creationId xmlns:a16="http://schemas.microsoft.com/office/drawing/2014/main" xmlns="" id="{C364D5D3-A9ED-9B8B-0474-AF3EF62241C0}"/>
               </a:ext>
             </a:extLst>
           </p:cNvPr>
@@ -6322,7 +6371,7 @@
           <p:cNvPr id="3" name="Espaço Reservado para Conteúdo 2">
             <a:extLst>
               <a:ext uri="{FF2B5EF4-FFF2-40B4-BE49-F238E27FC236}">
-                <a16:creationId xmlns:a16="http://schemas.microsoft.com/office/drawing/2014/main" id="{729D007B-9E18-00C3-2CF2-47D7955EBACC}"/>
+                <a16:creationId xmlns:a16="http://schemas.microsoft.com/office/drawing/2014/main" xmlns="" id="{729D007B-9E18-00C3-2CF2-47D7955EBACC}"/>
               </a:ext>
             </a:extLst>
           </p:cNvPr>
@@ -6479,7 +6528,7 @@
               <p:cNvPr id="4" name="CaixaDeTexto 3">
                 <a:extLst>
                   <a:ext uri="{FF2B5EF4-FFF2-40B4-BE49-F238E27FC236}">
-                    <a16:creationId xmlns:a16="http://schemas.microsoft.com/office/drawing/2014/main" id="{3B70A8A1-B016-521E-B475-1827A59F773A}"/>
+                    <a16:creationId xmlns:a16="http://schemas.microsoft.com/office/drawing/2014/main" xmlns="" id="{3B70A8A1-B016-521E-B475-1827A59F773A}"/>
                   </a:ext>
                 </a:extLst>
               </p:cNvPr>
@@ -6505,7 +6554,10 @@
                 <a:pPr/>
                 <a14:m>
                   <m:oMathPara xmlns:m="http://schemas.openxmlformats.org/officeDocument/2006/math">
-                    <m:oMath>
+                    <m:oMathParaPr>
+                      <m:jc m:val="centerGroup"/>
+                    </m:oMathParaPr>
+                    <m:oMath xmlns:m="http://schemas.openxmlformats.org/officeDocument/2006/math">
                       <m:r>
                         <m:rPr>
                           <m:sty m:val="p"/>
@@ -6548,7 +6600,7 @@
                       <m:f>
                         <m:fPr>
                           <m:ctrlPr>
-                            <a:rPr lang="pt-BR" sz="3200">
+                            <a:rPr lang="pt-BR" sz="3200" i="1">
                               <a:latin typeface="Cambria Math" panose="02040503050406030204" pitchFamily="18" charset="0"/>
                             </a:rPr>
                           </m:ctrlPr>
@@ -6585,7 +6637,49 @@
                               <m:nor/>
                             </m:rPr>
                             <a:rPr lang="pt-BR" sz="3200" i="0" dirty="0"/>
-                            <m:t>TP + FN + FP + TN</m:t>
+                            <m:t>TP</m:t>
+                          </m:r>
+                          <m:r>
+                            <m:rPr>
+                              <m:nor/>
+                            </m:rPr>
+                            <a:rPr lang="pt-BR" sz="3200" i="0" dirty="0"/>
+                            <m:t> + </m:t>
+                          </m:r>
+                          <m:r>
+                            <m:rPr>
+                              <m:nor/>
+                            </m:rPr>
+                            <a:rPr lang="pt-BR" sz="3200" i="0" dirty="0"/>
+                            <m:t>FN</m:t>
+                          </m:r>
+                          <m:r>
+                            <m:rPr>
+                              <m:nor/>
+                            </m:rPr>
+                            <a:rPr lang="pt-BR" sz="3200" i="0" dirty="0"/>
+                            <m:t> + </m:t>
+                          </m:r>
+                          <m:r>
+                            <m:rPr>
+                              <m:nor/>
+                            </m:rPr>
+                            <a:rPr lang="pt-BR" sz="3200" i="0" dirty="0"/>
+                            <m:t>FP</m:t>
+                          </m:r>
+                          <m:r>
+                            <m:rPr>
+                              <m:nor/>
+                            </m:rPr>
+                            <a:rPr lang="pt-BR" sz="3200" i="0" dirty="0"/>
+                            <m:t> + </m:t>
+                          </m:r>
+                          <m:r>
+                            <m:rPr>
+                              <m:nor/>
+                            </m:rPr>
+                            <a:rPr lang="pt-BR" sz="3200" i="0" dirty="0"/>
+                            <m:t>TN</m:t>
                           </m:r>
                         </m:den>
                       </m:f>
@@ -6677,7 +6771,7 @@
           <p:cNvPr id="2" name="Título 1">
             <a:extLst>
               <a:ext uri="{FF2B5EF4-FFF2-40B4-BE49-F238E27FC236}">
-                <a16:creationId xmlns:a16="http://schemas.microsoft.com/office/drawing/2014/main" id="{C364D5D3-A9ED-9B8B-0474-AF3EF62241C0}"/>
+                <a16:creationId xmlns:a16="http://schemas.microsoft.com/office/drawing/2014/main" xmlns="" id="{C364D5D3-A9ED-9B8B-0474-AF3EF62241C0}"/>
               </a:ext>
             </a:extLst>
           </p:cNvPr>
@@ -6707,7 +6801,7 @@
               <p:cNvPr id="3" name="Espaço Reservado para Conteúdo 2">
                 <a:extLst>
                   <a:ext uri="{FF2B5EF4-FFF2-40B4-BE49-F238E27FC236}">
-                    <a16:creationId xmlns:a16="http://schemas.microsoft.com/office/drawing/2014/main" id="{729D007B-9E18-00C3-2CF2-47D7955EBACC}"/>
+                    <a16:creationId xmlns:a16="http://schemas.microsoft.com/office/drawing/2014/main" xmlns="" id="{729D007B-9E18-00C3-2CF2-47D7955EBACC}"/>
                   </a:ext>
                 </a:extLst>
               </p:cNvPr>
@@ -6750,7 +6844,10 @@
                 </a:pPr>
                 <a14:m>
                   <m:oMathPara xmlns:m="http://schemas.openxmlformats.org/officeDocument/2006/math">
-                    <m:oMath>
+                    <m:oMathParaPr>
+                      <m:jc m:val="centerGroup"/>
+                    </m:oMathParaPr>
+                    <m:oMath xmlns:m="http://schemas.openxmlformats.org/officeDocument/2006/math">
                       <m:func>
                         <m:funcPr>
                           <m:ctrlPr>
@@ -6766,7 +6863,7 @@
                           <m:limLow>
                             <m:limLowPr>
                               <m:ctrlPr>
-                                <a:rPr lang="pt-BR" i="0" noProof="0" smtClean="0">
+                                <a:rPr lang="pt-BR" i="1" noProof="0" smtClean="0">
                                   <a:solidFill>
                                     <a:schemeClr val="tx1"/>
                                   </a:solidFill>
@@ -6865,7 +6962,7 @@
                       <m:limLow>
                         <m:limLowPr>
                           <m:ctrlPr>
-                            <a:rPr lang="pt-BR" noProof="0">
+                            <a:rPr lang="pt-BR" i="1" noProof="0">
                               <a:solidFill>
                                 <a:schemeClr val="tx1"/>
                               </a:solidFill>
@@ -6927,7 +7024,7 @@
                           <m:f>
                             <m:fPr>
                               <m:ctrlPr>
-                                <a:rPr lang="pt-BR" noProof="0">
+                                <a:rPr lang="pt-BR" i="1" noProof="0">
                                   <a:solidFill>
                                     <a:schemeClr val="tx1"/>
                                   </a:solidFill>
@@ -7063,7 +7160,7 @@
                       <m:f>
                         <m:fPr>
                           <m:ctrlPr>
-                            <a:rPr lang="pt-BR" noProof="0">
+                            <a:rPr lang="pt-BR" i="1" noProof="0">
                               <a:solidFill>
                                 <a:schemeClr val="tx1"/>
                               </a:solidFill>
@@ -7260,7 +7357,7 @@
           <p:cNvPr id="3" name="Espaço Reservado para Conteúdo 2">
             <a:extLst>
               <a:ext uri="{FF2B5EF4-FFF2-40B4-BE49-F238E27FC236}">
-                <a16:creationId xmlns:a16="http://schemas.microsoft.com/office/drawing/2014/main" id="{B0351861-7A86-07B3-5514-F1B15497FB0D}"/>
+                <a16:creationId xmlns:a16="http://schemas.microsoft.com/office/drawing/2014/main" xmlns="" id="{B0351861-7A86-07B3-5514-F1B15497FB0D}"/>
               </a:ext>
             </a:extLst>
           </p:cNvPr>
@@ -7345,7 +7442,7 @@
           <p:cNvPr id="2" name="Título 1">
             <a:extLst>
               <a:ext uri="{FF2B5EF4-FFF2-40B4-BE49-F238E27FC236}">
-                <a16:creationId xmlns:a16="http://schemas.microsoft.com/office/drawing/2014/main" id="{6759409E-2F7C-F9FB-1D90-828F558DAD79}"/>
+                <a16:creationId xmlns:a16="http://schemas.microsoft.com/office/drawing/2014/main" xmlns="" id="{6759409E-2F7C-F9FB-1D90-828F558DAD79}"/>
               </a:ext>
             </a:extLst>
           </p:cNvPr>
@@ -7373,7 +7470,7 @@
           <p:cNvPr id="3" name="Espaço Reservado para Conteúdo 2">
             <a:extLst>
               <a:ext uri="{FF2B5EF4-FFF2-40B4-BE49-F238E27FC236}">
-                <a16:creationId xmlns:a16="http://schemas.microsoft.com/office/drawing/2014/main" id="{047B3338-3C79-280E-33CD-E184CC752916}"/>
+                <a16:creationId xmlns:a16="http://schemas.microsoft.com/office/drawing/2014/main" xmlns="" id="{047B3338-3C79-280E-33CD-E184CC752916}"/>
               </a:ext>
             </a:extLst>
           </p:cNvPr>
@@ -7485,7 +7582,7 @@
               <p:cNvPr id="5" name="CaixaDeTexto 4">
                 <a:extLst>
                   <a:ext uri="{FF2B5EF4-FFF2-40B4-BE49-F238E27FC236}">
-                    <a16:creationId xmlns:a16="http://schemas.microsoft.com/office/drawing/2014/main" id="{A3376B35-7B47-DF75-A545-B75926FB5BB2}"/>
+                    <a16:creationId xmlns:a16="http://schemas.microsoft.com/office/drawing/2014/main" xmlns="" id="{A3376B35-7B47-DF75-A545-B75926FB5BB2}"/>
                   </a:ext>
                 </a:extLst>
               </p:cNvPr>
@@ -7511,7 +7608,10 @@
                 <a:pPr/>
                 <a14:m>
                   <m:oMathPara xmlns:m="http://schemas.openxmlformats.org/officeDocument/2006/math">
-                    <m:oMath>
+                    <m:oMathParaPr>
+                      <m:jc m:val="centerGroup"/>
+                    </m:oMathParaPr>
+                    <m:oMath xmlns:m="http://schemas.openxmlformats.org/officeDocument/2006/math">
                       <m:r>
                         <m:rPr>
                           <m:sty m:val="p"/>
@@ -7545,7 +7645,7 @@
                       <m:f>
                         <m:fPr>
                           <m:ctrlPr>
-                            <a:rPr lang="pt-BR" sz="3200" b="0" i="0" smtClean="0">
+                            <a:rPr lang="pt-BR" sz="3200" b="0" i="1" smtClean="0">
                               <a:latin typeface="Cambria Math" panose="02040503050406030204" pitchFamily="18" charset="0"/>
                             </a:rPr>
                           </m:ctrlPr>
@@ -7646,7 +7746,7 @@
           <p:cNvPr id="4" name="Tabela 5">
             <a:extLst>
               <a:ext uri="{FF2B5EF4-FFF2-40B4-BE49-F238E27FC236}">
-                <a16:creationId xmlns:a16="http://schemas.microsoft.com/office/drawing/2014/main" id="{0D5ABCB4-5EB5-F832-F110-AD1F2FD3532A}"/>
+                <a16:creationId xmlns:a16="http://schemas.microsoft.com/office/drawing/2014/main" xmlns="" id="{0D5ABCB4-5EB5-F832-F110-AD1F2FD3532A}"/>
               </a:ext>
             </a:extLst>
           </p:cNvPr>
@@ -7669,14 +7769,14 @@
                 <a:gridCol w="897466">
                   <a:extLst>
                     <a:ext uri="{9D8B030D-6E8A-4147-A177-3AD203B41FA5}">
-                      <a16:colId xmlns:a16="http://schemas.microsoft.com/office/drawing/2014/main" val="2780398905"/>
+                      <a16:colId xmlns:a16="http://schemas.microsoft.com/office/drawing/2014/main" xmlns="" val="2780398905"/>
                     </a:ext>
                   </a:extLst>
                 </a:gridCol>
                 <a:gridCol w="897466">
                   <a:extLst>
                     <a:ext uri="{9D8B030D-6E8A-4147-A177-3AD203B41FA5}">
-                      <a16:colId xmlns:a16="http://schemas.microsoft.com/office/drawing/2014/main" val="1752542230"/>
+                      <a16:colId xmlns:a16="http://schemas.microsoft.com/office/drawing/2014/main" xmlns="" val="1752542230"/>
                     </a:ext>
                   </a:extLst>
                 </a:gridCol>
@@ -7833,7 +7933,7 @@
                 </a:tc>
                 <a:extLst>
                   <a:ext uri="{0D108BD9-81ED-4DB2-BD59-A6C34878D82A}">
-                    <a16:rowId xmlns:a16="http://schemas.microsoft.com/office/drawing/2014/main" val="3952155157"/>
+                    <a16:rowId xmlns:a16="http://schemas.microsoft.com/office/drawing/2014/main" xmlns="" val="3952155157"/>
                   </a:ext>
                 </a:extLst>
               </a:tr>
@@ -8001,7 +8101,7 @@
                 </a:tc>
                 <a:extLst>
                   <a:ext uri="{0D108BD9-81ED-4DB2-BD59-A6C34878D82A}">
-                    <a16:rowId xmlns:a16="http://schemas.microsoft.com/office/drawing/2014/main" val="2169341992"/>
+                    <a16:rowId xmlns:a16="http://schemas.microsoft.com/office/drawing/2014/main" xmlns="" val="2169341992"/>
                   </a:ext>
                 </a:extLst>
               </a:tr>
@@ -8014,7 +8114,7 @@
           <p:cNvPr id="6" name="Retângulo 5">
             <a:extLst>
               <a:ext uri="{FF2B5EF4-FFF2-40B4-BE49-F238E27FC236}">
-                <a16:creationId xmlns:a16="http://schemas.microsoft.com/office/drawing/2014/main" id="{685BDF4E-E4CF-5896-0326-96A536D9643C}"/>
+                <a16:creationId xmlns:a16="http://schemas.microsoft.com/office/drawing/2014/main" xmlns="" id="{685BDF4E-E4CF-5896-0326-96A536D9643C}"/>
               </a:ext>
             </a:extLst>
           </p:cNvPr>
@@ -8066,7 +8166,7 @@
           <p:cNvPr id="7" name="CaixaDeTexto 6">
             <a:extLst>
               <a:ext uri="{FF2B5EF4-FFF2-40B4-BE49-F238E27FC236}">
-                <a16:creationId xmlns:a16="http://schemas.microsoft.com/office/drawing/2014/main" id="{D1154846-7200-8A13-7CE3-866E0423AC95}"/>
+                <a16:creationId xmlns:a16="http://schemas.microsoft.com/office/drawing/2014/main" xmlns="" id="{D1154846-7200-8A13-7CE3-866E0423AC95}"/>
               </a:ext>
             </a:extLst>
           </p:cNvPr>
@@ -8102,7 +8202,7 @@
           <p:cNvPr id="9" name="CaixaDeTexto 8">
             <a:extLst>
               <a:ext uri="{FF2B5EF4-FFF2-40B4-BE49-F238E27FC236}">
-                <a16:creationId xmlns:a16="http://schemas.microsoft.com/office/drawing/2014/main" id="{D5BECE90-0299-928D-2937-BAD69964EB36}"/>
+                <a16:creationId xmlns:a16="http://schemas.microsoft.com/office/drawing/2014/main" xmlns="" id="{D5BECE90-0299-928D-2937-BAD69964EB36}"/>
               </a:ext>
             </a:extLst>
           </p:cNvPr>
@@ -8138,7 +8238,7 @@
           <p:cNvPr id="11" name="CaixaDeTexto 10">
             <a:extLst>
               <a:ext uri="{FF2B5EF4-FFF2-40B4-BE49-F238E27FC236}">
-                <a16:creationId xmlns:a16="http://schemas.microsoft.com/office/drawing/2014/main" id="{4E5240CA-203C-851E-7E56-73BFF976FA1B}"/>
+                <a16:creationId xmlns:a16="http://schemas.microsoft.com/office/drawing/2014/main" xmlns="" id="{4E5240CA-203C-851E-7E56-73BFF976FA1B}"/>
               </a:ext>
             </a:extLst>
           </p:cNvPr>
@@ -8174,7 +8274,7 @@
           <p:cNvPr id="13" name="CaixaDeTexto 12">
             <a:extLst>
               <a:ext uri="{FF2B5EF4-FFF2-40B4-BE49-F238E27FC236}">
-                <a16:creationId xmlns:a16="http://schemas.microsoft.com/office/drawing/2014/main" id="{08DF3936-009E-86E3-DA9B-9C242B4A2046}"/>
+                <a16:creationId xmlns:a16="http://schemas.microsoft.com/office/drawing/2014/main" xmlns="" id="{08DF3936-009E-86E3-DA9B-9C242B4A2046}"/>
               </a:ext>
             </a:extLst>
           </p:cNvPr>
@@ -8226,7 +8326,7 @@
         <p:cNvPr id="1" name="">
           <a:extLst>
             <a:ext uri="{FF2B5EF4-FFF2-40B4-BE49-F238E27FC236}">
-              <a16:creationId xmlns:a16="http://schemas.microsoft.com/office/drawing/2014/main" id="{D6F94076-840C-F8A0-1EBA-0559789D9928}"/>
+              <a16:creationId xmlns:a16="http://schemas.microsoft.com/office/drawing/2014/main" xmlns="" id="{D6F94076-840C-F8A0-1EBA-0559789D9928}"/>
             </a:ext>
           </a:extLst>
         </p:cNvPr>
@@ -8246,7 +8346,7 @@
           <p:cNvPr id="2" name="Título 1">
             <a:extLst>
               <a:ext uri="{FF2B5EF4-FFF2-40B4-BE49-F238E27FC236}">
-                <a16:creationId xmlns:a16="http://schemas.microsoft.com/office/drawing/2014/main" id="{5BE837E6-3644-108F-C376-E31809129570}"/>
+                <a16:creationId xmlns:a16="http://schemas.microsoft.com/office/drawing/2014/main" xmlns="" id="{5BE837E6-3644-108F-C376-E31809129570}"/>
               </a:ext>
             </a:extLst>
           </p:cNvPr>
@@ -8274,7 +8374,7 @@
           <p:cNvPr id="3" name="Espaço Reservado para Conteúdo 2">
             <a:extLst>
               <a:ext uri="{FF2B5EF4-FFF2-40B4-BE49-F238E27FC236}">
-                <a16:creationId xmlns:a16="http://schemas.microsoft.com/office/drawing/2014/main" id="{1ED50CCD-BAF9-D705-F6DD-4E87FC3E6A8D}"/>
+                <a16:creationId xmlns:a16="http://schemas.microsoft.com/office/drawing/2014/main" xmlns="" id="{1ED50CCD-BAF9-D705-F6DD-4E87FC3E6A8D}"/>
               </a:ext>
             </a:extLst>
           </p:cNvPr>
@@ -8423,7 +8523,7 @@
               <p:cNvPr id="5" name="CaixaDeTexto 4">
                 <a:extLst>
                   <a:ext uri="{FF2B5EF4-FFF2-40B4-BE49-F238E27FC236}">
-                    <a16:creationId xmlns:a16="http://schemas.microsoft.com/office/drawing/2014/main" id="{704D3BDA-16E0-C30B-2504-2D58C9069DF7}"/>
+                    <a16:creationId xmlns:a16="http://schemas.microsoft.com/office/drawing/2014/main" xmlns="" id="{704D3BDA-16E0-C30B-2504-2D58C9069DF7}"/>
                   </a:ext>
                 </a:extLst>
               </p:cNvPr>
@@ -8449,7 +8549,10 @@
                 <a:pPr/>
                 <a14:m>
                   <m:oMathPara xmlns:m="http://schemas.openxmlformats.org/officeDocument/2006/math">
-                    <m:oMath>
+                    <m:oMathParaPr>
+                      <m:jc m:val="centerGroup"/>
+                    </m:oMathParaPr>
+                    <m:oMath xmlns:m="http://schemas.openxmlformats.org/officeDocument/2006/math">
                       <m:r>
                         <m:rPr>
                           <m:sty m:val="p"/>
@@ -8483,7 +8586,7 @@
                       <m:f>
                         <m:fPr>
                           <m:ctrlPr>
-                            <a:rPr lang="pt-BR" sz="3200" b="0" i="0" smtClean="0">
+                            <a:rPr lang="pt-BR" sz="3200" b="0" i="1" smtClean="0">
                               <a:latin typeface="Cambria Math" panose="02040503050406030204" pitchFamily="18" charset="0"/>
                             </a:rPr>
                           </m:ctrlPr>
@@ -8584,7 +8687,7 @@
           <p:cNvPr id="4" name="Tabela 5">
             <a:extLst>
               <a:ext uri="{FF2B5EF4-FFF2-40B4-BE49-F238E27FC236}">
-                <a16:creationId xmlns:a16="http://schemas.microsoft.com/office/drawing/2014/main" id="{72E4F38E-A7EF-429F-6B31-B7E993C4BB48}"/>
+                <a16:creationId xmlns:a16="http://schemas.microsoft.com/office/drawing/2014/main" xmlns="" id="{72E4F38E-A7EF-429F-6B31-B7E993C4BB48}"/>
               </a:ext>
             </a:extLst>
           </p:cNvPr>
@@ -8607,14 +8710,14 @@
                 <a:gridCol w="897466">
                   <a:extLst>
                     <a:ext uri="{9D8B030D-6E8A-4147-A177-3AD203B41FA5}">
-                      <a16:colId xmlns:a16="http://schemas.microsoft.com/office/drawing/2014/main" val="2780398905"/>
+                      <a16:colId xmlns:a16="http://schemas.microsoft.com/office/drawing/2014/main" xmlns="" val="2780398905"/>
                     </a:ext>
                   </a:extLst>
                 </a:gridCol>
                 <a:gridCol w="897466">
                   <a:extLst>
                     <a:ext uri="{9D8B030D-6E8A-4147-A177-3AD203B41FA5}">
-                      <a16:colId xmlns:a16="http://schemas.microsoft.com/office/drawing/2014/main" val="1752542230"/>
+                      <a16:colId xmlns:a16="http://schemas.microsoft.com/office/drawing/2014/main" xmlns="" val="1752542230"/>
                     </a:ext>
                   </a:extLst>
                 </a:gridCol>
@@ -8771,7 +8874,7 @@
                 </a:tc>
                 <a:extLst>
                   <a:ext uri="{0D108BD9-81ED-4DB2-BD59-A6C34878D82A}">
-                    <a16:rowId xmlns:a16="http://schemas.microsoft.com/office/drawing/2014/main" val="3952155157"/>
+                    <a16:rowId xmlns:a16="http://schemas.microsoft.com/office/drawing/2014/main" xmlns="" val="3952155157"/>
                   </a:ext>
                 </a:extLst>
               </a:tr>
@@ -8939,7 +9042,7 @@
                 </a:tc>
                 <a:extLst>
                   <a:ext uri="{0D108BD9-81ED-4DB2-BD59-A6C34878D82A}">
-                    <a16:rowId xmlns:a16="http://schemas.microsoft.com/office/drawing/2014/main" val="2169341992"/>
+                    <a16:rowId xmlns:a16="http://schemas.microsoft.com/office/drawing/2014/main" xmlns="" val="2169341992"/>
                   </a:ext>
                 </a:extLst>
               </a:tr>
@@ -8952,7 +9055,7 @@
           <p:cNvPr id="6" name="Retângulo 5">
             <a:extLst>
               <a:ext uri="{FF2B5EF4-FFF2-40B4-BE49-F238E27FC236}">
-                <a16:creationId xmlns:a16="http://schemas.microsoft.com/office/drawing/2014/main" id="{7DBCA45D-01DE-F21C-9CC9-EBEE7C31C895}"/>
+                <a16:creationId xmlns:a16="http://schemas.microsoft.com/office/drawing/2014/main" xmlns="" id="{7DBCA45D-01DE-F21C-9CC9-EBEE7C31C895}"/>
               </a:ext>
             </a:extLst>
           </p:cNvPr>
@@ -9004,7 +9107,7 @@
           <p:cNvPr id="7" name="CaixaDeTexto 6">
             <a:extLst>
               <a:ext uri="{FF2B5EF4-FFF2-40B4-BE49-F238E27FC236}">
-                <a16:creationId xmlns:a16="http://schemas.microsoft.com/office/drawing/2014/main" id="{FD64B03D-AF6E-F650-7BA8-30B1ADE878DC}"/>
+                <a16:creationId xmlns:a16="http://schemas.microsoft.com/office/drawing/2014/main" xmlns="" id="{FD64B03D-AF6E-F650-7BA8-30B1ADE878DC}"/>
               </a:ext>
             </a:extLst>
           </p:cNvPr>
@@ -9040,7 +9143,7 @@
           <p:cNvPr id="9" name="CaixaDeTexto 8">
             <a:extLst>
               <a:ext uri="{FF2B5EF4-FFF2-40B4-BE49-F238E27FC236}">
-                <a16:creationId xmlns:a16="http://schemas.microsoft.com/office/drawing/2014/main" id="{1C6F87C0-602F-3FE7-1A8C-E76501466135}"/>
+                <a16:creationId xmlns:a16="http://schemas.microsoft.com/office/drawing/2014/main" xmlns="" id="{1C6F87C0-602F-3FE7-1A8C-E76501466135}"/>
               </a:ext>
             </a:extLst>
           </p:cNvPr>
@@ -9076,7 +9179,7 @@
           <p:cNvPr id="11" name="CaixaDeTexto 10">
             <a:extLst>
               <a:ext uri="{FF2B5EF4-FFF2-40B4-BE49-F238E27FC236}">
-                <a16:creationId xmlns:a16="http://schemas.microsoft.com/office/drawing/2014/main" id="{4D11FED4-798F-FE62-4DD0-9B02BCE4FF2E}"/>
+                <a16:creationId xmlns:a16="http://schemas.microsoft.com/office/drawing/2014/main" xmlns="" id="{4D11FED4-798F-FE62-4DD0-9B02BCE4FF2E}"/>
               </a:ext>
             </a:extLst>
           </p:cNvPr>
@@ -9112,7 +9215,7 @@
           <p:cNvPr id="13" name="CaixaDeTexto 12">
             <a:extLst>
               <a:ext uri="{FF2B5EF4-FFF2-40B4-BE49-F238E27FC236}">
-                <a16:creationId xmlns:a16="http://schemas.microsoft.com/office/drawing/2014/main" id="{DF6DA85B-6614-958D-C680-07895E10B379}"/>
+                <a16:creationId xmlns:a16="http://schemas.microsoft.com/office/drawing/2014/main" xmlns="" id="{DF6DA85B-6614-958D-C680-07895E10B379}"/>
               </a:ext>
             </a:extLst>
           </p:cNvPr>
@@ -9178,7 +9281,7 @@
           <p:cNvPr id="2" name="Título 1">
             <a:extLst>
               <a:ext uri="{FF2B5EF4-FFF2-40B4-BE49-F238E27FC236}">
-                <a16:creationId xmlns:a16="http://schemas.microsoft.com/office/drawing/2014/main" id="{B287A758-CC86-49D1-9698-4D8C118C40E1}"/>
+                <a16:creationId xmlns:a16="http://schemas.microsoft.com/office/drawing/2014/main" xmlns="" id="{B287A758-CC86-49D1-9698-4D8C118C40E1}"/>
               </a:ext>
             </a:extLst>
           </p:cNvPr>
@@ -9206,7 +9309,7 @@
           <p:cNvPr id="3" name="Espaço Reservado para Conteúdo 2">
             <a:extLst>
               <a:ext uri="{FF2B5EF4-FFF2-40B4-BE49-F238E27FC236}">
-                <a16:creationId xmlns:a16="http://schemas.microsoft.com/office/drawing/2014/main" id="{50E4F4E1-BE8B-2CDE-011D-F70A3522A287}"/>
+                <a16:creationId xmlns:a16="http://schemas.microsoft.com/office/drawing/2014/main" xmlns="" id="{50E4F4E1-BE8B-2CDE-011D-F70A3522A287}"/>
               </a:ext>
             </a:extLst>
           </p:cNvPr>
@@ -9326,7 +9429,7 @@
               <p:cNvPr id="5" name="CaixaDeTexto 4">
                 <a:extLst>
                   <a:ext uri="{FF2B5EF4-FFF2-40B4-BE49-F238E27FC236}">
-                    <a16:creationId xmlns:a16="http://schemas.microsoft.com/office/drawing/2014/main" id="{E92F9593-43C2-2FC6-D7DF-B4A04BE65B06}"/>
+                    <a16:creationId xmlns:a16="http://schemas.microsoft.com/office/drawing/2014/main" xmlns="" id="{E92F9593-43C2-2FC6-D7DF-B4A04BE65B06}"/>
                   </a:ext>
                 </a:extLst>
               </p:cNvPr>
@@ -9352,7 +9455,10 @@
                 <a:pPr/>
                 <a14:m>
                   <m:oMathPara xmlns:m="http://schemas.openxmlformats.org/officeDocument/2006/math">
-                    <m:oMath>
+                    <m:oMathParaPr>
+                      <m:jc m:val="centerGroup"/>
+                    </m:oMathParaPr>
+                    <m:oMath xmlns:m="http://schemas.openxmlformats.org/officeDocument/2006/math">
                       <m:r>
                         <a:rPr lang="pt-BR" sz="3200" b="0" i="1" smtClean="0">
                           <a:latin typeface="Cambria Math" panose="02040503050406030204" pitchFamily="18" charset="0"/>
@@ -9368,7 +9474,7 @@
                       <m:f>
                         <m:fPr>
                           <m:ctrlPr>
-                            <a:rPr lang="pt-BR" sz="3200" i="0">
+                            <a:rPr lang="pt-BR" sz="3200" i="1">
                               <a:latin typeface="Cambria Math" panose="02040503050406030204" pitchFamily="18" charset="0"/>
                             </a:rPr>
                           </m:ctrlPr>
@@ -9469,7 +9575,7 @@
           <p:cNvPr id="4" name="Tabela 5">
             <a:extLst>
               <a:ext uri="{FF2B5EF4-FFF2-40B4-BE49-F238E27FC236}">
-                <a16:creationId xmlns:a16="http://schemas.microsoft.com/office/drawing/2014/main" id="{AB28634A-9E6D-BA06-E08B-AF1826CF6578}"/>
+                <a16:creationId xmlns:a16="http://schemas.microsoft.com/office/drawing/2014/main" xmlns="" id="{AB28634A-9E6D-BA06-E08B-AF1826CF6578}"/>
               </a:ext>
             </a:extLst>
           </p:cNvPr>
@@ -9492,14 +9598,14 @@
                 <a:gridCol w="897466">
                   <a:extLst>
                     <a:ext uri="{9D8B030D-6E8A-4147-A177-3AD203B41FA5}">
-                      <a16:colId xmlns:a16="http://schemas.microsoft.com/office/drawing/2014/main" val="2780398905"/>
+                      <a16:colId xmlns:a16="http://schemas.microsoft.com/office/drawing/2014/main" xmlns="" val="2780398905"/>
                     </a:ext>
                   </a:extLst>
                 </a:gridCol>
                 <a:gridCol w="897466">
                   <a:extLst>
                     <a:ext uri="{9D8B030D-6E8A-4147-A177-3AD203B41FA5}">
-                      <a16:colId xmlns:a16="http://schemas.microsoft.com/office/drawing/2014/main" val="1752542230"/>
+                      <a16:colId xmlns:a16="http://schemas.microsoft.com/office/drawing/2014/main" xmlns="" val="1752542230"/>
                     </a:ext>
                   </a:extLst>
                 </a:gridCol>
@@ -9656,7 +9762,7 @@
                 </a:tc>
                 <a:extLst>
                   <a:ext uri="{0D108BD9-81ED-4DB2-BD59-A6C34878D82A}">
-                    <a16:rowId xmlns:a16="http://schemas.microsoft.com/office/drawing/2014/main" val="3952155157"/>
+                    <a16:rowId xmlns:a16="http://schemas.microsoft.com/office/drawing/2014/main" xmlns="" val="3952155157"/>
                   </a:ext>
                 </a:extLst>
               </a:tr>
@@ -9824,7 +9930,7 @@
                 </a:tc>
                 <a:extLst>
                   <a:ext uri="{0D108BD9-81ED-4DB2-BD59-A6C34878D82A}">
-                    <a16:rowId xmlns:a16="http://schemas.microsoft.com/office/drawing/2014/main" val="2169341992"/>
+                    <a16:rowId xmlns:a16="http://schemas.microsoft.com/office/drawing/2014/main" xmlns="" val="2169341992"/>
                   </a:ext>
                 </a:extLst>
               </a:tr>
@@ -9837,7 +9943,7 @@
           <p:cNvPr id="6" name="Retângulo 5">
             <a:extLst>
               <a:ext uri="{FF2B5EF4-FFF2-40B4-BE49-F238E27FC236}">
-                <a16:creationId xmlns:a16="http://schemas.microsoft.com/office/drawing/2014/main" id="{894B2598-B989-4F1A-AB5A-34B5BD2133A9}"/>
+                <a16:creationId xmlns:a16="http://schemas.microsoft.com/office/drawing/2014/main" xmlns="" id="{894B2598-B989-4F1A-AB5A-34B5BD2133A9}"/>
               </a:ext>
             </a:extLst>
           </p:cNvPr>
@@ -9884,6 +9990,150 @@
           </a:p>
         </p:txBody>
       </p:sp>
+      <p:sp>
+        <p:nvSpPr>
+          <p:cNvPr id="7" name="CaixaDeTexto 6">
+            <a:extLst>
+              <a:ext uri="{FF2B5EF4-FFF2-40B4-BE49-F238E27FC236}">
+                <a16:creationId xmlns:a16="http://schemas.microsoft.com/office/drawing/2014/main" xmlns="" id="{D1154846-7200-8A13-7CE3-866E0423AC95}"/>
+              </a:ext>
+            </a:extLst>
+          </p:cNvPr>
+          <p:cNvSpPr txBox="1"/>
+          <p:nvPr/>
+        </p:nvSpPr>
+        <p:spPr>
+          <a:xfrm>
+            <a:off x="2200275" y="6157592"/>
+            <a:ext cx="255198" cy="369332"/>
+          </a:xfrm>
+          <a:prstGeom prst="rect">
+            <a:avLst/>
+          </a:prstGeom>
+          <a:noFill/>
+        </p:spPr>
+        <p:txBody>
+          <a:bodyPr wrap="none" rtlCol="0">
+            <a:spAutoFit/>
+          </a:bodyPr>
+          <a:lstStyle/>
+          <a:p>
+            <a:r>
+              <a:rPr lang="pt-BR" dirty="0"/>
+              <a:t>-</a:t>
+            </a:r>
+            <a:endParaRPr lang="en-US" dirty="0"/>
+          </a:p>
+        </p:txBody>
+      </p:sp>
+      <p:sp>
+        <p:nvSpPr>
+          <p:cNvPr id="8" name="CaixaDeTexto 7">
+            <a:extLst>
+              <a:ext uri="{FF2B5EF4-FFF2-40B4-BE49-F238E27FC236}">
+                <a16:creationId xmlns:a16="http://schemas.microsoft.com/office/drawing/2014/main" xmlns="" id="{D5BECE90-0299-928D-2937-BAD69964EB36}"/>
+              </a:ext>
+            </a:extLst>
+          </p:cNvPr>
+          <p:cNvSpPr txBox="1"/>
+          <p:nvPr/>
+        </p:nvSpPr>
+        <p:spPr>
+          <a:xfrm>
+            <a:off x="3070353" y="6170130"/>
+            <a:ext cx="300082" cy="369332"/>
+          </a:xfrm>
+          <a:prstGeom prst="rect">
+            <a:avLst/>
+          </a:prstGeom>
+          <a:noFill/>
+        </p:spPr>
+        <p:txBody>
+          <a:bodyPr wrap="none" rtlCol="0">
+            <a:spAutoFit/>
+          </a:bodyPr>
+          <a:lstStyle/>
+          <a:p>
+            <a:r>
+              <a:rPr lang="pt-BR" dirty="0"/>
+              <a:t>+</a:t>
+            </a:r>
+            <a:endParaRPr lang="en-US" dirty="0"/>
+          </a:p>
+        </p:txBody>
+      </p:sp>
+      <p:sp>
+        <p:nvSpPr>
+          <p:cNvPr id="9" name="CaixaDeTexto 8">
+            <a:extLst>
+              <a:ext uri="{FF2B5EF4-FFF2-40B4-BE49-F238E27FC236}">
+                <a16:creationId xmlns:a16="http://schemas.microsoft.com/office/drawing/2014/main" xmlns="" id="{4E5240CA-203C-851E-7E56-73BFF976FA1B}"/>
+              </a:ext>
+            </a:extLst>
+          </p:cNvPr>
+          <p:cNvSpPr txBox="1"/>
+          <p:nvPr/>
+        </p:nvSpPr>
+        <p:spPr>
+          <a:xfrm>
+            <a:off x="1469270" y="5688013"/>
+            <a:ext cx="300082" cy="369332"/>
+          </a:xfrm>
+          <a:prstGeom prst="rect">
+            <a:avLst/>
+          </a:prstGeom>
+          <a:noFill/>
+        </p:spPr>
+        <p:txBody>
+          <a:bodyPr wrap="none" rtlCol="0">
+            <a:spAutoFit/>
+          </a:bodyPr>
+          <a:lstStyle/>
+          <a:p>
+            <a:r>
+              <a:rPr lang="pt-BR" dirty="0"/>
+              <a:t>+</a:t>
+            </a:r>
+            <a:endParaRPr lang="en-US" dirty="0"/>
+          </a:p>
+        </p:txBody>
+      </p:sp>
+      <p:sp>
+        <p:nvSpPr>
+          <p:cNvPr id="10" name="CaixaDeTexto 9">
+            <a:extLst>
+              <a:ext uri="{FF2B5EF4-FFF2-40B4-BE49-F238E27FC236}">
+                <a16:creationId xmlns:a16="http://schemas.microsoft.com/office/drawing/2014/main" xmlns="" id="{08DF3936-009E-86E3-DA9B-9C242B4A2046}"/>
+              </a:ext>
+            </a:extLst>
+          </p:cNvPr>
+          <p:cNvSpPr txBox="1"/>
+          <p:nvPr/>
+        </p:nvSpPr>
+        <p:spPr>
+          <a:xfrm>
+            <a:off x="1491712" y="5280937"/>
+            <a:ext cx="255198" cy="369332"/>
+          </a:xfrm>
+          <a:prstGeom prst="rect">
+            <a:avLst/>
+          </a:prstGeom>
+          <a:noFill/>
+        </p:spPr>
+        <p:txBody>
+          <a:bodyPr wrap="none" rtlCol="0">
+            <a:spAutoFit/>
+          </a:bodyPr>
+          <a:lstStyle/>
+          <a:p>
+            <a:r>
+              <a:rPr lang="pt-BR" dirty="0"/>
+              <a:t>-</a:t>
+            </a:r>
+            <a:endParaRPr lang="en-US" dirty="0"/>
+          </a:p>
+        </p:txBody>
+      </p:sp>
     </p:spTree>
     <p:extLst>
       <p:ext uri="{BB962C8B-B14F-4D97-AF65-F5344CB8AC3E}">
@@ -9905,7 +10155,7 @@
         <p:cNvPr id="1" name="">
           <a:extLst>
             <a:ext uri="{FF2B5EF4-FFF2-40B4-BE49-F238E27FC236}">
-              <a16:creationId xmlns:a16="http://schemas.microsoft.com/office/drawing/2014/main" id="{E1608E56-1063-9535-583F-68F98BEED64E}"/>
+              <a16:creationId xmlns:a16="http://schemas.microsoft.com/office/drawing/2014/main" xmlns="" id="{E1608E56-1063-9535-583F-68F98BEED64E}"/>
             </a:ext>
           </a:extLst>
         </p:cNvPr>
@@ -9925,7 +10175,7 @@
           <p:cNvPr id="2" name="Título 1">
             <a:extLst>
               <a:ext uri="{FF2B5EF4-FFF2-40B4-BE49-F238E27FC236}">
-                <a16:creationId xmlns:a16="http://schemas.microsoft.com/office/drawing/2014/main" id="{7B281AC0-3FAB-E1EC-DE8A-76F8FBB33FFF}"/>
+                <a16:creationId xmlns:a16="http://schemas.microsoft.com/office/drawing/2014/main" xmlns="" id="{7B281AC0-3FAB-E1EC-DE8A-76F8FBB33FFF}"/>
               </a:ext>
             </a:extLst>
           </p:cNvPr>
@@ -9953,7 +10203,7 @@
           <p:cNvPr id="3" name="Espaço Reservado para Conteúdo 2">
             <a:extLst>
               <a:ext uri="{FF2B5EF4-FFF2-40B4-BE49-F238E27FC236}">
-                <a16:creationId xmlns:a16="http://schemas.microsoft.com/office/drawing/2014/main" id="{4AA4931E-FED8-1E19-BC1E-B1813EAF8984}"/>
+                <a16:creationId xmlns:a16="http://schemas.microsoft.com/office/drawing/2014/main" xmlns="" id="{4AA4931E-FED8-1E19-BC1E-B1813EAF8984}"/>
               </a:ext>
             </a:extLst>
           </p:cNvPr>
@@ -10042,7 +10292,7 @@
               <p:cNvPr id="5" name="CaixaDeTexto 4">
                 <a:extLst>
                   <a:ext uri="{FF2B5EF4-FFF2-40B4-BE49-F238E27FC236}">
-                    <a16:creationId xmlns:a16="http://schemas.microsoft.com/office/drawing/2014/main" id="{838A3350-B424-FFC8-887E-A4F979401EC1}"/>
+                    <a16:creationId xmlns:a16="http://schemas.microsoft.com/office/drawing/2014/main" xmlns="" id="{838A3350-B424-FFC8-887E-A4F979401EC1}"/>
                   </a:ext>
                 </a:extLst>
               </p:cNvPr>
@@ -10068,7 +10318,10 @@
                 <a:pPr/>
                 <a14:m>
                   <m:oMathPara xmlns:m="http://schemas.openxmlformats.org/officeDocument/2006/math">
-                    <m:oMath>
+                    <m:oMathParaPr>
+                      <m:jc m:val="centerGroup"/>
+                    </m:oMathParaPr>
+                    <m:oMath xmlns:m="http://schemas.openxmlformats.org/officeDocument/2006/math">
                       <m:r>
                         <a:rPr lang="pt-BR" sz="3200" b="0" i="1" smtClean="0">
                           <a:latin typeface="Cambria Math" panose="02040503050406030204" pitchFamily="18" charset="0"/>
@@ -10084,7 +10337,7 @@
                       <m:f>
                         <m:fPr>
                           <m:ctrlPr>
-                            <a:rPr lang="pt-BR" sz="3200" i="0">
+                            <a:rPr lang="pt-BR" sz="3200" i="1">
                               <a:latin typeface="Cambria Math" panose="02040503050406030204" pitchFamily="18" charset="0"/>
                             </a:rPr>
                           </m:ctrlPr>
@@ -10185,7 +10438,7 @@
           <p:cNvPr id="4" name="Tabela 5">
             <a:extLst>
               <a:ext uri="{FF2B5EF4-FFF2-40B4-BE49-F238E27FC236}">
-                <a16:creationId xmlns:a16="http://schemas.microsoft.com/office/drawing/2014/main" id="{6F8B50E5-59B3-7D20-E676-F37DDCFCA230}"/>
+                <a16:creationId xmlns:a16="http://schemas.microsoft.com/office/drawing/2014/main" xmlns="" id="{6F8B50E5-59B3-7D20-E676-F37DDCFCA230}"/>
               </a:ext>
             </a:extLst>
           </p:cNvPr>
@@ -10208,14 +10461,14 @@
                 <a:gridCol w="897466">
                   <a:extLst>
                     <a:ext uri="{9D8B030D-6E8A-4147-A177-3AD203B41FA5}">
-                      <a16:colId xmlns:a16="http://schemas.microsoft.com/office/drawing/2014/main" val="2780398905"/>
+                      <a16:colId xmlns:a16="http://schemas.microsoft.com/office/drawing/2014/main" xmlns="" val="2780398905"/>
                     </a:ext>
                   </a:extLst>
                 </a:gridCol>
                 <a:gridCol w="897466">
                   <a:extLst>
                     <a:ext uri="{9D8B030D-6E8A-4147-A177-3AD203B41FA5}">
-                      <a16:colId xmlns:a16="http://schemas.microsoft.com/office/drawing/2014/main" val="1752542230"/>
+                      <a16:colId xmlns:a16="http://schemas.microsoft.com/office/drawing/2014/main" xmlns="" val="1752542230"/>
                     </a:ext>
                   </a:extLst>
                 </a:gridCol>
@@ -10372,7 +10625,7 @@
                 </a:tc>
                 <a:extLst>
                   <a:ext uri="{0D108BD9-81ED-4DB2-BD59-A6C34878D82A}">
-                    <a16:rowId xmlns:a16="http://schemas.microsoft.com/office/drawing/2014/main" val="3952155157"/>
+                    <a16:rowId xmlns:a16="http://schemas.microsoft.com/office/drawing/2014/main" xmlns="" val="3952155157"/>
                   </a:ext>
                 </a:extLst>
               </a:tr>
@@ -10540,7 +10793,7 @@
                 </a:tc>
                 <a:extLst>
                   <a:ext uri="{0D108BD9-81ED-4DB2-BD59-A6C34878D82A}">
-                    <a16:rowId xmlns:a16="http://schemas.microsoft.com/office/drawing/2014/main" val="2169341992"/>
+                    <a16:rowId xmlns:a16="http://schemas.microsoft.com/office/drawing/2014/main" xmlns="" val="2169341992"/>
                   </a:ext>
                 </a:extLst>
               </a:tr>
@@ -10553,7 +10806,7 @@
           <p:cNvPr id="6" name="Retângulo 5">
             <a:extLst>
               <a:ext uri="{FF2B5EF4-FFF2-40B4-BE49-F238E27FC236}">
-                <a16:creationId xmlns:a16="http://schemas.microsoft.com/office/drawing/2014/main" id="{26508683-E050-40A0-9B76-B0CF504C46C8}"/>
+                <a16:creationId xmlns:a16="http://schemas.microsoft.com/office/drawing/2014/main" xmlns="" id="{26508683-E050-40A0-9B76-B0CF504C46C8}"/>
               </a:ext>
             </a:extLst>
           </p:cNvPr>
@@ -10605,7 +10858,7 @@
           <p:cNvPr id="8" name="CaixaDeTexto 7">
             <a:extLst>
               <a:ext uri="{FF2B5EF4-FFF2-40B4-BE49-F238E27FC236}">
-                <a16:creationId xmlns:a16="http://schemas.microsoft.com/office/drawing/2014/main" id="{EF4E8F31-70DD-AFAD-34E2-A822946626E9}"/>
+                <a16:creationId xmlns:a16="http://schemas.microsoft.com/office/drawing/2014/main" xmlns="" id="{EF4E8F31-70DD-AFAD-34E2-A822946626E9}"/>
               </a:ext>
             </a:extLst>
           </p:cNvPr>
@@ -10641,7 +10894,7 @@
           <p:cNvPr id="10" name="CaixaDeTexto 9">
             <a:extLst>
               <a:ext uri="{FF2B5EF4-FFF2-40B4-BE49-F238E27FC236}">
-                <a16:creationId xmlns:a16="http://schemas.microsoft.com/office/drawing/2014/main" id="{8339B622-0A8F-73D9-2449-EDF1095410C1}"/>
+                <a16:creationId xmlns:a16="http://schemas.microsoft.com/office/drawing/2014/main" xmlns="" id="{8339B622-0A8F-73D9-2449-EDF1095410C1}"/>
               </a:ext>
             </a:extLst>
           </p:cNvPr>
@@ -10677,7 +10930,7 @@
           <p:cNvPr id="12" name="CaixaDeTexto 11">
             <a:extLst>
               <a:ext uri="{FF2B5EF4-FFF2-40B4-BE49-F238E27FC236}">
-                <a16:creationId xmlns:a16="http://schemas.microsoft.com/office/drawing/2014/main" id="{C8BDA5C3-77D9-BE4A-F72B-0D83504807E8}"/>
+                <a16:creationId xmlns:a16="http://schemas.microsoft.com/office/drawing/2014/main" xmlns="" id="{C8BDA5C3-77D9-BE4A-F72B-0D83504807E8}"/>
               </a:ext>
             </a:extLst>
           </p:cNvPr>
@@ -10713,7 +10966,7 @@
           <p:cNvPr id="14" name="CaixaDeTexto 13">
             <a:extLst>
               <a:ext uri="{FF2B5EF4-FFF2-40B4-BE49-F238E27FC236}">
-                <a16:creationId xmlns:a16="http://schemas.microsoft.com/office/drawing/2014/main" id="{A5CFE41C-61A5-A9A5-1493-12FF02B34221}"/>
+                <a16:creationId xmlns:a16="http://schemas.microsoft.com/office/drawing/2014/main" xmlns="" id="{A5CFE41C-61A5-A9A5-1493-12FF02B34221}"/>
               </a:ext>
             </a:extLst>
           </p:cNvPr>
@@ -10779,7 +11032,7 @@
           <p:cNvPr id="3" name="Espaço Reservado para Conteúdo 2">
             <a:extLst>
               <a:ext uri="{FF2B5EF4-FFF2-40B4-BE49-F238E27FC236}">
-                <a16:creationId xmlns:a16="http://schemas.microsoft.com/office/drawing/2014/main" id="{171E3951-9049-F65B-B03A-1DB6F4600ADB}"/>
+                <a16:creationId xmlns:a16="http://schemas.microsoft.com/office/drawing/2014/main" xmlns="" id="{171E3951-9049-F65B-B03A-1DB6F4600ADB}"/>
               </a:ext>
             </a:extLst>
           </p:cNvPr>
@@ -10848,7 +11101,7 @@
           <p:cNvPr id="2" name="Título 1">
             <a:extLst>
               <a:ext uri="{FF2B5EF4-FFF2-40B4-BE49-F238E27FC236}">
-                <a16:creationId xmlns:a16="http://schemas.microsoft.com/office/drawing/2014/main" id="{EECB3FED-5D1A-7084-5333-A3B2FA75F608}"/>
+                <a16:creationId xmlns:a16="http://schemas.microsoft.com/office/drawing/2014/main" xmlns="" id="{EECB3FED-5D1A-7084-5333-A3B2FA75F608}"/>
               </a:ext>
             </a:extLst>
           </p:cNvPr>
@@ -10876,7 +11129,7 @@
           <p:cNvPr id="3" name="Espaço Reservado para Conteúdo 2">
             <a:extLst>
               <a:ext uri="{FF2B5EF4-FFF2-40B4-BE49-F238E27FC236}">
-                <a16:creationId xmlns:a16="http://schemas.microsoft.com/office/drawing/2014/main" id="{25FE7774-7186-A846-D8DE-518B2CBF4EBD}"/>
+                <a16:creationId xmlns:a16="http://schemas.microsoft.com/office/drawing/2014/main" xmlns="" id="{25FE7774-7186-A846-D8DE-518B2CBF4EBD}"/>
               </a:ext>
             </a:extLst>
           </p:cNvPr>
@@ -10953,7 +11206,7 @@
           <p:cNvPr id="2" name="Título 1">
             <a:extLst>
               <a:ext uri="{FF2B5EF4-FFF2-40B4-BE49-F238E27FC236}">
-                <a16:creationId xmlns:a16="http://schemas.microsoft.com/office/drawing/2014/main" id="{0BF87474-9D5C-0B3D-63E8-AD1CF986CDF4}"/>
+                <a16:creationId xmlns:a16="http://schemas.microsoft.com/office/drawing/2014/main" xmlns="" id="{0BF87474-9D5C-0B3D-63E8-AD1CF986CDF4}"/>
               </a:ext>
             </a:extLst>
           </p:cNvPr>
@@ -10985,7 +11238,7 @@
           <p:cNvPr id="3" name="Espaço Reservado para Conteúdo 2">
             <a:extLst>
               <a:ext uri="{FF2B5EF4-FFF2-40B4-BE49-F238E27FC236}">
-                <a16:creationId xmlns:a16="http://schemas.microsoft.com/office/drawing/2014/main" id="{82DAA94B-AA8F-AF15-EE11-8B107DF8C311}"/>
+                <a16:creationId xmlns:a16="http://schemas.microsoft.com/office/drawing/2014/main" xmlns="" id="{82DAA94B-AA8F-AF15-EE11-8B107DF8C311}"/>
               </a:ext>
             </a:extLst>
           </p:cNvPr>
@@ -11130,7 +11383,7 @@
               <p:cNvPr id="4" name="CaixaDeTexto 3">
                 <a:extLst>
                   <a:ext uri="{FF2B5EF4-FFF2-40B4-BE49-F238E27FC236}">
-                    <a16:creationId xmlns:a16="http://schemas.microsoft.com/office/drawing/2014/main" id="{B66DD82C-2C7C-932B-0676-6777E743E2CA}"/>
+                    <a16:creationId xmlns:a16="http://schemas.microsoft.com/office/drawing/2014/main" xmlns="" id="{B66DD82C-2C7C-932B-0676-6777E743E2CA}"/>
                   </a:ext>
                 </a:extLst>
               </p:cNvPr>
@@ -11156,7 +11409,10 @@
                 <a:pPr/>
                 <a14:m>
                   <m:oMathPara xmlns:m="http://schemas.openxmlformats.org/officeDocument/2006/math">
-                    <m:oMath>
+                    <m:oMathParaPr>
+                      <m:jc m:val="centerGroup"/>
+                    </m:oMathParaPr>
+                    <m:oMath xmlns:m="http://schemas.openxmlformats.org/officeDocument/2006/math">
                       <m:r>
                         <a:rPr lang="pt-BR" sz="3200" b="0" i="1" smtClean="0">
                           <a:latin typeface="Cambria Math" panose="02040503050406030204" pitchFamily="18" charset="0"/>
@@ -11172,7 +11428,7 @@
                       <m:f>
                         <m:fPr>
                           <m:ctrlPr>
-                            <a:rPr lang="pt-BR" sz="3200" i="0">
+                            <a:rPr lang="pt-BR" sz="3200" i="1">
                               <a:latin typeface="Cambria Math" panose="02040503050406030204" pitchFamily="18" charset="0"/>
                             </a:rPr>
                           </m:ctrlPr>
@@ -11275,7 +11531,7 @@
               <p:cNvPr id="5" name="CaixaDeTexto 4">
                 <a:extLst>
                   <a:ext uri="{FF2B5EF4-FFF2-40B4-BE49-F238E27FC236}">
-                    <a16:creationId xmlns:a16="http://schemas.microsoft.com/office/drawing/2014/main" id="{1C33F56B-917E-EDAE-B038-52C2901A324E}"/>
+                    <a16:creationId xmlns:a16="http://schemas.microsoft.com/office/drawing/2014/main" xmlns="" id="{1C33F56B-917E-EDAE-B038-52C2901A324E}"/>
                   </a:ext>
                 </a:extLst>
               </p:cNvPr>
@@ -11301,7 +11557,10 @@
                 <a:pPr/>
                 <a14:m>
                   <m:oMathPara xmlns:m="http://schemas.openxmlformats.org/officeDocument/2006/math">
-                    <m:oMath>
+                    <m:oMathParaPr>
+                      <m:jc m:val="centerGroup"/>
+                    </m:oMathParaPr>
+                    <m:oMath xmlns:m="http://schemas.openxmlformats.org/officeDocument/2006/math">
                       <m:r>
                         <m:rPr>
                           <m:sty m:val="p"/>
@@ -11335,7 +11594,7 @@
                       <m:f>
                         <m:fPr>
                           <m:ctrlPr>
-                            <a:rPr lang="pt-BR" sz="3200" b="0" i="0" smtClean="0">
+                            <a:rPr lang="pt-BR" sz="3200" b="0" i="1" smtClean="0">
                               <a:latin typeface="Cambria Math" panose="02040503050406030204" pitchFamily="18" charset="0"/>
                             </a:rPr>
                           </m:ctrlPr>
@@ -11466,7 +11725,7 @@
           <p:cNvPr id="2" name="Título 1">
             <a:extLst>
               <a:ext uri="{FF2B5EF4-FFF2-40B4-BE49-F238E27FC236}">
-                <a16:creationId xmlns:a16="http://schemas.microsoft.com/office/drawing/2014/main" id="{B64DCA44-CC6E-8998-A693-998426B94AA3}"/>
+                <a16:creationId xmlns:a16="http://schemas.microsoft.com/office/drawing/2014/main" xmlns="" id="{B64DCA44-CC6E-8998-A693-998426B94AA3}"/>
               </a:ext>
             </a:extLst>
           </p:cNvPr>
@@ -11493,14 +11752,14 @@
           </a:p>
         </p:txBody>
       </p:sp>
-      <mc:AlternateContent xmlns:mc="http://schemas.openxmlformats.org/markup-compatibility/2006">
-        <mc:Choice xmlns:a14="http://schemas.microsoft.com/office/drawing/2010/main" Requires="a14">
+      <mc:AlternateContent xmlns:mc="http://schemas.openxmlformats.org/markup-compatibility/2006" xmlns:a14="http://schemas.microsoft.com/office/drawing/2010/main">
+        <mc:Choice Requires="a14">
           <p:sp>
             <p:nvSpPr>
               <p:cNvPr id="3" name="Espaço Reservado para Conteúdo 2">
                 <a:extLst>
                   <a:ext uri="{FF2B5EF4-FFF2-40B4-BE49-F238E27FC236}">
-                    <a16:creationId xmlns:a16="http://schemas.microsoft.com/office/drawing/2014/main" id="{C261D671-8D7F-BF6D-3C19-CFC15A190C23}"/>
+                    <a16:creationId xmlns:a16="http://schemas.microsoft.com/office/drawing/2014/main" xmlns="" id="{C261D671-8D7F-BF6D-3C19-CFC15A190C23}"/>
                   </a:ext>
                 </a:extLst>
               </p:cNvPr>
@@ -11753,7 +12012,7 @@
             </p:txBody>
           </p:sp>
         </mc:Choice>
-        <mc:Fallback>
+        <mc:Fallback xmlns="">
           <p:sp>
             <p:nvSpPr>
               <p:cNvPr id="3" name="Espaço Reservado para Conteúdo 2">
@@ -11804,7 +12063,7 @@
               <p:cNvPr id="5" name="CaixaDeTexto 4">
                 <a:extLst>
                   <a:ext uri="{FF2B5EF4-FFF2-40B4-BE49-F238E27FC236}">
-                    <a16:creationId xmlns:a16="http://schemas.microsoft.com/office/drawing/2014/main" id="{C0A929A7-E33F-6D02-D301-38706DE0743C}"/>
+                    <a16:creationId xmlns:a16="http://schemas.microsoft.com/office/drawing/2014/main" xmlns="" id="{C0A929A7-E33F-6D02-D301-38706DE0743C}"/>
                   </a:ext>
                 </a:extLst>
               </p:cNvPr>
@@ -11832,7 +12091,10 @@
                 </a:pPr>
                 <a14:m>
                   <m:oMathPara xmlns:m="http://schemas.openxmlformats.org/officeDocument/2006/math">
-                    <m:oMath>
+                    <m:oMathParaPr>
+                      <m:jc m:val="centerGroup"/>
+                    </m:oMathParaPr>
+                    <m:oMath xmlns:m="http://schemas.openxmlformats.org/officeDocument/2006/math">
                       <m:sSub>
                         <m:sSubPr>
                           <m:ctrlPr>
@@ -11867,7 +12129,7 @@
                       <m:f>
                         <m:fPr>
                           <m:ctrlPr>
-                            <a:rPr lang="pt-BR" sz="3200" b="0" i="0" smtClean="0">
+                            <a:rPr lang="pt-BR" sz="3200" b="0" i="1" smtClean="0">
                               <a:latin typeface="Cambria Math" panose="02040503050406030204" pitchFamily="18" charset="0"/>
                             </a:rPr>
                           </m:ctrlPr>
@@ -11902,7 +12164,7 @@
                           <m:f>
                             <m:fPr>
                               <m:ctrlPr>
-                                <a:rPr lang="pt-BR" sz="3200" b="0" i="0" smtClean="0">
+                                <a:rPr lang="pt-BR" sz="3200" b="0" i="1" smtClean="0">
                                   <a:latin typeface="Cambria Math" panose="02040503050406030204" pitchFamily="18" charset="0"/>
                                 </a:rPr>
                               </m:ctrlPr>
@@ -11953,7 +12215,7 @@
                       <m:f>
                         <m:fPr>
                           <m:ctrlPr>
-                            <a:rPr lang="pt-BR" sz="3200" b="0" i="0" smtClean="0">
+                            <a:rPr lang="pt-BR" sz="3200" b="0" i="1" smtClean="0">
                               <a:latin typeface="Cambria Math" panose="02040503050406030204" pitchFamily="18" charset="0"/>
                             </a:rPr>
                           </m:ctrlPr>
@@ -12127,14 +12389,14 @@
           <a:chExt cx="0" cy="0"/>
         </a:xfrm>
       </p:grpSpPr>
-      <mc:AlternateContent xmlns:mc="http://schemas.openxmlformats.org/markup-compatibility/2006">
-        <mc:Choice xmlns:a14="http://schemas.microsoft.com/office/drawing/2010/main" Requires="a14">
+      <mc:AlternateContent xmlns:mc="http://schemas.openxmlformats.org/markup-compatibility/2006" xmlns:a14="http://schemas.microsoft.com/office/drawing/2010/main">
+        <mc:Choice Requires="a14">
           <p:sp>
             <p:nvSpPr>
               <p:cNvPr id="3" name="Espaço Reservado para Conteúdo 2">
                 <a:extLst>
                   <a:ext uri="{FF2B5EF4-FFF2-40B4-BE49-F238E27FC236}">
-                    <a16:creationId xmlns:a16="http://schemas.microsoft.com/office/drawing/2014/main" id="{0F418656-538C-BBD9-47FA-40A924A669E5}"/>
+                    <a16:creationId xmlns:a16="http://schemas.microsoft.com/office/drawing/2014/main" xmlns="" id="{0F418656-538C-BBD9-47FA-40A924A669E5}"/>
                   </a:ext>
                 </a:extLst>
               </p:cNvPr>
@@ -12182,7 +12444,7 @@
             </p:txBody>
           </p:sp>
         </mc:Choice>
-        <mc:Fallback>
+        <mc:Fallback xmlns="">
           <p:sp>
             <p:nvSpPr>
               <p:cNvPr id="3" name="Espaço Reservado para Conteúdo 2">
@@ -12261,7 +12523,7 @@
           <p:cNvPr id="2" name="Título 1">
             <a:extLst>
               <a:ext uri="{FF2B5EF4-FFF2-40B4-BE49-F238E27FC236}">
-                <a16:creationId xmlns:a16="http://schemas.microsoft.com/office/drawing/2014/main" id="{44F6D18B-0399-55B9-FD83-C7EDF77FF08A}"/>
+                <a16:creationId xmlns:a16="http://schemas.microsoft.com/office/drawing/2014/main" xmlns="" id="{44F6D18B-0399-55B9-FD83-C7EDF77FF08A}"/>
               </a:ext>
             </a:extLst>
           </p:cNvPr>
@@ -12296,7 +12558,7 @@
               <p:cNvPr id="3" name="Espaço Reservado para Conteúdo 2">
                 <a:extLst>
                   <a:ext uri="{FF2B5EF4-FFF2-40B4-BE49-F238E27FC236}">
-                    <a16:creationId xmlns:a16="http://schemas.microsoft.com/office/drawing/2014/main" id="{06AE9087-3D2E-DF8E-D6D3-12EDE543712C}"/>
+                    <a16:creationId xmlns:a16="http://schemas.microsoft.com/office/drawing/2014/main" xmlns="" id="{06AE9087-3D2E-DF8E-D6D3-12EDE543712C}"/>
                   </a:ext>
                 </a:extLst>
               </p:cNvPr>
@@ -12746,7 +13008,7 @@
           <p:cNvPr id="21" name="Agrupar 20">
             <a:extLst>
               <a:ext uri="{FF2B5EF4-FFF2-40B4-BE49-F238E27FC236}">
-                <a16:creationId xmlns:a16="http://schemas.microsoft.com/office/drawing/2014/main" id="{C5995D85-6E2F-F101-4F83-A59335472961}"/>
+                <a16:creationId xmlns:a16="http://schemas.microsoft.com/office/drawing/2014/main" xmlns="" id="{C5995D85-6E2F-F101-4F83-A59335472961}"/>
               </a:ext>
             </a:extLst>
           </p:cNvPr>
@@ -12890,7 +13152,10 @@
                       <a:pPr/>
                       <a14:m>
                         <m:oMathPara xmlns:m="http://schemas.openxmlformats.org/officeDocument/2006/math">
-                          <m:oMath>
+                          <m:oMathParaPr>
+                            <m:jc m:val="centerGroup"/>
+                          </m:oMathParaPr>
+                          <m:oMath xmlns:m="http://schemas.openxmlformats.org/officeDocument/2006/math">
                             <m:sSub>
                               <m:sSubPr>
                                 <m:ctrlPr>
@@ -12990,7 +13255,10 @@
                       <a:pPr/>
                       <a14:m>
                         <m:oMathPara xmlns:m="http://schemas.openxmlformats.org/officeDocument/2006/math">
-                          <m:oMath>
+                          <m:oMathParaPr>
+                            <m:jc m:val="centerGroup"/>
+                          </m:oMathParaPr>
+                          <m:oMath xmlns:m="http://schemas.openxmlformats.org/officeDocument/2006/math">
                             <m:sSub>
                               <m:sSubPr>
                                 <m:ctrlPr>
@@ -13961,7 +14229,10 @@
                       <a:pPr/>
                       <a14:m>
                         <m:oMathPara xmlns:m="http://schemas.openxmlformats.org/officeDocument/2006/math">
-                          <m:oMath>
+                          <m:oMathParaPr>
+                            <m:jc m:val="centerGroup"/>
+                          </m:oMathParaPr>
+                          <m:oMath xmlns:m="http://schemas.openxmlformats.org/officeDocument/2006/math">
                             <m:sSub>
                               <m:sSubPr>
                                 <m:ctrlPr>
@@ -14061,7 +14332,10 @@
                       <a:pPr/>
                       <a14:m>
                         <m:oMathPara xmlns:m="http://schemas.openxmlformats.org/officeDocument/2006/math">
-                          <m:oMath>
+                          <m:oMathParaPr>
+                            <m:jc m:val="centerGroup"/>
+                          </m:oMathParaPr>
+                          <m:oMath xmlns:m="http://schemas.openxmlformats.org/officeDocument/2006/math">
                             <m:sSub>
                               <m:sSubPr>
                                 <m:ctrlPr>
@@ -15032,7 +15306,10 @@
                       <a:pPr/>
                       <a14:m>
                         <m:oMathPara xmlns:m="http://schemas.openxmlformats.org/officeDocument/2006/math">
-                          <m:oMath>
+                          <m:oMathParaPr>
+                            <m:jc m:val="centerGroup"/>
+                          </m:oMathParaPr>
+                          <m:oMath xmlns:m="http://schemas.openxmlformats.org/officeDocument/2006/math">
                             <m:sSub>
                               <m:sSubPr>
                                 <m:ctrlPr>
@@ -15132,7 +15409,10 @@
                       <a:pPr/>
                       <a14:m>
                         <m:oMathPara xmlns:m="http://schemas.openxmlformats.org/officeDocument/2006/math">
-                          <m:oMath>
+                          <m:oMathParaPr>
+                            <m:jc m:val="centerGroup"/>
+                          </m:oMathParaPr>
+                          <m:oMath xmlns:m="http://schemas.openxmlformats.org/officeDocument/2006/math">
                             <m:sSub>
                               <m:sSubPr>
                                 <m:ctrlPr>
@@ -16103,7 +16383,10 @@
                       <a:pPr/>
                       <a14:m>
                         <m:oMathPara xmlns:m="http://schemas.openxmlformats.org/officeDocument/2006/math">
-                          <m:oMath>
+                          <m:oMathParaPr>
+                            <m:jc m:val="centerGroup"/>
+                          </m:oMathParaPr>
+                          <m:oMath xmlns:m="http://schemas.openxmlformats.org/officeDocument/2006/math">
                             <m:sSub>
                               <m:sSubPr>
                                 <m:ctrlPr>
@@ -16203,7 +16486,10 @@
                       <a:pPr/>
                       <a14:m>
                         <m:oMathPara xmlns:m="http://schemas.openxmlformats.org/officeDocument/2006/math">
-                          <m:oMath>
+                          <m:oMathParaPr>
+                            <m:jc m:val="centerGroup"/>
+                          </m:oMathParaPr>
+                          <m:oMath xmlns:m="http://schemas.openxmlformats.org/officeDocument/2006/math">
                             <m:sSub>
                               <m:sSubPr>
                                 <m:ctrlPr>
@@ -17085,7 +17371,10 @@
                     <a:pPr/>
                     <a14:m>
                       <m:oMathPara xmlns:m="http://schemas.openxmlformats.org/officeDocument/2006/math">
-                        <m:oMath>
+                        <m:oMathParaPr>
+                          <m:jc m:val="centerGroup"/>
+                        </m:oMathParaPr>
+                        <m:oMath xmlns:m="http://schemas.openxmlformats.org/officeDocument/2006/math">
                           <m:sSub>
                             <m:sSubPr>
                               <m:ctrlPr>
@@ -17184,7 +17473,10 @@
                     <a:pPr/>
                     <a14:m>
                       <m:oMathPara xmlns:m="http://schemas.openxmlformats.org/officeDocument/2006/math">
-                        <m:oMath>
+                        <m:oMathParaPr>
+                          <m:jc m:val="centerGroup"/>
+                        </m:oMathParaPr>
+                        <m:oMath xmlns:m="http://schemas.openxmlformats.org/officeDocument/2006/math">
                           <m:sSub>
                             <m:sSubPr>
                               <m:ctrlPr>
@@ -17283,7 +17575,10 @@
                     <a:pPr/>
                     <a14:m>
                       <m:oMathPara xmlns:m="http://schemas.openxmlformats.org/officeDocument/2006/math">
-                        <m:oMath>
+                        <m:oMathParaPr>
+                          <m:jc m:val="centerGroup"/>
+                        </m:oMathParaPr>
+                        <m:oMath xmlns:m="http://schemas.openxmlformats.org/officeDocument/2006/math">
                           <m:sSub>
                             <m:sSubPr>
                               <m:ctrlPr>
@@ -17382,7 +17677,10 @@
                     <a:pPr/>
                     <a14:m>
                       <m:oMathPara xmlns:m="http://schemas.openxmlformats.org/officeDocument/2006/math">
-                        <m:oMath>
+                        <m:oMathParaPr>
+                          <m:jc m:val="centerGroup"/>
+                        </m:oMathParaPr>
+                        <m:oMath xmlns:m="http://schemas.openxmlformats.org/officeDocument/2006/math">
                           <m:sSub>
                             <m:sSubPr>
                               <m:ctrlPr>
@@ -17481,7 +17779,10 @@
                     <a:pPr/>
                     <a14:m>
                       <m:oMathPara xmlns:m="http://schemas.openxmlformats.org/officeDocument/2006/math">
-                        <m:oMath>
+                        <m:oMathParaPr>
+                          <m:jc m:val="centerGroup"/>
+                        </m:oMathParaPr>
+                        <m:oMath xmlns:m="http://schemas.openxmlformats.org/officeDocument/2006/math">
                           <m:sSub>
                             <m:sSubPr>
                               <m:ctrlPr>
@@ -17580,7 +17881,10 @@
                     <a:pPr/>
                     <a14:m>
                       <m:oMathPara xmlns:m="http://schemas.openxmlformats.org/officeDocument/2006/math">
-                        <m:oMath>
+                        <m:oMathParaPr>
+                          <m:jc m:val="centerGroup"/>
+                        </m:oMathParaPr>
+                        <m:oMath xmlns:m="http://schemas.openxmlformats.org/officeDocument/2006/math">
                           <m:sSub>
                             <m:sSubPr>
                               <m:ctrlPr>
@@ -17679,7 +17983,10 @@
                     <a:pPr/>
                     <a14:m>
                       <m:oMathPara xmlns:m="http://schemas.openxmlformats.org/officeDocument/2006/math">
-                        <m:oMath>
+                        <m:oMathParaPr>
+                          <m:jc m:val="centerGroup"/>
+                        </m:oMathParaPr>
+                        <m:oMath xmlns:m="http://schemas.openxmlformats.org/officeDocument/2006/math">
                           <m:sSub>
                             <m:sSubPr>
                               <m:ctrlPr>
@@ -17778,7 +18085,10 @@
                     <a:pPr/>
                     <a14:m>
                       <m:oMathPara xmlns:m="http://schemas.openxmlformats.org/officeDocument/2006/math">
-                        <m:oMath>
+                        <m:oMathParaPr>
+                          <m:jc m:val="centerGroup"/>
+                        </m:oMathParaPr>
+                        <m:oMath xmlns:m="http://schemas.openxmlformats.org/officeDocument/2006/math">
                           <m:sSub>
                             <m:sSubPr>
                               <m:ctrlPr>
@@ -17877,7 +18187,10 @@
                     <a:pPr/>
                     <a14:m>
                       <m:oMathPara xmlns:m="http://schemas.openxmlformats.org/officeDocument/2006/math">
-                        <m:oMath>
+                        <m:oMathParaPr>
+                          <m:jc m:val="centerGroup"/>
+                        </m:oMathParaPr>
+                        <m:oMath xmlns:m="http://schemas.openxmlformats.org/officeDocument/2006/math">
                           <m:sSub>
                             <m:sSubPr>
                               <m:ctrlPr>
@@ -18057,7 +18370,7 @@
                 <p:cNvPr id="3" name="CaixaDeTexto 2">
                   <a:extLst>
                     <a:ext uri="{FF2B5EF4-FFF2-40B4-BE49-F238E27FC236}">
-                      <a16:creationId xmlns:a16="http://schemas.microsoft.com/office/drawing/2014/main" id="{569EE34C-BDCC-0D10-1E8B-D043A5A2353D}"/>
+                      <a16:creationId xmlns:a16="http://schemas.microsoft.com/office/drawing/2014/main" xmlns="" id="{569EE34C-BDCC-0D10-1E8B-D043A5A2353D}"/>
                     </a:ext>
                   </a:extLst>
                 </p:cNvPr>
@@ -18253,7 +18566,7 @@
                 <p:cNvPr id="10" name="CaixaDeTexto 9">
                   <a:extLst>
                     <a:ext uri="{FF2B5EF4-FFF2-40B4-BE49-F238E27FC236}">
-                      <a16:creationId xmlns:a16="http://schemas.microsoft.com/office/drawing/2014/main" id="{350798A0-066E-CC4D-389B-8D3FB768C8CB}"/>
+                      <a16:creationId xmlns:a16="http://schemas.microsoft.com/office/drawing/2014/main" xmlns="" id="{350798A0-066E-CC4D-389B-8D3FB768C8CB}"/>
                     </a:ext>
                   </a:extLst>
                 </p:cNvPr>
@@ -18446,7 +18759,7 @@
                 <p:cNvPr id="16" name="CaixaDeTexto 15">
                   <a:extLst>
                     <a:ext uri="{FF2B5EF4-FFF2-40B4-BE49-F238E27FC236}">
-                      <a16:creationId xmlns:a16="http://schemas.microsoft.com/office/drawing/2014/main" id="{1FF1EB9B-4390-9FF2-BD8A-6EE552F64DB4}"/>
+                      <a16:creationId xmlns:a16="http://schemas.microsoft.com/office/drawing/2014/main" xmlns="" id="{1FF1EB9B-4390-9FF2-BD8A-6EE552F64DB4}"/>
                     </a:ext>
                   </a:extLst>
                 </p:cNvPr>
@@ -18640,7 +18953,7 @@
               <p:cNvPr id="18" name="CaixaDeTexto 17">
                 <a:extLst>
                   <a:ext uri="{FF2B5EF4-FFF2-40B4-BE49-F238E27FC236}">
-                    <a16:creationId xmlns:a16="http://schemas.microsoft.com/office/drawing/2014/main" id="{5F594E2D-9C00-0397-8F33-5E9A964A065A}"/>
+                    <a16:creationId xmlns:a16="http://schemas.microsoft.com/office/drawing/2014/main" xmlns="" id="{5F594E2D-9C00-0397-8F33-5E9A964A065A}"/>
                   </a:ext>
                 </a:extLst>
               </p:cNvPr>
@@ -18751,7 +19064,7 @@
           <p:cNvPr id="19" name="Title 1">
             <a:extLst>
               <a:ext uri="{FF2B5EF4-FFF2-40B4-BE49-F238E27FC236}">
-                <a16:creationId xmlns:a16="http://schemas.microsoft.com/office/drawing/2014/main" id="{1A0E4709-46E3-F10D-1F0B-C228BEF03A1D}"/>
+                <a16:creationId xmlns:a16="http://schemas.microsoft.com/office/drawing/2014/main" xmlns="" id="{1A0E4709-46E3-F10D-1F0B-C228BEF03A1D}"/>
               </a:ext>
             </a:extLst>
           </p:cNvPr>
@@ -18784,7 +19097,7 @@
           <p:cNvPr id="23" name="Espaço Reservado para Conteúdo 2">
             <a:extLst>
               <a:ext uri="{FF2B5EF4-FFF2-40B4-BE49-F238E27FC236}">
-                <a16:creationId xmlns:a16="http://schemas.microsoft.com/office/drawing/2014/main" id="{1F869FA1-6ABE-A62C-D1D9-85E87B1FFE8E}"/>
+                <a16:creationId xmlns:a16="http://schemas.microsoft.com/office/drawing/2014/main" xmlns="" id="{1F869FA1-6ABE-A62C-D1D9-85E87B1FFE8E}"/>
               </a:ext>
             </a:extLst>
           </p:cNvPr>
@@ -18865,7 +19178,7 @@
         <p:cNvPr id="1" name="">
           <a:extLst>
             <a:ext uri="{FF2B5EF4-FFF2-40B4-BE49-F238E27FC236}">
-              <a16:creationId xmlns:a16="http://schemas.microsoft.com/office/drawing/2014/main" id="{2130EF1D-BFF8-2F82-4975-9C47E037612C}"/>
+              <a16:creationId xmlns:a16="http://schemas.microsoft.com/office/drawing/2014/main" xmlns="" id="{2130EF1D-BFF8-2F82-4975-9C47E037612C}"/>
             </a:ext>
           </a:extLst>
         </p:cNvPr>
@@ -18887,7 +19200,7 @@
               <p:cNvPr id="2" name="Título 1">
                 <a:extLst>
                   <a:ext uri="{FF2B5EF4-FFF2-40B4-BE49-F238E27FC236}">
-                    <a16:creationId xmlns:a16="http://schemas.microsoft.com/office/drawing/2014/main" id="{9E8992A0-634A-97EF-203B-8346A5DC6DBB}"/>
+                    <a16:creationId xmlns:a16="http://schemas.microsoft.com/office/drawing/2014/main" xmlns="" id="{9E8992A0-634A-97EF-203B-8346A5DC6DBB}"/>
                   </a:ext>
                 </a:extLst>
               </p:cNvPr>
@@ -18984,7 +19297,7 @@
               <p:cNvPr id="3" name="Espaço Reservado para Conteúdo 2">
                 <a:extLst>
                   <a:ext uri="{FF2B5EF4-FFF2-40B4-BE49-F238E27FC236}">
-                    <a16:creationId xmlns:a16="http://schemas.microsoft.com/office/drawing/2014/main" id="{0DC01E49-26FA-3E21-CFB3-E9EF7AE69543}"/>
+                    <a16:creationId xmlns:a16="http://schemas.microsoft.com/office/drawing/2014/main" xmlns="" id="{0DC01E49-26FA-3E21-CFB3-E9EF7AE69543}"/>
                   </a:ext>
                 </a:extLst>
               </p:cNvPr>
@@ -19277,7 +19590,7 @@
               <p:cNvPr id="4" name="Table 3">
                 <a:extLst>
                   <a:ext uri="{FF2B5EF4-FFF2-40B4-BE49-F238E27FC236}">
-                    <a16:creationId xmlns:a16="http://schemas.microsoft.com/office/drawing/2014/main" id="{EB28D29F-1291-5914-B146-FE53202329C4}"/>
+                    <a16:creationId xmlns:a16="http://schemas.microsoft.com/office/drawing/2014/main" xmlns="" id="{EB28D29F-1291-5914-B146-FE53202329C4}"/>
                   </a:ext>
                 </a:extLst>
               </p:cNvPr>
@@ -19304,35 +19617,35 @@
                     <a:gridCol w="1073505">
                       <a:extLst>
                         <a:ext uri="{9D8B030D-6E8A-4147-A177-3AD203B41FA5}">
-                          <a16:colId xmlns:a16="http://schemas.microsoft.com/office/drawing/2014/main" val="20000"/>
+                          <a16:colId xmlns:a16="http://schemas.microsoft.com/office/drawing/2014/main" xmlns="" val="20000"/>
                         </a:ext>
                       </a:extLst>
                     </a:gridCol>
                     <a:gridCol w="967120">
                       <a:extLst>
                         <a:ext uri="{9D8B030D-6E8A-4147-A177-3AD203B41FA5}">
-                          <a16:colId xmlns:a16="http://schemas.microsoft.com/office/drawing/2014/main" val="20001"/>
+                          <a16:colId xmlns:a16="http://schemas.microsoft.com/office/drawing/2014/main" xmlns="" val="20001"/>
                         </a:ext>
                       </a:extLst>
                     </a:gridCol>
                     <a:gridCol w="1411999">
                       <a:extLst>
                         <a:ext uri="{9D8B030D-6E8A-4147-A177-3AD203B41FA5}">
-                          <a16:colId xmlns:a16="http://schemas.microsoft.com/office/drawing/2014/main" val="20002"/>
+                          <a16:colId xmlns:a16="http://schemas.microsoft.com/office/drawing/2014/main" xmlns="" val="20002"/>
                         </a:ext>
                       </a:extLst>
                     </a:gridCol>
                     <a:gridCol w="1411999">
                       <a:extLst>
                         <a:ext uri="{9D8B030D-6E8A-4147-A177-3AD203B41FA5}">
-                          <a16:colId xmlns:a16="http://schemas.microsoft.com/office/drawing/2014/main" val="20003"/>
+                          <a16:colId xmlns:a16="http://schemas.microsoft.com/office/drawing/2014/main" xmlns="" val="20003"/>
                         </a:ext>
                       </a:extLst>
                     </a:gridCol>
                     <a:gridCol w="1411999">
                       <a:extLst>
                         <a:ext uri="{9D8B030D-6E8A-4147-A177-3AD203B41FA5}">
-                          <a16:colId xmlns:a16="http://schemas.microsoft.com/office/drawing/2014/main" val="20004"/>
+                          <a16:colId xmlns:a16="http://schemas.microsoft.com/office/drawing/2014/main" xmlns="" val="20004"/>
                         </a:ext>
                       </a:extLst>
                     </a:gridCol>
@@ -19729,7 +20042,7 @@
                     </a:tc>
                     <a:extLst>
                       <a:ext uri="{0D108BD9-81ED-4DB2-BD59-A6C34878D82A}">
-                        <a16:rowId xmlns:a16="http://schemas.microsoft.com/office/drawing/2014/main" val="10000"/>
+                        <a16:rowId xmlns:a16="http://schemas.microsoft.com/office/drawing/2014/main" xmlns="" val="10000"/>
                       </a:ext>
                     </a:extLst>
                   </a:tr>
@@ -20071,7 +20384,7 @@
                     </a:tc>
                     <a:extLst>
                       <a:ext uri="{0D108BD9-81ED-4DB2-BD59-A6C34878D82A}">
-                        <a16:rowId xmlns:a16="http://schemas.microsoft.com/office/drawing/2014/main" val="10001"/>
+                        <a16:rowId xmlns:a16="http://schemas.microsoft.com/office/drawing/2014/main" xmlns="" val="10001"/>
                       </a:ext>
                     </a:extLst>
                   </a:tr>
@@ -20413,7 +20726,7 @@
                     </a:tc>
                     <a:extLst>
                       <a:ext uri="{0D108BD9-81ED-4DB2-BD59-A6C34878D82A}">
-                        <a16:rowId xmlns:a16="http://schemas.microsoft.com/office/drawing/2014/main" val="10002"/>
+                        <a16:rowId xmlns:a16="http://schemas.microsoft.com/office/drawing/2014/main" xmlns="" val="10002"/>
                       </a:ext>
                     </a:extLst>
                   </a:tr>
@@ -20768,7 +21081,7 @@
                     </a:tc>
                     <a:extLst>
                       <a:ext uri="{0D108BD9-81ED-4DB2-BD59-A6C34878D82A}">
-                        <a16:rowId xmlns:a16="http://schemas.microsoft.com/office/drawing/2014/main" val="10003"/>
+                        <a16:rowId xmlns:a16="http://schemas.microsoft.com/office/drawing/2014/main" xmlns="" val="10003"/>
                       </a:ext>
                     </a:extLst>
                   </a:tr>
@@ -20868,7 +21181,7 @@
                     </a:tc>
                     <a:extLst>
                       <a:ext uri="{0D108BD9-81ED-4DB2-BD59-A6C34878D82A}">
-                        <a16:rowId xmlns:a16="http://schemas.microsoft.com/office/drawing/2014/main" val="10004"/>
+                        <a16:rowId xmlns:a16="http://schemas.microsoft.com/office/drawing/2014/main" xmlns="" val="10004"/>
                       </a:ext>
                     </a:extLst>
                   </a:tr>
@@ -22230,7 +22543,7 @@
               <p:cNvPr id="5" name="CaixaDeTexto 4">
                 <a:extLst>
                   <a:ext uri="{FF2B5EF4-FFF2-40B4-BE49-F238E27FC236}">
-                    <a16:creationId xmlns:a16="http://schemas.microsoft.com/office/drawing/2014/main" id="{23FA4BC7-C097-6186-8E44-F91117C6BABA}"/>
+                    <a16:creationId xmlns:a16="http://schemas.microsoft.com/office/drawing/2014/main" xmlns="" id="{23FA4BC7-C097-6186-8E44-F91117C6BABA}"/>
                   </a:ext>
                 </a:extLst>
               </p:cNvPr>
@@ -22377,7 +22690,7 @@
               <p:cNvPr id="2" name="Título 1">
                 <a:extLst>
                   <a:ext uri="{FF2B5EF4-FFF2-40B4-BE49-F238E27FC236}">
-                    <a16:creationId xmlns:a16="http://schemas.microsoft.com/office/drawing/2014/main" id="{6F3810FD-8C1E-E235-CDF3-A845D40ED979}"/>
+                    <a16:creationId xmlns:a16="http://schemas.microsoft.com/office/drawing/2014/main" xmlns="" id="{6F3810FD-8C1E-E235-CDF3-A845D40ED979}"/>
                   </a:ext>
                 </a:extLst>
               </p:cNvPr>
@@ -22465,7 +22778,7 @@
               <p:cNvPr id="4" name="Table 4">
                 <a:extLst>
                   <a:ext uri="{FF2B5EF4-FFF2-40B4-BE49-F238E27FC236}">
-                    <a16:creationId xmlns:a16="http://schemas.microsoft.com/office/drawing/2014/main" id="{F549053F-BDE4-C8D3-A996-B46C550898B5}"/>
+                    <a16:creationId xmlns:a16="http://schemas.microsoft.com/office/drawing/2014/main" xmlns="" id="{F549053F-BDE4-C8D3-A996-B46C550898B5}"/>
                   </a:ext>
                 </a:extLst>
               </p:cNvPr>
@@ -22492,35 +22805,35 @@
                     <a:gridCol w="1083731">
                       <a:extLst>
                         <a:ext uri="{9D8B030D-6E8A-4147-A177-3AD203B41FA5}">
-                          <a16:colId xmlns:a16="http://schemas.microsoft.com/office/drawing/2014/main" val="20000"/>
+                          <a16:colId xmlns:a16="http://schemas.microsoft.com/office/drawing/2014/main" xmlns="" val="20000"/>
                         </a:ext>
                       </a:extLst>
                     </a:gridCol>
                     <a:gridCol w="740353">
                       <a:extLst>
                         <a:ext uri="{9D8B030D-6E8A-4147-A177-3AD203B41FA5}">
-                          <a16:colId xmlns:a16="http://schemas.microsoft.com/office/drawing/2014/main" val="20001"/>
+                          <a16:colId xmlns:a16="http://schemas.microsoft.com/office/drawing/2014/main" xmlns="" val="20001"/>
                         </a:ext>
                       </a:extLst>
                     </a:gridCol>
                     <a:gridCol w="1262164">
                       <a:extLst>
                         <a:ext uri="{9D8B030D-6E8A-4147-A177-3AD203B41FA5}">
-                          <a16:colId xmlns:a16="http://schemas.microsoft.com/office/drawing/2014/main" val="20002"/>
+                          <a16:colId xmlns:a16="http://schemas.microsoft.com/office/drawing/2014/main" xmlns="" val="20002"/>
                         </a:ext>
                       </a:extLst>
                     </a:gridCol>
                     <a:gridCol w="1262164">
                       <a:extLst>
                         <a:ext uri="{9D8B030D-6E8A-4147-A177-3AD203B41FA5}">
-                          <a16:colId xmlns:a16="http://schemas.microsoft.com/office/drawing/2014/main" val="20003"/>
+                          <a16:colId xmlns:a16="http://schemas.microsoft.com/office/drawing/2014/main" xmlns="" val="20003"/>
                         </a:ext>
                       </a:extLst>
                     </a:gridCol>
                     <a:gridCol w="1262164">
                       <a:extLst>
                         <a:ext uri="{9D8B030D-6E8A-4147-A177-3AD203B41FA5}">
-                          <a16:colId xmlns:a16="http://schemas.microsoft.com/office/drawing/2014/main" val="20004"/>
+                          <a16:colId xmlns:a16="http://schemas.microsoft.com/office/drawing/2014/main" xmlns="" val="20004"/>
                         </a:ext>
                       </a:extLst>
                     </a:gridCol>
@@ -22965,7 +23278,7 @@
                     </a:tc>
                     <a:extLst>
                       <a:ext uri="{0D108BD9-81ED-4DB2-BD59-A6C34878D82A}">
-                        <a16:rowId xmlns:a16="http://schemas.microsoft.com/office/drawing/2014/main" val="10000"/>
+                        <a16:rowId xmlns:a16="http://schemas.microsoft.com/office/drawing/2014/main" xmlns="" val="10000"/>
                       </a:ext>
                     </a:extLst>
                   </a:tr>
@@ -23355,7 +23668,7 @@
                     </a:tc>
                     <a:extLst>
                       <a:ext uri="{0D108BD9-81ED-4DB2-BD59-A6C34878D82A}">
-                        <a16:rowId xmlns:a16="http://schemas.microsoft.com/office/drawing/2014/main" val="10001"/>
+                        <a16:rowId xmlns:a16="http://schemas.microsoft.com/office/drawing/2014/main" xmlns="" val="10001"/>
                       </a:ext>
                     </a:extLst>
                   </a:tr>
@@ -23745,7 +24058,7 @@
                     </a:tc>
                     <a:extLst>
                       <a:ext uri="{0D108BD9-81ED-4DB2-BD59-A6C34878D82A}">
-                        <a16:rowId xmlns:a16="http://schemas.microsoft.com/office/drawing/2014/main" val="10002"/>
+                        <a16:rowId xmlns:a16="http://schemas.microsoft.com/office/drawing/2014/main" xmlns="" val="10002"/>
                       </a:ext>
                     </a:extLst>
                   </a:tr>
@@ -24103,7 +24416,7 @@
                     </a:tc>
                     <a:extLst>
                       <a:ext uri="{0D108BD9-81ED-4DB2-BD59-A6C34878D82A}">
-                        <a16:rowId xmlns:a16="http://schemas.microsoft.com/office/drawing/2014/main" val="10003"/>
+                        <a16:rowId xmlns:a16="http://schemas.microsoft.com/office/drawing/2014/main" xmlns="" val="10003"/>
                       </a:ext>
                     </a:extLst>
                   </a:tr>
@@ -24203,7 +24516,7 @@
                     </a:tc>
                     <a:extLst>
                       <a:ext uri="{0D108BD9-81ED-4DB2-BD59-A6C34878D82A}">
-                        <a16:rowId xmlns:a16="http://schemas.microsoft.com/office/drawing/2014/main" val="10004"/>
+                        <a16:rowId xmlns:a16="http://schemas.microsoft.com/office/drawing/2014/main" xmlns="" val="10004"/>
                       </a:ext>
                     </a:extLst>
                   </a:tr>
@@ -25661,7 +25974,7 @@
               <p:cNvPr id="6" name="CaixaDeTexto 5">
                 <a:extLst>
                   <a:ext uri="{FF2B5EF4-FFF2-40B4-BE49-F238E27FC236}">
-                    <a16:creationId xmlns:a16="http://schemas.microsoft.com/office/drawing/2014/main" id="{B7DCAE37-0B68-31FE-C4B4-15B3A38CF8F2}"/>
+                    <a16:creationId xmlns:a16="http://schemas.microsoft.com/office/drawing/2014/main" xmlns="" id="{B7DCAE37-0B68-31FE-C4B4-15B3A38CF8F2}"/>
                   </a:ext>
                 </a:extLst>
               </p:cNvPr>
@@ -25778,7 +26091,7 @@
               <p:cNvPr id="3" name="Espaço Reservado para Conteúdo 2">
                 <a:extLst>
                   <a:ext uri="{FF2B5EF4-FFF2-40B4-BE49-F238E27FC236}">
-                    <a16:creationId xmlns:a16="http://schemas.microsoft.com/office/drawing/2014/main" id="{AFB9017A-4D48-F779-0F83-6B9ADCB47688}"/>
+                    <a16:creationId xmlns:a16="http://schemas.microsoft.com/office/drawing/2014/main" xmlns="" id="{AFB9017A-4D48-F779-0F83-6B9ADCB47688}"/>
                   </a:ext>
                 </a:extLst>
               </p:cNvPr>
@@ -26012,7 +26325,7 @@
         <p:cNvPr id="1" name="">
           <a:extLst>
             <a:ext uri="{FF2B5EF4-FFF2-40B4-BE49-F238E27FC236}">
-              <a16:creationId xmlns:a16="http://schemas.microsoft.com/office/drawing/2014/main" id="{62563306-0FB6-57F4-8340-A91D68410238}"/>
+              <a16:creationId xmlns:a16="http://schemas.microsoft.com/office/drawing/2014/main" xmlns="" id="{62563306-0FB6-57F4-8340-A91D68410238}"/>
             </a:ext>
           </a:extLst>
         </p:cNvPr>
@@ -26034,7 +26347,7 @@
               <p:cNvPr id="2" name="Título 1">
                 <a:extLst>
                   <a:ext uri="{FF2B5EF4-FFF2-40B4-BE49-F238E27FC236}">
-                    <a16:creationId xmlns:a16="http://schemas.microsoft.com/office/drawing/2014/main" id="{29383E70-93A4-E908-802C-517D3ED3BE0B}"/>
+                    <a16:creationId xmlns:a16="http://schemas.microsoft.com/office/drawing/2014/main" xmlns="" id="{29383E70-93A4-E908-802C-517D3ED3BE0B}"/>
                   </a:ext>
                 </a:extLst>
               </p:cNvPr>
@@ -26122,7 +26435,7 @@
               <p:cNvPr id="5" name="Table 5">
                 <a:extLst>
                   <a:ext uri="{FF2B5EF4-FFF2-40B4-BE49-F238E27FC236}">
-                    <a16:creationId xmlns:a16="http://schemas.microsoft.com/office/drawing/2014/main" id="{7ECD143D-AF30-8E23-B045-8B71B6EDF91A}"/>
+                    <a16:creationId xmlns:a16="http://schemas.microsoft.com/office/drawing/2014/main" xmlns="" id="{7ECD143D-AF30-8E23-B045-8B71B6EDF91A}"/>
                   </a:ext>
                 </a:extLst>
               </p:cNvPr>
@@ -26149,35 +26462,35 @@
                     <a:gridCol w="1128888">
                       <a:extLst>
                         <a:ext uri="{9D8B030D-6E8A-4147-A177-3AD203B41FA5}">
-                          <a16:colId xmlns:a16="http://schemas.microsoft.com/office/drawing/2014/main" val="20000"/>
+                          <a16:colId xmlns:a16="http://schemas.microsoft.com/office/drawing/2014/main" xmlns="" val="20000"/>
                         </a:ext>
                       </a:extLst>
                     </a:gridCol>
                     <a:gridCol w="695197">
                       <a:extLst>
                         <a:ext uri="{9D8B030D-6E8A-4147-A177-3AD203B41FA5}">
-                          <a16:colId xmlns:a16="http://schemas.microsoft.com/office/drawing/2014/main" val="20001"/>
+                          <a16:colId xmlns:a16="http://schemas.microsoft.com/office/drawing/2014/main" xmlns="" val="20001"/>
                         </a:ext>
                       </a:extLst>
                     </a:gridCol>
                     <a:gridCol w="1262164">
                       <a:extLst>
                         <a:ext uri="{9D8B030D-6E8A-4147-A177-3AD203B41FA5}">
-                          <a16:colId xmlns:a16="http://schemas.microsoft.com/office/drawing/2014/main" val="20002"/>
+                          <a16:colId xmlns:a16="http://schemas.microsoft.com/office/drawing/2014/main" xmlns="" val="20002"/>
                         </a:ext>
                       </a:extLst>
                     </a:gridCol>
                     <a:gridCol w="1262164">
                       <a:extLst>
                         <a:ext uri="{9D8B030D-6E8A-4147-A177-3AD203B41FA5}">
-                          <a16:colId xmlns:a16="http://schemas.microsoft.com/office/drawing/2014/main" val="20003"/>
+                          <a16:colId xmlns:a16="http://schemas.microsoft.com/office/drawing/2014/main" xmlns="" val="20003"/>
                         </a:ext>
                       </a:extLst>
                     </a:gridCol>
                     <a:gridCol w="1262164">
                       <a:extLst>
                         <a:ext uri="{9D8B030D-6E8A-4147-A177-3AD203B41FA5}">
-                          <a16:colId xmlns:a16="http://schemas.microsoft.com/office/drawing/2014/main" val="20004"/>
+                          <a16:colId xmlns:a16="http://schemas.microsoft.com/office/drawing/2014/main" xmlns="" val="20004"/>
                         </a:ext>
                       </a:extLst>
                     </a:gridCol>
@@ -26638,7 +26951,7 @@
                     </a:tc>
                     <a:extLst>
                       <a:ext uri="{0D108BD9-81ED-4DB2-BD59-A6C34878D82A}">
-                        <a16:rowId xmlns:a16="http://schemas.microsoft.com/office/drawing/2014/main" val="10000"/>
+                        <a16:rowId xmlns:a16="http://schemas.microsoft.com/office/drawing/2014/main" xmlns="" val="10000"/>
                       </a:ext>
                     </a:extLst>
                   </a:tr>
@@ -27044,7 +27357,7 @@
                     </a:tc>
                     <a:extLst>
                       <a:ext uri="{0D108BD9-81ED-4DB2-BD59-A6C34878D82A}">
-                        <a16:rowId xmlns:a16="http://schemas.microsoft.com/office/drawing/2014/main" val="10001"/>
+                        <a16:rowId xmlns:a16="http://schemas.microsoft.com/office/drawing/2014/main" xmlns="" val="10001"/>
                       </a:ext>
                     </a:extLst>
                   </a:tr>
@@ -27450,7 +27763,7 @@
                     </a:tc>
                     <a:extLst>
                       <a:ext uri="{0D108BD9-81ED-4DB2-BD59-A6C34878D82A}">
-                        <a16:rowId xmlns:a16="http://schemas.microsoft.com/office/drawing/2014/main" val="10002"/>
+                        <a16:rowId xmlns:a16="http://schemas.microsoft.com/office/drawing/2014/main" xmlns="" val="10002"/>
                       </a:ext>
                     </a:extLst>
                   </a:tr>
@@ -27824,7 +28137,7 @@
                     </a:tc>
                     <a:extLst>
                       <a:ext uri="{0D108BD9-81ED-4DB2-BD59-A6C34878D82A}">
-                        <a16:rowId xmlns:a16="http://schemas.microsoft.com/office/drawing/2014/main" val="10003"/>
+                        <a16:rowId xmlns:a16="http://schemas.microsoft.com/office/drawing/2014/main" xmlns="" val="10003"/>
                       </a:ext>
                     </a:extLst>
                   </a:tr>
@@ -27924,7 +28237,7 @@
                     </a:tc>
                     <a:extLst>
                       <a:ext uri="{0D108BD9-81ED-4DB2-BD59-A6C34878D82A}">
-                        <a16:rowId xmlns:a16="http://schemas.microsoft.com/office/drawing/2014/main" val="10004"/>
+                        <a16:rowId xmlns:a16="http://schemas.microsoft.com/office/drawing/2014/main" xmlns="" val="10004"/>
                       </a:ext>
                     </a:extLst>
                   </a:tr>
@@ -29430,7 +29743,7 @@
               <p:cNvPr id="7" name="CaixaDeTexto 6">
                 <a:extLst>
                   <a:ext uri="{FF2B5EF4-FFF2-40B4-BE49-F238E27FC236}">
-                    <a16:creationId xmlns:a16="http://schemas.microsoft.com/office/drawing/2014/main" id="{A5330AE9-A322-005B-2219-EB4A7E59F328}"/>
+                    <a16:creationId xmlns:a16="http://schemas.microsoft.com/office/drawing/2014/main" xmlns="" id="{A5330AE9-A322-005B-2219-EB4A7E59F328}"/>
                   </a:ext>
                 </a:extLst>
               </p:cNvPr>
@@ -29546,14 +29859,14 @@
           </p:sp>
         </mc:Fallback>
       </mc:AlternateContent>
-      <mc:AlternateContent xmlns:mc="http://schemas.openxmlformats.org/markup-compatibility/2006">
-        <mc:Choice xmlns:a14="http://schemas.microsoft.com/office/drawing/2010/main" Requires="a14">
+      <mc:AlternateContent xmlns:mc="http://schemas.openxmlformats.org/markup-compatibility/2006" xmlns:a14="http://schemas.microsoft.com/office/drawing/2010/main">
+        <mc:Choice Requires="a14">
           <p:sp>
             <p:nvSpPr>
               <p:cNvPr id="3" name="Espaço Reservado para Conteúdo 2">
                 <a:extLst>
                   <a:ext uri="{FF2B5EF4-FFF2-40B4-BE49-F238E27FC236}">
-                    <a16:creationId xmlns:a16="http://schemas.microsoft.com/office/drawing/2014/main" id="{9DDD8A4E-6FAD-9F48-24F8-EBBD83CDE404}"/>
+                    <a16:creationId xmlns:a16="http://schemas.microsoft.com/office/drawing/2014/main" xmlns="" id="{9DDD8A4E-6FAD-9F48-24F8-EBBD83CDE404}"/>
                   </a:ext>
                 </a:extLst>
               </p:cNvPr>
@@ -29772,7 +30085,7 @@
             </p:txBody>
           </p:sp>
         </mc:Choice>
-        <mc:Fallback>
+        <mc:Fallback xmlns="">
           <p:sp>
             <p:nvSpPr>
               <p:cNvPr id="3" name="Espaço Reservado para Conteúdo 2">
@@ -29851,7 +30164,7 @@
           <p:cNvPr id="2" name="Title 1">
             <a:extLst>
               <a:ext uri="{FF2B5EF4-FFF2-40B4-BE49-F238E27FC236}">
-                <a16:creationId xmlns:a16="http://schemas.microsoft.com/office/drawing/2014/main" id="{9EA478C6-7197-E66C-805B-12C1C5C166DC}"/>
+                <a16:creationId xmlns:a16="http://schemas.microsoft.com/office/drawing/2014/main" xmlns="" id="{9EA478C6-7197-E66C-805B-12C1C5C166DC}"/>
               </a:ext>
             </a:extLst>
           </p:cNvPr>
@@ -29880,7 +30193,7 @@
           <p:cNvPr id="3" name="Content Placeholder 2">
             <a:extLst>
               <a:ext uri="{FF2B5EF4-FFF2-40B4-BE49-F238E27FC236}">
-                <a16:creationId xmlns:a16="http://schemas.microsoft.com/office/drawing/2014/main" id="{2B0A3077-842E-10B4-83E8-F6B58E0934BA}"/>
+                <a16:creationId xmlns:a16="http://schemas.microsoft.com/office/drawing/2014/main" xmlns="" id="{2B0A3077-842E-10B4-83E8-F6B58E0934BA}"/>
               </a:ext>
             </a:extLst>
           </p:cNvPr>
@@ -29909,14 +30222,14 @@
           </a:p>
         </p:txBody>
       </p:sp>
-      <mc:AlternateContent xmlns:mc="http://schemas.openxmlformats.org/markup-compatibility/2006">
-        <mc:Choice xmlns:a14="http://schemas.microsoft.com/office/drawing/2010/main" Requires="a14">
+      <mc:AlternateContent xmlns:mc="http://schemas.openxmlformats.org/markup-compatibility/2006" xmlns:a14="http://schemas.microsoft.com/office/drawing/2010/main">
+        <mc:Choice Requires="a14">
           <p:sp>
             <p:nvSpPr>
               <p:cNvPr id="4" name="CaixaDeTexto 3">
                 <a:extLst>
                   <a:ext uri="{FF2B5EF4-FFF2-40B4-BE49-F238E27FC236}">
-                    <a16:creationId xmlns:a16="http://schemas.microsoft.com/office/drawing/2014/main" id="{BCF716F4-6740-06F0-4F7F-43E81B6588C9}"/>
+                    <a16:creationId xmlns:a16="http://schemas.microsoft.com/office/drawing/2014/main" xmlns="" id="{BCF716F4-6740-06F0-4F7F-43E81B6588C9}"/>
                   </a:ext>
                 </a:extLst>
               </p:cNvPr>
@@ -29942,7 +30255,10 @@
                 <a:pPr/>
                 <a14:m>
                   <m:oMathPara xmlns:m="http://schemas.openxmlformats.org/officeDocument/2006/math">
-                    <m:oMath>
+                    <m:oMathParaPr>
+                      <m:jc m:val="centerGroup"/>
+                    </m:oMathParaPr>
+                    <m:oMath xmlns:m="http://schemas.openxmlformats.org/officeDocument/2006/math">
                       <m:r>
                         <m:rPr>
                           <m:sty m:val="p"/>
@@ -29985,7 +30301,7 @@
                       <m:f>
                         <m:fPr>
                           <m:ctrlPr>
-                            <a:rPr lang="pt-BR" sz="3200" b="0" i="0" smtClean="0">
+                            <a:rPr lang="pt-BR" sz="3200" b="0" i="1" smtClean="0">
                               <a:latin typeface="Cambria Math" panose="02040503050406030204" pitchFamily="18" charset="0"/>
                             </a:rPr>
                           </m:ctrlPr>
@@ -30192,7 +30508,7 @@
             </p:txBody>
           </p:sp>
         </mc:Choice>
-        <mc:Fallback>
+        <mc:Fallback xmlns="">
           <p:sp>
             <p:nvSpPr>
               <p:cNvPr id="4" name="CaixaDeTexto 3">
@@ -30242,7 +30558,7 @@
           <p:cNvPr id="5" name="Table 4">
             <a:extLst>
               <a:ext uri="{FF2B5EF4-FFF2-40B4-BE49-F238E27FC236}">
-                <a16:creationId xmlns:a16="http://schemas.microsoft.com/office/drawing/2014/main" id="{91DB5CB5-58D6-D6F0-CAE4-AE7FAAC84F35}"/>
+                <a16:creationId xmlns:a16="http://schemas.microsoft.com/office/drawing/2014/main" xmlns="" id="{91DB5CB5-58D6-D6F0-CAE4-AE7FAAC84F35}"/>
               </a:ext>
             </a:extLst>
           </p:cNvPr>
@@ -30271,21 +30587,21 @@
                 <a:gridCol w="863601">
                   <a:extLst>
                     <a:ext uri="{9D8B030D-6E8A-4147-A177-3AD203B41FA5}">
-                      <a16:colId xmlns:a16="http://schemas.microsoft.com/office/drawing/2014/main" val="3867026763"/>
+                      <a16:colId xmlns:a16="http://schemas.microsoft.com/office/drawing/2014/main" xmlns="" val="3867026763"/>
                     </a:ext>
                   </a:extLst>
                 </a:gridCol>
                 <a:gridCol w="863601">
                   <a:extLst>
                     <a:ext uri="{9D8B030D-6E8A-4147-A177-3AD203B41FA5}">
-                      <a16:colId xmlns:a16="http://schemas.microsoft.com/office/drawing/2014/main" val="2035180929"/>
+                      <a16:colId xmlns:a16="http://schemas.microsoft.com/office/drawing/2014/main" xmlns="" val="2035180929"/>
                     </a:ext>
                   </a:extLst>
                 </a:gridCol>
                 <a:gridCol w="863601">
                   <a:extLst>
                     <a:ext uri="{9D8B030D-6E8A-4147-A177-3AD203B41FA5}">
-                      <a16:colId xmlns:a16="http://schemas.microsoft.com/office/drawing/2014/main" val="1096411002"/>
+                      <a16:colId xmlns:a16="http://schemas.microsoft.com/office/drawing/2014/main" xmlns="" val="1096411002"/>
                     </a:ext>
                   </a:extLst>
                 </a:gridCol>
@@ -30458,7 +30774,7 @@
                 </a:tc>
                 <a:extLst>
                   <a:ext uri="{0D108BD9-81ED-4DB2-BD59-A6C34878D82A}">
-                    <a16:rowId xmlns:a16="http://schemas.microsoft.com/office/drawing/2014/main" val="3112607757"/>
+                    <a16:rowId xmlns:a16="http://schemas.microsoft.com/office/drawing/2014/main" xmlns="" val="3112607757"/>
                   </a:ext>
                 </a:extLst>
               </a:tr>
@@ -30644,7 +30960,7 @@
                 </a:tc>
                 <a:extLst>
                   <a:ext uri="{0D108BD9-81ED-4DB2-BD59-A6C34878D82A}">
-                    <a16:rowId xmlns:a16="http://schemas.microsoft.com/office/drawing/2014/main" val="324473955"/>
+                    <a16:rowId xmlns:a16="http://schemas.microsoft.com/office/drawing/2014/main" xmlns="" val="324473955"/>
                   </a:ext>
                 </a:extLst>
               </a:tr>
@@ -30816,7 +31132,7 @@
                 </a:tc>
                 <a:extLst>
                   <a:ext uri="{0D108BD9-81ED-4DB2-BD59-A6C34878D82A}">
-                    <a16:rowId xmlns:a16="http://schemas.microsoft.com/office/drawing/2014/main" val="493002121"/>
+                    <a16:rowId xmlns:a16="http://schemas.microsoft.com/office/drawing/2014/main" xmlns="" val="493002121"/>
                   </a:ext>
                 </a:extLst>
               </a:tr>
@@ -30829,7 +31145,7 @@
           <p:cNvPr id="6" name="TextBox 5">
             <a:extLst>
               <a:ext uri="{FF2B5EF4-FFF2-40B4-BE49-F238E27FC236}">
-                <a16:creationId xmlns:a16="http://schemas.microsoft.com/office/drawing/2014/main" id="{4FB9EF39-B90C-8E8A-FAA1-894F1357DF08}"/>
+                <a16:creationId xmlns:a16="http://schemas.microsoft.com/office/drawing/2014/main" xmlns="" id="{4FB9EF39-B90C-8E8A-FAA1-894F1357DF08}"/>
               </a:ext>
             </a:extLst>
           </p:cNvPr>
@@ -30865,7 +31181,7 @@
           <p:cNvPr id="7" name="TextBox 6">
             <a:extLst>
               <a:ext uri="{FF2B5EF4-FFF2-40B4-BE49-F238E27FC236}">
-                <a16:creationId xmlns:a16="http://schemas.microsoft.com/office/drawing/2014/main" id="{EE98951F-EC06-3600-8596-2C37C9D3F470}"/>
+                <a16:creationId xmlns:a16="http://schemas.microsoft.com/office/drawing/2014/main" xmlns="" id="{EE98951F-EC06-3600-8596-2C37C9D3F470}"/>
               </a:ext>
             </a:extLst>
           </p:cNvPr>
@@ -30901,7 +31217,7 @@
           <p:cNvPr id="8" name="TextBox 7">
             <a:extLst>
               <a:ext uri="{FF2B5EF4-FFF2-40B4-BE49-F238E27FC236}">
-                <a16:creationId xmlns:a16="http://schemas.microsoft.com/office/drawing/2014/main" id="{04A648ED-ACCF-A0E8-A7FF-A93266861237}"/>
+                <a16:creationId xmlns:a16="http://schemas.microsoft.com/office/drawing/2014/main" xmlns="" id="{04A648ED-ACCF-A0E8-A7FF-A93266861237}"/>
               </a:ext>
             </a:extLst>
           </p:cNvPr>
@@ -30937,7 +31253,7 @@
           <p:cNvPr id="9" name="TextBox 8">
             <a:extLst>
               <a:ext uri="{FF2B5EF4-FFF2-40B4-BE49-F238E27FC236}">
-                <a16:creationId xmlns:a16="http://schemas.microsoft.com/office/drawing/2014/main" id="{0F24060A-F1D6-9DB5-76BA-3A64C1CCFBA2}"/>
+                <a16:creationId xmlns:a16="http://schemas.microsoft.com/office/drawing/2014/main" xmlns="" id="{0F24060A-F1D6-9DB5-76BA-3A64C1CCFBA2}"/>
               </a:ext>
             </a:extLst>
           </p:cNvPr>
@@ -30973,7 +31289,7 @@
           <p:cNvPr id="10" name="TextBox 9">
             <a:extLst>
               <a:ext uri="{FF2B5EF4-FFF2-40B4-BE49-F238E27FC236}">
-                <a16:creationId xmlns:a16="http://schemas.microsoft.com/office/drawing/2014/main" id="{504D6480-6017-F7EF-CBF8-45BE5E5980C6}"/>
+                <a16:creationId xmlns:a16="http://schemas.microsoft.com/office/drawing/2014/main" xmlns="" id="{504D6480-6017-F7EF-CBF8-45BE5E5980C6}"/>
               </a:ext>
             </a:extLst>
           </p:cNvPr>
@@ -31009,7 +31325,7 @@
           <p:cNvPr id="11" name="TextBox 10">
             <a:extLst>
               <a:ext uri="{FF2B5EF4-FFF2-40B4-BE49-F238E27FC236}">
-                <a16:creationId xmlns:a16="http://schemas.microsoft.com/office/drawing/2014/main" id="{40EA34B0-3C80-7E6E-DB17-529180947558}"/>
+                <a16:creationId xmlns:a16="http://schemas.microsoft.com/office/drawing/2014/main" xmlns="" id="{40EA34B0-3C80-7E6E-DB17-529180947558}"/>
               </a:ext>
             </a:extLst>
           </p:cNvPr>
@@ -31067,7 +31383,10 @@
                 <a:pPr/>
                 <a14:m>
                   <m:oMathPara xmlns:m="http://schemas.openxmlformats.org/officeDocument/2006/math">
-                    <m:oMath>
+                    <m:oMathParaPr>
+                      <m:jc m:val="centerGroup"/>
+                    </m:oMathParaPr>
+                    <m:oMath xmlns:m="http://schemas.openxmlformats.org/officeDocument/2006/math">
                       <m:r>
                         <a:rPr lang="pt-BR" sz="2800" b="0" i="1" smtClean="0">
                           <a:latin typeface="Cambria Math" panose="02040503050406030204" pitchFamily="18" charset="0"/>
@@ -31162,7 +31481,7 @@
           <p:cNvPr id="3" name="Content Placeholder 2">
             <a:extLst>
               <a:ext uri="{FF2B5EF4-FFF2-40B4-BE49-F238E27FC236}">
-                <a16:creationId xmlns:a16="http://schemas.microsoft.com/office/drawing/2014/main" id="{21699DC6-5E81-1EFB-D850-9CA5951E88B7}"/>
+                <a16:creationId xmlns:a16="http://schemas.microsoft.com/office/drawing/2014/main" xmlns="" id="{21699DC6-5E81-1EFB-D850-9CA5951E88B7}"/>
               </a:ext>
             </a:extLst>
           </p:cNvPr>
@@ -31216,7 +31535,7 @@
           <p:cNvPr id="1026" name="Picture 2" descr="7 razões pelas quais você não deve se desesperar com a vigência imediata da  LGPD">
             <a:extLst>
               <a:ext uri="{FF2B5EF4-FFF2-40B4-BE49-F238E27FC236}">
-                <a16:creationId xmlns:a16="http://schemas.microsoft.com/office/drawing/2014/main" id="{3834F76E-882E-CE2E-2975-876D4AFD7AA4}"/>
+                <a16:creationId xmlns:a16="http://schemas.microsoft.com/office/drawing/2014/main" xmlns="" id="{3834F76E-882E-CE2E-2975-876D4AFD7AA4}"/>
               </a:ext>
             </a:extLst>
           </p:cNvPr>
@@ -31293,7 +31612,7 @@
           <p:cNvPr id="2" name="Title 1">
             <a:extLst>
               <a:ext uri="{FF2B5EF4-FFF2-40B4-BE49-F238E27FC236}">
-                <a16:creationId xmlns:a16="http://schemas.microsoft.com/office/drawing/2014/main" id="{F1CB30D0-D052-EC03-3C25-35C106AA1077}"/>
+                <a16:creationId xmlns:a16="http://schemas.microsoft.com/office/drawing/2014/main" xmlns="" id="{F1CB30D0-D052-EC03-3C25-35C106AA1077}"/>
               </a:ext>
             </a:extLst>
           </p:cNvPr>
@@ -31322,7 +31641,7 @@
           <p:cNvPr id="2050" name="Picture 2" descr="Validate me Constructive criticism permitted – @gallusrostromegalus on  Tumblr">
             <a:extLst>
               <a:ext uri="{FF2B5EF4-FFF2-40B4-BE49-F238E27FC236}">
-                <a16:creationId xmlns:a16="http://schemas.microsoft.com/office/drawing/2014/main" id="{A9C68C0F-3A42-8D60-0B8A-979695E4072E}"/>
+                <a16:creationId xmlns:a16="http://schemas.microsoft.com/office/drawing/2014/main" xmlns="" id="{A9C68C0F-3A42-8D60-0B8A-979695E4072E}"/>
               </a:ext>
             </a:extLst>
           </p:cNvPr>
@@ -31489,7 +31808,7 @@
           <p:cNvPr id="2" name="Título 1">
             <a:extLst>
               <a:ext uri="{FF2B5EF4-FFF2-40B4-BE49-F238E27FC236}">
-                <a16:creationId xmlns:a16="http://schemas.microsoft.com/office/drawing/2014/main" id="{9CD00B3E-85D7-8B25-6629-4A85FF36133A}"/>
+                <a16:creationId xmlns:a16="http://schemas.microsoft.com/office/drawing/2014/main" xmlns="" id="{9CD00B3E-85D7-8B25-6629-4A85FF36133A}"/>
               </a:ext>
             </a:extLst>
           </p:cNvPr>
@@ -31517,7 +31836,7 @@
           <p:cNvPr id="3" name="Espaço Reservado para Conteúdo 2">
             <a:extLst>
               <a:ext uri="{FF2B5EF4-FFF2-40B4-BE49-F238E27FC236}">
-                <a16:creationId xmlns:a16="http://schemas.microsoft.com/office/drawing/2014/main" id="{9730104F-E6BA-B308-644A-11A7E4939EBD}"/>
+                <a16:creationId xmlns:a16="http://schemas.microsoft.com/office/drawing/2014/main" xmlns="" id="{9730104F-E6BA-B308-644A-11A7E4939EBD}"/>
               </a:ext>
             </a:extLst>
           </p:cNvPr>
@@ -31553,7 +31872,7 @@
           <p:cNvPr id="2052" name="Picture 4" descr="Project Jupyter | Try Jupyter">
             <a:extLst>
               <a:ext uri="{FF2B5EF4-FFF2-40B4-BE49-F238E27FC236}">
-                <a16:creationId xmlns:a16="http://schemas.microsoft.com/office/drawing/2014/main" id="{FC70A9A5-A2C7-C005-C6C5-A9FF775654D9}"/>
+                <a16:creationId xmlns:a16="http://schemas.microsoft.com/office/drawing/2014/main" xmlns="" id="{FC70A9A5-A2C7-C005-C6C5-A9FF775654D9}"/>
               </a:ext>
             </a:extLst>
           </p:cNvPr>
@@ -31600,7 +31919,7 @@
           <p:cNvPr id="2056" name="Picture 8" descr="Google Colaboratory Colab - Guía Completa Español - Marketing Branding">
             <a:extLst>
               <a:ext uri="{FF2B5EF4-FFF2-40B4-BE49-F238E27FC236}">
-                <a16:creationId xmlns:a16="http://schemas.microsoft.com/office/drawing/2014/main" id="{8A007768-2032-FE11-22C9-9394A0EF02EF}"/>
+                <a16:creationId xmlns:a16="http://schemas.microsoft.com/office/drawing/2014/main" xmlns="" id="{8A007768-2032-FE11-22C9-9394A0EF02EF}"/>
               </a:ext>
             </a:extLst>
           </p:cNvPr>
@@ -31645,7 +31964,7 @@
           <p:cNvPr id="2058" name="Picture 10" descr="IT12A01: FUNDAMENTALS OF PYTHON PROGRAMMING (SF) (SYNCHRONOUS E-LEARNING) -  NTUC LearningHub">
             <a:extLst>
               <a:ext uri="{FF2B5EF4-FFF2-40B4-BE49-F238E27FC236}">
-                <a16:creationId xmlns:a16="http://schemas.microsoft.com/office/drawing/2014/main" id="{80EDF8DB-E749-8471-3ACA-2FFE3006FC46}"/>
+                <a16:creationId xmlns:a16="http://schemas.microsoft.com/office/drawing/2014/main" xmlns="" id="{80EDF8DB-E749-8471-3ACA-2FFE3006FC46}"/>
               </a:ext>
             </a:extLst>
           </p:cNvPr>
@@ -31690,7 +32009,7 @@
           <p:cNvPr id="10" name="Sinal de Adição 9">
             <a:extLst>
               <a:ext uri="{FF2B5EF4-FFF2-40B4-BE49-F238E27FC236}">
-                <a16:creationId xmlns:a16="http://schemas.microsoft.com/office/drawing/2014/main" id="{C6DC4B29-EABA-20F7-BB46-C33BEC93E2DD}"/>
+                <a16:creationId xmlns:a16="http://schemas.microsoft.com/office/drawing/2014/main" xmlns="" id="{C6DC4B29-EABA-20F7-BB46-C33BEC93E2DD}"/>
               </a:ext>
             </a:extLst>
           </p:cNvPr>
@@ -31738,7 +32057,7 @@
           <p:cNvPr id="11" name="Sinal de Adição 10">
             <a:extLst>
               <a:ext uri="{FF2B5EF4-FFF2-40B4-BE49-F238E27FC236}">
-                <a16:creationId xmlns:a16="http://schemas.microsoft.com/office/drawing/2014/main" id="{FF65B64B-136B-DCC4-8A01-509D3D5CD19F}"/>
+                <a16:creationId xmlns:a16="http://schemas.microsoft.com/office/drawing/2014/main" xmlns="" id="{FF65B64B-136B-DCC4-8A01-509D3D5CD19F}"/>
               </a:ext>
             </a:extLst>
           </p:cNvPr>
@@ -31816,7 +32135,7 @@
           <p:cNvPr id="2" name="Title 1">
             <a:extLst>
               <a:ext uri="{FF2B5EF4-FFF2-40B4-BE49-F238E27FC236}">
-                <a16:creationId xmlns:a16="http://schemas.microsoft.com/office/drawing/2014/main" id="{CF49AE95-3E0A-F9BB-A3FD-4C328EF25334}"/>
+                <a16:creationId xmlns:a16="http://schemas.microsoft.com/office/drawing/2014/main" xmlns="" id="{CF49AE95-3E0A-F9BB-A3FD-4C328EF25334}"/>
               </a:ext>
             </a:extLst>
           </p:cNvPr>
@@ -31845,7 +32164,7 @@
           <p:cNvPr id="3" name="Content Placeholder 2">
             <a:extLst>
               <a:ext uri="{FF2B5EF4-FFF2-40B4-BE49-F238E27FC236}">
-                <a16:creationId xmlns:a16="http://schemas.microsoft.com/office/drawing/2014/main" id="{A431927B-FE56-CB25-3ECF-AB5E92A7DC71}"/>
+                <a16:creationId xmlns:a16="http://schemas.microsoft.com/office/drawing/2014/main" xmlns="" id="{A431927B-FE56-CB25-3ECF-AB5E92A7DC71}"/>
               </a:ext>
             </a:extLst>
           </p:cNvPr>
@@ -31927,7 +32246,7 @@
           <p:cNvPr id="4" name="Título 1">
             <a:extLst>
               <a:ext uri="{FF2B5EF4-FFF2-40B4-BE49-F238E27FC236}">
-                <a16:creationId xmlns:a16="http://schemas.microsoft.com/office/drawing/2014/main" id="{32666AC8-2E17-4DB4-B0F5-60C640CCFD2E}"/>
+                <a16:creationId xmlns:a16="http://schemas.microsoft.com/office/drawing/2014/main" xmlns="" id="{32666AC8-2E17-4DB4-B0F5-60C640CCFD2E}"/>
               </a:ext>
             </a:extLst>
           </p:cNvPr>
@@ -32013,7 +32332,7 @@
           <p:cNvPr id="4" name="Título 1">
             <a:extLst>
               <a:ext uri="{FF2B5EF4-FFF2-40B4-BE49-F238E27FC236}">
-                <a16:creationId xmlns:a16="http://schemas.microsoft.com/office/drawing/2014/main" id="{32666AC8-2E17-4DB4-B0F5-60C640CCFD2E}"/>
+                <a16:creationId xmlns:a16="http://schemas.microsoft.com/office/drawing/2014/main" xmlns="" id="{32666AC8-2E17-4DB4-B0F5-60C640CCFD2E}"/>
               </a:ext>
             </a:extLst>
           </p:cNvPr>
@@ -32099,7 +32418,7 @@
           <p:cNvPr id="2" name="Título 1">
             <a:extLst>
               <a:ext uri="{FF2B5EF4-FFF2-40B4-BE49-F238E27FC236}">
-                <a16:creationId xmlns:a16="http://schemas.microsoft.com/office/drawing/2014/main" id="{C738E7C4-65BB-5A05-5DF4-FF60F520CB58}"/>
+                <a16:creationId xmlns:a16="http://schemas.microsoft.com/office/drawing/2014/main" xmlns="" id="{C738E7C4-65BB-5A05-5DF4-FF60F520CB58}"/>
               </a:ext>
             </a:extLst>
           </p:cNvPr>
@@ -32129,7 +32448,7 @@
               <p:cNvPr id="3" name="Espaço Reservado para Conteúdo 2">
                 <a:extLst>
                   <a:ext uri="{FF2B5EF4-FFF2-40B4-BE49-F238E27FC236}">
-                    <a16:creationId xmlns:a16="http://schemas.microsoft.com/office/drawing/2014/main" id="{40ABD154-3AFD-0036-3D3B-BDE0F6C2A332}"/>
+                    <a16:creationId xmlns:a16="http://schemas.microsoft.com/office/drawing/2014/main" xmlns="" id="{40ABD154-3AFD-0036-3D3B-BDE0F6C2A332}"/>
                   </a:ext>
                 </a:extLst>
               </p:cNvPr>
@@ -32325,7 +32644,7 @@
               <p:cNvPr id="5" name="CaixaDeTexto 4">
                 <a:extLst>
                   <a:ext uri="{FF2B5EF4-FFF2-40B4-BE49-F238E27FC236}">
-                    <a16:creationId xmlns:a16="http://schemas.microsoft.com/office/drawing/2014/main" id="{9FE2C07F-02D2-0345-E394-150F01C017C4}"/>
+                    <a16:creationId xmlns:a16="http://schemas.microsoft.com/office/drawing/2014/main" xmlns="" id="{9FE2C07F-02D2-0345-E394-150F01C017C4}"/>
                   </a:ext>
                 </a:extLst>
               </p:cNvPr>
@@ -32351,7 +32670,10 @@
                 <a:pPr/>
                 <a14:m>
                   <m:oMathPara xmlns:m="http://schemas.openxmlformats.org/officeDocument/2006/math">
-                    <m:oMath>
+                    <m:oMathParaPr>
+                      <m:jc m:val="centerGroup"/>
+                    </m:oMathParaPr>
+                    <m:oMath xmlns:m="http://schemas.openxmlformats.org/officeDocument/2006/math">
                       <m:r>
                         <a:rPr lang="pt-BR" sz="3200" b="1" i="1" smtClean="0">
                           <a:latin typeface="Cambria Math" panose="02040503050406030204" pitchFamily="18" charset="0"/>
@@ -32922,7 +33244,7 @@
           <p:cNvPr id="2" name="Título 1">
             <a:extLst>
               <a:ext uri="{FF2B5EF4-FFF2-40B4-BE49-F238E27FC236}">
-                <a16:creationId xmlns:a16="http://schemas.microsoft.com/office/drawing/2014/main" id="{C738E7C4-65BB-5A05-5DF4-FF60F520CB58}"/>
+                <a16:creationId xmlns:a16="http://schemas.microsoft.com/office/drawing/2014/main" xmlns="" id="{C738E7C4-65BB-5A05-5DF4-FF60F520CB58}"/>
               </a:ext>
             </a:extLst>
           </p:cNvPr>
@@ -32952,7 +33274,7 @@
               <p:cNvPr id="5" name="CaixaDeTexto 4">
                 <a:extLst>
                   <a:ext uri="{FF2B5EF4-FFF2-40B4-BE49-F238E27FC236}">
-                    <a16:creationId xmlns:a16="http://schemas.microsoft.com/office/drawing/2014/main" id="{9FE2C07F-02D2-0345-E394-150F01C017C4}"/>
+                    <a16:creationId xmlns:a16="http://schemas.microsoft.com/office/drawing/2014/main" xmlns="" id="{9FE2C07F-02D2-0345-E394-150F01C017C4}"/>
                   </a:ext>
                 </a:extLst>
               </p:cNvPr>
@@ -32978,7 +33300,10 @@
                 <a:pPr/>
                 <a14:m>
                   <m:oMathPara xmlns:m="http://schemas.openxmlformats.org/officeDocument/2006/math">
-                    <m:oMath>
+                    <m:oMathParaPr>
+                      <m:jc m:val="centerGroup"/>
+                    </m:oMathParaPr>
+                    <m:oMath xmlns:m="http://schemas.openxmlformats.org/officeDocument/2006/math">
                       <m:d>
                         <m:dPr>
                           <m:begChr m:val="["/>
@@ -33507,7 +33832,7 @@
           <p:cNvPr id="4" name="Chave Direita 3">
             <a:extLst>
               <a:ext uri="{FF2B5EF4-FFF2-40B4-BE49-F238E27FC236}">
-                <a16:creationId xmlns:a16="http://schemas.microsoft.com/office/drawing/2014/main" id="{314F6830-34E9-8654-9AF0-D69DE9FAE980}"/>
+                <a16:creationId xmlns:a16="http://schemas.microsoft.com/office/drawing/2014/main" xmlns="" id="{314F6830-34E9-8654-9AF0-D69DE9FAE980}"/>
               </a:ext>
             </a:extLst>
           </p:cNvPr>
@@ -33551,7 +33876,7 @@
           <p:cNvPr id="6" name="CaixaDeTexto 5">
             <a:extLst>
               <a:ext uri="{FF2B5EF4-FFF2-40B4-BE49-F238E27FC236}">
-                <a16:creationId xmlns:a16="http://schemas.microsoft.com/office/drawing/2014/main" id="{AA46DBC8-FBDE-250B-240D-193F0A609C0C}"/>
+                <a16:creationId xmlns:a16="http://schemas.microsoft.com/office/drawing/2014/main" xmlns="" id="{AA46DBC8-FBDE-250B-240D-193F0A609C0C}"/>
               </a:ext>
             </a:extLst>
           </p:cNvPr>
@@ -33595,7 +33920,7 @@
           <p:cNvPr id="7" name="Chave Direita 6">
             <a:extLst>
               <a:ext uri="{FF2B5EF4-FFF2-40B4-BE49-F238E27FC236}">
-                <a16:creationId xmlns:a16="http://schemas.microsoft.com/office/drawing/2014/main" id="{E94D5995-3604-C1B4-B485-9B393568D39B}"/>
+                <a16:creationId xmlns:a16="http://schemas.microsoft.com/office/drawing/2014/main" xmlns="" id="{E94D5995-3604-C1B4-B485-9B393568D39B}"/>
               </a:ext>
             </a:extLst>
           </p:cNvPr>
@@ -33639,7 +33964,7 @@
           <p:cNvPr id="8" name="CaixaDeTexto 7">
             <a:extLst>
               <a:ext uri="{FF2B5EF4-FFF2-40B4-BE49-F238E27FC236}">
-                <a16:creationId xmlns:a16="http://schemas.microsoft.com/office/drawing/2014/main" id="{AF3B44CB-FB5A-9774-1C6B-808D8FC9AA1C}"/>
+                <a16:creationId xmlns:a16="http://schemas.microsoft.com/office/drawing/2014/main" xmlns="" id="{AF3B44CB-FB5A-9774-1C6B-808D8FC9AA1C}"/>
               </a:ext>
             </a:extLst>
           </p:cNvPr>
@@ -33683,7 +34008,7 @@
           <p:cNvPr id="3" name="TextBox 2">
             <a:extLst>
               <a:ext uri="{FF2B5EF4-FFF2-40B4-BE49-F238E27FC236}">
-                <a16:creationId xmlns:a16="http://schemas.microsoft.com/office/drawing/2014/main" id="{B69DC4B7-28AE-3B52-6F26-3A317D0DAC53}"/>
+                <a16:creationId xmlns:a16="http://schemas.microsoft.com/office/drawing/2014/main" xmlns="" id="{B69DC4B7-28AE-3B52-6F26-3A317D0DAC53}"/>
               </a:ext>
             </a:extLst>
           </p:cNvPr>
@@ -33757,7 +34082,7 @@
           <p:cNvPr id="2" name="Título 1">
             <a:extLst>
               <a:ext uri="{FF2B5EF4-FFF2-40B4-BE49-F238E27FC236}">
-                <a16:creationId xmlns:a16="http://schemas.microsoft.com/office/drawing/2014/main" id="{C738E7C4-65BB-5A05-5DF4-FF60F520CB58}"/>
+                <a16:creationId xmlns:a16="http://schemas.microsoft.com/office/drawing/2014/main" xmlns="" id="{C738E7C4-65BB-5A05-5DF4-FF60F520CB58}"/>
               </a:ext>
             </a:extLst>
           </p:cNvPr>
@@ -33787,7 +34112,7 @@
               <p:cNvPr id="3" name="Espaço Reservado para Conteúdo 2">
                 <a:extLst>
                   <a:ext uri="{FF2B5EF4-FFF2-40B4-BE49-F238E27FC236}">
-                    <a16:creationId xmlns:a16="http://schemas.microsoft.com/office/drawing/2014/main" id="{40ABD154-3AFD-0036-3D3B-BDE0F6C2A332}"/>
+                    <a16:creationId xmlns:a16="http://schemas.microsoft.com/office/drawing/2014/main" xmlns="" id="{40ABD154-3AFD-0036-3D3B-BDE0F6C2A332}"/>
                   </a:ext>
                 </a:extLst>
               </p:cNvPr>
@@ -34071,7 +34396,7 @@
               <p:cNvPr id="5" name="CaixaDeTexto 4">
                 <a:extLst>
                   <a:ext uri="{FF2B5EF4-FFF2-40B4-BE49-F238E27FC236}">
-                    <a16:creationId xmlns:a16="http://schemas.microsoft.com/office/drawing/2014/main" id="{9FE2C07F-02D2-0345-E394-150F01C017C4}"/>
+                    <a16:creationId xmlns:a16="http://schemas.microsoft.com/office/drawing/2014/main" xmlns="" id="{9FE2C07F-02D2-0345-E394-150F01C017C4}"/>
                   </a:ext>
                 </a:extLst>
               </p:cNvPr>
@@ -34097,7 +34422,10 @@
                 <a:pPr/>
                 <a14:m>
                   <m:oMathPara xmlns:m="http://schemas.openxmlformats.org/officeDocument/2006/math">
-                    <m:oMath>
+                    <m:oMathParaPr>
+                      <m:jc m:val="centerGroup"/>
+                    </m:oMathParaPr>
+                    <m:oMath xmlns:m="http://schemas.openxmlformats.org/officeDocument/2006/math">
                       <m:r>
                         <a:rPr lang="pt-BR" sz="3200" b="1" i="1" smtClean="0">
                           <a:latin typeface="Cambria Math" panose="02040503050406030204" pitchFamily="18" charset="0"/>
@@ -34638,7 +34966,7 @@
           <p:cNvPr id="4" name="Oval 3">
             <a:extLst>
               <a:ext uri="{FF2B5EF4-FFF2-40B4-BE49-F238E27FC236}">
-                <a16:creationId xmlns:a16="http://schemas.microsoft.com/office/drawing/2014/main" id="{E3C2398C-FA6E-B604-0A4E-B8DC5CF24EF7}"/>
+                <a16:creationId xmlns:a16="http://schemas.microsoft.com/office/drawing/2014/main" xmlns="" id="{E3C2398C-FA6E-B604-0A4E-B8DC5CF24EF7}"/>
               </a:ext>
             </a:extLst>
           </p:cNvPr>
@@ -34690,7 +35018,7 @@
           <p:cNvPr id="6" name="Oval 5">
             <a:extLst>
               <a:ext uri="{FF2B5EF4-FFF2-40B4-BE49-F238E27FC236}">
-                <a16:creationId xmlns:a16="http://schemas.microsoft.com/office/drawing/2014/main" id="{4BBF1D53-FE8C-A737-118B-224A249F0F55}"/>
+                <a16:creationId xmlns:a16="http://schemas.microsoft.com/office/drawing/2014/main" xmlns="" id="{4BBF1D53-FE8C-A737-118B-224A249F0F55}"/>
               </a:ext>
             </a:extLst>
           </p:cNvPr>
@@ -34772,7 +35100,7 @@
           <p:cNvPr id="2" name="Título 1">
             <a:extLst>
               <a:ext uri="{FF2B5EF4-FFF2-40B4-BE49-F238E27FC236}">
-                <a16:creationId xmlns:a16="http://schemas.microsoft.com/office/drawing/2014/main" id="{C738E7C4-65BB-5A05-5DF4-FF60F520CB58}"/>
+                <a16:creationId xmlns:a16="http://schemas.microsoft.com/office/drawing/2014/main" xmlns="" id="{C738E7C4-65BB-5A05-5DF4-FF60F520CB58}"/>
               </a:ext>
             </a:extLst>
           </p:cNvPr>
@@ -34802,7 +35130,7 @@
               <p:cNvPr id="5" name="CaixaDeTexto 4">
                 <a:extLst>
                   <a:ext uri="{FF2B5EF4-FFF2-40B4-BE49-F238E27FC236}">
-                    <a16:creationId xmlns:a16="http://schemas.microsoft.com/office/drawing/2014/main" id="{9FE2C07F-02D2-0345-E394-150F01C017C4}"/>
+                    <a16:creationId xmlns:a16="http://schemas.microsoft.com/office/drawing/2014/main" xmlns="" id="{9FE2C07F-02D2-0345-E394-150F01C017C4}"/>
                   </a:ext>
                 </a:extLst>
               </p:cNvPr>
@@ -34828,7 +35156,10 @@
                 <a:pPr/>
                 <a14:m>
                   <m:oMathPara xmlns:m="http://schemas.openxmlformats.org/officeDocument/2006/math">
-                    <m:oMath>
+                    <m:oMathParaPr>
+                      <m:jc m:val="centerGroup"/>
+                    </m:oMathParaPr>
+                    <m:oMath xmlns:m="http://schemas.openxmlformats.org/officeDocument/2006/math">
                       <m:r>
                         <a:rPr lang="pt-BR" sz="3200" b="1" i="1" smtClean="0">
                           <a:latin typeface="Cambria Math" panose="02040503050406030204" pitchFamily="18" charset="0"/>
@@ -35369,7 +35700,7 @@
           <p:cNvPr id="6" name="Oval 3">
             <a:extLst>
               <a:ext uri="{FF2B5EF4-FFF2-40B4-BE49-F238E27FC236}">
-                <a16:creationId xmlns:a16="http://schemas.microsoft.com/office/drawing/2014/main" id="{E9839706-E14C-629A-7F56-18012BB99C3A}"/>
+                <a16:creationId xmlns:a16="http://schemas.microsoft.com/office/drawing/2014/main" xmlns="" id="{E9839706-E14C-629A-7F56-18012BB99C3A}"/>
               </a:ext>
             </a:extLst>
           </p:cNvPr>
@@ -35421,7 +35752,7 @@
           <p:cNvPr id="7" name="TextBox 4">
             <a:extLst>
               <a:ext uri="{FF2B5EF4-FFF2-40B4-BE49-F238E27FC236}">
-                <a16:creationId xmlns:a16="http://schemas.microsoft.com/office/drawing/2014/main" id="{6279C33D-9270-DC3C-212E-0FD57AC45F7D}"/>
+                <a16:creationId xmlns:a16="http://schemas.microsoft.com/office/drawing/2014/main" xmlns="" id="{6279C33D-9270-DC3C-212E-0FD57AC45F7D}"/>
               </a:ext>
             </a:extLst>
           </p:cNvPr>
@@ -35457,7 +35788,7 @@
           <p:cNvPr id="8" name="Oval 5">
             <a:extLst>
               <a:ext uri="{FF2B5EF4-FFF2-40B4-BE49-F238E27FC236}">
-                <a16:creationId xmlns:a16="http://schemas.microsoft.com/office/drawing/2014/main" id="{1BD26B11-37BD-057A-7642-8513680C0B09}"/>
+                <a16:creationId xmlns:a16="http://schemas.microsoft.com/office/drawing/2014/main" xmlns="" id="{1BD26B11-37BD-057A-7642-8513680C0B09}"/>
               </a:ext>
             </a:extLst>
           </p:cNvPr>
@@ -35509,7 +35840,7 @@
           <p:cNvPr id="9" name="Freeform 6">
             <a:extLst>
               <a:ext uri="{FF2B5EF4-FFF2-40B4-BE49-F238E27FC236}">
-                <a16:creationId xmlns:a16="http://schemas.microsoft.com/office/drawing/2014/main" id="{0F0FD986-F79E-DA0A-829E-1F5A7437324A}"/>
+                <a16:creationId xmlns:a16="http://schemas.microsoft.com/office/drawing/2014/main" xmlns="" id="{0F0FD986-F79E-DA0A-829E-1F5A7437324A}"/>
               </a:ext>
             </a:extLst>
           </p:cNvPr>
@@ -35601,7 +35932,7 @@
           <p:cNvPr id="10" name="TextBox 7">
             <a:extLst>
               <a:ext uri="{FF2B5EF4-FFF2-40B4-BE49-F238E27FC236}">
-                <a16:creationId xmlns:a16="http://schemas.microsoft.com/office/drawing/2014/main" id="{30228E55-A04A-15F3-F542-24A94935CB8F}"/>
+                <a16:creationId xmlns:a16="http://schemas.microsoft.com/office/drawing/2014/main" xmlns="" id="{30228E55-A04A-15F3-F542-24A94935CB8F}"/>
               </a:ext>
             </a:extLst>
           </p:cNvPr>
@@ -35637,7 +35968,7 @@
           <p:cNvPr id="11" name="Freeform 8">
             <a:extLst>
               <a:ext uri="{FF2B5EF4-FFF2-40B4-BE49-F238E27FC236}">
-                <a16:creationId xmlns:a16="http://schemas.microsoft.com/office/drawing/2014/main" id="{DE8EF324-A6C8-6014-6A79-6F6CD536E661}"/>
+                <a16:creationId xmlns:a16="http://schemas.microsoft.com/office/drawing/2014/main" xmlns="" id="{DE8EF324-A6C8-6014-6A79-6F6CD536E661}"/>
               </a:ext>
             </a:extLst>
           </p:cNvPr>
@@ -35721,7 +36052,7 @@
               <p:cNvPr id="12" name="Rectangle 9">
                 <a:extLst>
                   <a:ext uri="{FF2B5EF4-FFF2-40B4-BE49-F238E27FC236}">
-                    <a16:creationId xmlns:a16="http://schemas.microsoft.com/office/drawing/2014/main" id="{B0A8A935-42A2-46DB-34B6-70E5007CD2FA}"/>
+                    <a16:creationId xmlns:a16="http://schemas.microsoft.com/office/drawing/2014/main" xmlns="" id="{B0A8A935-42A2-46DB-34B6-70E5007CD2FA}"/>
                   </a:ext>
                 </a:extLst>
               </p:cNvPr>
@@ -35925,7 +36256,7 @@
               <p:cNvPr id="2" name="Título 1">
                 <a:extLst>
                   <a:ext uri="{FF2B5EF4-FFF2-40B4-BE49-F238E27FC236}">
-                    <a16:creationId xmlns:a16="http://schemas.microsoft.com/office/drawing/2014/main" id="{4EAC8C3E-AFB0-15A1-EDEF-475FA3643375}"/>
+                    <a16:creationId xmlns:a16="http://schemas.microsoft.com/office/drawing/2014/main" xmlns="" id="{4EAC8C3E-AFB0-15A1-EDEF-475FA3643375}"/>
                   </a:ext>
                 </a:extLst>
               </p:cNvPr>
@@ -36016,7 +36347,7 @@
               <p:cNvPr id="3" name="Espaço Reservado para Conteúdo 2">
                 <a:extLst>
                   <a:ext uri="{FF2B5EF4-FFF2-40B4-BE49-F238E27FC236}">
-                    <a16:creationId xmlns:a16="http://schemas.microsoft.com/office/drawing/2014/main" id="{6A052458-A5D6-9055-C748-5BFDB00FC77C}"/>
+                    <a16:creationId xmlns:a16="http://schemas.microsoft.com/office/drawing/2014/main" xmlns="" id="{6A052458-A5D6-9055-C748-5BFDB00FC77C}"/>
                   </a:ext>
                 </a:extLst>
               </p:cNvPr>
@@ -36231,7 +36562,7 @@
           <p:cNvPr id="5" name="Tabela 5">
             <a:extLst>
               <a:ext uri="{FF2B5EF4-FFF2-40B4-BE49-F238E27FC236}">
-                <a16:creationId xmlns:a16="http://schemas.microsoft.com/office/drawing/2014/main" id="{744D7738-C774-F8D0-DD85-76976F9C0032}"/>
+                <a16:creationId xmlns:a16="http://schemas.microsoft.com/office/drawing/2014/main" xmlns="" id="{744D7738-C774-F8D0-DD85-76976F9C0032}"/>
               </a:ext>
             </a:extLst>
           </p:cNvPr>
@@ -36260,14 +36591,14 @@
                 <a:gridCol w="1781769">
                   <a:extLst>
                     <a:ext uri="{9D8B030D-6E8A-4147-A177-3AD203B41FA5}">
-                      <a16:colId xmlns:a16="http://schemas.microsoft.com/office/drawing/2014/main" val="2780398905"/>
+                      <a16:colId xmlns:a16="http://schemas.microsoft.com/office/drawing/2014/main" xmlns="" val="2780398905"/>
                     </a:ext>
                   </a:extLst>
                 </a:gridCol>
                 <a:gridCol w="1781769">
                   <a:extLst>
                     <a:ext uri="{9D8B030D-6E8A-4147-A177-3AD203B41FA5}">
-                      <a16:colId xmlns:a16="http://schemas.microsoft.com/office/drawing/2014/main" val="1752542230"/>
+                      <a16:colId xmlns:a16="http://schemas.microsoft.com/office/drawing/2014/main" xmlns="" val="1752542230"/>
                     </a:ext>
                   </a:extLst>
                 </a:gridCol>
@@ -36464,7 +36795,7 @@
                 </a:tc>
                 <a:extLst>
                   <a:ext uri="{0D108BD9-81ED-4DB2-BD59-A6C34878D82A}">
-                    <a16:rowId xmlns:a16="http://schemas.microsoft.com/office/drawing/2014/main" val="3952155157"/>
+                    <a16:rowId xmlns:a16="http://schemas.microsoft.com/office/drawing/2014/main" xmlns="" val="3952155157"/>
                   </a:ext>
                 </a:extLst>
               </a:tr>
@@ -36666,7 +36997,7 @@
                 </a:tc>
                 <a:extLst>
                   <a:ext uri="{0D108BD9-81ED-4DB2-BD59-A6C34878D82A}">
-                    <a16:rowId xmlns:a16="http://schemas.microsoft.com/office/drawing/2014/main" val="2169341992"/>
+                    <a16:rowId xmlns:a16="http://schemas.microsoft.com/office/drawing/2014/main" xmlns="" val="2169341992"/>
                   </a:ext>
                 </a:extLst>
               </a:tr>
@@ -36679,7 +37010,7 @@
           <p:cNvPr id="7" name="CaixaDeTexto 6">
             <a:extLst>
               <a:ext uri="{FF2B5EF4-FFF2-40B4-BE49-F238E27FC236}">
-                <a16:creationId xmlns:a16="http://schemas.microsoft.com/office/drawing/2014/main" id="{44F3702B-0FE3-BDED-62A7-35438A8F3B75}"/>
+                <a16:creationId xmlns:a16="http://schemas.microsoft.com/office/drawing/2014/main" xmlns="" id="{44F3702B-0FE3-BDED-62A7-35438A8F3B75}"/>
               </a:ext>
             </a:extLst>
           </p:cNvPr>
@@ -36717,7 +37048,7 @@
           <p:cNvPr id="9" name="CaixaDeTexto 8">
             <a:extLst>
               <a:ext uri="{FF2B5EF4-FFF2-40B4-BE49-F238E27FC236}">
-                <a16:creationId xmlns:a16="http://schemas.microsoft.com/office/drawing/2014/main" id="{1FC82D3C-E180-54E3-CEFE-B2BD9B8D3E2A}"/>
+                <a16:creationId xmlns:a16="http://schemas.microsoft.com/office/drawing/2014/main" xmlns="" id="{1FC82D3C-E180-54E3-CEFE-B2BD9B8D3E2A}"/>
               </a:ext>
             </a:extLst>
           </p:cNvPr>
@@ -36757,7 +37088,7 @@
               <p:cNvPr id="11" name="CaixaDeTexto 10">
                 <a:extLst>
                   <a:ext uri="{FF2B5EF4-FFF2-40B4-BE49-F238E27FC236}">
-                    <a16:creationId xmlns:a16="http://schemas.microsoft.com/office/drawing/2014/main" id="{D618FE73-F69F-A4D4-3E14-7C80BD56C5C9}"/>
+                    <a16:creationId xmlns:a16="http://schemas.microsoft.com/office/drawing/2014/main" xmlns="" id="{D618FE73-F69F-A4D4-3E14-7C80BD56C5C9}"/>
                   </a:ext>
                 </a:extLst>
               </p:cNvPr>
@@ -36884,7 +37215,7 @@
               <p:cNvPr id="12" name="CaixaDeTexto 11">
                 <a:extLst>
                   <a:ext uri="{FF2B5EF4-FFF2-40B4-BE49-F238E27FC236}">
-                    <a16:creationId xmlns:a16="http://schemas.microsoft.com/office/drawing/2014/main" id="{64841025-C42C-FB64-87B6-62F7C4AD612E}"/>
+                    <a16:creationId xmlns:a16="http://schemas.microsoft.com/office/drawing/2014/main" xmlns="" id="{64841025-C42C-FB64-87B6-62F7C4AD612E}"/>
                   </a:ext>
                 </a:extLst>
               </p:cNvPr>
@@ -37015,7 +37346,7 @@
               <p:cNvPr id="13" name="CaixaDeTexto 12">
                 <a:extLst>
                   <a:ext uri="{FF2B5EF4-FFF2-40B4-BE49-F238E27FC236}">
-                    <a16:creationId xmlns:a16="http://schemas.microsoft.com/office/drawing/2014/main" id="{33FF584A-410C-DBCB-7735-A7CD30A88BC6}"/>
+                    <a16:creationId xmlns:a16="http://schemas.microsoft.com/office/drawing/2014/main" xmlns="" id="{33FF584A-410C-DBCB-7735-A7CD30A88BC6}"/>
                   </a:ext>
                 </a:extLst>
               </p:cNvPr>
@@ -37142,7 +37473,7 @@
               <p:cNvPr id="14" name="CaixaDeTexto 13">
                 <a:extLst>
                   <a:ext uri="{FF2B5EF4-FFF2-40B4-BE49-F238E27FC236}">
-                    <a16:creationId xmlns:a16="http://schemas.microsoft.com/office/drawing/2014/main" id="{01118442-F1CF-69E3-68DB-2A693775C8C5}"/>
+                    <a16:creationId xmlns:a16="http://schemas.microsoft.com/office/drawing/2014/main" xmlns="" id="{01118442-F1CF-69E3-68DB-2A693775C8C5}"/>
                   </a:ext>
                 </a:extLst>
               </p:cNvPr>
@@ -37303,7 +37634,7 @@
               <p:cNvPr id="2" name="Título 1">
                 <a:extLst>
                   <a:ext uri="{FF2B5EF4-FFF2-40B4-BE49-F238E27FC236}">
-                    <a16:creationId xmlns:a16="http://schemas.microsoft.com/office/drawing/2014/main" id="{2EDB17EF-5EC1-A178-3122-9310D2C0D3C6}"/>
+                    <a16:creationId xmlns:a16="http://schemas.microsoft.com/office/drawing/2014/main" xmlns="" id="{2EDB17EF-5EC1-A178-3122-9310D2C0D3C6}"/>
                   </a:ext>
                 </a:extLst>
               </p:cNvPr>
@@ -37392,7 +37723,7 @@
           <p:cNvPr id="22" name="Imagem 21">
             <a:extLst>
               <a:ext uri="{FF2B5EF4-FFF2-40B4-BE49-F238E27FC236}">
-                <a16:creationId xmlns:a16="http://schemas.microsoft.com/office/drawing/2014/main" id="{43854156-1399-9016-BDBA-8C80710C3EC7}"/>
+                <a16:creationId xmlns:a16="http://schemas.microsoft.com/office/drawing/2014/main" xmlns="" id="{43854156-1399-9016-BDBA-8C80710C3EC7}"/>
               </a:ext>
             </a:extLst>
           </p:cNvPr>

--- a/slides/C24_Métricas_de_Classificação.pptx
+++ b/slides/C24_Métricas_de_Classificação.pptx
@@ -19,12 +19,12 @@
     <p:sldId id="319" r:id="rId7"/>
     <p:sldId id="320" r:id="rId8"/>
     <p:sldId id="321" r:id="rId9"/>
-    <p:sldId id="322" r:id="rId10"/>
-    <p:sldId id="323" r:id="rId11"/>
-    <p:sldId id="324" r:id="rId12"/>
-    <p:sldId id="325" r:id="rId13"/>
-    <p:sldId id="326" r:id="rId14"/>
-    <p:sldId id="464" r:id="rId15"/>
+    <p:sldId id="323" r:id="rId10"/>
+    <p:sldId id="324" r:id="rId11"/>
+    <p:sldId id="325" r:id="rId12"/>
+    <p:sldId id="326" r:id="rId13"/>
+    <p:sldId id="464" r:id="rId14"/>
+    <p:sldId id="322" r:id="rId15"/>
     <p:sldId id="327" r:id="rId16"/>
     <p:sldId id="458" r:id="rId17"/>
     <p:sldId id="328" r:id="rId18"/>
@@ -307,7 +307,7 @@
           <a:p>
             <a:fld id="{144F1436-6906-4D93-B7A2-786C327BFA14}" type="datetimeFigureOut">
               <a:rPr lang="nl-BE" smtClean="0"/>
-              <a:t>14/09/2026</a:t>
+              <a:t>21/09/2026</a:t>
             </a:fld>
             <a:endParaRPr lang="nl-BE"/>
           </a:p>
@@ -472,7 +472,7 @@
           <a:p>
             <a:fld id="{AA8CD09E-2914-4F47-B6C1-51B2C31814C9}" type="datetimeFigureOut">
               <a:rPr lang="pt-BR" smtClean="0"/>
-              <a:t>14/09/2026</a:t>
+              <a:t>21/09/2026</a:t>
             </a:fld>
             <a:endParaRPr lang="pt-BR"/>
           </a:p>
@@ -1036,6 +1036,868 @@
 </file>
 
 <file path=ppt/notesSlides/notesSlide11.xml><?xml version="1.0" encoding="utf-8"?>
+<p:notes xmlns:a="http://schemas.openxmlformats.org/drawingml/2006/main" xmlns:r="http://schemas.openxmlformats.org/officeDocument/2006/relationships" xmlns:p="http://schemas.openxmlformats.org/presentationml/2006/main">
+  <p:cSld>
+    <p:spTree>
+      <p:nvGrpSpPr>
+        <p:cNvPr id="1" name=""/>
+        <p:cNvGrpSpPr/>
+        <p:nvPr/>
+      </p:nvGrpSpPr>
+      <p:grpSpPr>
+        <a:xfrm>
+          <a:off x="0" y="0"/>
+          <a:ext cx="0" cy="0"/>
+          <a:chOff x="0" y="0"/>
+          <a:chExt cx="0" cy="0"/>
+        </a:xfrm>
+      </p:grpSpPr>
+      <p:sp>
+        <p:nvSpPr>
+          <p:cNvPr id="2" name="Espaço Reservado para Imagem de Slide 1"/>
+          <p:cNvSpPr>
+            <a:spLocks noGrp="1" noRot="1" noChangeAspect="1"/>
+          </p:cNvSpPr>
+          <p:nvPr>
+            <p:ph type="sldImg"/>
+          </p:nvPr>
+        </p:nvSpPr>
+        <p:spPr/>
+      </p:sp>
+      <mc:AlternateContent xmlns:mc="http://schemas.openxmlformats.org/markup-compatibility/2006">
+        <mc:Choice xmlns:a14="http://schemas.microsoft.com/office/drawing/2010/main" Requires="a14">
+          <p:sp>
+            <p:nvSpPr>
+              <p:cNvPr id="3" name="Espaço Reservado para Anotações 2"/>
+              <p:cNvSpPr>
+                <a:spLocks noGrp="1"/>
+              </p:cNvSpPr>
+              <p:nvPr>
+                <p:ph type="body" idx="1"/>
+              </p:nvPr>
+            </p:nvSpPr>
+            <p:spPr/>
+            <p:txBody>
+              <a:bodyPr/>
+              <a:lstStyle/>
+              <a:p>
+                <a:pPr rtl="0"/>
+                <a:r>
+                  <a:rPr lang="en-US" dirty="0"/>
+                  <a:t>A </a:t>
+                </a:r>
+                <a:r>
+                  <a:rPr lang="en-US" dirty="0" err="1"/>
+                  <a:t>média</a:t>
+                </a:r>
+                <a:r>
+                  <a:rPr lang="en-US" dirty="0"/>
+                  <a:t> </a:t>
+                </a:r>
+                <a:r>
+                  <a:rPr lang="en-US" dirty="0" err="1"/>
+                  <a:t>harmônica</a:t>
+                </a:r>
+                <a:r>
+                  <a:rPr lang="en-US" dirty="0"/>
+                  <a:t> de </a:t>
+                </a:r>
+                <a:r>
+                  <a:rPr lang="en-US" dirty="0" err="1"/>
+                  <a:t>dois</a:t>
+                </a:r>
+                <a:r>
+                  <a:rPr lang="en-US" dirty="0"/>
+                  <a:t> </a:t>
+                </a:r>
+                <a:r>
+                  <a:rPr lang="en-US" dirty="0" err="1"/>
+                  <a:t>números</a:t>
+                </a:r>
+                <a:r>
+                  <a:rPr lang="en-US" dirty="0"/>
+                  <a:t> </a:t>
+                </a:r>
+                <a14:m>
+                  <m:oMath xmlns:m="http://schemas.openxmlformats.org/officeDocument/2006/math">
+                    <m:r>
+                      <a:rPr lang="en-US" sz="1200" i="1" kern="1200">
+                        <a:solidFill>
+                          <a:schemeClr val="tx1"/>
+                        </a:solidFill>
+                        <a:latin typeface="+mn-lt"/>
+                        <a:ea typeface="+mn-ea"/>
+                        <a:cs typeface="+mn-cs"/>
+                      </a:rPr>
+                      <m:t>𝑎</m:t>
+                    </m:r>
+                  </m:oMath>
+                </a14:m>
+                <a:r>
+                  <a:rPr lang="en-US" dirty="0"/>
+                  <a:t> e </a:t>
+                </a:r>
+                <a14:m>
+                  <m:oMath xmlns:m="http://schemas.openxmlformats.org/officeDocument/2006/math">
+                    <m:r>
+                      <a:rPr lang="en-US" sz="1200" i="1" kern="1200">
+                        <a:solidFill>
+                          <a:schemeClr val="tx1"/>
+                        </a:solidFill>
+                        <a:latin typeface="+mn-lt"/>
+                        <a:ea typeface="+mn-ea"/>
+                        <a:cs typeface="+mn-cs"/>
+                      </a:rPr>
+                      <m:t>𝑏</m:t>
+                    </m:r>
+                  </m:oMath>
+                </a14:m>
+                <a:r>
+                  <a:rPr lang="en-US" dirty="0"/>
+                  <a:t> é o </a:t>
+                </a:r>
+                <a:r>
+                  <a:rPr lang="en-US" dirty="0" err="1"/>
+                  <a:t>inverso</a:t>
+                </a:r>
+                <a:r>
+                  <a:rPr lang="en-US" dirty="0"/>
+                  <a:t> da </a:t>
+                </a:r>
+                <a:r>
+                  <a:rPr lang="en-US" dirty="0" err="1"/>
+                  <a:t>média</a:t>
+                </a:r>
+                <a:r>
+                  <a:rPr lang="en-US" dirty="0"/>
+                  <a:t> dos </a:t>
+                </a:r>
+                <a:r>
+                  <a:rPr lang="en-US" dirty="0" err="1"/>
+                  <a:t>inversos</a:t>
+                </a:r>
+                <a:r>
+                  <a:rPr lang="en-US" dirty="0"/>
+                  <a:t>:</a:t>
+                </a:r>
+              </a:p>
+              <a:p>
+                <a14:m>
+                  <m:oMathPara xmlns:m="http://schemas.openxmlformats.org/officeDocument/2006/math">
+                    <m:oMath>
+                      <m:r>
+                        <a:rPr lang="en-US" sz="1200" i="1" kern="1200">
+                          <a:solidFill>
+                            <a:schemeClr val="tx1"/>
+                          </a:solidFill>
+                          <a:latin typeface="+mn-lt"/>
+                          <a:ea typeface="+mn-ea"/>
+                          <a:cs typeface="+mn-cs"/>
+                        </a:rPr>
+                        <m:t>𝐻</m:t>
+                      </m:r>
+                      <m:r>
+                        <a:rPr lang="en-US" sz="1200" i="0" kern="1200">
+                          <a:solidFill>
+                            <a:schemeClr val="tx1"/>
+                          </a:solidFill>
+                          <a:latin typeface="+mn-lt"/>
+                          <a:ea typeface="+mn-ea"/>
+                          <a:cs typeface="+mn-cs"/>
+                        </a:rPr>
+                        <m:t>=</m:t>
+                      </m:r>
+                      <m:f>
+                        <m:fPr>
+                          <m:ctrlPr>
+                            <a:rPr lang="en-US" sz="1200" i="0" kern="1200">
+                              <a:solidFill>
+                                <a:schemeClr val="tx1"/>
+                              </a:solidFill>
+                              <a:latin typeface="+mn-lt"/>
+                              <a:ea typeface="+mn-ea"/>
+                              <a:cs typeface="+mn-cs"/>
+                            </a:rPr>
+                          </m:ctrlPr>
+                        </m:fPr>
+                        <m:num>
+                          <m:r>
+                            <a:rPr lang="en-US" sz="1200" i="0" kern="1200">
+                              <a:solidFill>
+                                <a:schemeClr val="tx1"/>
+                              </a:solidFill>
+                              <a:latin typeface="+mn-lt"/>
+                              <a:ea typeface="+mn-ea"/>
+                              <a:cs typeface="+mn-cs"/>
+                            </a:rPr>
+                            <m:t>1</m:t>
+                          </m:r>
+                        </m:num>
+                        <m:den>
+                          <m:f>
+                            <m:fPr>
+                              <m:ctrlPr>
+                                <a:rPr lang="en-US" sz="1200" i="0" kern="1200">
+                                  <a:solidFill>
+                                    <a:schemeClr val="tx1"/>
+                                  </a:solidFill>
+                                  <a:latin typeface="+mn-lt"/>
+                                  <a:ea typeface="+mn-ea"/>
+                                  <a:cs typeface="+mn-cs"/>
+                                </a:rPr>
+                              </m:ctrlPr>
+                            </m:fPr>
+                            <m:num>
+                              <m:r>
+                                <a:rPr lang="en-US" sz="1200" i="0" kern="1200">
+                                  <a:solidFill>
+                                    <a:schemeClr val="tx1"/>
+                                  </a:solidFill>
+                                  <a:latin typeface="+mn-lt"/>
+                                  <a:ea typeface="+mn-ea"/>
+                                  <a:cs typeface="+mn-cs"/>
+                                </a:rPr>
+                                <m:t>1/</m:t>
+                              </m:r>
+                              <m:r>
+                                <a:rPr lang="en-US" sz="1200" i="1" kern="1200">
+                                  <a:solidFill>
+                                    <a:schemeClr val="tx1"/>
+                                  </a:solidFill>
+                                  <a:latin typeface="+mn-lt"/>
+                                  <a:ea typeface="+mn-ea"/>
+                                  <a:cs typeface="+mn-cs"/>
+                                </a:rPr>
+                                <m:t>𝑎</m:t>
+                              </m:r>
+                              <m:r>
+                                <a:rPr lang="en-US" sz="1200" i="0" kern="1200">
+                                  <a:solidFill>
+                                    <a:schemeClr val="tx1"/>
+                                  </a:solidFill>
+                                  <a:latin typeface="+mn-lt"/>
+                                  <a:ea typeface="+mn-ea"/>
+                                  <a:cs typeface="+mn-cs"/>
+                                </a:rPr>
+                                <m:t>+1/</m:t>
+                              </m:r>
+                              <m:r>
+                                <a:rPr lang="en-US" sz="1200" i="1" kern="1200">
+                                  <a:solidFill>
+                                    <a:schemeClr val="tx1"/>
+                                  </a:solidFill>
+                                  <a:latin typeface="+mn-lt"/>
+                                  <a:ea typeface="+mn-ea"/>
+                                  <a:cs typeface="+mn-cs"/>
+                                </a:rPr>
+                                <m:t>𝑏</m:t>
+                              </m:r>
+                            </m:num>
+                            <m:den>
+                              <m:r>
+                                <a:rPr lang="en-US" sz="1200" i="0" kern="1200">
+                                  <a:solidFill>
+                                    <a:schemeClr val="tx1"/>
+                                  </a:solidFill>
+                                  <a:latin typeface="+mn-lt"/>
+                                  <a:ea typeface="+mn-ea"/>
+                                  <a:cs typeface="+mn-cs"/>
+                                </a:rPr>
+                                <m:t>2</m:t>
+                              </m:r>
+                            </m:den>
+                          </m:f>
+                        </m:den>
+                      </m:f>
+                      <m:r>
+                        <a:rPr lang="en-US" sz="1200" i="0" kern="1200">
+                          <a:solidFill>
+                            <a:schemeClr val="tx1"/>
+                          </a:solidFill>
+                          <a:latin typeface="+mn-lt"/>
+                          <a:ea typeface="+mn-ea"/>
+                          <a:cs typeface="+mn-cs"/>
+                        </a:rPr>
+                        <m:t>=</m:t>
+                      </m:r>
+                      <m:f>
+                        <m:fPr>
+                          <m:ctrlPr>
+                            <a:rPr lang="en-US" sz="1200" i="0" kern="1200">
+                              <a:solidFill>
+                                <a:schemeClr val="tx1"/>
+                              </a:solidFill>
+                              <a:latin typeface="+mn-lt"/>
+                              <a:ea typeface="+mn-ea"/>
+                              <a:cs typeface="+mn-cs"/>
+                            </a:rPr>
+                          </m:ctrlPr>
+                        </m:fPr>
+                        <m:num>
+                          <m:r>
+                            <a:rPr lang="en-US" sz="1200" i="0" kern="1200">
+                              <a:solidFill>
+                                <a:schemeClr val="tx1"/>
+                              </a:solidFill>
+                              <a:latin typeface="+mn-lt"/>
+                              <a:ea typeface="+mn-ea"/>
+                              <a:cs typeface="+mn-cs"/>
+                            </a:rPr>
+                            <m:t>2</m:t>
+                          </m:r>
+                        </m:num>
+                        <m:den>
+                          <m:f>
+                            <m:fPr>
+                              <m:ctrlPr>
+                                <a:rPr lang="en-US" sz="1200" i="0" kern="1200">
+                                  <a:solidFill>
+                                    <a:schemeClr val="tx1"/>
+                                  </a:solidFill>
+                                  <a:latin typeface="+mn-lt"/>
+                                  <a:ea typeface="+mn-ea"/>
+                                  <a:cs typeface="+mn-cs"/>
+                                </a:rPr>
+                              </m:ctrlPr>
+                            </m:fPr>
+                            <m:num>
+                              <m:r>
+                                <a:rPr lang="en-US" sz="1200" i="0" kern="1200">
+                                  <a:solidFill>
+                                    <a:schemeClr val="tx1"/>
+                                  </a:solidFill>
+                                  <a:latin typeface="+mn-lt"/>
+                                  <a:ea typeface="+mn-ea"/>
+                                  <a:cs typeface="+mn-cs"/>
+                                </a:rPr>
+                                <m:t>1</m:t>
+                              </m:r>
+                            </m:num>
+                            <m:den>
+                              <m:r>
+                                <a:rPr lang="en-US" sz="1200" i="1" kern="1200">
+                                  <a:solidFill>
+                                    <a:schemeClr val="tx1"/>
+                                  </a:solidFill>
+                                  <a:latin typeface="+mn-lt"/>
+                                  <a:ea typeface="+mn-ea"/>
+                                  <a:cs typeface="+mn-cs"/>
+                                </a:rPr>
+                                <m:t>𝑎</m:t>
+                              </m:r>
+                            </m:den>
+                          </m:f>
+                          <m:r>
+                            <a:rPr lang="en-US" sz="1200" i="0" kern="1200">
+                              <a:solidFill>
+                                <a:schemeClr val="tx1"/>
+                              </a:solidFill>
+                              <a:latin typeface="+mn-lt"/>
+                              <a:ea typeface="+mn-ea"/>
+                              <a:cs typeface="+mn-cs"/>
+                            </a:rPr>
+                            <m:t>+</m:t>
+                          </m:r>
+                          <m:f>
+                            <m:fPr>
+                              <m:ctrlPr>
+                                <a:rPr lang="en-US" sz="1200" i="0" kern="1200">
+                                  <a:solidFill>
+                                    <a:schemeClr val="tx1"/>
+                                  </a:solidFill>
+                                  <a:latin typeface="+mn-lt"/>
+                                  <a:ea typeface="+mn-ea"/>
+                                  <a:cs typeface="+mn-cs"/>
+                                </a:rPr>
+                              </m:ctrlPr>
+                            </m:fPr>
+                            <m:num>
+                              <m:r>
+                                <a:rPr lang="en-US" sz="1200" i="0" kern="1200">
+                                  <a:solidFill>
+                                    <a:schemeClr val="tx1"/>
+                                  </a:solidFill>
+                                  <a:latin typeface="+mn-lt"/>
+                                  <a:ea typeface="+mn-ea"/>
+                                  <a:cs typeface="+mn-cs"/>
+                                </a:rPr>
+                                <m:t>1</m:t>
+                              </m:r>
+                            </m:num>
+                            <m:den>
+                              <m:r>
+                                <a:rPr lang="en-US" sz="1200" i="1" kern="1200">
+                                  <a:solidFill>
+                                    <a:schemeClr val="tx1"/>
+                                  </a:solidFill>
+                                  <a:latin typeface="+mn-lt"/>
+                                  <a:ea typeface="+mn-ea"/>
+                                  <a:cs typeface="+mn-cs"/>
+                                </a:rPr>
+                                <m:t>𝑏</m:t>
+                              </m:r>
+                            </m:den>
+                          </m:f>
+                        </m:den>
+                      </m:f>
+                    </m:oMath>
+                  </m:oMathPara>
+                </a14:m>
+                <a:endParaRPr lang="en-US" dirty="0"/>
+              </a:p>
+              <a:p>
+                <a:pPr rtl="0"/>
+                <a:r>
+                  <a:rPr lang="en-US" dirty="0" err="1"/>
+                  <a:t>Então</a:t>
+                </a:r>
+                <a:r>
+                  <a:rPr lang="en-US" dirty="0"/>
+                  <a:t>:</a:t>
+                </a:r>
+              </a:p>
+              <a:p>
+                <a14:m>
+                  <m:oMathPara xmlns:m="http://schemas.openxmlformats.org/officeDocument/2006/math">
+                    <m:oMath>
+                      <m:sSub>
+                        <m:sSubPr>
+                          <m:ctrlPr>
+                            <a:rPr lang="en-US" sz="1200" i="1" kern="1200">
+                              <a:solidFill>
+                                <a:schemeClr val="tx1"/>
+                              </a:solidFill>
+                              <a:latin typeface="+mn-lt"/>
+                              <a:ea typeface="+mn-ea"/>
+                              <a:cs typeface="+mn-cs"/>
+                            </a:rPr>
+                          </m:ctrlPr>
+                        </m:sSubPr>
+                        <m:e>
+                          <m:r>
+                            <a:rPr lang="en-US" sz="1200" i="1" kern="1200">
+                              <a:solidFill>
+                                <a:schemeClr val="tx1"/>
+                              </a:solidFill>
+                              <a:latin typeface="+mn-lt"/>
+                              <a:ea typeface="+mn-ea"/>
+                              <a:cs typeface="+mn-cs"/>
+                            </a:rPr>
+                            <m:t>𝐹</m:t>
+                          </m:r>
+                        </m:e>
+                        <m:sub>
+                          <m:r>
+                            <a:rPr lang="en-US" sz="1200" i="0" kern="1200">
+                              <a:solidFill>
+                                <a:schemeClr val="tx1"/>
+                              </a:solidFill>
+                              <a:latin typeface="+mn-lt"/>
+                              <a:ea typeface="+mn-ea"/>
+                              <a:cs typeface="+mn-cs"/>
+                            </a:rPr>
+                            <m:t>1</m:t>
+                          </m:r>
+                        </m:sub>
+                      </m:sSub>
+                      <m:r>
+                        <a:rPr lang="en-US" sz="1200" i="0" kern="1200">
+                          <a:solidFill>
+                            <a:schemeClr val="tx1"/>
+                          </a:solidFill>
+                          <a:latin typeface="+mn-lt"/>
+                          <a:ea typeface="+mn-ea"/>
+                          <a:cs typeface="+mn-cs"/>
+                        </a:rPr>
+                        <m:t>=</m:t>
+                      </m:r>
+                      <m:f>
+                        <m:fPr>
+                          <m:ctrlPr>
+                            <a:rPr lang="en-US" sz="1200" i="0" kern="1200">
+                              <a:solidFill>
+                                <a:schemeClr val="tx1"/>
+                              </a:solidFill>
+                              <a:latin typeface="+mn-lt"/>
+                              <a:ea typeface="+mn-ea"/>
+                              <a:cs typeface="+mn-cs"/>
+                            </a:rPr>
+                          </m:ctrlPr>
+                        </m:fPr>
+                        <m:num>
+                          <m:r>
+                            <a:rPr lang="en-US" sz="1200" i="0" kern="1200">
+                              <a:solidFill>
+                                <a:schemeClr val="tx1"/>
+                              </a:solidFill>
+                              <a:latin typeface="+mn-lt"/>
+                              <a:ea typeface="+mn-ea"/>
+                              <a:cs typeface="+mn-cs"/>
+                            </a:rPr>
+                            <m:t>2</m:t>
+                          </m:r>
+                        </m:num>
+                        <m:den>
+                          <m:f>
+                            <m:fPr>
+                              <m:ctrlPr>
+                                <a:rPr lang="en-US" sz="1200" i="0" kern="1200">
+                                  <a:solidFill>
+                                    <a:schemeClr val="tx1"/>
+                                  </a:solidFill>
+                                  <a:latin typeface="+mn-lt"/>
+                                  <a:ea typeface="+mn-ea"/>
+                                  <a:cs typeface="+mn-cs"/>
+                                </a:rPr>
+                              </m:ctrlPr>
+                            </m:fPr>
+                            <m:num>
+                              <m:r>
+                                <a:rPr lang="en-US" sz="1200" i="0" kern="1200">
+                                  <a:solidFill>
+                                    <a:schemeClr val="tx1"/>
+                                  </a:solidFill>
+                                  <a:latin typeface="+mn-lt"/>
+                                  <a:ea typeface="+mn-ea"/>
+                                  <a:cs typeface="+mn-cs"/>
+                                </a:rPr>
+                                <m:t>1</m:t>
+                              </m:r>
+                            </m:num>
+                            <m:den>
+                              <m:r>
+                                <m:rPr>
+                                  <m:nor/>
+                                </m:rPr>
+                                <a:rPr lang="en-US" sz="1200" b="0" i="0" kern="1200">
+                                  <a:solidFill>
+                                    <a:schemeClr val="tx1"/>
+                                  </a:solidFill>
+                                  <a:latin typeface="+mn-lt"/>
+                                  <a:ea typeface="+mn-ea"/>
+                                  <a:cs typeface="+mn-cs"/>
+                                </a:rPr>
+                                <m:t>precis</m:t>
+                              </m:r>
+                              <m:limUpp>
+                                <m:limUppPr>
+                                  <m:ctrlPr>
+                                    <a:rPr lang="en-US" sz="1200" b="0" i="0" kern="1200">
+                                      <a:solidFill>
+                                        <a:schemeClr val="tx1"/>
+                                      </a:solidFill>
+                                      <a:latin typeface="+mn-lt"/>
+                                      <a:ea typeface="+mn-ea"/>
+                                      <a:cs typeface="+mn-cs"/>
+                                    </a:rPr>
+                                  </m:ctrlPr>
+                                </m:limUppPr>
+                                <m:e>
+                                  <m:r>
+                                    <m:rPr>
+                                      <m:nor/>
+                                    </m:rPr>
+                                    <a:rPr lang="en-US" sz="1200" b="0" i="0" kern="1200">
+                                      <a:solidFill>
+                                        <a:schemeClr val="tx1"/>
+                                      </a:solidFill>
+                                      <a:latin typeface="+mn-lt"/>
+                                      <a:ea typeface="+mn-ea"/>
+                                      <a:cs typeface="+mn-cs"/>
+                                    </a:rPr>
+                                    <m:t>a</m:t>
+                                  </m:r>
+                                </m:e>
+                                <m:lim>
+                                  <m:r>
+                                    <a:rPr lang="en-US" sz="1200" b="0" i="0" kern="1200">
+                                      <a:solidFill>
+                                        <a:schemeClr val="tx1"/>
+                                      </a:solidFill>
+                                      <a:latin typeface="+mn-lt"/>
+                                      <a:ea typeface="+mn-ea"/>
+                                      <a:cs typeface="+mn-cs"/>
+                                    </a:rPr>
+                                    <m:t>˜</m:t>
+                                  </m:r>
+                                </m:lim>
+                              </m:limUpp>
+                              <m:r>
+                                <m:rPr>
+                                  <m:nor/>
+                                </m:rPr>
+                                <a:rPr lang="en-US" sz="1200" b="0" i="0" kern="1200">
+                                  <a:solidFill>
+                                    <a:schemeClr val="tx1"/>
+                                  </a:solidFill>
+                                  <a:latin typeface="+mn-lt"/>
+                                  <a:ea typeface="+mn-ea"/>
+                                  <a:cs typeface="+mn-cs"/>
+                                </a:rPr>
+                                <m:t>o</m:t>
+                              </m:r>
+                            </m:den>
+                          </m:f>
+                          <m:r>
+                            <a:rPr lang="en-US" sz="1200" b="0" i="0" kern="1200">
+                              <a:solidFill>
+                                <a:schemeClr val="tx1"/>
+                              </a:solidFill>
+                              <a:latin typeface="+mn-lt"/>
+                              <a:ea typeface="+mn-ea"/>
+                              <a:cs typeface="+mn-cs"/>
+                            </a:rPr>
+                            <m:t>+</m:t>
+                          </m:r>
+                          <m:f>
+                            <m:fPr>
+                              <m:ctrlPr>
+                                <a:rPr lang="en-US" sz="1200" b="0" i="0" kern="1200">
+                                  <a:solidFill>
+                                    <a:schemeClr val="tx1"/>
+                                  </a:solidFill>
+                                  <a:latin typeface="+mn-lt"/>
+                                  <a:ea typeface="+mn-ea"/>
+                                  <a:cs typeface="+mn-cs"/>
+                                </a:rPr>
+                              </m:ctrlPr>
+                            </m:fPr>
+                            <m:num>
+                              <m:r>
+                                <a:rPr lang="en-US" sz="1200" b="0" i="0" kern="1200">
+                                  <a:solidFill>
+                                    <a:schemeClr val="tx1"/>
+                                  </a:solidFill>
+                                  <a:latin typeface="+mn-lt"/>
+                                  <a:ea typeface="+mn-ea"/>
+                                  <a:cs typeface="+mn-cs"/>
+                                </a:rPr>
+                                <m:t>1</m:t>
+                              </m:r>
+                            </m:num>
+                            <m:den>
+                              <m:r>
+                                <a:rPr lang="en-US" sz="1200" b="0" i="1" kern="1200">
+                                  <a:solidFill>
+                                    <a:schemeClr val="tx1"/>
+                                  </a:solidFill>
+                                  <a:latin typeface="+mn-lt"/>
+                                  <a:ea typeface="+mn-ea"/>
+                                  <a:cs typeface="+mn-cs"/>
+                                </a:rPr>
+                                <m:t>𝑟𝑒𝑐𝑎𝑙𝑙</m:t>
+                              </m:r>
+                            </m:den>
+                          </m:f>
+                        </m:den>
+                      </m:f>
+                    </m:oMath>
+                  </m:oMathPara>
+                </a14:m>
+                <a:endParaRPr lang="en-US" b="0" dirty="0"/>
+              </a:p>
+            </p:txBody>
+          </p:sp>
+        </mc:Choice>
+        <mc:Fallback>
+          <p:sp>
+            <p:nvSpPr>
+              <p:cNvPr id="3" name="Espaço Reservado para Anotações 2"/>
+              <p:cNvSpPr>
+                <a:spLocks noGrp="1"/>
+              </p:cNvSpPr>
+              <p:nvPr>
+                <p:ph type="body" idx="1"/>
+              </p:nvPr>
+            </p:nvSpPr>
+            <p:spPr/>
+            <p:txBody>
+              <a:bodyPr/>
+              <a:lstStyle/>
+              <a:p>
+                <a:pPr rtl="0"/>
+                <a:r>
+                  <a:rPr lang="en-US" dirty="0"/>
+                  <a:t>A </a:t>
+                </a:r>
+                <a:r>
+                  <a:rPr lang="en-US" dirty="0" err="1"/>
+                  <a:t>média</a:t>
+                </a:r>
+                <a:r>
+                  <a:rPr lang="en-US" dirty="0"/>
+                  <a:t> </a:t>
+                </a:r>
+                <a:r>
+                  <a:rPr lang="en-US" dirty="0" err="1"/>
+                  <a:t>harmônica</a:t>
+                </a:r>
+                <a:r>
+                  <a:rPr lang="en-US" dirty="0"/>
+                  <a:t> de </a:t>
+                </a:r>
+                <a:r>
+                  <a:rPr lang="en-US" dirty="0" err="1"/>
+                  <a:t>dois</a:t>
+                </a:r>
+                <a:r>
+                  <a:rPr lang="en-US" dirty="0"/>
+                  <a:t> </a:t>
+                </a:r>
+                <a:r>
+                  <a:rPr lang="en-US" dirty="0" err="1"/>
+                  <a:t>números</a:t>
+                </a:r>
+                <a:r>
+                  <a:rPr lang="en-US" dirty="0"/>
+                  <a:t> </a:t>
+                </a:r>
+                <a:r>
+                  <a:rPr lang="en-US" sz="1200" i="0" kern="1200">
+                    <a:solidFill>
+                      <a:schemeClr val="tx1"/>
+                    </a:solidFill>
+                    <a:latin typeface="+mn-lt"/>
+                    <a:ea typeface="+mn-ea"/>
+                    <a:cs typeface="+mn-cs"/>
+                  </a:rPr>
+                  <a:t>𝑎</a:t>
+                </a:r>
+                <a:r>
+                  <a:rPr lang="en-US" dirty="0"/>
+                  <a:t> e </a:t>
+                </a:r>
+                <a:r>
+                  <a:rPr lang="en-US" sz="1200" i="0" kern="1200">
+                    <a:solidFill>
+                      <a:schemeClr val="tx1"/>
+                    </a:solidFill>
+                    <a:latin typeface="+mn-lt"/>
+                    <a:ea typeface="+mn-ea"/>
+                    <a:cs typeface="+mn-cs"/>
+                  </a:rPr>
+                  <a:t>𝑏</a:t>
+                </a:r>
+                <a:r>
+                  <a:rPr lang="en-US" dirty="0"/>
+                  <a:t> é o </a:t>
+                </a:r>
+                <a:r>
+                  <a:rPr lang="en-US" dirty="0" err="1"/>
+                  <a:t>inverso</a:t>
+                </a:r>
+                <a:r>
+                  <a:rPr lang="en-US" dirty="0"/>
+                  <a:t> da </a:t>
+                </a:r>
+                <a:r>
+                  <a:rPr lang="en-US" dirty="0" err="1"/>
+                  <a:t>média</a:t>
+                </a:r>
+                <a:r>
+                  <a:rPr lang="en-US" dirty="0"/>
+                  <a:t> dos </a:t>
+                </a:r>
+                <a:r>
+                  <a:rPr lang="en-US" dirty="0" err="1"/>
+                  <a:t>inversos</a:t>
+                </a:r>
+                <a:r>
+                  <a:rPr lang="en-US" dirty="0"/>
+                  <a:t>:</a:t>
+                </a:r>
+              </a:p>
+              <a:p>
+                <a:r>
+                  <a:rPr lang="en-US" sz="1200" i="0" kern="1200">
+                    <a:solidFill>
+                      <a:schemeClr val="tx1"/>
+                    </a:solidFill>
+                    <a:latin typeface="+mn-lt"/>
+                    <a:ea typeface="+mn-ea"/>
+                    <a:cs typeface="+mn-cs"/>
+                  </a:rPr>
+                  <a:t>𝐻=1/((1/𝑎+1/𝑏)/2)=2/(1/𝑎+1/𝑏)</a:t>
+                </a:r>
+                <a:endParaRPr lang="en-US" dirty="0"/>
+              </a:p>
+              <a:p>
+                <a:pPr rtl="0"/>
+                <a:r>
+                  <a:rPr lang="en-US" dirty="0" err="1"/>
+                  <a:t>Então</a:t>
+                </a:r>
+                <a:r>
+                  <a:rPr lang="en-US" dirty="0"/>
+                  <a:t>:</a:t>
+                </a:r>
+              </a:p>
+              <a:p>
+                <a:r>
+                  <a:rPr lang="en-US" sz="1200" i="0" kern="1200">
+                    <a:solidFill>
+                      <a:schemeClr val="tx1"/>
+                    </a:solidFill>
+                    <a:latin typeface="+mn-lt"/>
+                    <a:ea typeface="+mn-ea"/>
+                    <a:cs typeface="+mn-cs"/>
+                  </a:rPr>
+                  <a:t>𝐹_1=2/(1/(</a:t>
+                </a:r>
+                <a:r>
+                  <a:rPr lang="en-US" sz="1200" b="0" i="0" kern="1200">
+                    <a:solidFill>
+                      <a:schemeClr val="tx1"/>
+                    </a:solidFill>
+                    <a:latin typeface="+mn-lt"/>
+                    <a:ea typeface="+mn-ea"/>
+                    <a:cs typeface="+mn-cs"/>
+                  </a:rPr>
+                  <a:t>"precis"  "a" ┴˜ "o" )+1/𝑟𝑒𝑐𝑎𝑙𝑙)</a:t>
+                </a:r>
+                <a:endParaRPr lang="en-US" b="0" dirty="0"/>
+              </a:p>
+            </p:txBody>
+          </p:sp>
+        </mc:Fallback>
+      </mc:AlternateContent>
+      <p:sp>
+        <p:nvSpPr>
+          <p:cNvPr id="4" name="Espaço Reservado para Número de Slide 3"/>
+          <p:cNvSpPr>
+            <a:spLocks noGrp="1"/>
+          </p:cNvSpPr>
+          <p:nvPr>
+            <p:ph type="sldNum" sz="quarter" idx="5"/>
+          </p:nvPr>
+        </p:nvSpPr>
+        <p:spPr/>
+        <p:txBody>
+          <a:bodyPr/>
+          <a:lstStyle/>
+          <a:p>
+            <a:fld id="{6FC8D850-966F-45A6-8DE7-15B891E7D40D}" type="slidenum">
+              <a:rPr lang="pt-BR" smtClean="0"/>
+              <a:t>21</a:t>
+            </a:fld>
+            <a:endParaRPr lang="pt-BR"/>
+          </a:p>
+        </p:txBody>
+      </p:sp>
+    </p:spTree>
+    <p:extLst>
+      <p:ext uri="{BB962C8B-B14F-4D97-AF65-F5344CB8AC3E}">
+        <p14:creationId xmlns:p14="http://schemas.microsoft.com/office/powerpoint/2010/main" val="1157145713"/>
+      </p:ext>
+    </p:extLst>
+  </p:cSld>
+  <p:clrMapOvr>
+    <a:masterClrMapping/>
+  </p:clrMapOvr>
+</p:notes>
+</file>
+
+<file path=ppt/notesSlides/notesSlide12.xml><?xml version="1.0" encoding="utf-8"?>
 <p:notes xmlns:a="http://schemas.openxmlformats.org/drawingml/2006/main" xmlns:r="http://schemas.openxmlformats.org/officeDocument/2006/relationships" xmlns:p="http://schemas.openxmlformats.org/presentationml/2006/main">
   <p:cSld>
     <p:spTree>
@@ -1988,7 +2850,7 @@
           <a:p>
             <a:fld id="{6FC8D850-966F-45A6-8DE7-15B891E7D40D}" type="slidenum">
               <a:rPr lang="pt-BR" smtClean="0"/>
-              <a:t>11</a:t>
+              <a:t>10</a:t>
             </a:fld>
             <a:endParaRPr lang="pt-BR"/>
           </a:p>
@@ -2131,7 +2993,7 @@
           <a:p>
             <a:fld id="{6FC8D850-966F-45A6-8DE7-15B891E7D40D}" type="slidenum">
               <a:rPr lang="pt-BR" smtClean="0"/>
-              <a:t>12</a:t>
+              <a:t>11</a:t>
             </a:fld>
             <a:endParaRPr lang="pt-BR"/>
           </a:p>
@@ -2410,7 +3272,7 @@
           <a:p>
             <a:fld id="{6FC8D850-966F-45A6-8DE7-15B891E7D40D}" type="slidenum">
               <a:rPr lang="pt-BR" smtClean="0"/>
-              <a:t>13</a:t>
+              <a:t>12</a:t>
             </a:fld>
             <a:endParaRPr lang="pt-BR"/>
           </a:p>
@@ -2451,7 +3313,7 @@
           <p:cNvPr id="2" name="Título 1">
             <a:extLst>
               <a:ext uri="{FF2B5EF4-FFF2-40B4-BE49-F238E27FC236}">
-                <a16:creationId xmlns:a16="http://schemas.microsoft.com/office/drawing/2014/main" xmlns="" id="{1DB9B4FF-B06E-403C-A326-BDC64D8FF94E}"/>
+                <a16:creationId xmlns:a16="http://schemas.microsoft.com/office/drawing/2014/main" id="{1DB9B4FF-B06E-403C-A326-BDC64D8FF94E}"/>
               </a:ext>
             </a:extLst>
           </p:cNvPr>
@@ -2488,7 +3350,7 @@
           <p:cNvPr id="3" name="Subtítulo 2">
             <a:extLst>
               <a:ext uri="{FF2B5EF4-FFF2-40B4-BE49-F238E27FC236}">
-                <a16:creationId xmlns:a16="http://schemas.microsoft.com/office/drawing/2014/main" xmlns="" id="{247BDFCE-746E-45BF-A319-4733D58D1632}"/>
+                <a16:creationId xmlns:a16="http://schemas.microsoft.com/office/drawing/2014/main" id="{247BDFCE-746E-45BF-A319-4733D58D1632}"/>
               </a:ext>
             </a:extLst>
           </p:cNvPr>
@@ -2558,7 +3420,7 @@
           <p:cNvPr id="4" name="Espaço Reservado para Data 3">
             <a:extLst>
               <a:ext uri="{FF2B5EF4-FFF2-40B4-BE49-F238E27FC236}">
-                <a16:creationId xmlns:a16="http://schemas.microsoft.com/office/drawing/2014/main" xmlns="" id="{9EDE2778-5372-4104-B96D-968184DA8288}"/>
+                <a16:creationId xmlns:a16="http://schemas.microsoft.com/office/drawing/2014/main" id="{9EDE2778-5372-4104-B96D-968184DA8288}"/>
               </a:ext>
             </a:extLst>
           </p:cNvPr>
@@ -2576,7 +3438,7 @@
           <a:p>
             <a:fld id="{63289F7E-B80B-496E-81B4-D396C37C9454}" type="datetimeFigureOut">
               <a:rPr lang="pt-BR" smtClean="0"/>
-              <a:t>14/09/2026</a:t>
+              <a:t>21/09/2026</a:t>
             </a:fld>
             <a:endParaRPr lang="pt-BR"/>
           </a:p>
@@ -2587,7 +3449,7 @@
           <p:cNvPr id="5" name="Espaço Reservado para Rodapé 4">
             <a:extLst>
               <a:ext uri="{FF2B5EF4-FFF2-40B4-BE49-F238E27FC236}">
-                <a16:creationId xmlns:a16="http://schemas.microsoft.com/office/drawing/2014/main" xmlns="" id="{C1DD0F41-C861-4051-988D-3024A37A4B93}"/>
+                <a16:creationId xmlns:a16="http://schemas.microsoft.com/office/drawing/2014/main" id="{C1DD0F41-C861-4051-988D-3024A37A4B93}"/>
               </a:ext>
             </a:extLst>
           </p:cNvPr>
@@ -2612,7 +3474,7 @@
           <p:cNvPr id="6" name="Espaço Reservado para Número de Slide 5">
             <a:extLst>
               <a:ext uri="{FF2B5EF4-FFF2-40B4-BE49-F238E27FC236}">
-                <a16:creationId xmlns:a16="http://schemas.microsoft.com/office/drawing/2014/main" xmlns="" id="{07E5967E-D980-431A-A5DB-3F0C5030A81E}"/>
+                <a16:creationId xmlns:a16="http://schemas.microsoft.com/office/drawing/2014/main" id="{07E5967E-D980-431A-A5DB-3F0C5030A81E}"/>
               </a:ext>
             </a:extLst>
           </p:cNvPr>
@@ -2671,7 +3533,7 @@
           <p:cNvPr id="2" name="Título 1">
             <a:extLst>
               <a:ext uri="{FF2B5EF4-FFF2-40B4-BE49-F238E27FC236}">
-                <a16:creationId xmlns:a16="http://schemas.microsoft.com/office/drawing/2014/main" xmlns="" id="{9036C49F-3E68-4175-81BA-3C3FEE44308A}"/>
+                <a16:creationId xmlns:a16="http://schemas.microsoft.com/office/drawing/2014/main" id="{9036C49F-3E68-4175-81BA-3C3FEE44308A}"/>
               </a:ext>
             </a:extLst>
           </p:cNvPr>
@@ -2699,7 +3561,7 @@
           <p:cNvPr id="3" name="Espaço Reservado para Texto Vertical 2">
             <a:extLst>
               <a:ext uri="{FF2B5EF4-FFF2-40B4-BE49-F238E27FC236}">
-                <a16:creationId xmlns:a16="http://schemas.microsoft.com/office/drawing/2014/main" xmlns="" id="{426FA736-3DD3-4D4E-B57B-BBE1D8F7D424}"/>
+                <a16:creationId xmlns:a16="http://schemas.microsoft.com/office/drawing/2014/main" id="{426FA736-3DD3-4D4E-B57B-BBE1D8F7D424}"/>
               </a:ext>
             </a:extLst>
           </p:cNvPr>
@@ -2756,7 +3618,7 @@
           <p:cNvPr id="4" name="Espaço Reservado para Data 3">
             <a:extLst>
               <a:ext uri="{FF2B5EF4-FFF2-40B4-BE49-F238E27FC236}">
-                <a16:creationId xmlns:a16="http://schemas.microsoft.com/office/drawing/2014/main" xmlns="" id="{99E8855C-D8FD-48F6-B14E-861E0DE4D915}"/>
+                <a16:creationId xmlns:a16="http://schemas.microsoft.com/office/drawing/2014/main" id="{99E8855C-D8FD-48F6-B14E-861E0DE4D915}"/>
               </a:ext>
             </a:extLst>
           </p:cNvPr>
@@ -2774,7 +3636,7 @@
           <a:p>
             <a:fld id="{63289F7E-B80B-496E-81B4-D396C37C9454}" type="datetimeFigureOut">
               <a:rPr lang="pt-BR" smtClean="0"/>
-              <a:t>14/09/2026</a:t>
+              <a:t>21/09/2026</a:t>
             </a:fld>
             <a:endParaRPr lang="pt-BR"/>
           </a:p>
@@ -2785,7 +3647,7 @@
           <p:cNvPr id="5" name="Espaço Reservado para Rodapé 4">
             <a:extLst>
               <a:ext uri="{FF2B5EF4-FFF2-40B4-BE49-F238E27FC236}">
-                <a16:creationId xmlns:a16="http://schemas.microsoft.com/office/drawing/2014/main" xmlns="" id="{97C0BB88-2F21-42A5-ACFF-83DA47F2D340}"/>
+                <a16:creationId xmlns:a16="http://schemas.microsoft.com/office/drawing/2014/main" id="{97C0BB88-2F21-42A5-ACFF-83DA47F2D340}"/>
               </a:ext>
             </a:extLst>
           </p:cNvPr>
@@ -2810,7 +3672,7 @@
           <p:cNvPr id="6" name="Espaço Reservado para Número de Slide 5">
             <a:extLst>
               <a:ext uri="{FF2B5EF4-FFF2-40B4-BE49-F238E27FC236}">
-                <a16:creationId xmlns:a16="http://schemas.microsoft.com/office/drawing/2014/main" xmlns="" id="{6CB462B3-1F22-4C05-B4B8-7A279FB7D5E9}"/>
+                <a16:creationId xmlns:a16="http://schemas.microsoft.com/office/drawing/2014/main" id="{6CB462B3-1F22-4C05-B4B8-7A279FB7D5E9}"/>
               </a:ext>
             </a:extLst>
           </p:cNvPr>
@@ -2869,7 +3731,7 @@
           <p:cNvPr id="2" name="Título Vertical 1">
             <a:extLst>
               <a:ext uri="{FF2B5EF4-FFF2-40B4-BE49-F238E27FC236}">
-                <a16:creationId xmlns:a16="http://schemas.microsoft.com/office/drawing/2014/main" xmlns="" id="{EAEAB728-701C-4207-A9D5-23FF45C60502}"/>
+                <a16:creationId xmlns:a16="http://schemas.microsoft.com/office/drawing/2014/main" id="{EAEAB728-701C-4207-A9D5-23FF45C60502}"/>
               </a:ext>
             </a:extLst>
           </p:cNvPr>
@@ -2902,7 +3764,7 @@
           <p:cNvPr id="3" name="Espaço Reservado para Texto Vertical 2">
             <a:extLst>
               <a:ext uri="{FF2B5EF4-FFF2-40B4-BE49-F238E27FC236}">
-                <a16:creationId xmlns:a16="http://schemas.microsoft.com/office/drawing/2014/main" xmlns="" id="{BA8C8CCF-7823-480A-9A19-0F664DD17E3B}"/>
+                <a16:creationId xmlns:a16="http://schemas.microsoft.com/office/drawing/2014/main" id="{BA8C8CCF-7823-480A-9A19-0F664DD17E3B}"/>
               </a:ext>
             </a:extLst>
           </p:cNvPr>
@@ -2964,7 +3826,7 @@
           <p:cNvPr id="4" name="Espaço Reservado para Data 3">
             <a:extLst>
               <a:ext uri="{FF2B5EF4-FFF2-40B4-BE49-F238E27FC236}">
-                <a16:creationId xmlns:a16="http://schemas.microsoft.com/office/drawing/2014/main" xmlns="" id="{721D5734-7B1F-425D-942F-6EB73344027C}"/>
+                <a16:creationId xmlns:a16="http://schemas.microsoft.com/office/drawing/2014/main" id="{721D5734-7B1F-425D-942F-6EB73344027C}"/>
               </a:ext>
             </a:extLst>
           </p:cNvPr>
@@ -2982,7 +3844,7 @@
           <a:p>
             <a:fld id="{63289F7E-B80B-496E-81B4-D396C37C9454}" type="datetimeFigureOut">
               <a:rPr lang="pt-BR" smtClean="0"/>
-              <a:t>14/09/2026</a:t>
+              <a:t>21/09/2026</a:t>
             </a:fld>
             <a:endParaRPr lang="pt-BR"/>
           </a:p>
@@ -2993,7 +3855,7 @@
           <p:cNvPr id="5" name="Espaço Reservado para Rodapé 4">
             <a:extLst>
               <a:ext uri="{FF2B5EF4-FFF2-40B4-BE49-F238E27FC236}">
-                <a16:creationId xmlns:a16="http://schemas.microsoft.com/office/drawing/2014/main" xmlns="" id="{1E1AAEAC-F08D-45FE-89EC-B1B349A868C9}"/>
+                <a16:creationId xmlns:a16="http://schemas.microsoft.com/office/drawing/2014/main" id="{1E1AAEAC-F08D-45FE-89EC-B1B349A868C9}"/>
               </a:ext>
             </a:extLst>
           </p:cNvPr>
@@ -3018,7 +3880,7 @@
           <p:cNvPr id="6" name="Espaço Reservado para Número de Slide 5">
             <a:extLst>
               <a:ext uri="{FF2B5EF4-FFF2-40B4-BE49-F238E27FC236}">
-                <a16:creationId xmlns:a16="http://schemas.microsoft.com/office/drawing/2014/main" xmlns="" id="{BAA44493-9911-47B2-87A6-C2141A972BC8}"/>
+                <a16:creationId xmlns:a16="http://schemas.microsoft.com/office/drawing/2014/main" id="{BAA44493-9911-47B2-87A6-C2141A972BC8}"/>
               </a:ext>
             </a:extLst>
           </p:cNvPr>
@@ -3077,7 +3939,7 @@
           <p:cNvPr id="2" name="Título 1">
             <a:extLst>
               <a:ext uri="{FF2B5EF4-FFF2-40B4-BE49-F238E27FC236}">
-                <a16:creationId xmlns:a16="http://schemas.microsoft.com/office/drawing/2014/main" xmlns="" id="{71BD44A5-8F21-4626-A01D-48A1C874B1D5}"/>
+                <a16:creationId xmlns:a16="http://schemas.microsoft.com/office/drawing/2014/main" id="{71BD44A5-8F21-4626-A01D-48A1C874B1D5}"/>
               </a:ext>
             </a:extLst>
           </p:cNvPr>
@@ -3105,7 +3967,7 @@
           <p:cNvPr id="3" name="Espaço Reservado para Conteúdo 2">
             <a:extLst>
               <a:ext uri="{FF2B5EF4-FFF2-40B4-BE49-F238E27FC236}">
-                <a16:creationId xmlns:a16="http://schemas.microsoft.com/office/drawing/2014/main" xmlns="" id="{B79E8085-65A9-48AA-951D-71D978BFF4ED}"/>
+                <a16:creationId xmlns:a16="http://schemas.microsoft.com/office/drawing/2014/main" id="{B79E8085-65A9-48AA-951D-71D978BFF4ED}"/>
               </a:ext>
             </a:extLst>
           </p:cNvPr>
@@ -3162,7 +4024,7 @@
           <p:cNvPr id="4" name="Espaço Reservado para Data 3">
             <a:extLst>
               <a:ext uri="{FF2B5EF4-FFF2-40B4-BE49-F238E27FC236}">
-                <a16:creationId xmlns:a16="http://schemas.microsoft.com/office/drawing/2014/main" xmlns="" id="{F05BE1AF-51EA-425D-B188-DE7BD675009F}"/>
+                <a16:creationId xmlns:a16="http://schemas.microsoft.com/office/drawing/2014/main" id="{F05BE1AF-51EA-425D-B188-DE7BD675009F}"/>
               </a:ext>
             </a:extLst>
           </p:cNvPr>
@@ -3180,7 +4042,7 @@
           <a:p>
             <a:fld id="{63289F7E-B80B-496E-81B4-D396C37C9454}" type="datetimeFigureOut">
               <a:rPr lang="pt-BR" smtClean="0"/>
-              <a:t>14/09/2026</a:t>
+              <a:t>21/09/2026</a:t>
             </a:fld>
             <a:endParaRPr lang="pt-BR"/>
           </a:p>
@@ -3191,7 +4053,7 @@
           <p:cNvPr id="5" name="Espaço Reservado para Rodapé 4">
             <a:extLst>
               <a:ext uri="{FF2B5EF4-FFF2-40B4-BE49-F238E27FC236}">
-                <a16:creationId xmlns:a16="http://schemas.microsoft.com/office/drawing/2014/main" xmlns="" id="{121BE632-29CF-4CB9-B365-C9EF38F89BE6}"/>
+                <a16:creationId xmlns:a16="http://schemas.microsoft.com/office/drawing/2014/main" id="{121BE632-29CF-4CB9-B365-C9EF38F89BE6}"/>
               </a:ext>
             </a:extLst>
           </p:cNvPr>
@@ -3216,7 +4078,7 @@
           <p:cNvPr id="6" name="Espaço Reservado para Número de Slide 5">
             <a:extLst>
               <a:ext uri="{FF2B5EF4-FFF2-40B4-BE49-F238E27FC236}">
-                <a16:creationId xmlns:a16="http://schemas.microsoft.com/office/drawing/2014/main" xmlns="" id="{60CF3DD1-9AEC-4A57-B461-4E4DD86FAC18}"/>
+                <a16:creationId xmlns:a16="http://schemas.microsoft.com/office/drawing/2014/main" id="{60CF3DD1-9AEC-4A57-B461-4E4DD86FAC18}"/>
               </a:ext>
             </a:extLst>
           </p:cNvPr>
@@ -3275,7 +4137,7 @@
           <p:cNvPr id="2" name="Título 1">
             <a:extLst>
               <a:ext uri="{FF2B5EF4-FFF2-40B4-BE49-F238E27FC236}">
-                <a16:creationId xmlns:a16="http://schemas.microsoft.com/office/drawing/2014/main" xmlns="" id="{34AB2FF0-A4D7-4E28-991D-FF26140D5988}"/>
+                <a16:creationId xmlns:a16="http://schemas.microsoft.com/office/drawing/2014/main" id="{34AB2FF0-A4D7-4E28-991D-FF26140D5988}"/>
               </a:ext>
             </a:extLst>
           </p:cNvPr>
@@ -3312,7 +4174,7 @@
           <p:cNvPr id="3" name="Espaço Reservado para Texto 2">
             <a:extLst>
               <a:ext uri="{FF2B5EF4-FFF2-40B4-BE49-F238E27FC236}">
-                <a16:creationId xmlns:a16="http://schemas.microsoft.com/office/drawing/2014/main" xmlns="" id="{E2AC45B0-4145-40DB-8E61-105461170604}"/>
+                <a16:creationId xmlns:a16="http://schemas.microsoft.com/office/drawing/2014/main" id="{E2AC45B0-4145-40DB-8E61-105461170604}"/>
               </a:ext>
             </a:extLst>
           </p:cNvPr>
@@ -3437,7 +4299,7 @@
           <p:cNvPr id="4" name="Espaço Reservado para Data 3">
             <a:extLst>
               <a:ext uri="{FF2B5EF4-FFF2-40B4-BE49-F238E27FC236}">
-                <a16:creationId xmlns:a16="http://schemas.microsoft.com/office/drawing/2014/main" xmlns="" id="{50F1D3FB-740A-4EBA-A309-2CE71D12ECFB}"/>
+                <a16:creationId xmlns:a16="http://schemas.microsoft.com/office/drawing/2014/main" id="{50F1D3FB-740A-4EBA-A309-2CE71D12ECFB}"/>
               </a:ext>
             </a:extLst>
           </p:cNvPr>
@@ -3455,7 +4317,7 @@
           <a:p>
             <a:fld id="{63289F7E-B80B-496E-81B4-D396C37C9454}" type="datetimeFigureOut">
               <a:rPr lang="pt-BR" smtClean="0"/>
-              <a:t>14/09/2026</a:t>
+              <a:t>21/09/2026</a:t>
             </a:fld>
             <a:endParaRPr lang="pt-BR"/>
           </a:p>
@@ -3466,7 +4328,7 @@
           <p:cNvPr id="5" name="Espaço Reservado para Rodapé 4">
             <a:extLst>
               <a:ext uri="{FF2B5EF4-FFF2-40B4-BE49-F238E27FC236}">
-                <a16:creationId xmlns:a16="http://schemas.microsoft.com/office/drawing/2014/main" xmlns="" id="{BDCAB18F-8715-4465-A940-F9C193A2ACE9}"/>
+                <a16:creationId xmlns:a16="http://schemas.microsoft.com/office/drawing/2014/main" id="{BDCAB18F-8715-4465-A940-F9C193A2ACE9}"/>
               </a:ext>
             </a:extLst>
           </p:cNvPr>
@@ -3491,7 +4353,7 @@
           <p:cNvPr id="6" name="Espaço Reservado para Número de Slide 5">
             <a:extLst>
               <a:ext uri="{FF2B5EF4-FFF2-40B4-BE49-F238E27FC236}">
-                <a16:creationId xmlns:a16="http://schemas.microsoft.com/office/drawing/2014/main" xmlns="" id="{353466C6-8248-429F-8056-FF040BF509EB}"/>
+                <a16:creationId xmlns:a16="http://schemas.microsoft.com/office/drawing/2014/main" id="{353466C6-8248-429F-8056-FF040BF509EB}"/>
               </a:ext>
             </a:extLst>
           </p:cNvPr>
@@ -3550,7 +4412,7 @@
           <p:cNvPr id="2" name="Título 1">
             <a:extLst>
               <a:ext uri="{FF2B5EF4-FFF2-40B4-BE49-F238E27FC236}">
-                <a16:creationId xmlns:a16="http://schemas.microsoft.com/office/drawing/2014/main" xmlns="" id="{BC7BB9F0-F14B-4A91-B2B7-35BC47FE4DE7}"/>
+                <a16:creationId xmlns:a16="http://schemas.microsoft.com/office/drawing/2014/main" id="{BC7BB9F0-F14B-4A91-B2B7-35BC47FE4DE7}"/>
               </a:ext>
             </a:extLst>
           </p:cNvPr>
@@ -3578,7 +4440,7 @@
           <p:cNvPr id="3" name="Espaço Reservado para Conteúdo 2">
             <a:extLst>
               <a:ext uri="{FF2B5EF4-FFF2-40B4-BE49-F238E27FC236}">
-                <a16:creationId xmlns:a16="http://schemas.microsoft.com/office/drawing/2014/main" xmlns="" id="{EC1FC1C4-73DA-47A6-8496-B0B457F7D39A}"/>
+                <a16:creationId xmlns:a16="http://schemas.microsoft.com/office/drawing/2014/main" id="{EC1FC1C4-73DA-47A6-8496-B0B457F7D39A}"/>
               </a:ext>
             </a:extLst>
           </p:cNvPr>
@@ -3640,7 +4502,7 @@
           <p:cNvPr id="4" name="Espaço Reservado para Conteúdo 3">
             <a:extLst>
               <a:ext uri="{FF2B5EF4-FFF2-40B4-BE49-F238E27FC236}">
-                <a16:creationId xmlns:a16="http://schemas.microsoft.com/office/drawing/2014/main" xmlns="" id="{E92F06A8-A449-4D92-9912-76873E529B38}"/>
+                <a16:creationId xmlns:a16="http://schemas.microsoft.com/office/drawing/2014/main" id="{E92F06A8-A449-4D92-9912-76873E529B38}"/>
               </a:ext>
             </a:extLst>
           </p:cNvPr>
@@ -3702,7 +4564,7 @@
           <p:cNvPr id="5" name="Espaço Reservado para Data 4">
             <a:extLst>
               <a:ext uri="{FF2B5EF4-FFF2-40B4-BE49-F238E27FC236}">
-                <a16:creationId xmlns:a16="http://schemas.microsoft.com/office/drawing/2014/main" xmlns="" id="{938070A4-BC2F-4D55-BD8D-DEAF11BB9EE9}"/>
+                <a16:creationId xmlns:a16="http://schemas.microsoft.com/office/drawing/2014/main" id="{938070A4-BC2F-4D55-BD8D-DEAF11BB9EE9}"/>
               </a:ext>
             </a:extLst>
           </p:cNvPr>
@@ -3720,7 +4582,7 @@
           <a:p>
             <a:fld id="{63289F7E-B80B-496E-81B4-D396C37C9454}" type="datetimeFigureOut">
               <a:rPr lang="pt-BR" smtClean="0"/>
-              <a:t>14/09/2026</a:t>
+              <a:t>21/09/2026</a:t>
             </a:fld>
             <a:endParaRPr lang="pt-BR"/>
           </a:p>
@@ -3731,7 +4593,7 @@
           <p:cNvPr id="6" name="Espaço Reservado para Rodapé 5">
             <a:extLst>
               <a:ext uri="{FF2B5EF4-FFF2-40B4-BE49-F238E27FC236}">
-                <a16:creationId xmlns:a16="http://schemas.microsoft.com/office/drawing/2014/main" xmlns="" id="{45CC2DB8-844A-465F-BA9A-7734C80C7F43}"/>
+                <a16:creationId xmlns:a16="http://schemas.microsoft.com/office/drawing/2014/main" id="{45CC2DB8-844A-465F-BA9A-7734C80C7F43}"/>
               </a:ext>
             </a:extLst>
           </p:cNvPr>
@@ -3756,7 +4618,7 @@
           <p:cNvPr id="7" name="Espaço Reservado para Número de Slide 6">
             <a:extLst>
               <a:ext uri="{FF2B5EF4-FFF2-40B4-BE49-F238E27FC236}">
-                <a16:creationId xmlns:a16="http://schemas.microsoft.com/office/drawing/2014/main" xmlns="" id="{4CC606A8-097B-4040-94E0-CD8C88280D8F}"/>
+                <a16:creationId xmlns:a16="http://schemas.microsoft.com/office/drawing/2014/main" id="{4CC606A8-097B-4040-94E0-CD8C88280D8F}"/>
               </a:ext>
             </a:extLst>
           </p:cNvPr>
@@ -3815,7 +4677,7 @@
           <p:cNvPr id="2" name="Título 1">
             <a:extLst>
               <a:ext uri="{FF2B5EF4-FFF2-40B4-BE49-F238E27FC236}">
-                <a16:creationId xmlns:a16="http://schemas.microsoft.com/office/drawing/2014/main" xmlns="" id="{76D66686-0143-4CB6-8C09-BA326F1E7ACA}"/>
+                <a16:creationId xmlns:a16="http://schemas.microsoft.com/office/drawing/2014/main" id="{76D66686-0143-4CB6-8C09-BA326F1E7ACA}"/>
               </a:ext>
             </a:extLst>
           </p:cNvPr>
@@ -3848,7 +4710,7 @@
           <p:cNvPr id="3" name="Espaço Reservado para Texto 2">
             <a:extLst>
               <a:ext uri="{FF2B5EF4-FFF2-40B4-BE49-F238E27FC236}">
-                <a16:creationId xmlns:a16="http://schemas.microsoft.com/office/drawing/2014/main" xmlns="" id="{0227AB85-F59E-4BCE-B846-4FA0992C2F23}"/>
+                <a16:creationId xmlns:a16="http://schemas.microsoft.com/office/drawing/2014/main" id="{0227AB85-F59E-4BCE-B846-4FA0992C2F23}"/>
               </a:ext>
             </a:extLst>
           </p:cNvPr>
@@ -3919,7 +4781,7 @@
           <p:cNvPr id="4" name="Espaço Reservado para Conteúdo 3">
             <a:extLst>
               <a:ext uri="{FF2B5EF4-FFF2-40B4-BE49-F238E27FC236}">
-                <a16:creationId xmlns:a16="http://schemas.microsoft.com/office/drawing/2014/main" xmlns="" id="{3373456C-7319-4D0A-827D-D29F6B083F5D}"/>
+                <a16:creationId xmlns:a16="http://schemas.microsoft.com/office/drawing/2014/main" id="{3373456C-7319-4D0A-827D-D29F6B083F5D}"/>
               </a:ext>
             </a:extLst>
           </p:cNvPr>
@@ -3981,7 +4843,7 @@
           <p:cNvPr id="5" name="Espaço Reservado para Texto 4">
             <a:extLst>
               <a:ext uri="{FF2B5EF4-FFF2-40B4-BE49-F238E27FC236}">
-                <a16:creationId xmlns:a16="http://schemas.microsoft.com/office/drawing/2014/main" xmlns="" id="{4CD109D0-2E83-4262-8029-A871CEC47406}"/>
+                <a16:creationId xmlns:a16="http://schemas.microsoft.com/office/drawing/2014/main" id="{4CD109D0-2E83-4262-8029-A871CEC47406}"/>
               </a:ext>
             </a:extLst>
           </p:cNvPr>
@@ -4052,7 +4914,7 @@
           <p:cNvPr id="6" name="Espaço Reservado para Conteúdo 5">
             <a:extLst>
               <a:ext uri="{FF2B5EF4-FFF2-40B4-BE49-F238E27FC236}">
-                <a16:creationId xmlns:a16="http://schemas.microsoft.com/office/drawing/2014/main" xmlns="" id="{AD706E3A-CFBB-4A6C-A65F-D0360A9E74FE}"/>
+                <a16:creationId xmlns:a16="http://schemas.microsoft.com/office/drawing/2014/main" id="{AD706E3A-CFBB-4A6C-A65F-D0360A9E74FE}"/>
               </a:ext>
             </a:extLst>
           </p:cNvPr>
@@ -4114,7 +4976,7 @@
           <p:cNvPr id="7" name="Espaço Reservado para Data 6">
             <a:extLst>
               <a:ext uri="{FF2B5EF4-FFF2-40B4-BE49-F238E27FC236}">
-                <a16:creationId xmlns:a16="http://schemas.microsoft.com/office/drawing/2014/main" xmlns="" id="{4172C0E5-5AF0-4805-BB51-443733CD2BD5}"/>
+                <a16:creationId xmlns:a16="http://schemas.microsoft.com/office/drawing/2014/main" id="{4172C0E5-5AF0-4805-BB51-443733CD2BD5}"/>
               </a:ext>
             </a:extLst>
           </p:cNvPr>
@@ -4132,7 +4994,7 @@
           <a:p>
             <a:fld id="{63289F7E-B80B-496E-81B4-D396C37C9454}" type="datetimeFigureOut">
               <a:rPr lang="pt-BR" smtClean="0"/>
-              <a:t>14/09/2026</a:t>
+              <a:t>21/09/2026</a:t>
             </a:fld>
             <a:endParaRPr lang="pt-BR"/>
           </a:p>
@@ -4143,7 +5005,7 @@
           <p:cNvPr id="8" name="Espaço Reservado para Rodapé 7">
             <a:extLst>
               <a:ext uri="{FF2B5EF4-FFF2-40B4-BE49-F238E27FC236}">
-                <a16:creationId xmlns:a16="http://schemas.microsoft.com/office/drawing/2014/main" xmlns="" id="{0E801648-156F-497E-99CF-797DF48051E1}"/>
+                <a16:creationId xmlns:a16="http://schemas.microsoft.com/office/drawing/2014/main" id="{0E801648-156F-497E-99CF-797DF48051E1}"/>
               </a:ext>
             </a:extLst>
           </p:cNvPr>
@@ -4168,7 +5030,7 @@
           <p:cNvPr id="9" name="Espaço Reservado para Número de Slide 8">
             <a:extLst>
               <a:ext uri="{FF2B5EF4-FFF2-40B4-BE49-F238E27FC236}">
-                <a16:creationId xmlns:a16="http://schemas.microsoft.com/office/drawing/2014/main" xmlns="" id="{EEE23D32-80E7-4796-A137-66BF842E4B53}"/>
+                <a16:creationId xmlns:a16="http://schemas.microsoft.com/office/drawing/2014/main" id="{EEE23D32-80E7-4796-A137-66BF842E4B53}"/>
               </a:ext>
             </a:extLst>
           </p:cNvPr>
@@ -4227,7 +5089,7 @@
           <p:cNvPr id="2" name="Título 1">
             <a:extLst>
               <a:ext uri="{FF2B5EF4-FFF2-40B4-BE49-F238E27FC236}">
-                <a16:creationId xmlns:a16="http://schemas.microsoft.com/office/drawing/2014/main" xmlns="" id="{2BCE2379-C78F-47E1-8CFC-B846E7AF148D}"/>
+                <a16:creationId xmlns:a16="http://schemas.microsoft.com/office/drawing/2014/main" id="{2BCE2379-C78F-47E1-8CFC-B846E7AF148D}"/>
               </a:ext>
             </a:extLst>
           </p:cNvPr>
@@ -4255,7 +5117,7 @@
           <p:cNvPr id="3" name="Espaço Reservado para Data 2">
             <a:extLst>
               <a:ext uri="{FF2B5EF4-FFF2-40B4-BE49-F238E27FC236}">
-                <a16:creationId xmlns:a16="http://schemas.microsoft.com/office/drawing/2014/main" xmlns="" id="{342600A9-7F92-4E22-9D94-E4717252A817}"/>
+                <a16:creationId xmlns:a16="http://schemas.microsoft.com/office/drawing/2014/main" id="{342600A9-7F92-4E22-9D94-E4717252A817}"/>
               </a:ext>
             </a:extLst>
           </p:cNvPr>
@@ -4273,7 +5135,7 @@
           <a:p>
             <a:fld id="{63289F7E-B80B-496E-81B4-D396C37C9454}" type="datetimeFigureOut">
               <a:rPr lang="pt-BR" smtClean="0"/>
-              <a:t>14/09/2026</a:t>
+              <a:t>21/09/2026</a:t>
             </a:fld>
             <a:endParaRPr lang="pt-BR"/>
           </a:p>
@@ -4284,7 +5146,7 @@
           <p:cNvPr id="4" name="Espaço Reservado para Rodapé 3">
             <a:extLst>
               <a:ext uri="{FF2B5EF4-FFF2-40B4-BE49-F238E27FC236}">
-                <a16:creationId xmlns:a16="http://schemas.microsoft.com/office/drawing/2014/main" xmlns="" id="{192E6BED-F546-40CC-A2DF-99CBA853654E}"/>
+                <a16:creationId xmlns:a16="http://schemas.microsoft.com/office/drawing/2014/main" id="{192E6BED-F546-40CC-A2DF-99CBA853654E}"/>
               </a:ext>
             </a:extLst>
           </p:cNvPr>
@@ -4309,7 +5171,7 @@
           <p:cNvPr id="5" name="Espaço Reservado para Número de Slide 4">
             <a:extLst>
               <a:ext uri="{FF2B5EF4-FFF2-40B4-BE49-F238E27FC236}">
-                <a16:creationId xmlns:a16="http://schemas.microsoft.com/office/drawing/2014/main" xmlns="" id="{6091CC40-A8C4-4063-80EB-CC5099621678}"/>
+                <a16:creationId xmlns:a16="http://schemas.microsoft.com/office/drawing/2014/main" id="{6091CC40-A8C4-4063-80EB-CC5099621678}"/>
               </a:ext>
             </a:extLst>
           </p:cNvPr>
@@ -4368,7 +5230,7 @@
           <p:cNvPr id="2" name="Espaço Reservado para Data 1">
             <a:extLst>
               <a:ext uri="{FF2B5EF4-FFF2-40B4-BE49-F238E27FC236}">
-                <a16:creationId xmlns:a16="http://schemas.microsoft.com/office/drawing/2014/main" xmlns="" id="{DD19515C-212C-4EAE-84A3-8FF4BC844F1B}"/>
+                <a16:creationId xmlns:a16="http://schemas.microsoft.com/office/drawing/2014/main" id="{DD19515C-212C-4EAE-84A3-8FF4BC844F1B}"/>
               </a:ext>
             </a:extLst>
           </p:cNvPr>
@@ -4386,7 +5248,7 @@
           <a:p>
             <a:fld id="{63289F7E-B80B-496E-81B4-D396C37C9454}" type="datetimeFigureOut">
               <a:rPr lang="pt-BR" smtClean="0"/>
-              <a:t>14/09/2026</a:t>
+              <a:t>21/09/2026</a:t>
             </a:fld>
             <a:endParaRPr lang="pt-BR"/>
           </a:p>
@@ -4397,7 +5259,7 @@
           <p:cNvPr id="3" name="Espaço Reservado para Rodapé 2">
             <a:extLst>
               <a:ext uri="{FF2B5EF4-FFF2-40B4-BE49-F238E27FC236}">
-                <a16:creationId xmlns:a16="http://schemas.microsoft.com/office/drawing/2014/main" xmlns="" id="{94D3D120-B3E8-4C96-861D-7A4F12F49B3A}"/>
+                <a16:creationId xmlns:a16="http://schemas.microsoft.com/office/drawing/2014/main" id="{94D3D120-B3E8-4C96-861D-7A4F12F49B3A}"/>
               </a:ext>
             </a:extLst>
           </p:cNvPr>
@@ -4422,7 +5284,7 @@
           <p:cNvPr id="4" name="Espaço Reservado para Número de Slide 3">
             <a:extLst>
               <a:ext uri="{FF2B5EF4-FFF2-40B4-BE49-F238E27FC236}">
-                <a16:creationId xmlns:a16="http://schemas.microsoft.com/office/drawing/2014/main" xmlns="" id="{42E49B68-FA1B-468B-9F17-D5C09243D454}"/>
+                <a16:creationId xmlns:a16="http://schemas.microsoft.com/office/drawing/2014/main" id="{42E49B68-FA1B-468B-9F17-D5C09243D454}"/>
               </a:ext>
             </a:extLst>
           </p:cNvPr>
@@ -4481,7 +5343,7 @@
           <p:cNvPr id="2" name="Título 1">
             <a:extLst>
               <a:ext uri="{FF2B5EF4-FFF2-40B4-BE49-F238E27FC236}">
-                <a16:creationId xmlns:a16="http://schemas.microsoft.com/office/drawing/2014/main" xmlns="" id="{1C17BCBE-A897-4319-85EC-D87909C24980}"/>
+                <a16:creationId xmlns:a16="http://schemas.microsoft.com/office/drawing/2014/main" id="{1C17BCBE-A897-4319-85EC-D87909C24980}"/>
               </a:ext>
             </a:extLst>
           </p:cNvPr>
@@ -4518,7 +5380,7 @@
           <p:cNvPr id="3" name="Espaço Reservado para Conteúdo 2">
             <a:extLst>
               <a:ext uri="{FF2B5EF4-FFF2-40B4-BE49-F238E27FC236}">
-                <a16:creationId xmlns:a16="http://schemas.microsoft.com/office/drawing/2014/main" xmlns="" id="{4226F885-0204-4913-868B-4B8B82576F17}"/>
+                <a16:creationId xmlns:a16="http://schemas.microsoft.com/office/drawing/2014/main" id="{4226F885-0204-4913-868B-4B8B82576F17}"/>
               </a:ext>
             </a:extLst>
           </p:cNvPr>
@@ -4608,7 +5470,7 @@
           <p:cNvPr id="4" name="Espaço Reservado para Texto 3">
             <a:extLst>
               <a:ext uri="{FF2B5EF4-FFF2-40B4-BE49-F238E27FC236}">
-                <a16:creationId xmlns:a16="http://schemas.microsoft.com/office/drawing/2014/main" xmlns="" id="{00F9F784-A858-441B-8AB5-697098141751}"/>
+                <a16:creationId xmlns:a16="http://schemas.microsoft.com/office/drawing/2014/main" id="{00F9F784-A858-441B-8AB5-697098141751}"/>
               </a:ext>
             </a:extLst>
           </p:cNvPr>
@@ -4679,7 +5541,7 @@
           <p:cNvPr id="5" name="Espaço Reservado para Data 4">
             <a:extLst>
               <a:ext uri="{FF2B5EF4-FFF2-40B4-BE49-F238E27FC236}">
-                <a16:creationId xmlns:a16="http://schemas.microsoft.com/office/drawing/2014/main" xmlns="" id="{A4DC363A-5000-472E-8B17-02E7DCB8840A}"/>
+                <a16:creationId xmlns:a16="http://schemas.microsoft.com/office/drawing/2014/main" id="{A4DC363A-5000-472E-8B17-02E7DCB8840A}"/>
               </a:ext>
             </a:extLst>
           </p:cNvPr>
@@ -4697,7 +5559,7 @@
           <a:p>
             <a:fld id="{63289F7E-B80B-496E-81B4-D396C37C9454}" type="datetimeFigureOut">
               <a:rPr lang="pt-BR" smtClean="0"/>
-              <a:t>14/09/2026</a:t>
+              <a:t>21/09/2026</a:t>
             </a:fld>
             <a:endParaRPr lang="pt-BR"/>
           </a:p>
@@ -4708,7 +5570,7 @@
           <p:cNvPr id="6" name="Espaço Reservado para Rodapé 5">
             <a:extLst>
               <a:ext uri="{FF2B5EF4-FFF2-40B4-BE49-F238E27FC236}">
-                <a16:creationId xmlns:a16="http://schemas.microsoft.com/office/drawing/2014/main" xmlns="" id="{5548425D-2C21-4C56-BAD4-662978775C28}"/>
+                <a16:creationId xmlns:a16="http://schemas.microsoft.com/office/drawing/2014/main" id="{5548425D-2C21-4C56-BAD4-662978775C28}"/>
               </a:ext>
             </a:extLst>
           </p:cNvPr>
@@ -4733,7 +5595,7 @@
           <p:cNvPr id="7" name="Espaço Reservado para Número de Slide 6">
             <a:extLst>
               <a:ext uri="{FF2B5EF4-FFF2-40B4-BE49-F238E27FC236}">
-                <a16:creationId xmlns:a16="http://schemas.microsoft.com/office/drawing/2014/main" xmlns="" id="{C63E9726-E64C-42B2-AE8A-8C235A956B48}"/>
+                <a16:creationId xmlns:a16="http://schemas.microsoft.com/office/drawing/2014/main" id="{C63E9726-E64C-42B2-AE8A-8C235A956B48}"/>
               </a:ext>
             </a:extLst>
           </p:cNvPr>
@@ -4792,7 +5654,7 @@
           <p:cNvPr id="2" name="Título 1">
             <a:extLst>
               <a:ext uri="{FF2B5EF4-FFF2-40B4-BE49-F238E27FC236}">
-                <a16:creationId xmlns:a16="http://schemas.microsoft.com/office/drawing/2014/main" xmlns="" id="{11086A78-3E74-450C-96A6-CA8AC37AF772}"/>
+                <a16:creationId xmlns:a16="http://schemas.microsoft.com/office/drawing/2014/main" id="{11086A78-3E74-450C-96A6-CA8AC37AF772}"/>
               </a:ext>
             </a:extLst>
           </p:cNvPr>
@@ -4829,7 +5691,7 @@
           <p:cNvPr id="3" name="Espaço Reservado para Imagem 2">
             <a:extLst>
               <a:ext uri="{FF2B5EF4-FFF2-40B4-BE49-F238E27FC236}">
-                <a16:creationId xmlns:a16="http://schemas.microsoft.com/office/drawing/2014/main" xmlns="" id="{5F5B7312-975A-4DBC-9B2F-3652ADA006FD}"/>
+                <a16:creationId xmlns:a16="http://schemas.microsoft.com/office/drawing/2014/main" id="{5F5B7312-975A-4DBC-9B2F-3652ADA006FD}"/>
               </a:ext>
             </a:extLst>
           </p:cNvPr>
@@ -4896,7 +5758,7 @@
           <p:cNvPr id="4" name="Espaço Reservado para Texto 3">
             <a:extLst>
               <a:ext uri="{FF2B5EF4-FFF2-40B4-BE49-F238E27FC236}">
-                <a16:creationId xmlns:a16="http://schemas.microsoft.com/office/drawing/2014/main" xmlns="" id="{AAF805F5-1DFF-41C6-944C-7D79FE0D0963}"/>
+                <a16:creationId xmlns:a16="http://schemas.microsoft.com/office/drawing/2014/main" id="{AAF805F5-1DFF-41C6-944C-7D79FE0D0963}"/>
               </a:ext>
             </a:extLst>
           </p:cNvPr>
@@ -4967,7 +5829,7 @@
           <p:cNvPr id="5" name="Espaço Reservado para Data 4">
             <a:extLst>
               <a:ext uri="{FF2B5EF4-FFF2-40B4-BE49-F238E27FC236}">
-                <a16:creationId xmlns:a16="http://schemas.microsoft.com/office/drawing/2014/main" xmlns="" id="{02113D81-8665-4516-BD81-C6A1F254EECD}"/>
+                <a16:creationId xmlns:a16="http://schemas.microsoft.com/office/drawing/2014/main" id="{02113D81-8665-4516-BD81-C6A1F254EECD}"/>
               </a:ext>
             </a:extLst>
           </p:cNvPr>
@@ -4985,7 +5847,7 @@
           <a:p>
             <a:fld id="{63289F7E-B80B-496E-81B4-D396C37C9454}" type="datetimeFigureOut">
               <a:rPr lang="pt-BR" smtClean="0"/>
-              <a:t>14/09/2026</a:t>
+              <a:t>21/09/2026</a:t>
             </a:fld>
             <a:endParaRPr lang="pt-BR"/>
           </a:p>
@@ -4996,7 +5858,7 @@
           <p:cNvPr id="6" name="Espaço Reservado para Rodapé 5">
             <a:extLst>
               <a:ext uri="{FF2B5EF4-FFF2-40B4-BE49-F238E27FC236}">
-                <a16:creationId xmlns:a16="http://schemas.microsoft.com/office/drawing/2014/main" xmlns="" id="{2B00C88B-FF32-40AA-A187-727D96FD7862}"/>
+                <a16:creationId xmlns:a16="http://schemas.microsoft.com/office/drawing/2014/main" id="{2B00C88B-FF32-40AA-A187-727D96FD7862}"/>
               </a:ext>
             </a:extLst>
           </p:cNvPr>
@@ -5021,7 +5883,7 @@
           <p:cNvPr id="7" name="Espaço Reservado para Número de Slide 6">
             <a:extLst>
               <a:ext uri="{FF2B5EF4-FFF2-40B4-BE49-F238E27FC236}">
-                <a16:creationId xmlns:a16="http://schemas.microsoft.com/office/drawing/2014/main" xmlns="" id="{A04D1A2D-69F7-4B8F-A730-BC26DC340BA6}"/>
+                <a16:creationId xmlns:a16="http://schemas.microsoft.com/office/drawing/2014/main" id="{A04D1A2D-69F7-4B8F-A730-BC26DC340BA6}"/>
               </a:ext>
             </a:extLst>
           </p:cNvPr>
@@ -5085,7 +5947,7 @@
           <p:cNvPr id="2" name="Espaço Reservado para Título 1">
             <a:extLst>
               <a:ext uri="{FF2B5EF4-FFF2-40B4-BE49-F238E27FC236}">
-                <a16:creationId xmlns:a16="http://schemas.microsoft.com/office/drawing/2014/main" xmlns="" id="{E69A0273-1966-4A1B-9370-4C1CE5036371}"/>
+                <a16:creationId xmlns:a16="http://schemas.microsoft.com/office/drawing/2014/main" id="{E69A0273-1966-4A1B-9370-4C1CE5036371}"/>
               </a:ext>
             </a:extLst>
           </p:cNvPr>
@@ -5123,7 +5985,7 @@
           <p:cNvPr id="3" name="Espaço Reservado para Texto 2">
             <a:extLst>
               <a:ext uri="{FF2B5EF4-FFF2-40B4-BE49-F238E27FC236}">
-                <a16:creationId xmlns:a16="http://schemas.microsoft.com/office/drawing/2014/main" xmlns="" id="{3B9CF87A-0448-49A7-AB25-EBC1D56A40EF}"/>
+                <a16:creationId xmlns:a16="http://schemas.microsoft.com/office/drawing/2014/main" id="{3B9CF87A-0448-49A7-AB25-EBC1D56A40EF}"/>
               </a:ext>
             </a:extLst>
           </p:cNvPr>
@@ -5190,7 +6052,7 @@
           <p:cNvPr id="4" name="Espaço Reservado para Data 3">
             <a:extLst>
               <a:ext uri="{FF2B5EF4-FFF2-40B4-BE49-F238E27FC236}">
-                <a16:creationId xmlns:a16="http://schemas.microsoft.com/office/drawing/2014/main" xmlns="" id="{2EF7B1F2-BB5A-44D0-816D-16AD2C71430E}"/>
+                <a16:creationId xmlns:a16="http://schemas.microsoft.com/office/drawing/2014/main" id="{2EF7B1F2-BB5A-44D0-816D-16AD2C71430E}"/>
               </a:ext>
             </a:extLst>
           </p:cNvPr>
@@ -5226,7 +6088,7 @@
           <a:p>
             <a:fld id="{63289F7E-B80B-496E-81B4-D396C37C9454}" type="datetimeFigureOut">
               <a:rPr lang="pt-BR" smtClean="0"/>
-              <a:t>14/09/2026</a:t>
+              <a:t>21/09/2026</a:t>
             </a:fld>
             <a:endParaRPr lang="pt-BR"/>
           </a:p>
@@ -5237,7 +6099,7 @@
           <p:cNvPr id="5" name="Espaço Reservado para Rodapé 4">
             <a:extLst>
               <a:ext uri="{FF2B5EF4-FFF2-40B4-BE49-F238E27FC236}">
-                <a16:creationId xmlns:a16="http://schemas.microsoft.com/office/drawing/2014/main" xmlns="" id="{C703F94C-2CC8-4DAA-BC35-14FC3E841DCD}"/>
+                <a16:creationId xmlns:a16="http://schemas.microsoft.com/office/drawing/2014/main" id="{C703F94C-2CC8-4DAA-BC35-14FC3E841DCD}"/>
               </a:ext>
             </a:extLst>
           </p:cNvPr>
@@ -5280,7 +6142,7 @@
           <p:cNvPr id="6" name="Espaço Reservado para Número de Slide 5">
             <a:extLst>
               <a:ext uri="{FF2B5EF4-FFF2-40B4-BE49-F238E27FC236}">
-                <a16:creationId xmlns:a16="http://schemas.microsoft.com/office/drawing/2014/main" xmlns="" id="{64051336-7048-457A-8B61-D94291D71648}"/>
+                <a16:creationId xmlns:a16="http://schemas.microsoft.com/office/drawing/2014/main" id="{64051336-7048-457A-8B61-D94291D71648}"/>
               </a:ext>
             </a:extLst>
           </p:cNvPr>
@@ -5648,7 +6510,7 @@
           <p:cNvPr id="4" name="CaixaDeTexto 3">
             <a:extLst>
               <a:ext uri="{FF2B5EF4-FFF2-40B4-BE49-F238E27FC236}">
-                <a16:creationId xmlns:a16="http://schemas.microsoft.com/office/drawing/2014/main" xmlns="" id="{430EB894-B7D4-434C-9D1A-A14094D9BEEC}"/>
+                <a16:creationId xmlns:a16="http://schemas.microsoft.com/office/drawing/2014/main" id="{430EB894-B7D4-434C-9D1A-A14094D9BEEC}"/>
               </a:ext>
             </a:extLst>
           </p:cNvPr>
@@ -5692,7 +6554,7 @@
           <p:cNvPr id="1026" name="Picture 2" descr="Logo">
             <a:extLst>
               <a:ext uri="{FF2B5EF4-FFF2-40B4-BE49-F238E27FC236}">
-                <a16:creationId xmlns:a16="http://schemas.microsoft.com/office/drawing/2014/main" xmlns="" id="{3F2642E0-4F6A-4196-8F58-E77D36E9A33F}"/>
+                <a16:creationId xmlns:a16="http://schemas.microsoft.com/office/drawing/2014/main" id="{3F2642E0-4F6A-4196-8F58-E77D36E9A33F}"/>
               </a:ext>
             </a:extLst>
           </p:cNvPr>
@@ -5737,7 +6599,7 @@
           <p:cNvPr id="5122" name="Picture 2" descr="Image result for machine learning">
             <a:extLst>
               <a:ext uri="{FF2B5EF4-FFF2-40B4-BE49-F238E27FC236}">
-                <a16:creationId xmlns:a16="http://schemas.microsoft.com/office/drawing/2014/main" xmlns="" id="{810CE0A2-4102-44A6-A370-175E7896CDCB}"/>
+                <a16:creationId xmlns:a16="http://schemas.microsoft.com/office/drawing/2014/main" id="{810CE0A2-4102-44A6-A370-175E7896CDCB}"/>
               </a:ext>
             </a:extLst>
           </p:cNvPr>
@@ -5782,7 +6644,7 @@
           <p:cNvPr id="7" name="Título 1">
             <a:extLst>
               <a:ext uri="{FF2B5EF4-FFF2-40B4-BE49-F238E27FC236}">
-                <a16:creationId xmlns:a16="http://schemas.microsoft.com/office/drawing/2014/main" xmlns="" id="{32666AC8-2E17-4DB4-B0F5-60C640CCFD2E}"/>
+                <a16:creationId xmlns:a16="http://schemas.microsoft.com/office/drawing/2014/main" id="{32666AC8-2E17-4DB4-B0F5-60C640CCFD2E}"/>
               </a:ext>
             </a:extLst>
           </p:cNvPr>
@@ -5808,10 +6670,6 @@
             <a:r>
               <a:rPr lang="pt-BR" sz="6600" dirty="0"/>
               <a:t>C24 – Inteligência Artificial:</a:t>
-            </a:r>
-            <a:r>
-              <a:rPr lang="pt-BR" sz="7200" dirty="0"/>
-              <a:t/>
             </a:r>
             <a:br>
               <a:rPr lang="pt-BR" sz="7200" dirty="0"/>
@@ -5855,90 +6713,10 @@
       </p:grpSpPr>
       <p:sp>
         <p:nvSpPr>
-          <p:cNvPr id="3" name="Espaço Reservado para Conteúdo 2">
-            <a:extLst>
-              <a:ext uri="{FF2B5EF4-FFF2-40B4-BE49-F238E27FC236}">
-                <a16:creationId xmlns:a16="http://schemas.microsoft.com/office/drawing/2014/main" xmlns="" id="{0F418656-538C-BBD9-47FA-40A924A669E5}"/>
-              </a:ext>
-            </a:extLst>
-          </p:cNvPr>
-          <p:cNvSpPr>
-            <a:spLocks noGrp="1"/>
-          </p:cNvSpPr>
-          <p:nvPr>
-            <p:ph idx="1"/>
-          </p:nvPr>
-        </p:nvSpPr>
-        <p:spPr>
-          <a:xfrm>
-            <a:off x="838200" y="2028604"/>
-            <a:ext cx="10515600" cy="2800791"/>
-          </a:xfrm>
-        </p:spPr>
-        <p:txBody>
-          <a:bodyPr>
-            <a:normAutofit/>
-          </a:bodyPr>
-          <a:lstStyle/>
-          <a:p>
-            <a:pPr marL="0" indent="0" algn="ctr">
-              <a:buNone/>
-            </a:pPr>
-            <a:r>
-              <a:rPr lang="pt-BR" sz="4800" dirty="0"/>
-              <a:t>Nós podemos calcular algumas métricas de desempenho importantes a partir das informações contidas na </a:t>
-            </a:r>
-            <a:r>
-              <a:rPr lang="pt-BR" sz="4800" b="1" dirty="0">
-                <a:solidFill>
-                  <a:srgbClr val="7030A0"/>
-                </a:solidFill>
-              </a:rPr>
-              <a:t>matriz de confusão binária</a:t>
-            </a:r>
-            <a:r>
-              <a:rPr lang="pt-BR" sz="4800" dirty="0"/>
-              <a:t>.</a:t>
-            </a:r>
-          </a:p>
-        </p:txBody>
-      </p:sp>
-    </p:spTree>
-    <p:extLst>
-      <p:ext uri="{BB962C8B-B14F-4D97-AF65-F5344CB8AC3E}">
-        <p14:creationId xmlns:p14="http://schemas.microsoft.com/office/powerpoint/2010/main" val="3609063348"/>
-      </p:ext>
-    </p:extLst>
-  </p:cSld>
-  <p:clrMapOvr>
-    <a:masterClrMapping/>
-  </p:clrMapOvr>
-</p:sld>
-</file>
-
-<file path=ppt/slides/slide11.xml><?xml version="1.0" encoding="utf-8"?>
-<p:sld xmlns:a="http://schemas.openxmlformats.org/drawingml/2006/main" xmlns:r="http://schemas.openxmlformats.org/officeDocument/2006/relationships" xmlns:p="http://schemas.openxmlformats.org/presentationml/2006/main">
-  <p:cSld>
-    <p:spTree>
-      <p:nvGrpSpPr>
-        <p:cNvPr id="1" name=""/>
-        <p:cNvGrpSpPr/>
-        <p:nvPr/>
-      </p:nvGrpSpPr>
-      <p:grpSpPr>
-        <a:xfrm>
-          <a:off x="0" y="0"/>
-          <a:ext cx="0" cy="0"/>
-          <a:chOff x="0" y="0"/>
-          <a:chExt cx="0" cy="0"/>
-        </a:xfrm>
-      </p:grpSpPr>
-      <p:sp>
-        <p:nvSpPr>
           <p:cNvPr id="2" name="Título 1">
             <a:extLst>
               <a:ext uri="{FF2B5EF4-FFF2-40B4-BE49-F238E27FC236}">
-                <a16:creationId xmlns:a16="http://schemas.microsoft.com/office/drawing/2014/main" xmlns="" id="{88C76DB9-C5DB-DAD2-5D1D-F064916FE36F}"/>
+                <a16:creationId xmlns:a16="http://schemas.microsoft.com/office/drawing/2014/main" id="{88C76DB9-C5DB-DAD2-5D1D-F064916FE36F}"/>
               </a:ext>
             </a:extLst>
           </p:cNvPr>
@@ -5966,7 +6744,7 @@
           <p:cNvPr id="3" name="Espaço Reservado para Conteúdo 2">
             <a:extLst>
               <a:ext uri="{FF2B5EF4-FFF2-40B4-BE49-F238E27FC236}">
-                <a16:creationId xmlns:a16="http://schemas.microsoft.com/office/drawing/2014/main" xmlns="" id="{0243F063-09F2-F192-E084-325BC503299F}"/>
+                <a16:creationId xmlns:a16="http://schemas.microsoft.com/office/drawing/2014/main" id="{0243F063-09F2-F192-E084-325BC503299F}"/>
               </a:ext>
             </a:extLst>
           </p:cNvPr>
@@ -6039,7 +6817,7 @@
                 </a:solidFill>
                 <a:effectLst/>
               </a:rPr>
-              <a:t>predições corretas em comparação com todas as previsões feitas</a:t>
+              <a:t>predições corretas em comparação com todas as predições feitas</a:t>
             </a:r>
             <a:r>
               <a:rPr lang="pt-BR" b="0" dirty="0">
@@ -6100,7 +6878,7 @@
               <p:cNvPr id="5" name="CaixaDeTexto 4">
                 <a:extLst>
                   <a:ext uri="{FF2B5EF4-FFF2-40B4-BE49-F238E27FC236}">
-                    <a16:creationId xmlns:a16="http://schemas.microsoft.com/office/drawing/2014/main" xmlns="" id="{A1A8E5FE-3F01-AAA0-2326-F47AA1AC18B9}"/>
+                    <a16:creationId xmlns:a16="http://schemas.microsoft.com/office/drawing/2014/main" id="{A1A8E5FE-3F01-AAA0-2326-F47AA1AC18B9}"/>
                   </a:ext>
                 </a:extLst>
               </p:cNvPr>
@@ -6126,10 +6904,7 @@
                 <a:pPr/>
                 <a14:m>
                   <m:oMathPara xmlns:m="http://schemas.openxmlformats.org/officeDocument/2006/math">
-                    <m:oMathParaPr>
-                      <m:jc m:val="centerGroup"/>
-                    </m:oMathParaPr>
-                    <m:oMath xmlns:m="http://schemas.openxmlformats.org/officeDocument/2006/math">
+                    <m:oMath>
                       <m:r>
                         <m:rPr>
                           <m:sty m:val="p"/>
@@ -6172,7 +6947,7 @@
                       <m:f>
                         <m:fPr>
                           <m:ctrlPr>
-                            <a:rPr lang="pt-BR" sz="3200" i="1">
+                            <a:rPr lang="pt-BR" sz="3200">
                               <a:latin typeface="Cambria Math" panose="02040503050406030204" pitchFamily="18" charset="0"/>
                             </a:rPr>
                           </m:ctrlPr>
@@ -6209,49 +6984,7 @@
                               <m:nor/>
                             </m:rPr>
                             <a:rPr lang="pt-BR" sz="3200" i="0" dirty="0"/>
-                            <m:t>TP</m:t>
-                          </m:r>
-                          <m:r>
-                            <m:rPr>
-                              <m:nor/>
-                            </m:rPr>
-                            <a:rPr lang="pt-BR" sz="3200" i="0" dirty="0"/>
-                            <m:t> + </m:t>
-                          </m:r>
-                          <m:r>
-                            <m:rPr>
-                              <m:nor/>
-                            </m:rPr>
-                            <a:rPr lang="pt-BR" sz="3200" i="0" dirty="0"/>
-                            <m:t>FN</m:t>
-                          </m:r>
-                          <m:r>
-                            <m:rPr>
-                              <m:nor/>
-                            </m:rPr>
-                            <a:rPr lang="pt-BR" sz="3200" i="0" dirty="0"/>
-                            <m:t> + </m:t>
-                          </m:r>
-                          <m:r>
-                            <m:rPr>
-                              <m:nor/>
-                            </m:rPr>
-                            <a:rPr lang="pt-BR" sz="3200" i="0" dirty="0"/>
-                            <m:t>FP</m:t>
-                          </m:r>
-                          <m:r>
-                            <m:rPr>
-                              <m:nor/>
-                            </m:rPr>
-                            <a:rPr lang="pt-BR" sz="3200" i="0" dirty="0"/>
-                            <m:t> + </m:t>
-                          </m:r>
-                          <m:r>
-                            <m:rPr>
-                              <m:nor/>
-                            </m:rPr>
-                            <a:rPr lang="pt-BR" sz="3200" i="0" dirty="0"/>
-                            <m:t>TN</m:t>
+                            <m:t>TP + FN + FP + TN</m:t>
                           </m:r>
                         </m:den>
                       </m:f>
@@ -6321,7 +7054,7 @@
 </p:sld>
 </file>
 
-<file path=ppt/slides/slide12.xml><?xml version="1.0" encoding="utf-8"?>
+<file path=ppt/slides/slide11.xml><?xml version="1.0" encoding="utf-8"?>
 <p:sld xmlns:a="http://schemas.openxmlformats.org/drawingml/2006/main" xmlns:r="http://schemas.openxmlformats.org/officeDocument/2006/relationships" xmlns:p="http://schemas.openxmlformats.org/presentationml/2006/main">
   <p:cSld>
     <p:spTree>
@@ -6343,7 +7076,7 @@
           <p:cNvPr id="2" name="Título 1">
             <a:extLst>
               <a:ext uri="{FF2B5EF4-FFF2-40B4-BE49-F238E27FC236}">
-                <a16:creationId xmlns:a16="http://schemas.microsoft.com/office/drawing/2014/main" xmlns="" id="{C364D5D3-A9ED-9B8B-0474-AF3EF62241C0}"/>
+                <a16:creationId xmlns:a16="http://schemas.microsoft.com/office/drawing/2014/main" id="{C364D5D3-A9ED-9B8B-0474-AF3EF62241C0}"/>
               </a:ext>
             </a:extLst>
           </p:cNvPr>
@@ -6371,7 +7104,7 @@
           <p:cNvPr id="3" name="Espaço Reservado para Conteúdo 2">
             <a:extLst>
               <a:ext uri="{FF2B5EF4-FFF2-40B4-BE49-F238E27FC236}">
-                <a16:creationId xmlns:a16="http://schemas.microsoft.com/office/drawing/2014/main" xmlns="" id="{729D007B-9E18-00C3-2CF2-47D7955EBACC}"/>
+                <a16:creationId xmlns:a16="http://schemas.microsoft.com/office/drawing/2014/main" id="{729D007B-9E18-00C3-2CF2-47D7955EBACC}"/>
               </a:ext>
             </a:extLst>
           </p:cNvPr>
@@ -6528,7 +7261,7 @@
               <p:cNvPr id="4" name="CaixaDeTexto 3">
                 <a:extLst>
                   <a:ext uri="{FF2B5EF4-FFF2-40B4-BE49-F238E27FC236}">
-                    <a16:creationId xmlns:a16="http://schemas.microsoft.com/office/drawing/2014/main" xmlns="" id="{3B70A8A1-B016-521E-B475-1827A59F773A}"/>
+                    <a16:creationId xmlns:a16="http://schemas.microsoft.com/office/drawing/2014/main" id="{3B70A8A1-B016-521E-B475-1827A59F773A}"/>
                   </a:ext>
                 </a:extLst>
               </p:cNvPr>
@@ -6554,10 +7287,7 @@
                 <a:pPr/>
                 <a14:m>
                   <m:oMathPara xmlns:m="http://schemas.openxmlformats.org/officeDocument/2006/math">
-                    <m:oMathParaPr>
-                      <m:jc m:val="centerGroup"/>
-                    </m:oMathParaPr>
-                    <m:oMath xmlns:m="http://schemas.openxmlformats.org/officeDocument/2006/math">
+                    <m:oMath>
                       <m:r>
                         <m:rPr>
                           <m:sty m:val="p"/>
@@ -6600,7 +7330,7 @@
                       <m:f>
                         <m:fPr>
                           <m:ctrlPr>
-                            <a:rPr lang="pt-BR" sz="3200" i="1">
+                            <a:rPr lang="pt-BR" sz="3200">
                               <a:latin typeface="Cambria Math" panose="02040503050406030204" pitchFamily="18" charset="0"/>
                             </a:rPr>
                           </m:ctrlPr>
@@ -6637,49 +7367,7 @@
                               <m:nor/>
                             </m:rPr>
                             <a:rPr lang="pt-BR" sz="3200" i="0" dirty="0"/>
-                            <m:t>TP</m:t>
-                          </m:r>
-                          <m:r>
-                            <m:rPr>
-                              <m:nor/>
-                            </m:rPr>
-                            <a:rPr lang="pt-BR" sz="3200" i="0" dirty="0"/>
-                            <m:t> + </m:t>
-                          </m:r>
-                          <m:r>
-                            <m:rPr>
-                              <m:nor/>
-                            </m:rPr>
-                            <a:rPr lang="pt-BR" sz="3200" i="0" dirty="0"/>
-                            <m:t>FN</m:t>
-                          </m:r>
-                          <m:r>
-                            <m:rPr>
-                              <m:nor/>
-                            </m:rPr>
-                            <a:rPr lang="pt-BR" sz="3200" i="0" dirty="0"/>
-                            <m:t> + </m:t>
-                          </m:r>
-                          <m:r>
-                            <m:rPr>
-                              <m:nor/>
-                            </m:rPr>
-                            <a:rPr lang="pt-BR" sz="3200" i="0" dirty="0"/>
-                            <m:t>FP</m:t>
-                          </m:r>
-                          <m:r>
-                            <m:rPr>
-                              <m:nor/>
-                            </m:rPr>
-                            <a:rPr lang="pt-BR" sz="3200" i="0" dirty="0"/>
-                            <m:t> + </m:t>
-                          </m:r>
-                          <m:r>
-                            <m:rPr>
-                              <m:nor/>
-                            </m:rPr>
-                            <a:rPr lang="pt-BR" sz="3200" i="0" dirty="0"/>
-                            <m:t>TN</m:t>
+                            <m:t>TP + FN + FP + TN</m:t>
                           </m:r>
                         </m:den>
                       </m:f>
@@ -6749,7 +7437,7 @@
 </p:sld>
 </file>
 
-<file path=ppt/slides/slide13.xml><?xml version="1.0" encoding="utf-8"?>
+<file path=ppt/slides/slide12.xml><?xml version="1.0" encoding="utf-8"?>
 <p:sld xmlns:a="http://schemas.openxmlformats.org/drawingml/2006/main" xmlns:r="http://schemas.openxmlformats.org/officeDocument/2006/relationships" xmlns:p="http://schemas.openxmlformats.org/presentationml/2006/main">
   <p:cSld>
     <p:spTree>
@@ -6771,7 +7459,7 @@
           <p:cNvPr id="2" name="Título 1">
             <a:extLst>
               <a:ext uri="{FF2B5EF4-FFF2-40B4-BE49-F238E27FC236}">
-                <a16:creationId xmlns:a16="http://schemas.microsoft.com/office/drawing/2014/main" xmlns="" id="{C364D5D3-A9ED-9B8B-0474-AF3EF62241C0}"/>
+                <a16:creationId xmlns:a16="http://schemas.microsoft.com/office/drawing/2014/main" id="{C364D5D3-A9ED-9B8B-0474-AF3EF62241C0}"/>
               </a:ext>
             </a:extLst>
           </p:cNvPr>
@@ -6794,14 +7482,14 @@
           </a:p>
         </p:txBody>
       </p:sp>
-      <mc:AlternateContent xmlns:mc="http://schemas.openxmlformats.org/markup-compatibility/2006" xmlns:a14="http://schemas.microsoft.com/office/drawing/2010/main">
-        <mc:Choice Requires="a14">
+      <mc:AlternateContent xmlns:mc="http://schemas.openxmlformats.org/markup-compatibility/2006">
+        <mc:Choice xmlns:a14="http://schemas.microsoft.com/office/drawing/2010/main" Requires="a14">
           <p:sp>
             <p:nvSpPr>
               <p:cNvPr id="3" name="Espaço Reservado para Conteúdo 2">
                 <a:extLst>
                   <a:ext uri="{FF2B5EF4-FFF2-40B4-BE49-F238E27FC236}">
-                    <a16:creationId xmlns:a16="http://schemas.microsoft.com/office/drawing/2014/main" xmlns="" id="{729D007B-9E18-00C3-2CF2-47D7955EBACC}"/>
+                    <a16:creationId xmlns:a16="http://schemas.microsoft.com/office/drawing/2014/main" id="{729D007B-9E18-00C3-2CF2-47D7955EBACC}"/>
                   </a:ext>
                 </a:extLst>
               </p:cNvPr>
@@ -6844,10 +7532,7 @@
                 </a:pPr>
                 <a14:m>
                   <m:oMathPara xmlns:m="http://schemas.openxmlformats.org/officeDocument/2006/math">
-                    <m:oMathParaPr>
-                      <m:jc m:val="centerGroup"/>
-                    </m:oMathParaPr>
-                    <m:oMath xmlns:m="http://schemas.openxmlformats.org/officeDocument/2006/math">
+                    <m:oMath>
                       <m:func>
                         <m:funcPr>
                           <m:ctrlPr>
@@ -6863,7 +7548,7 @@
                           <m:limLow>
                             <m:limLowPr>
                               <m:ctrlPr>
-                                <a:rPr lang="pt-BR" i="1" noProof="0" smtClean="0">
+                                <a:rPr lang="pt-BR" i="0" noProof="0" smtClean="0">
                                   <a:solidFill>
                                     <a:schemeClr val="tx1"/>
                                   </a:solidFill>
@@ -6962,7 +7647,7 @@
                       <m:limLow>
                         <m:limLowPr>
                           <m:ctrlPr>
-                            <a:rPr lang="pt-BR" i="1" noProof="0">
+                            <a:rPr lang="pt-BR" noProof="0">
                               <a:solidFill>
                                 <a:schemeClr val="tx1"/>
                               </a:solidFill>
@@ -7024,7 +7709,7 @@
                           <m:f>
                             <m:fPr>
                               <m:ctrlPr>
-                                <a:rPr lang="pt-BR" i="1" noProof="0">
+                                <a:rPr lang="pt-BR" noProof="0">
                                   <a:solidFill>
                                     <a:schemeClr val="tx1"/>
                                   </a:solidFill>
@@ -7160,7 +7845,7 @@
                       <m:f>
                         <m:fPr>
                           <m:ctrlPr>
-                            <a:rPr lang="pt-BR" i="1" noProof="0">
+                            <a:rPr lang="pt-BR" noProof="0">
                               <a:solidFill>
                                 <a:schemeClr val="tx1"/>
                               </a:solidFill>
@@ -7198,13 +7883,20 @@
                         </m:den>
                       </m:f>
                       <m:r>
+                        <a:rPr lang="pt-BR" i="1">
+                          <a:latin typeface="Cambria Math" panose="02040503050406030204" pitchFamily="18" charset="0"/>
+                          <a:ea typeface="Cambria Math" panose="02040503050406030204" pitchFamily="18" charset="0"/>
+                        </a:rPr>
+                        <m:t>→</m:t>
+                      </m:r>
+                      <m:r>
                         <a:rPr lang="pt-BR" b="0" i="1" noProof="0" smtClean="0">
                           <a:solidFill>
                             <a:schemeClr val="tx1"/>
                           </a:solidFill>
                           <a:latin typeface="Cambria Math" panose="02040503050406030204" pitchFamily="18" charset="0"/>
                         </a:rPr>
-                        <m:t>=1</m:t>
+                        <m:t>1</m:t>
                       </m:r>
                       <m:r>
                         <a:rPr lang="pt-BR" b="0" i="0" noProof="0" smtClean="0">
@@ -7256,14 +7948,28 @@
               </a:p>
               <a:p>
                 <a:r>
+                  <a:rPr lang="en-US" dirty="0"/>
+                  <a:t>Ela</a:t>
+                </a:r>
+                <a:r>
                   <a:rPr lang="pt-BR" b="0" noProof="0" dirty="0">
                     <a:solidFill>
                       <a:schemeClr val="tx1"/>
                     </a:solidFill>
                     <a:effectLst/>
                   </a:rPr>
-                  <a:t>Ela também é enganosa quando os custos de falsos positivos e falsos negativos não são iguais.</a:t>
+                  <a:t> também é enganosa quando os custos de falsos positivos e falsos negativos não são iguais</a:t>
                 </a:r>
+                <a:r>
+                  <a:rPr lang="pt-BR" dirty="0"/>
+                  <a:t>, pois dá o mesmo pesos a esses erros.</a:t>
+                </a:r>
+                <a:endParaRPr lang="pt-BR" b="0" noProof="0" dirty="0">
+                  <a:solidFill>
+                    <a:schemeClr val="tx1"/>
+                  </a:solidFill>
+                  <a:effectLst/>
+                </a:endParaRPr>
               </a:p>
               <a:p>
                 <a:pPr lvl="1">
@@ -7278,7 +7984,7 @@
             </p:txBody>
           </p:sp>
         </mc:Choice>
-        <mc:Fallback xmlns="">
+        <mc:Fallback>
           <p:sp>
             <p:nvSpPr>
               <p:cNvPr id="3" name="Espaço Reservado para Conteúdo 2">
@@ -7335,7 +8041,7 @@
 </p:sld>
 </file>
 
-<file path=ppt/slides/slide14.xml><?xml version="1.0" encoding="utf-8"?>
+<file path=ppt/slides/slide13.xml><?xml version="1.0" encoding="utf-8"?>
 <p:sld xmlns:a="http://schemas.openxmlformats.org/drawingml/2006/main" xmlns:r="http://schemas.openxmlformats.org/officeDocument/2006/relationships" xmlns:p="http://schemas.openxmlformats.org/presentationml/2006/main">
   <p:cSld>
     <p:spTree>
@@ -7357,7 +8063,7 @@
           <p:cNvPr id="3" name="Espaço Reservado para Conteúdo 2">
             <a:extLst>
               <a:ext uri="{FF2B5EF4-FFF2-40B4-BE49-F238E27FC236}">
-                <a16:creationId xmlns:a16="http://schemas.microsoft.com/office/drawing/2014/main" xmlns="" id="{B0351861-7A86-07B3-5514-F1B15497FB0D}"/>
+                <a16:creationId xmlns:a16="http://schemas.microsoft.com/office/drawing/2014/main" id="{B0351861-7A86-07B3-5514-F1B15497FB0D}"/>
               </a:ext>
             </a:extLst>
           </p:cNvPr>
@@ -7420,6 +8126,109 @@
 </p:sld>
 </file>
 
+<file path=ppt/slides/slide14.xml><?xml version="1.0" encoding="utf-8"?>
+<p:sld xmlns:a="http://schemas.openxmlformats.org/drawingml/2006/main" xmlns:r="http://schemas.openxmlformats.org/officeDocument/2006/relationships" xmlns:p="http://schemas.openxmlformats.org/presentationml/2006/main">
+  <p:cSld>
+    <p:spTree>
+      <p:nvGrpSpPr>
+        <p:cNvPr id="1" name=""/>
+        <p:cNvGrpSpPr/>
+        <p:nvPr/>
+      </p:nvGrpSpPr>
+      <p:grpSpPr>
+        <a:xfrm>
+          <a:off x="0" y="0"/>
+          <a:ext cx="0" cy="0"/>
+          <a:chOff x="0" y="0"/>
+          <a:chExt cx="0" cy="0"/>
+        </a:xfrm>
+      </p:grpSpPr>
+      <p:pic>
+        <p:nvPicPr>
+          <p:cNvPr id="22" name="Imagem 21">
+            <a:extLst>
+              <a:ext uri="{FF2B5EF4-FFF2-40B4-BE49-F238E27FC236}">
+                <a16:creationId xmlns:a16="http://schemas.microsoft.com/office/drawing/2014/main" id="{43854156-1399-9016-BDBA-8C80710C3EC7}"/>
+              </a:ext>
+            </a:extLst>
+          </p:cNvPr>
+          <p:cNvPicPr>
+            <a:picLocks noChangeAspect="1"/>
+          </p:cNvPicPr>
+          <p:nvPr/>
+        </p:nvPicPr>
+        <p:blipFill>
+          <a:blip r:embed="rId2" cstate="print">
+            <a:extLst>
+              <a:ext uri="{28A0092B-C50C-407E-A947-70E740481C1C}">
+                <a14:useLocalDpi xmlns:a14="http://schemas.microsoft.com/office/drawing/2010/main" val="0"/>
+              </a:ext>
+            </a:extLst>
+          </a:blip>
+          <a:stretch>
+            <a:fillRect/>
+          </a:stretch>
+        </p:blipFill>
+        <p:spPr>
+          <a:xfrm>
+            <a:off x="590550" y="1106924"/>
+            <a:ext cx="6420922" cy="5235019"/>
+          </a:xfrm>
+          <a:prstGeom prst="rect">
+            <a:avLst/>
+          </a:prstGeom>
+        </p:spPr>
+      </p:pic>
+      <p:sp>
+        <p:nvSpPr>
+          <p:cNvPr id="3" name="CaixaDeTexto 2">
+            <a:extLst>
+              <a:ext uri="{FF2B5EF4-FFF2-40B4-BE49-F238E27FC236}">
+                <a16:creationId xmlns:a16="http://schemas.microsoft.com/office/drawing/2014/main" id="{6F27774B-96EF-A279-E76D-CC1C685A7E20}"/>
+              </a:ext>
+            </a:extLst>
+          </p:cNvPr>
+          <p:cNvSpPr txBox="1"/>
+          <p:nvPr/>
+        </p:nvSpPr>
+        <p:spPr>
+          <a:xfrm>
+            <a:off x="7343775" y="2324051"/>
+            <a:ext cx="4429125" cy="2800767"/>
+          </a:xfrm>
+          <a:prstGeom prst="rect">
+            <a:avLst/>
+          </a:prstGeom>
+          <a:noFill/>
+        </p:spPr>
+        <p:txBody>
+          <a:bodyPr wrap="square" rtlCol="0">
+            <a:spAutoFit/>
+          </a:bodyPr>
+          <a:lstStyle/>
+          <a:p>
+            <a:pPr algn="ctr"/>
+            <a:r>
+              <a:rPr lang="pt-BR" sz="4400" dirty="0"/>
+              <a:t>Falsos positivos e falsos negativos podem ter custos diferentes!</a:t>
+            </a:r>
+            <a:endParaRPr lang="en-US" sz="4400" dirty="0"/>
+          </a:p>
+        </p:txBody>
+      </p:sp>
+    </p:spTree>
+    <p:extLst>
+      <p:ext uri="{BB962C8B-B14F-4D97-AF65-F5344CB8AC3E}">
+        <p14:creationId xmlns:p14="http://schemas.microsoft.com/office/powerpoint/2010/main" val="3651511289"/>
+      </p:ext>
+    </p:extLst>
+  </p:cSld>
+  <p:clrMapOvr>
+    <a:masterClrMapping/>
+  </p:clrMapOvr>
+</p:sld>
+</file>
+
 <file path=ppt/slides/slide15.xml><?xml version="1.0" encoding="utf-8"?>
 <p:sld xmlns:a="http://schemas.openxmlformats.org/drawingml/2006/main" xmlns:r="http://schemas.openxmlformats.org/officeDocument/2006/relationships" xmlns:p="http://schemas.openxmlformats.org/presentationml/2006/main">
   <p:cSld>
@@ -7442,7 +8251,7 @@
           <p:cNvPr id="2" name="Título 1">
             <a:extLst>
               <a:ext uri="{FF2B5EF4-FFF2-40B4-BE49-F238E27FC236}">
-                <a16:creationId xmlns:a16="http://schemas.microsoft.com/office/drawing/2014/main" xmlns="" id="{6759409E-2F7C-F9FB-1D90-828F558DAD79}"/>
+                <a16:creationId xmlns:a16="http://schemas.microsoft.com/office/drawing/2014/main" id="{6759409E-2F7C-F9FB-1D90-828F558DAD79}"/>
               </a:ext>
             </a:extLst>
           </p:cNvPr>
@@ -7470,7 +8279,7 @@
           <p:cNvPr id="3" name="Espaço Reservado para Conteúdo 2">
             <a:extLst>
               <a:ext uri="{FF2B5EF4-FFF2-40B4-BE49-F238E27FC236}">
-                <a16:creationId xmlns:a16="http://schemas.microsoft.com/office/drawing/2014/main" xmlns="" id="{047B3338-3C79-280E-33CD-E184CC752916}"/>
+                <a16:creationId xmlns:a16="http://schemas.microsoft.com/office/drawing/2014/main" id="{047B3338-3C79-280E-33CD-E184CC752916}"/>
               </a:ext>
             </a:extLst>
           </p:cNvPr>
@@ -7582,7 +8391,7 @@
               <p:cNvPr id="5" name="CaixaDeTexto 4">
                 <a:extLst>
                   <a:ext uri="{FF2B5EF4-FFF2-40B4-BE49-F238E27FC236}">
-                    <a16:creationId xmlns:a16="http://schemas.microsoft.com/office/drawing/2014/main" xmlns="" id="{A3376B35-7B47-DF75-A545-B75926FB5BB2}"/>
+                    <a16:creationId xmlns:a16="http://schemas.microsoft.com/office/drawing/2014/main" id="{A3376B35-7B47-DF75-A545-B75926FB5BB2}"/>
                   </a:ext>
                 </a:extLst>
               </p:cNvPr>
@@ -7608,10 +8417,7 @@
                 <a:pPr/>
                 <a14:m>
                   <m:oMathPara xmlns:m="http://schemas.openxmlformats.org/officeDocument/2006/math">
-                    <m:oMathParaPr>
-                      <m:jc m:val="centerGroup"/>
-                    </m:oMathParaPr>
-                    <m:oMath xmlns:m="http://schemas.openxmlformats.org/officeDocument/2006/math">
+                    <m:oMath>
                       <m:r>
                         <m:rPr>
                           <m:sty m:val="p"/>
@@ -7645,7 +8451,7 @@
                       <m:f>
                         <m:fPr>
                           <m:ctrlPr>
-                            <a:rPr lang="pt-BR" sz="3200" b="0" i="1" smtClean="0">
+                            <a:rPr lang="pt-BR" sz="3200" b="0" i="0" smtClean="0">
                               <a:latin typeface="Cambria Math" panose="02040503050406030204" pitchFamily="18" charset="0"/>
                             </a:rPr>
                           </m:ctrlPr>
@@ -7746,7 +8552,7 @@
           <p:cNvPr id="4" name="Tabela 5">
             <a:extLst>
               <a:ext uri="{FF2B5EF4-FFF2-40B4-BE49-F238E27FC236}">
-                <a16:creationId xmlns:a16="http://schemas.microsoft.com/office/drawing/2014/main" xmlns="" id="{0D5ABCB4-5EB5-F832-F110-AD1F2FD3532A}"/>
+                <a16:creationId xmlns:a16="http://schemas.microsoft.com/office/drawing/2014/main" id="{0D5ABCB4-5EB5-F832-F110-AD1F2FD3532A}"/>
               </a:ext>
             </a:extLst>
           </p:cNvPr>
@@ -7769,14 +8575,14 @@
                 <a:gridCol w="897466">
                   <a:extLst>
                     <a:ext uri="{9D8B030D-6E8A-4147-A177-3AD203B41FA5}">
-                      <a16:colId xmlns:a16="http://schemas.microsoft.com/office/drawing/2014/main" xmlns="" val="2780398905"/>
+                      <a16:colId xmlns:a16="http://schemas.microsoft.com/office/drawing/2014/main" val="2780398905"/>
                     </a:ext>
                   </a:extLst>
                 </a:gridCol>
                 <a:gridCol w="897466">
                   <a:extLst>
                     <a:ext uri="{9D8B030D-6E8A-4147-A177-3AD203B41FA5}">
-                      <a16:colId xmlns:a16="http://schemas.microsoft.com/office/drawing/2014/main" xmlns="" val="1752542230"/>
+                      <a16:colId xmlns:a16="http://schemas.microsoft.com/office/drawing/2014/main" val="1752542230"/>
                     </a:ext>
                   </a:extLst>
                 </a:gridCol>
@@ -7933,7 +8739,7 @@
                 </a:tc>
                 <a:extLst>
                   <a:ext uri="{0D108BD9-81ED-4DB2-BD59-A6C34878D82A}">
-                    <a16:rowId xmlns:a16="http://schemas.microsoft.com/office/drawing/2014/main" xmlns="" val="3952155157"/>
+                    <a16:rowId xmlns:a16="http://schemas.microsoft.com/office/drawing/2014/main" val="3952155157"/>
                   </a:ext>
                 </a:extLst>
               </a:tr>
@@ -8101,7 +8907,7 @@
                 </a:tc>
                 <a:extLst>
                   <a:ext uri="{0D108BD9-81ED-4DB2-BD59-A6C34878D82A}">
-                    <a16:rowId xmlns:a16="http://schemas.microsoft.com/office/drawing/2014/main" xmlns="" val="2169341992"/>
+                    <a16:rowId xmlns:a16="http://schemas.microsoft.com/office/drawing/2014/main" val="2169341992"/>
                   </a:ext>
                 </a:extLst>
               </a:tr>
@@ -8114,7 +8920,7 @@
           <p:cNvPr id="6" name="Retângulo 5">
             <a:extLst>
               <a:ext uri="{FF2B5EF4-FFF2-40B4-BE49-F238E27FC236}">
-                <a16:creationId xmlns:a16="http://schemas.microsoft.com/office/drawing/2014/main" xmlns="" id="{685BDF4E-E4CF-5896-0326-96A536D9643C}"/>
+                <a16:creationId xmlns:a16="http://schemas.microsoft.com/office/drawing/2014/main" id="{685BDF4E-E4CF-5896-0326-96A536D9643C}"/>
               </a:ext>
             </a:extLst>
           </p:cNvPr>
@@ -8166,7 +8972,7 @@
           <p:cNvPr id="7" name="CaixaDeTexto 6">
             <a:extLst>
               <a:ext uri="{FF2B5EF4-FFF2-40B4-BE49-F238E27FC236}">
-                <a16:creationId xmlns:a16="http://schemas.microsoft.com/office/drawing/2014/main" xmlns="" id="{D1154846-7200-8A13-7CE3-866E0423AC95}"/>
+                <a16:creationId xmlns:a16="http://schemas.microsoft.com/office/drawing/2014/main" id="{D1154846-7200-8A13-7CE3-866E0423AC95}"/>
               </a:ext>
             </a:extLst>
           </p:cNvPr>
@@ -8202,7 +9008,7 @@
           <p:cNvPr id="9" name="CaixaDeTexto 8">
             <a:extLst>
               <a:ext uri="{FF2B5EF4-FFF2-40B4-BE49-F238E27FC236}">
-                <a16:creationId xmlns:a16="http://schemas.microsoft.com/office/drawing/2014/main" xmlns="" id="{D5BECE90-0299-928D-2937-BAD69964EB36}"/>
+                <a16:creationId xmlns:a16="http://schemas.microsoft.com/office/drawing/2014/main" id="{D5BECE90-0299-928D-2937-BAD69964EB36}"/>
               </a:ext>
             </a:extLst>
           </p:cNvPr>
@@ -8238,7 +9044,7 @@
           <p:cNvPr id="11" name="CaixaDeTexto 10">
             <a:extLst>
               <a:ext uri="{FF2B5EF4-FFF2-40B4-BE49-F238E27FC236}">
-                <a16:creationId xmlns:a16="http://schemas.microsoft.com/office/drawing/2014/main" xmlns="" id="{4E5240CA-203C-851E-7E56-73BFF976FA1B}"/>
+                <a16:creationId xmlns:a16="http://schemas.microsoft.com/office/drawing/2014/main" id="{4E5240CA-203C-851E-7E56-73BFF976FA1B}"/>
               </a:ext>
             </a:extLst>
           </p:cNvPr>
@@ -8274,7 +9080,7 @@
           <p:cNvPr id="13" name="CaixaDeTexto 12">
             <a:extLst>
               <a:ext uri="{FF2B5EF4-FFF2-40B4-BE49-F238E27FC236}">
-                <a16:creationId xmlns:a16="http://schemas.microsoft.com/office/drawing/2014/main" xmlns="" id="{08DF3936-009E-86E3-DA9B-9C242B4A2046}"/>
+                <a16:creationId xmlns:a16="http://schemas.microsoft.com/office/drawing/2014/main" id="{08DF3936-009E-86E3-DA9B-9C242B4A2046}"/>
               </a:ext>
             </a:extLst>
           </p:cNvPr>
@@ -8326,7 +9132,7 @@
         <p:cNvPr id="1" name="">
           <a:extLst>
             <a:ext uri="{FF2B5EF4-FFF2-40B4-BE49-F238E27FC236}">
-              <a16:creationId xmlns:a16="http://schemas.microsoft.com/office/drawing/2014/main" xmlns="" id="{D6F94076-840C-F8A0-1EBA-0559789D9928}"/>
+              <a16:creationId xmlns:a16="http://schemas.microsoft.com/office/drawing/2014/main" id="{D6F94076-840C-F8A0-1EBA-0559789D9928}"/>
             </a:ext>
           </a:extLst>
         </p:cNvPr>
@@ -8346,7 +9152,7 @@
           <p:cNvPr id="2" name="Título 1">
             <a:extLst>
               <a:ext uri="{FF2B5EF4-FFF2-40B4-BE49-F238E27FC236}">
-                <a16:creationId xmlns:a16="http://schemas.microsoft.com/office/drawing/2014/main" xmlns="" id="{5BE837E6-3644-108F-C376-E31809129570}"/>
+                <a16:creationId xmlns:a16="http://schemas.microsoft.com/office/drawing/2014/main" id="{5BE837E6-3644-108F-C376-E31809129570}"/>
               </a:ext>
             </a:extLst>
           </p:cNvPr>
@@ -8374,7 +9180,7 @@
           <p:cNvPr id="3" name="Espaço Reservado para Conteúdo 2">
             <a:extLst>
               <a:ext uri="{FF2B5EF4-FFF2-40B4-BE49-F238E27FC236}">
-                <a16:creationId xmlns:a16="http://schemas.microsoft.com/office/drawing/2014/main" xmlns="" id="{1ED50CCD-BAF9-D705-F6DD-4E87FC3E6A8D}"/>
+                <a16:creationId xmlns:a16="http://schemas.microsoft.com/office/drawing/2014/main" id="{1ED50CCD-BAF9-D705-F6DD-4E87FC3E6A8D}"/>
               </a:ext>
             </a:extLst>
           </p:cNvPr>
@@ -8516,14 +9322,14 @@
           </a:p>
         </p:txBody>
       </p:sp>
-      <mc:AlternateContent xmlns:mc="http://schemas.openxmlformats.org/markup-compatibility/2006" xmlns:a14="http://schemas.microsoft.com/office/drawing/2010/main">
-        <mc:Choice Requires="a14">
+      <mc:AlternateContent xmlns:mc="http://schemas.openxmlformats.org/markup-compatibility/2006">
+        <mc:Choice xmlns:a14="http://schemas.microsoft.com/office/drawing/2010/main" Requires="a14">
           <p:sp>
             <p:nvSpPr>
               <p:cNvPr id="5" name="CaixaDeTexto 4">
                 <a:extLst>
                   <a:ext uri="{FF2B5EF4-FFF2-40B4-BE49-F238E27FC236}">
-                    <a16:creationId xmlns:a16="http://schemas.microsoft.com/office/drawing/2014/main" xmlns="" id="{704D3BDA-16E0-C30B-2504-2D58C9069DF7}"/>
+                    <a16:creationId xmlns:a16="http://schemas.microsoft.com/office/drawing/2014/main" id="{704D3BDA-16E0-C30B-2504-2D58C9069DF7}"/>
                   </a:ext>
                 </a:extLst>
               </p:cNvPr>
@@ -8532,7 +9338,7 @@
             </p:nvSpPr>
             <p:spPr>
               <a:xfrm>
-                <a:off x="654753" y="3341865"/>
+                <a:off x="638678" y="3102600"/>
                 <a:ext cx="3939823" cy="1022524"/>
               </a:xfrm>
               <a:prstGeom prst="rect">
@@ -8549,10 +9355,7 @@
                 <a:pPr/>
                 <a14:m>
                   <m:oMathPara xmlns:m="http://schemas.openxmlformats.org/officeDocument/2006/math">
-                    <m:oMathParaPr>
-                      <m:jc m:val="centerGroup"/>
-                    </m:oMathParaPr>
-                    <m:oMath xmlns:m="http://schemas.openxmlformats.org/officeDocument/2006/math">
+                    <m:oMath>
                       <m:r>
                         <m:rPr>
                           <m:sty m:val="p"/>
@@ -8586,7 +9389,7 @@
                       <m:f>
                         <m:fPr>
                           <m:ctrlPr>
-                            <a:rPr lang="pt-BR" sz="3200" b="0" i="1" smtClean="0">
+                            <a:rPr lang="pt-BR" sz="3200" b="0" i="0" smtClean="0">
                               <a:latin typeface="Cambria Math" panose="02040503050406030204" pitchFamily="18" charset="0"/>
                             </a:rPr>
                           </m:ctrlPr>
@@ -8637,13 +9440,13 @@
             </p:txBody>
           </p:sp>
         </mc:Choice>
-        <mc:Fallback xmlns="">
+        <mc:Fallback>
           <p:sp>
             <p:nvSpPr>
               <p:cNvPr id="5" name="CaixaDeTexto 4">
                 <a:extLst>
                   <a:ext uri="{FF2B5EF4-FFF2-40B4-BE49-F238E27FC236}">
-                    <a16:creationId xmlns:a16="http://schemas.microsoft.com/office/drawing/2014/main" id="{A3376B35-7B47-DF75-A545-B75926FB5BB2}"/>
+                    <a16:creationId xmlns:a16="http://schemas.microsoft.com/office/drawing/2014/main" id="{704D3BDA-16E0-C30B-2504-2D58C9069DF7}"/>
                   </a:ext>
                 </a:extLst>
               </p:cNvPr>
@@ -8654,7 +9457,7 @@
             </p:nvSpPr>
             <p:spPr>
               <a:xfrm>
-                <a:off x="654753" y="3341865"/>
+                <a:off x="638678" y="3102600"/>
                 <a:ext cx="3939823" cy="1022524"/>
               </a:xfrm>
               <a:prstGeom prst="rect">
@@ -8672,7 +9475,7 @@
               <a:lstStyle/>
               <a:p>
                 <a:r>
-                  <a:rPr lang="pt-BR">
+                  <a:rPr lang="en-US">
                     <a:noFill/>
                   </a:rPr>
                   <a:t> </a:t>
@@ -8687,7 +9490,7 @@
           <p:cNvPr id="4" name="Tabela 5">
             <a:extLst>
               <a:ext uri="{FF2B5EF4-FFF2-40B4-BE49-F238E27FC236}">
-                <a16:creationId xmlns:a16="http://schemas.microsoft.com/office/drawing/2014/main" xmlns="" id="{72E4F38E-A7EF-429F-6B31-B7E993C4BB48}"/>
+                <a16:creationId xmlns:a16="http://schemas.microsoft.com/office/drawing/2014/main" id="{72E4F38E-A7EF-429F-6B31-B7E993C4BB48}"/>
               </a:ext>
             </a:extLst>
           </p:cNvPr>
@@ -8710,14 +9513,14 @@
                 <a:gridCol w="897466">
                   <a:extLst>
                     <a:ext uri="{9D8B030D-6E8A-4147-A177-3AD203B41FA5}">
-                      <a16:colId xmlns:a16="http://schemas.microsoft.com/office/drawing/2014/main" xmlns="" val="2780398905"/>
+                      <a16:colId xmlns:a16="http://schemas.microsoft.com/office/drawing/2014/main" val="2780398905"/>
                     </a:ext>
                   </a:extLst>
                 </a:gridCol>
                 <a:gridCol w="897466">
                   <a:extLst>
                     <a:ext uri="{9D8B030D-6E8A-4147-A177-3AD203B41FA5}">
-                      <a16:colId xmlns:a16="http://schemas.microsoft.com/office/drawing/2014/main" xmlns="" val="1752542230"/>
+                      <a16:colId xmlns:a16="http://schemas.microsoft.com/office/drawing/2014/main" val="1752542230"/>
                     </a:ext>
                   </a:extLst>
                 </a:gridCol>
@@ -8874,7 +9677,7 @@
                 </a:tc>
                 <a:extLst>
                   <a:ext uri="{0D108BD9-81ED-4DB2-BD59-A6C34878D82A}">
-                    <a16:rowId xmlns:a16="http://schemas.microsoft.com/office/drawing/2014/main" xmlns="" val="3952155157"/>
+                    <a16:rowId xmlns:a16="http://schemas.microsoft.com/office/drawing/2014/main" val="3952155157"/>
                   </a:ext>
                 </a:extLst>
               </a:tr>
@@ -9042,7 +9845,7 @@
                 </a:tc>
                 <a:extLst>
                   <a:ext uri="{0D108BD9-81ED-4DB2-BD59-A6C34878D82A}">
-                    <a16:rowId xmlns:a16="http://schemas.microsoft.com/office/drawing/2014/main" xmlns="" val="2169341992"/>
+                    <a16:rowId xmlns:a16="http://schemas.microsoft.com/office/drawing/2014/main" val="2169341992"/>
                   </a:ext>
                 </a:extLst>
               </a:tr>
@@ -9055,7 +9858,7 @@
           <p:cNvPr id="6" name="Retângulo 5">
             <a:extLst>
               <a:ext uri="{FF2B5EF4-FFF2-40B4-BE49-F238E27FC236}">
-                <a16:creationId xmlns:a16="http://schemas.microsoft.com/office/drawing/2014/main" xmlns="" id="{7DBCA45D-01DE-F21C-9CC9-EBEE7C31C895}"/>
+                <a16:creationId xmlns:a16="http://schemas.microsoft.com/office/drawing/2014/main" id="{7DBCA45D-01DE-F21C-9CC9-EBEE7C31C895}"/>
               </a:ext>
             </a:extLst>
           </p:cNvPr>
@@ -9107,7 +9910,7 @@
           <p:cNvPr id="7" name="CaixaDeTexto 6">
             <a:extLst>
               <a:ext uri="{FF2B5EF4-FFF2-40B4-BE49-F238E27FC236}">
-                <a16:creationId xmlns:a16="http://schemas.microsoft.com/office/drawing/2014/main" xmlns="" id="{FD64B03D-AF6E-F650-7BA8-30B1ADE878DC}"/>
+                <a16:creationId xmlns:a16="http://schemas.microsoft.com/office/drawing/2014/main" id="{FD64B03D-AF6E-F650-7BA8-30B1ADE878DC}"/>
               </a:ext>
             </a:extLst>
           </p:cNvPr>
@@ -9143,7 +9946,7 @@
           <p:cNvPr id="9" name="CaixaDeTexto 8">
             <a:extLst>
               <a:ext uri="{FF2B5EF4-FFF2-40B4-BE49-F238E27FC236}">
-                <a16:creationId xmlns:a16="http://schemas.microsoft.com/office/drawing/2014/main" xmlns="" id="{1C6F87C0-602F-3FE7-1A8C-E76501466135}"/>
+                <a16:creationId xmlns:a16="http://schemas.microsoft.com/office/drawing/2014/main" id="{1C6F87C0-602F-3FE7-1A8C-E76501466135}"/>
               </a:ext>
             </a:extLst>
           </p:cNvPr>
@@ -9179,7 +9982,7 @@
           <p:cNvPr id="11" name="CaixaDeTexto 10">
             <a:extLst>
               <a:ext uri="{FF2B5EF4-FFF2-40B4-BE49-F238E27FC236}">
-                <a16:creationId xmlns:a16="http://schemas.microsoft.com/office/drawing/2014/main" xmlns="" id="{4D11FED4-798F-FE62-4DD0-9B02BCE4FF2E}"/>
+                <a16:creationId xmlns:a16="http://schemas.microsoft.com/office/drawing/2014/main" id="{4D11FED4-798F-FE62-4DD0-9B02BCE4FF2E}"/>
               </a:ext>
             </a:extLst>
           </p:cNvPr>
@@ -9215,7 +10018,7 @@
           <p:cNvPr id="13" name="CaixaDeTexto 12">
             <a:extLst>
               <a:ext uri="{FF2B5EF4-FFF2-40B4-BE49-F238E27FC236}">
-                <a16:creationId xmlns:a16="http://schemas.microsoft.com/office/drawing/2014/main" xmlns="" id="{DF6DA85B-6614-958D-C680-07895E10B379}"/>
+                <a16:creationId xmlns:a16="http://schemas.microsoft.com/office/drawing/2014/main" id="{DF6DA85B-6614-958D-C680-07895E10B379}"/>
               </a:ext>
             </a:extLst>
           </p:cNvPr>
@@ -9281,7 +10084,7 @@
           <p:cNvPr id="2" name="Título 1">
             <a:extLst>
               <a:ext uri="{FF2B5EF4-FFF2-40B4-BE49-F238E27FC236}">
-                <a16:creationId xmlns:a16="http://schemas.microsoft.com/office/drawing/2014/main" xmlns="" id="{B287A758-CC86-49D1-9698-4D8C118C40E1}"/>
+                <a16:creationId xmlns:a16="http://schemas.microsoft.com/office/drawing/2014/main" id="{B287A758-CC86-49D1-9698-4D8C118C40E1}"/>
               </a:ext>
             </a:extLst>
           </p:cNvPr>
@@ -9309,7 +10112,7 @@
           <p:cNvPr id="3" name="Espaço Reservado para Conteúdo 2">
             <a:extLst>
               <a:ext uri="{FF2B5EF4-FFF2-40B4-BE49-F238E27FC236}">
-                <a16:creationId xmlns:a16="http://schemas.microsoft.com/office/drawing/2014/main" xmlns="" id="{50E4F4E1-BE8B-2CDE-011D-F70A3522A287}"/>
+                <a16:creationId xmlns:a16="http://schemas.microsoft.com/office/drawing/2014/main" id="{50E4F4E1-BE8B-2CDE-011D-F70A3522A287}"/>
               </a:ext>
             </a:extLst>
           </p:cNvPr>
@@ -9429,7 +10232,7 @@
               <p:cNvPr id="5" name="CaixaDeTexto 4">
                 <a:extLst>
                   <a:ext uri="{FF2B5EF4-FFF2-40B4-BE49-F238E27FC236}">
-                    <a16:creationId xmlns:a16="http://schemas.microsoft.com/office/drawing/2014/main" xmlns="" id="{E92F9593-43C2-2FC6-D7DF-B4A04BE65B06}"/>
+                    <a16:creationId xmlns:a16="http://schemas.microsoft.com/office/drawing/2014/main" id="{E92F9593-43C2-2FC6-D7DF-B4A04BE65B06}"/>
                   </a:ext>
                 </a:extLst>
               </p:cNvPr>
@@ -9455,10 +10258,7 @@
                 <a:pPr/>
                 <a14:m>
                   <m:oMathPara xmlns:m="http://schemas.openxmlformats.org/officeDocument/2006/math">
-                    <m:oMathParaPr>
-                      <m:jc m:val="centerGroup"/>
-                    </m:oMathParaPr>
-                    <m:oMath xmlns:m="http://schemas.openxmlformats.org/officeDocument/2006/math">
+                    <m:oMath>
                       <m:r>
                         <a:rPr lang="pt-BR" sz="3200" b="0" i="1" smtClean="0">
                           <a:latin typeface="Cambria Math" panose="02040503050406030204" pitchFamily="18" charset="0"/>
@@ -9474,7 +10274,7 @@
                       <m:f>
                         <m:fPr>
                           <m:ctrlPr>
-                            <a:rPr lang="pt-BR" sz="3200" i="1">
+                            <a:rPr lang="pt-BR" sz="3200" i="0">
                               <a:latin typeface="Cambria Math" panose="02040503050406030204" pitchFamily="18" charset="0"/>
                             </a:rPr>
                           </m:ctrlPr>
@@ -9575,7 +10375,7 @@
           <p:cNvPr id="4" name="Tabela 5">
             <a:extLst>
               <a:ext uri="{FF2B5EF4-FFF2-40B4-BE49-F238E27FC236}">
-                <a16:creationId xmlns:a16="http://schemas.microsoft.com/office/drawing/2014/main" xmlns="" id="{AB28634A-9E6D-BA06-E08B-AF1826CF6578}"/>
+                <a16:creationId xmlns:a16="http://schemas.microsoft.com/office/drawing/2014/main" id="{AB28634A-9E6D-BA06-E08B-AF1826CF6578}"/>
               </a:ext>
             </a:extLst>
           </p:cNvPr>
@@ -9598,14 +10398,14 @@
                 <a:gridCol w="897466">
                   <a:extLst>
                     <a:ext uri="{9D8B030D-6E8A-4147-A177-3AD203B41FA5}">
-                      <a16:colId xmlns:a16="http://schemas.microsoft.com/office/drawing/2014/main" xmlns="" val="2780398905"/>
+                      <a16:colId xmlns:a16="http://schemas.microsoft.com/office/drawing/2014/main" val="2780398905"/>
                     </a:ext>
                   </a:extLst>
                 </a:gridCol>
                 <a:gridCol w="897466">
                   <a:extLst>
                     <a:ext uri="{9D8B030D-6E8A-4147-A177-3AD203B41FA5}">
-                      <a16:colId xmlns:a16="http://schemas.microsoft.com/office/drawing/2014/main" xmlns="" val="1752542230"/>
+                      <a16:colId xmlns:a16="http://schemas.microsoft.com/office/drawing/2014/main" val="1752542230"/>
                     </a:ext>
                   </a:extLst>
                 </a:gridCol>
@@ -9762,7 +10562,7 @@
                 </a:tc>
                 <a:extLst>
                   <a:ext uri="{0D108BD9-81ED-4DB2-BD59-A6C34878D82A}">
-                    <a16:rowId xmlns:a16="http://schemas.microsoft.com/office/drawing/2014/main" xmlns="" val="3952155157"/>
+                    <a16:rowId xmlns:a16="http://schemas.microsoft.com/office/drawing/2014/main" val="3952155157"/>
                   </a:ext>
                 </a:extLst>
               </a:tr>
@@ -9930,7 +10730,7 @@
                 </a:tc>
                 <a:extLst>
                   <a:ext uri="{0D108BD9-81ED-4DB2-BD59-A6C34878D82A}">
-                    <a16:rowId xmlns:a16="http://schemas.microsoft.com/office/drawing/2014/main" xmlns="" val="2169341992"/>
+                    <a16:rowId xmlns:a16="http://schemas.microsoft.com/office/drawing/2014/main" val="2169341992"/>
                   </a:ext>
                 </a:extLst>
               </a:tr>
@@ -9943,7 +10743,7 @@
           <p:cNvPr id="6" name="Retângulo 5">
             <a:extLst>
               <a:ext uri="{FF2B5EF4-FFF2-40B4-BE49-F238E27FC236}">
-                <a16:creationId xmlns:a16="http://schemas.microsoft.com/office/drawing/2014/main" xmlns="" id="{894B2598-B989-4F1A-AB5A-34B5BD2133A9}"/>
+                <a16:creationId xmlns:a16="http://schemas.microsoft.com/office/drawing/2014/main" id="{894B2598-B989-4F1A-AB5A-34B5BD2133A9}"/>
               </a:ext>
             </a:extLst>
           </p:cNvPr>
@@ -9995,7 +10795,7 @@
           <p:cNvPr id="7" name="CaixaDeTexto 6">
             <a:extLst>
               <a:ext uri="{FF2B5EF4-FFF2-40B4-BE49-F238E27FC236}">
-                <a16:creationId xmlns:a16="http://schemas.microsoft.com/office/drawing/2014/main" xmlns="" id="{D1154846-7200-8A13-7CE3-866E0423AC95}"/>
+                <a16:creationId xmlns:a16="http://schemas.microsoft.com/office/drawing/2014/main" id="{D1154846-7200-8A13-7CE3-866E0423AC95}"/>
               </a:ext>
             </a:extLst>
           </p:cNvPr>
@@ -10031,7 +10831,7 @@
           <p:cNvPr id="8" name="CaixaDeTexto 7">
             <a:extLst>
               <a:ext uri="{FF2B5EF4-FFF2-40B4-BE49-F238E27FC236}">
-                <a16:creationId xmlns:a16="http://schemas.microsoft.com/office/drawing/2014/main" xmlns="" id="{D5BECE90-0299-928D-2937-BAD69964EB36}"/>
+                <a16:creationId xmlns:a16="http://schemas.microsoft.com/office/drawing/2014/main" id="{D5BECE90-0299-928D-2937-BAD69964EB36}"/>
               </a:ext>
             </a:extLst>
           </p:cNvPr>
@@ -10067,7 +10867,7 @@
           <p:cNvPr id="9" name="CaixaDeTexto 8">
             <a:extLst>
               <a:ext uri="{FF2B5EF4-FFF2-40B4-BE49-F238E27FC236}">
-                <a16:creationId xmlns:a16="http://schemas.microsoft.com/office/drawing/2014/main" xmlns="" id="{4E5240CA-203C-851E-7E56-73BFF976FA1B}"/>
+                <a16:creationId xmlns:a16="http://schemas.microsoft.com/office/drawing/2014/main" id="{4E5240CA-203C-851E-7E56-73BFF976FA1B}"/>
               </a:ext>
             </a:extLst>
           </p:cNvPr>
@@ -10103,7 +10903,7 @@
           <p:cNvPr id="10" name="CaixaDeTexto 9">
             <a:extLst>
               <a:ext uri="{FF2B5EF4-FFF2-40B4-BE49-F238E27FC236}">
-                <a16:creationId xmlns:a16="http://schemas.microsoft.com/office/drawing/2014/main" xmlns="" id="{08DF3936-009E-86E3-DA9B-9C242B4A2046}"/>
+                <a16:creationId xmlns:a16="http://schemas.microsoft.com/office/drawing/2014/main" id="{08DF3936-009E-86E3-DA9B-9C242B4A2046}"/>
               </a:ext>
             </a:extLst>
           </p:cNvPr>
@@ -10155,7 +10955,7 @@
         <p:cNvPr id="1" name="">
           <a:extLst>
             <a:ext uri="{FF2B5EF4-FFF2-40B4-BE49-F238E27FC236}">
-              <a16:creationId xmlns:a16="http://schemas.microsoft.com/office/drawing/2014/main" xmlns="" id="{E1608E56-1063-9535-583F-68F98BEED64E}"/>
+              <a16:creationId xmlns:a16="http://schemas.microsoft.com/office/drawing/2014/main" id="{E1608E56-1063-9535-583F-68F98BEED64E}"/>
             </a:ext>
           </a:extLst>
         </p:cNvPr>
@@ -10175,7 +10975,7 @@
           <p:cNvPr id="2" name="Título 1">
             <a:extLst>
               <a:ext uri="{FF2B5EF4-FFF2-40B4-BE49-F238E27FC236}">
-                <a16:creationId xmlns:a16="http://schemas.microsoft.com/office/drawing/2014/main" xmlns="" id="{7B281AC0-3FAB-E1EC-DE8A-76F8FBB33FFF}"/>
+                <a16:creationId xmlns:a16="http://schemas.microsoft.com/office/drawing/2014/main" id="{7B281AC0-3FAB-E1EC-DE8A-76F8FBB33FFF}"/>
               </a:ext>
             </a:extLst>
           </p:cNvPr>
@@ -10203,7 +11003,7 @@
           <p:cNvPr id="3" name="Espaço Reservado para Conteúdo 2">
             <a:extLst>
               <a:ext uri="{FF2B5EF4-FFF2-40B4-BE49-F238E27FC236}">
-                <a16:creationId xmlns:a16="http://schemas.microsoft.com/office/drawing/2014/main" xmlns="" id="{4AA4931E-FED8-1E19-BC1E-B1813EAF8984}"/>
+                <a16:creationId xmlns:a16="http://schemas.microsoft.com/office/drawing/2014/main" id="{4AA4931E-FED8-1E19-BC1E-B1813EAF8984}"/>
               </a:ext>
             </a:extLst>
           </p:cNvPr>
@@ -10292,7 +11092,7 @@
               <p:cNvPr id="5" name="CaixaDeTexto 4">
                 <a:extLst>
                   <a:ext uri="{FF2B5EF4-FFF2-40B4-BE49-F238E27FC236}">
-                    <a16:creationId xmlns:a16="http://schemas.microsoft.com/office/drawing/2014/main" xmlns="" id="{838A3350-B424-FFC8-887E-A4F979401EC1}"/>
+                    <a16:creationId xmlns:a16="http://schemas.microsoft.com/office/drawing/2014/main" id="{838A3350-B424-FFC8-887E-A4F979401EC1}"/>
                   </a:ext>
                 </a:extLst>
               </p:cNvPr>
@@ -10318,10 +11118,7 @@
                 <a:pPr/>
                 <a14:m>
                   <m:oMathPara xmlns:m="http://schemas.openxmlformats.org/officeDocument/2006/math">
-                    <m:oMathParaPr>
-                      <m:jc m:val="centerGroup"/>
-                    </m:oMathParaPr>
-                    <m:oMath xmlns:m="http://schemas.openxmlformats.org/officeDocument/2006/math">
+                    <m:oMath>
                       <m:r>
                         <a:rPr lang="pt-BR" sz="3200" b="0" i="1" smtClean="0">
                           <a:latin typeface="Cambria Math" panose="02040503050406030204" pitchFamily="18" charset="0"/>
@@ -10337,7 +11134,7 @@
                       <m:f>
                         <m:fPr>
                           <m:ctrlPr>
-                            <a:rPr lang="pt-BR" sz="3200" i="1">
+                            <a:rPr lang="pt-BR" sz="3200" i="0">
                               <a:latin typeface="Cambria Math" panose="02040503050406030204" pitchFamily="18" charset="0"/>
                             </a:rPr>
                           </m:ctrlPr>
@@ -10438,7 +11235,7 @@
           <p:cNvPr id="4" name="Tabela 5">
             <a:extLst>
               <a:ext uri="{FF2B5EF4-FFF2-40B4-BE49-F238E27FC236}">
-                <a16:creationId xmlns:a16="http://schemas.microsoft.com/office/drawing/2014/main" xmlns="" id="{6F8B50E5-59B3-7D20-E676-F37DDCFCA230}"/>
+                <a16:creationId xmlns:a16="http://schemas.microsoft.com/office/drawing/2014/main" id="{6F8B50E5-59B3-7D20-E676-F37DDCFCA230}"/>
               </a:ext>
             </a:extLst>
           </p:cNvPr>
@@ -10461,14 +11258,14 @@
                 <a:gridCol w="897466">
                   <a:extLst>
                     <a:ext uri="{9D8B030D-6E8A-4147-A177-3AD203B41FA5}">
-                      <a16:colId xmlns:a16="http://schemas.microsoft.com/office/drawing/2014/main" xmlns="" val="2780398905"/>
+                      <a16:colId xmlns:a16="http://schemas.microsoft.com/office/drawing/2014/main" val="2780398905"/>
                     </a:ext>
                   </a:extLst>
                 </a:gridCol>
                 <a:gridCol w="897466">
                   <a:extLst>
                     <a:ext uri="{9D8B030D-6E8A-4147-A177-3AD203B41FA5}">
-                      <a16:colId xmlns:a16="http://schemas.microsoft.com/office/drawing/2014/main" xmlns="" val="1752542230"/>
+                      <a16:colId xmlns:a16="http://schemas.microsoft.com/office/drawing/2014/main" val="1752542230"/>
                     </a:ext>
                   </a:extLst>
                 </a:gridCol>
@@ -10625,7 +11422,7 @@
                 </a:tc>
                 <a:extLst>
                   <a:ext uri="{0D108BD9-81ED-4DB2-BD59-A6C34878D82A}">
-                    <a16:rowId xmlns:a16="http://schemas.microsoft.com/office/drawing/2014/main" xmlns="" val="3952155157"/>
+                    <a16:rowId xmlns:a16="http://schemas.microsoft.com/office/drawing/2014/main" val="3952155157"/>
                   </a:ext>
                 </a:extLst>
               </a:tr>
@@ -10793,7 +11590,7 @@
                 </a:tc>
                 <a:extLst>
                   <a:ext uri="{0D108BD9-81ED-4DB2-BD59-A6C34878D82A}">
-                    <a16:rowId xmlns:a16="http://schemas.microsoft.com/office/drawing/2014/main" xmlns="" val="2169341992"/>
+                    <a16:rowId xmlns:a16="http://schemas.microsoft.com/office/drawing/2014/main" val="2169341992"/>
                   </a:ext>
                 </a:extLst>
               </a:tr>
@@ -10806,7 +11603,7 @@
           <p:cNvPr id="6" name="Retângulo 5">
             <a:extLst>
               <a:ext uri="{FF2B5EF4-FFF2-40B4-BE49-F238E27FC236}">
-                <a16:creationId xmlns:a16="http://schemas.microsoft.com/office/drawing/2014/main" xmlns="" id="{26508683-E050-40A0-9B76-B0CF504C46C8}"/>
+                <a16:creationId xmlns:a16="http://schemas.microsoft.com/office/drawing/2014/main" id="{26508683-E050-40A0-9B76-B0CF504C46C8}"/>
               </a:ext>
             </a:extLst>
           </p:cNvPr>
@@ -10858,7 +11655,7 @@
           <p:cNvPr id="8" name="CaixaDeTexto 7">
             <a:extLst>
               <a:ext uri="{FF2B5EF4-FFF2-40B4-BE49-F238E27FC236}">
-                <a16:creationId xmlns:a16="http://schemas.microsoft.com/office/drawing/2014/main" xmlns="" id="{EF4E8F31-70DD-AFAD-34E2-A822946626E9}"/>
+                <a16:creationId xmlns:a16="http://schemas.microsoft.com/office/drawing/2014/main" id="{EF4E8F31-70DD-AFAD-34E2-A822946626E9}"/>
               </a:ext>
             </a:extLst>
           </p:cNvPr>
@@ -10894,7 +11691,7 @@
           <p:cNvPr id="10" name="CaixaDeTexto 9">
             <a:extLst>
               <a:ext uri="{FF2B5EF4-FFF2-40B4-BE49-F238E27FC236}">
-                <a16:creationId xmlns:a16="http://schemas.microsoft.com/office/drawing/2014/main" xmlns="" id="{8339B622-0A8F-73D9-2449-EDF1095410C1}"/>
+                <a16:creationId xmlns:a16="http://schemas.microsoft.com/office/drawing/2014/main" id="{8339B622-0A8F-73D9-2449-EDF1095410C1}"/>
               </a:ext>
             </a:extLst>
           </p:cNvPr>
@@ -10930,7 +11727,7 @@
           <p:cNvPr id="12" name="CaixaDeTexto 11">
             <a:extLst>
               <a:ext uri="{FF2B5EF4-FFF2-40B4-BE49-F238E27FC236}">
-                <a16:creationId xmlns:a16="http://schemas.microsoft.com/office/drawing/2014/main" xmlns="" id="{C8BDA5C3-77D9-BE4A-F72B-0D83504807E8}"/>
+                <a16:creationId xmlns:a16="http://schemas.microsoft.com/office/drawing/2014/main" id="{C8BDA5C3-77D9-BE4A-F72B-0D83504807E8}"/>
               </a:ext>
             </a:extLst>
           </p:cNvPr>
@@ -10966,7 +11763,7 @@
           <p:cNvPr id="14" name="CaixaDeTexto 13">
             <a:extLst>
               <a:ext uri="{FF2B5EF4-FFF2-40B4-BE49-F238E27FC236}">
-                <a16:creationId xmlns:a16="http://schemas.microsoft.com/office/drawing/2014/main" xmlns="" id="{A5CFE41C-61A5-A9A5-1493-12FF02B34221}"/>
+                <a16:creationId xmlns:a16="http://schemas.microsoft.com/office/drawing/2014/main" id="{A5CFE41C-61A5-A9A5-1493-12FF02B34221}"/>
               </a:ext>
             </a:extLst>
           </p:cNvPr>
@@ -11032,7 +11829,7 @@
           <p:cNvPr id="3" name="Espaço Reservado para Conteúdo 2">
             <a:extLst>
               <a:ext uri="{FF2B5EF4-FFF2-40B4-BE49-F238E27FC236}">
-                <a16:creationId xmlns:a16="http://schemas.microsoft.com/office/drawing/2014/main" xmlns="" id="{171E3951-9049-F65B-B03A-1DB6F4600ADB}"/>
+                <a16:creationId xmlns:a16="http://schemas.microsoft.com/office/drawing/2014/main" id="{171E3951-9049-F65B-B03A-1DB6F4600ADB}"/>
               </a:ext>
             </a:extLst>
           </p:cNvPr>
@@ -11101,7 +11898,7 @@
           <p:cNvPr id="2" name="Título 1">
             <a:extLst>
               <a:ext uri="{FF2B5EF4-FFF2-40B4-BE49-F238E27FC236}">
-                <a16:creationId xmlns:a16="http://schemas.microsoft.com/office/drawing/2014/main" xmlns="" id="{EECB3FED-5D1A-7084-5333-A3B2FA75F608}"/>
+                <a16:creationId xmlns:a16="http://schemas.microsoft.com/office/drawing/2014/main" id="{EECB3FED-5D1A-7084-5333-A3B2FA75F608}"/>
               </a:ext>
             </a:extLst>
           </p:cNvPr>
@@ -11129,7 +11926,7 @@
           <p:cNvPr id="3" name="Espaço Reservado para Conteúdo 2">
             <a:extLst>
               <a:ext uri="{FF2B5EF4-FFF2-40B4-BE49-F238E27FC236}">
-                <a16:creationId xmlns:a16="http://schemas.microsoft.com/office/drawing/2014/main" xmlns="" id="{25FE7774-7186-A846-D8DE-518B2CBF4EBD}"/>
+                <a16:creationId xmlns:a16="http://schemas.microsoft.com/office/drawing/2014/main" id="{25FE7774-7186-A846-D8DE-518B2CBF4EBD}"/>
               </a:ext>
             </a:extLst>
           </p:cNvPr>
@@ -11206,7 +12003,7 @@
           <p:cNvPr id="2" name="Título 1">
             <a:extLst>
               <a:ext uri="{FF2B5EF4-FFF2-40B4-BE49-F238E27FC236}">
-                <a16:creationId xmlns:a16="http://schemas.microsoft.com/office/drawing/2014/main" xmlns="" id="{0BF87474-9D5C-0B3D-63E8-AD1CF986CDF4}"/>
+                <a16:creationId xmlns:a16="http://schemas.microsoft.com/office/drawing/2014/main" id="{0BF87474-9D5C-0B3D-63E8-AD1CF986CDF4}"/>
               </a:ext>
             </a:extLst>
           </p:cNvPr>
@@ -11238,7 +12035,7 @@
           <p:cNvPr id="3" name="Espaço Reservado para Conteúdo 2">
             <a:extLst>
               <a:ext uri="{FF2B5EF4-FFF2-40B4-BE49-F238E27FC236}">
-                <a16:creationId xmlns:a16="http://schemas.microsoft.com/office/drawing/2014/main" xmlns="" id="{82DAA94B-AA8F-AF15-EE11-8B107DF8C311}"/>
+                <a16:creationId xmlns:a16="http://schemas.microsoft.com/office/drawing/2014/main" id="{82DAA94B-AA8F-AF15-EE11-8B107DF8C311}"/>
               </a:ext>
             </a:extLst>
           </p:cNvPr>
@@ -11383,7 +12180,7 @@
               <p:cNvPr id="4" name="CaixaDeTexto 3">
                 <a:extLst>
                   <a:ext uri="{FF2B5EF4-FFF2-40B4-BE49-F238E27FC236}">
-                    <a16:creationId xmlns:a16="http://schemas.microsoft.com/office/drawing/2014/main" xmlns="" id="{B66DD82C-2C7C-932B-0676-6777E743E2CA}"/>
+                    <a16:creationId xmlns:a16="http://schemas.microsoft.com/office/drawing/2014/main" id="{B66DD82C-2C7C-932B-0676-6777E743E2CA}"/>
                   </a:ext>
                 </a:extLst>
               </p:cNvPr>
@@ -11409,10 +12206,7 @@
                 <a:pPr/>
                 <a14:m>
                   <m:oMathPara xmlns:m="http://schemas.openxmlformats.org/officeDocument/2006/math">
-                    <m:oMathParaPr>
-                      <m:jc m:val="centerGroup"/>
-                    </m:oMathParaPr>
-                    <m:oMath xmlns:m="http://schemas.openxmlformats.org/officeDocument/2006/math">
+                    <m:oMath>
                       <m:r>
                         <a:rPr lang="pt-BR" sz="3200" b="0" i="1" smtClean="0">
                           <a:latin typeface="Cambria Math" panose="02040503050406030204" pitchFamily="18" charset="0"/>
@@ -11428,7 +12222,7 @@
                       <m:f>
                         <m:fPr>
                           <m:ctrlPr>
-                            <a:rPr lang="pt-BR" sz="3200" i="1">
+                            <a:rPr lang="pt-BR" sz="3200" i="0">
                               <a:latin typeface="Cambria Math" panose="02040503050406030204" pitchFamily="18" charset="0"/>
                             </a:rPr>
                           </m:ctrlPr>
@@ -11531,7 +12325,7 @@
               <p:cNvPr id="5" name="CaixaDeTexto 4">
                 <a:extLst>
                   <a:ext uri="{FF2B5EF4-FFF2-40B4-BE49-F238E27FC236}">
-                    <a16:creationId xmlns:a16="http://schemas.microsoft.com/office/drawing/2014/main" xmlns="" id="{1C33F56B-917E-EDAE-B038-52C2901A324E}"/>
+                    <a16:creationId xmlns:a16="http://schemas.microsoft.com/office/drawing/2014/main" id="{1C33F56B-917E-EDAE-B038-52C2901A324E}"/>
                   </a:ext>
                 </a:extLst>
               </p:cNvPr>
@@ -11557,10 +12351,7 @@
                 <a:pPr/>
                 <a14:m>
                   <m:oMathPara xmlns:m="http://schemas.openxmlformats.org/officeDocument/2006/math">
-                    <m:oMathParaPr>
-                      <m:jc m:val="centerGroup"/>
-                    </m:oMathParaPr>
-                    <m:oMath xmlns:m="http://schemas.openxmlformats.org/officeDocument/2006/math">
+                    <m:oMath>
                       <m:r>
                         <m:rPr>
                           <m:sty m:val="p"/>
@@ -11594,7 +12385,7 @@
                       <m:f>
                         <m:fPr>
                           <m:ctrlPr>
-                            <a:rPr lang="pt-BR" sz="3200" b="0" i="1" smtClean="0">
+                            <a:rPr lang="pt-BR" sz="3200" b="0" i="0" smtClean="0">
                               <a:latin typeface="Cambria Math" panose="02040503050406030204" pitchFamily="18" charset="0"/>
                             </a:rPr>
                           </m:ctrlPr>
@@ -11725,7 +12516,7 @@
           <p:cNvPr id="2" name="Título 1">
             <a:extLst>
               <a:ext uri="{FF2B5EF4-FFF2-40B4-BE49-F238E27FC236}">
-                <a16:creationId xmlns:a16="http://schemas.microsoft.com/office/drawing/2014/main" xmlns="" id="{B64DCA44-CC6E-8998-A693-998426B94AA3}"/>
+                <a16:creationId xmlns:a16="http://schemas.microsoft.com/office/drawing/2014/main" id="{B64DCA44-CC6E-8998-A693-998426B94AA3}"/>
               </a:ext>
             </a:extLst>
           </p:cNvPr>
@@ -11752,14 +12543,14 @@
           </a:p>
         </p:txBody>
       </p:sp>
-      <mc:AlternateContent xmlns:mc="http://schemas.openxmlformats.org/markup-compatibility/2006" xmlns:a14="http://schemas.microsoft.com/office/drawing/2010/main">
-        <mc:Choice Requires="a14">
+      <mc:AlternateContent xmlns:mc="http://schemas.openxmlformats.org/markup-compatibility/2006">
+        <mc:Choice xmlns:a14="http://schemas.microsoft.com/office/drawing/2010/main" Requires="a14">
           <p:sp>
             <p:nvSpPr>
               <p:cNvPr id="3" name="Espaço Reservado para Conteúdo 2">
                 <a:extLst>
                   <a:ext uri="{FF2B5EF4-FFF2-40B4-BE49-F238E27FC236}">
-                    <a16:creationId xmlns:a16="http://schemas.microsoft.com/office/drawing/2014/main" xmlns="" id="{C261D671-8D7F-BF6D-3C19-CFC15A190C23}"/>
+                    <a16:creationId xmlns:a16="http://schemas.microsoft.com/office/drawing/2014/main" id="{C261D671-8D7F-BF6D-3C19-CFC15A190C23}"/>
                   </a:ext>
                 </a:extLst>
               </p:cNvPr>
@@ -11792,7 +12583,27 @@
                 </a:r>
                 <a:r>
                   <a:rPr lang="pt-BR" dirty="0"/>
-                  <a:t> combina as duas métricas em uma única.</a:t>
+                  <a:t> combina as duas métricas em uma única através da </a:t>
+                </a:r>
+                <a:r>
+                  <a:rPr lang="pt-BR" b="1" dirty="0">
+                    <a:solidFill>
+                      <a:srgbClr val="00B050"/>
+                    </a:solidFill>
+                  </a:rPr>
+                  <a:t>média </a:t>
+                </a:r>
+                <a:r>
+                  <a:rPr lang="en-US" b="1" dirty="0" err="1">
+                    <a:solidFill>
+                      <a:srgbClr val="00B050"/>
+                    </a:solidFill>
+                  </a:rPr>
+                  <a:t>harmônica</a:t>
+                </a:r>
+                <a:r>
+                  <a:rPr lang="pt-BR" dirty="0"/>
+                  <a:t> delas.</a:t>
                 </a:r>
               </a:p>
               <a:p>
@@ -12012,7 +12823,7 @@
             </p:txBody>
           </p:sp>
         </mc:Choice>
-        <mc:Fallback xmlns="">
+        <mc:Fallback>
           <p:sp>
             <p:nvSpPr>
               <p:cNvPr id="3" name="Espaço Reservado para Conteúdo 2">
@@ -12035,7 +12846,7 @@
                 <a:ext cx="11185187" cy="5032375"/>
               </a:xfrm>
               <a:blipFill>
-                <a:blip r:embed="rId2"/>
+                <a:blip r:embed="rId3"/>
                 <a:stretch>
                   <a:fillRect l="-981" t="-1937"/>
                 </a:stretch>
@@ -12063,7 +12874,7 @@
               <p:cNvPr id="5" name="CaixaDeTexto 4">
                 <a:extLst>
                   <a:ext uri="{FF2B5EF4-FFF2-40B4-BE49-F238E27FC236}">
-                    <a16:creationId xmlns:a16="http://schemas.microsoft.com/office/drawing/2014/main" xmlns="" id="{C0A929A7-E33F-6D02-D301-38706DE0743C}"/>
+                    <a16:creationId xmlns:a16="http://schemas.microsoft.com/office/drawing/2014/main" id="{C0A929A7-E33F-6D02-D301-38706DE0743C}"/>
                   </a:ext>
                 </a:extLst>
               </p:cNvPr>
@@ -12091,10 +12902,7 @@
                 </a:pPr>
                 <a14:m>
                   <m:oMathPara xmlns:m="http://schemas.openxmlformats.org/officeDocument/2006/math">
-                    <m:oMathParaPr>
-                      <m:jc m:val="centerGroup"/>
-                    </m:oMathParaPr>
-                    <m:oMath xmlns:m="http://schemas.openxmlformats.org/officeDocument/2006/math">
+                    <m:oMath>
                       <m:sSub>
                         <m:sSubPr>
                           <m:ctrlPr>
@@ -12129,7 +12937,7 @@
                       <m:f>
                         <m:fPr>
                           <m:ctrlPr>
-                            <a:rPr lang="pt-BR" sz="3200" b="0" i="1" smtClean="0">
+                            <a:rPr lang="pt-BR" sz="3200" b="0" i="0" smtClean="0">
                               <a:latin typeface="Cambria Math" panose="02040503050406030204" pitchFamily="18" charset="0"/>
                             </a:rPr>
                           </m:ctrlPr>
@@ -12164,7 +12972,7 @@
                           <m:f>
                             <m:fPr>
                               <m:ctrlPr>
-                                <a:rPr lang="pt-BR" sz="3200" b="0" i="1" smtClean="0">
+                                <a:rPr lang="pt-BR" sz="3200" b="0" i="0" smtClean="0">
                                   <a:latin typeface="Cambria Math" panose="02040503050406030204" pitchFamily="18" charset="0"/>
                                 </a:rPr>
                               </m:ctrlPr>
@@ -12215,7 +13023,7 @@
                       <m:f>
                         <m:fPr>
                           <m:ctrlPr>
-                            <a:rPr lang="pt-BR" sz="3200" b="0" i="1" smtClean="0">
+                            <a:rPr lang="pt-BR" sz="3200" b="0" i="0" smtClean="0">
                               <a:latin typeface="Cambria Math" panose="02040503050406030204" pitchFamily="18" charset="0"/>
                             </a:rPr>
                           </m:ctrlPr>
@@ -12338,7 +13146,7 @@
                 <a:avLst/>
               </a:prstGeom>
               <a:blipFill>
-                <a:blip r:embed="rId3"/>
+                <a:blip r:embed="rId4"/>
                 <a:stretch>
                   <a:fillRect/>
                 </a:stretch>
@@ -12396,7 +13204,7 @@
               <p:cNvPr id="3" name="Espaço Reservado para Conteúdo 2">
                 <a:extLst>
                   <a:ext uri="{FF2B5EF4-FFF2-40B4-BE49-F238E27FC236}">
-                    <a16:creationId xmlns:a16="http://schemas.microsoft.com/office/drawing/2014/main" xmlns="" id="{0F418656-538C-BBD9-47FA-40A924A669E5}"/>
+                    <a16:creationId xmlns:a16="http://schemas.microsoft.com/office/drawing/2014/main" id="{0F418656-538C-BBD9-47FA-40A924A669E5}"/>
                   </a:ext>
                 </a:extLst>
               </p:cNvPr>
@@ -12523,7 +13331,7 @@
           <p:cNvPr id="2" name="Título 1">
             <a:extLst>
               <a:ext uri="{FF2B5EF4-FFF2-40B4-BE49-F238E27FC236}">
-                <a16:creationId xmlns:a16="http://schemas.microsoft.com/office/drawing/2014/main" xmlns="" id="{44F6D18B-0399-55B9-FD83-C7EDF77FF08A}"/>
+                <a16:creationId xmlns:a16="http://schemas.microsoft.com/office/drawing/2014/main" id="{44F6D18B-0399-55B9-FD83-C7EDF77FF08A}"/>
               </a:ext>
             </a:extLst>
           </p:cNvPr>
@@ -12551,14 +13359,14 @@
           </a:p>
         </p:txBody>
       </p:sp>
-      <mc:AlternateContent xmlns:mc="http://schemas.openxmlformats.org/markup-compatibility/2006" xmlns:a14="http://schemas.microsoft.com/office/drawing/2010/main">
-        <mc:Choice Requires="a14">
+      <mc:AlternateContent xmlns:mc="http://schemas.openxmlformats.org/markup-compatibility/2006">
+        <mc:Choice xmlns:a14="http://schemas.microsoft.com/office/drawing/2010/main" Requires="a14">
           <p:sp>
             <p:nvSpPr>
               <p:cNvPr id="3" name="Espaço Reservado para Conteúdo 2">
                 <a:extLst>
                   <a:ext uri="{FF2B5EF4-FFF2-40B4-BE49-F238E27FC236}">
-                    <a16:creationId xmlns:a16="http://schemas.microsoft.com/office/drawing/2014/main" xmlns="" id="{06AE9087-3D2E-DF8E-D6D3-12EDE543712C}"/>
+                    <a16:creationId xmlns:a16="http://schemas.microsoft.com/office/drawing/2014/main" id="{06AE9087-3D2E-DF8E-D6D3-12EDE543712C}"/>
                   </a:ext>
                 </a:extLst>
               </p:cNvPr>
@@ -12762,7 +13570,7 @@
               <a:p>
                 <a:r>
                   <a:rPr lang="pt-BR" dirty="0"/>
-                  <a:t>Desta forma, obtém-se os valores das </a:t>
+                  <a:t>Desta forma, como teremos TP, TN, FN e FP para cada classe, obtém-se os valores das </a:t>
                 </a:r>
                 <a:r>
                   <a:rPr lang="pt-BR" b="1" dirty="0">
@@ -12770,7 +13578,7 @@
                       <a:srgbClr val="00B050"/>
                     </a:solidFill>
                   </a:rPr>
-                  <a:t>métricas para cada uma das </a:t>
+                  <a:t>métricas anteriores para cada uma das </a:t>
                 </a:r>
                 <a14:m>
                   <m:oMath xmlns:m="http://schemas.openxmlformats.org/officeDocument/2006/math">
@@ -12929,7 +13737,7 @@
             </p:txBody>
           </p:sp>
         </mc:Choice>
-        <mc:Fallback xmlns="">
+        <mc:Fallback>
           <p:sp>
             <p:nvSpPr>
               <p:cNvPr id="3" name="Espaço Reservado para Conteúdo 2">
@@ -12952,7 +13760,7 @@
                 <a:ext cx="11353800" cy="4998509"/>
               </a:xfrm>
               <a:blipFill>
-                <a:blip r:embed="rId3"/>
+                <a:blip r:embed="rId2"/>
                 <a:stretch>
                   <a:fillRect l="-967" t="-1951"/>
                 </a:stretch>
@@ -13008,7 +13816,7 @@
           <p:cNvPr id="21" name="Agrupar 20">
             <a:extLst>
               <a:ext uri="{FF2B5EF4-FFF2-40B4-BE49-F238E27FC236}">
-                <a16:creationId xmlns:a16="http://schemas.microsoft.com/office/drawing/2014/main" xmlns="" id="{C5995D85-6E2F-F101-4F83-A59335472961}"/>
+                <a16:creationId xmlns:a16="http://schemas.microsoft.com/office/drawing/2014/main" id="{C5995D85-6E2F-F101-4F83-A59335472961}"/>
               </a:ext>
             </a:extLst>
           </p:cNvPr>
@@ -13152,10 +13960,7 @@
                       <a:pPr/>
                       <a14:m>
                         <m:oMathPara xmlns:m="http://schemas.openxmlformats.org/officeDocument/2006/math">
-                          <m:oMathParaPr>
-                            <m:jc m:val="centerGroup"/>
-                          </m:oMathParaPr>
-                          <m:oMath xmlns:m="http://schemas.openxmlformats.org/officeDocument/2006/math">
+                          <m:oMath>
                             <m:sSub>
                               <m:sSubPr>
                                 <m:ctrlPr>
@@ -13255,10 +14060,7 @@
                       <a:pPr/>
                       <a14:m>
                         <m:oMathPara xmlns:m="http://schemas.openxmlformats.org/officeDocument/2006/math">
-                          <m:oMathParaPr>
-                            <m:jc m:val="centerGroup"/>
-                          </m:oMathParaPr>
-                          <m:oMath xmlns:m="http://schemas.openxmlformats.org/officeDocument/2006/math">
+                          <m:oMath>
                             <m:sSub>
                               <m:sSubPr>
                                 <m:ctrlPr>
@@ -14229,10 +15031,7 @@
                       <a:pPr/>
                       <a14:m>
                         <m:oMathPara xmlns:m="http://schemas.openxmlformats.org/officeDocument/2006/math">
-                          <m:oMathParaPr>
-                            <m:jc m:val="centerGroup"/>
-                          </m:oMathParaPr>
-                          <m:oMath xmlns:m="http://schemas.openxmlformats.org/officeDocument/2006/math">
+                          <m:oMath>
                             <m:sSub>
                               <m:sSubPr>
                                 <m:ctrlPr>
@@ -14332,10 +15131,7 @@
                       <a:pPr/>
                       <a14:m>
                         <m:oMathPara xmlns:m="http://schemas.openxmlformats.org/officeDocument/2006/math">
-                          <m:oMathParaPr>
-                            <m:jc m:val="centerGroup"/>
-                          </m:oMathParaPr>
-                          <m:oMath xmlns:m="http://schemas.openxmlformats.org/officeDocument/2006/math">
+                          <m:oMath>
                             <m:sSub>
                               <m:sSubPr>
                                 <m:ctrlPr>
@@ -15306,10 +16102,7 @@
                       <a:pPr/>
                       <a14:m>
                         <m:oMathPara xmlns:m="http://schemas.openxmlformats.org/officeDocument/2006/math">
-                          <m:oMathParaPr>
-                            <m:jc m:val="centerGroup"/>
-                          </m:oMathParaPr>
-                          <m:oMath xmlns:m="http://schemas.openxmlformats.org/officeDocument/2006/math">
+                          <m:oMath>
                             <m:sSub>
                               <m:sSubPr>
                                 <m:ctrlPr>
@@ -15409,10 +16202,7 @@
                       <a:pPr/>
                       <a14:m>
                         <m:oMathPara xmlns:m="http://schemas.openxmlformats.org/officeDocument/2006/math">
-                          <m:oMathParaPr>
-                            <m:jc m:val="centerGroup"/>
-                          </m:oMathParaPr>
-                          <m:oMath xmlns:m="http://schemas.openxmlformats.org/officeDocument/2006/math">
+                          <m:oMath>
                             <m:sSub>
                               <m:sSubPr>
                                 <m:ctrlPr>
@@ -16383,10 +17173,7 @@
                       <a:pPr/>
                       <a14:m>
                         <m:oMathPara xmlns:m="http://schemas.openxmlformats.org/officeDocument/2006/math">
-                          <m:oMathParaPr>
-                            <m:jc m:val="centerGroup"/>
-                          </m:oMathParaPr>
-                          <m:oMath xmlns:m="http://schemas.openxmlformats.org/officeDocument/2006/math">
+                          <m:oMath>
                             <m:sSub>
                               <m:sSubPr>
                                 <m:ctrlPr>
@@ -16486,10 +17273,7 @@
                       <a:pPr/>
                       <a14:m>
                         <m:oMathPara xmlns:m="http://schemas.openxmlformats.org/officeDocument/2006/math">
-                          <m:oMathParaPr>
-                            <m:jc m:val="centerGroup"/>
-                          </m:oMathParaPr>
-                          <m:oMath xmlns:m="http://schemas.openxmlformats.org/officeDocument/2006/math">
+                          <m:oMath>
                             <m:sSub>
                               <m:sSubPr>
                                 <m:ctrlPr>
@@ -17371,10 +18155,7 @@
                     <a:pPr/>
                     <a14:m>
                       <m:oMathPara xmlns:m="http://schemas.openxmlformats.org/officeDocument/2006/math">
-                        <m:oMathParaPr>
-                          <m:jc m:val="centerGroup"/>
-                        </m:oMathParaPr>
-                        <m:oMath xmlns:m="http://schemas.openxmlformats.org/officeDocument/2006/math">
+                        <m:oMath>
                           <m:sSub>
                             <m:sSubPr>
                               <m:ctrlPr>
@@ -17473,10 +18254,7 @@
                     <a:pPr/>
                     <a14:m>
                       <m:oMathPara xmlns:m="http://schemas.openxmlformats.org/officeDocument/2006/math">
-                        <m:oMathParaPr>
-                          <m:jc m:val="centerGroup"/>
-                        </m:oMathParaPr>
-                        <m:oMath xmlns:m="http://schemas.openxmlformats.org/officeDocument/2006/math">
+                        <m:oMath>
                           <m:sSub>
                             <m:sSubPr>
                               <m:ctrlPr>
@@ -17575,10 +18353,7 @@
                     <a:pPr/>
                     <a14:m>
                       <m:oMathPara xmlns:m="http://schemas.openxmlformats.org/officeDocument/2006/math">
-                        <m:oMathParaPr>
-                          <m:jc m:val="centerGroup"/>
-                        </m:oMathParaPr>
-                        <m:oMath xmlns:m="http://schemas.openxmlformats.org/officeDocument/2006/math">
+                        <m:oMath>
                           <m:sSub>
                             <m:sSubPr>
                               <m:ctrlPr>
@@ -17677,10 +18452,7 @@
                     <a:pPr/>
                     <a14:m>
                       <m:oMathPara xmlns:m="http://schemas.openxmlformats.org/officeDocument/2006/math">
-                        <m:oMathParaPr>
-                          <m:jc m:val="centerGroup"/>
-                        </m:oMathParaPr>
-                        <m:oMath xmlns:m="http://schemas.openxmlformats.org/officeDocument/2006/math">
+                        <m:oMath>
                           <m:sSub>
                             <m:sSubPr>
                               <m:ctrlPr>
@@ -17779,10 +18551,7 @@
                     <a:pPr/>
                     <a14:m>
                       <m:oMathPara xmlns:m="http://schemas.openxmlformats.org/officeDocument/2006/math">
-                        <m:oMathParaPr>
-                          <m:jc m:val="centerGroup"/>
-                        </m:oMathParaPr>
-                        <m:oMath xmlns:m="http://schemas.openxmlformats.org/officeDocument/2006/math">
+                        <m:oMath>
                           <m:sSub>
                             <m:sSubPr>
                               <m:ctrlPr>
@@ -17881,10 +18650,7 @@
                     <a:pPr/>
                     <a14:m>
                       <m:oMathPara xmlns:m="http://schemas.openxmlformats.org/officeDocument/2006/math">
-                        <m:oMathParaPr>
-                          <m:jc m:val="centerGroup"/>
-                        </m:oMathParaPr>
-                        <m:oMath xmlns:m="http://schemas.openxmlformats.org/officeDocument/2006/math">
+                        <m:oMath>
                           <m:sSub>
                             <m:sSubPr>
                               <m:ctrlPr>
@@ -17983,10 +18749,7 @@
                     <a:pPr/>
                     <a14:m>
                       <m:oMathPara xmlns:m="http://schemas.openxmlformats.org/officeDocument/2006/math">
-                        <m:oMathParaPr>
-                          <m:jc m:val="centerGroup"/>
-                        </m:oMathParaPr>
-                        <m:oMath xmlns:m="http://schemas.openxmlformats.org/officeDocument/2006/math">
+                        <m:oMath>
                           <m:sSub>
                             <m:sSubPr>
                               <m:ctrlPr>
@@ -18085,10 +18848,7 @@
                     <a:pPr/>
                     <a14:m>
                       <m:oMathPara xmlns:m="http://schemas.openxmlformats.org/officeDocument/2006/math">
-                        <m:oMathParaPr>
-                          <m:jc m:val="centerGroup"/>
-                        </m:oMathParaPr>
-                        <m:oMath xmlns:m="http://schemas.openxmlformats.org/officeDocument/2006/math">
+                        <m:oMath>
                           <m:sSub>
                             <m:sSubPr>
                               <m:ctrlPr>
@@ -18187,10 +18947,7 @@
                     <a:pPr/>
                     <a14:m>
                       <m:oMathPara xmlns:m="http://schemas.openxmlformats.org/officeDocument/2006/math">
-                        <m:oMathParaPr>
-                          <m:jc m:val="centerGroup"/>
-                        </m:oMathParaPr>
-                        <m:oMath xmlns:m="http://schemas.openxmlformats.org/officeDocument/2006/math">
+                        <m:oMath>
                           <m:sSub>
                             <m:sSubPr>
                               <m:ctrlPr>
@@ -18370,7 +19127,7 @@
                 <p:cNvPr id="3" name="CaixaDeTexto 2">
                   <a:extLst>
                     <a:ext uri="{FF2B5EF4-FFF2-40B4-BE49-F238E27FC236}">
-                      <a16:creationId xmlns:a16="http://schemas.microsoft.com/office/drawing/2014/main" xmlns="" id="{569EE34C-BDCC-0D10-1E8B-D043A5A2353D}"/>
+                      <a16:creationId xmlns:a16="http://schemas.microsoft.com/office/drawing/2014/main" id="{569EE34C-BDCC-0D10-1E8B-D043A5A2353D}"/>
                     </a:ext>
                   </a:extLst>
                 </p:cNvPr>
@@ -18566,7 +19323,7 @@
                 <p:cNvPr id="10" name="CaixaDeTexto 9">
                   <a:extLst>
                     <a:ext uri="{FF2B5EF4-FFF2-40B4-BE49-F238E27FC236}">
-                      <a16:creationId xmlns:a16="http://schemas.microsoft.com/office/drawing/2014/main" xmlns="" id="{350798A0-066E-CC4D-389B-8D3FB768C8CB}"/>
+                      <a16:creationId xmlns:a16="http://schemas.microsoft.com/office/drawing/2014/main" id="{350798A0-066E-CC4D-389B-8D3FB768C8CB}"/>
                     </a:ext>
                   </a:extLst>
                 </p:cNvPr>
@@ -18759,7 +19516,7 @@
                 <p:cNvPr id="16" name="CaixaDeTexto 15">
                   <a:extLst>
                     <a:ext uri="{FF2B5EF4-FFF2-40B4-BE49-F238E27FC236}">
-                      <a16:creationId xmlns:a16="http://schemas.microsoft.com/office/drawing/2014/main" xmlns="" id="{1FF1EB9B-4390-9FF2-BD8A-6EE552F64DB4}"/>
+                      <a16:creationId xmlns:a16="http://schemas.microsoft.com/office/drawing/2014/main" id="{1FF1EB9B-4390-9FF2-BD8A-6EE552F64DB4}"/>
                     </a:ext>
                   </a:extLst>
                 </p:cNvPr>
@@ -18953,7 +19710,7 @@
               <p:cNvPr id="18" name="CaixaDeTexto 17">
                 <a:extLst>
                   <a:ext uri="{FF2B5EF4-FFF2-40B4-BE49-F238E27FC236}">
-                    <a16:creationId xmlns:a16="http://schemas.microsoft.com/office/drawing/2014/main" xmlns="" id="{5F594E2D-9C00-0397-8F33-5E9A964A065A}"/>
+                    <a16:creationId xmlns:a16="http://schemas.microsoft.com/office/drawing/2014/main" id="{5F594E2D-9C00-0397-8F33-5E9A964A065A}"/>
                   </a:ext>
                 </a:extLst>
               </p:cNvPr>
@@ -19064,7 +19821,7 @@
           <p:cNvPr id="19" name="Title 1">
             <a:extLst>
               <a:ext uri="{FF2B5EF4-FFF2-40B4-BE49-F238E27FC236}">
-                <a16:creationId xmlns:a16="http://schemas.microsoft.com/office/drawing/2014/main" xmlns="" id="{1A0E4709-46E3-F10D-1F0B-C228BEF03A1D}"/>
+                <a16:creationId xmlns:a16="http://schemas.microsoft.com/office/drawing/2014/main" id="{1A0E4709-46E3-F10D-1F0B-C228BEF03A1D}"/>
               </a:ext>
             </a:extLst>
           </p:cNvPr>
@@ -19097,7 +19854,7 @@
           <p:cNvPr id="23" name="Espaço Reservado para Conteúdo 2">
             <a:extLst>
               <a:ext uri="{FF2B5EF4-FFF2-40B4-BE49-F238E27FC236}">
-                <a16:creationId xmlns:a16="http://schemas.microsoft.com/office/drawing/2014/main" xmlns="" id="{1F869FA1-6ABE-A62C-D1D9-85E87B1FFE8E}"/>
+                <a16:creationId xmlns:a16="http://schemas.microsoft.com/office/drawing/2014/main" id="{1F869FA1-6ABE-A62C-D1D9-85E87B1FFE8E}"/>
               </a:ext>
             </a:extLst>
           </p:cNvPr>
@@ -19128,7 +19885,7 @@
           <a:p>
             <a:r>
               <a:rPr lang="pt-BR" dirty="0"/>
-              <a:t>Para cada problema binário, mudamos os rótulos de </a:t>
+              <a:t>Para cada problema binário, é como se mudássemos os rótulos de </a:t>
             </a:r>
             <a:r>
               <a:rPr lang="pt-BR" b="1" dirty="0">
@@ -19178,7 +19935,7 @@
         <p:cNvPr id="1" name="">
           <a:extLst>
             <a:ext uri="{FF2B5EF4-FFF2-40B4-BE49-F238E27FC236}">
-              <a16:creationId xmlns:a16="http://schemas.microsoft.com/office/drawing/2014/main" xmlns="" id="{2130EF1D-BFF8-2F82-4975-9C47E037612C}"/>
+              <a16:creationId xmlns:a16="http://schemas.microsoft.com/office/drawing/2014/main" id="{2130EF1D-BFF8-2F82-4975-9C47E037612C}"/>
             </a:ext>
           </a:extLst>
         </p:cNvPr>
@@ -19200,7 +19957,7 @@
               <p:cNvPr id="2" name="Título 1">
                 <a:extLst>
                   <a:ext uri="{FF2B5EF4-FFF2-40B4-BE49-F238E27FC236}">
-                    <a16:creationId xmlns:a16="http://schemas.microsoft.com/office/drawing/2014/main" xmlns="" id="{9E8992A0-634A-97EF-203B-8346A5DC6DBB}"/>
+                    <a16:creationId xmlns:a16="http://schemas.microsoft.com/office/drawing/2014/main" id="{9E8992A0-634A-97EF-203B-8346A5DC6DBB}"/>
                   </a:ext>
                 </a:extLst>
               </p:cNvPr>
@@ -19297,7 +20054,7 @@
               <p:cNvPr id="3" name="Espaço Reservado para Conteúdo 2">
                 <a:extLst>
                   <a:ext uri="{FF2B5EF4-FFF2-40B4-BE49-F238E27FC236}">
-                    <a16:creationId xmlns:a16="http://schemas.microsoft.com/office/drawing/2014/main" xmlns="" id="{0DC01E49-26FA-3E21-CFB3-E9EF7AE69543}"/>
+                    <a16:creationId xmlns:a16="http://schemas.microsoft.com/office/drawing/2014/main" id="{0DC01E49-26FA-3E21-CFB3-E9EF7AE69543}"/>
                   </a:ext>
                 </a:extLst>
               </p:cNvPr>
@@ -19590,7 +20347,7 @@
               <p:cNvPr id="4" name="Table 3">
                 <a:extLst>
                   <a:ext uri="{FF2B5EF4-FFF2-40B4-BE49-F238E27FC236}">
-                    <a16:creationId xmlns:a16="http://schemas.microsoft.com/office/drawing/2014/main" xmlns="" id="{EB28D29F-1291-5914-B146-FE53202329C4}"/>
+                    <a16:creationId xmlns:a16="http://schemas.microsoft.com/office/drawing/2014/main" id="{EB28D29F-1291-5914-B146-FE53202329C4}"/>
                   </a:ext>
                 </a:extLst>
               </p:cNvPr>
@@ -19617,35 +20374,35 @@
                     <a:gridCol w="1073505">
                       <a:extLst>
                         <a:ext uri="{9D8B030D-6E8A-4147-A177-3AD203B41FA5}">
-                          <a16:colId xmlns:a16="http://schemas.microsoft.com/office/drawing/2014/main" xmlns="" val="20000"/>
+                          <a16:colId xmlns:a16="http://schemas.microsoft.com/office/drawing/2014/main" val="20000"/>
                         </a:ext>
                       </a:extLst>
                     </a:gridCol>
                     <a:gridCol w="967120">
                       <a:extLst>
                         <a:ext uri="{9D8B030D-6E8A-4147-A177-3AD203B41FA5}">
-                          <a16:colId xmlns:a16="http://schemas.microsoft.com/office/drawing/2014/main" xmlns="" val="20001"/>
+                          <a16:colId xmlns:a16="http://schemas.microsoft.com/office/drawing/2014/main" val="20001"/>
                         </a:ext>
                       </a:extLst>
                     </a:gridCol>
                     <a:gridCol w="1411999">
                       <a:extLst>
                         <a:ext uri="{9D8B030D-6E8A-4147-A177-3AD203B41FA5}">
-                          <a16:colId xmlns:a16="http://schemas.microsoft.com/office/drawing/2014/main" xmlns="" val="20002"/>
+                          <a16:colId xmlns:a16="http://schemas.microsoft.com/office/drawing/2014/main" val="20002"/>
                         </a:ext>
                       </a:extLst>
                     </a:gridCol>
                     <a:gridCol w="1411999">
                       <a:extLst>
                         <a:ext uri="{9D8B030D-6E8A-4147-A177-3AD203B41FA5}">
-                          <a16:colId xmlns:a16="http://schemas.microsoft.com/office/drawing/2014/main" xmlns="" val="20003"/>
+                          <a16:colId xmlns:a16="http://schemas.microsoft.com/office/drawing/2014/main" val="20003"/>
                         </a:ext>
                       </a:extLst>
                     </a:gridCol>
                     <a:gridCol w="1411999">
                       <a:extLst>
                         <a:ext uri="{9D8B030D-6E8A-4147-A177-3AD203B41FA5}">
-                          <a16:colId xmlns:a16="http://schemas.microsoft.com/office/drawing/2014/main" xmlns="" val="20004"/>
+                          <a16:colId xmlns:a16="http://schemas.microsoft.com/office/drawing/2014/main" val="20004"/>
                         </a:ext>
                       </a:extLst>
                     </a:gridCol>
@@ -20042,7 +20799,7 @@
                     </a:tc>
                     <a:extLst>
                       <a:ext uri="{0D108BD9-81ED-4DB2-BD59-A6C34878D82A}">
-                        <a16:rowId xmlns:a16="http://schemas.microsoft.com/office/drawing/2014/main" xmlns="" val="10000"/>
+                        <a16:rowId xmlns:a16="http://schemas.microsoft.com/office/drawing/2014/main" val="10000"/>
                       </a:ext>
                     </a:extLst>
                   </a:tr>
@@ -20384,7 +21141,7 @@
                     </a:tc>
                     <a:extLst>
                       <a:ext uri="{0D108BD9-81ED-4DB2-BD59-A6C34878D82A}">
-                        <a16:rowId xmlns:a16="http://schemas.microsoft.com/office/drawing/2014/main" xmlns="" val="10001"/>
+                        <a16:rowId xmlns:a16="http://schemas.microsoft.com/office/drawing/2014/main" val="10001"/>
                       </a:ext>
                     </a:extLst>
                   </a:tr>
@@ -20726,7 +21483,7 @@
                     </a:tc>
                     <a:extLst>
                       <a:ext uri="{0D108BD9-81ED-4DB2-BD59-A6C34878D82A}">
-                        <a16:rowId xmlns:a16="http://schemas.microsoft.com/office/drawing/2014/main" xmlns="" val="10002"/>
+                        <a16:rowId xmlns:a16="http://schemas.microsoft.com/office/drawing/2014/main" val="10002"/>
                       </a:ext>
                     </a:extLst>
                   </a:tr>
@@ -21081,7 +21838,7 @@
                     </a:tc>
                     <a:extLst>
                       <a:ext uri="{0D108BD9-81ED-4DB2-BD59-A6C34878D82A}">
-                        <a16:rowId xmlns:a16="http://schemas.microsoft.com/office/drawing/2014/main" xmlns="" val="10003"/>
+                        <a16:rowId xmlns:a16="http://schemas.microsoft.com/office/drawing/2014/main" val="10003"/>
                       </a:ext>
                     </a:extLst>
                   </a:tr>
@@ -21181,7 +21938,7 @@
                     </a:tc>
                     <a:extLst>
                       <a:ext uri="{0D108BD9-81ED-4DB2-BD59-A6C34878D82A}">
-                        <a16:rowId xmlns:a16="http://schemas.microsoft.com/office/drawing/2014/main" xmlns="" val="10004"/>
+                        <a16:rowId xmlns:a16="http://schemas.microsoft.com/office/drawing/2014/main" val="10004"/>
                       </a:ext>
                     </a:extLst>
                   </a:tr>
@@ -22543,7 +23300,7 @@
               <p:cNvPr id="5" name="CaixaDeTexto 4">
                 <a:extLst>
                   <a:ext uri="{FF2B5EF4-FFF2-40B4-BE49-F238E27FC236}">
-                    <a16:creationId xmlns:a16="http://schemas.microsoft.com/office/drawing/2014/main" xmlns="" id="{23FA4BC7-C097-6186-8E44-F91117C6BABA}"/>
+                    <a16:creationId xmlns:a16="http://schemas.microsoft.com/office/drawing/2014/main" id="{23FA4BC7-C097-6186-8E44-F91117C6BABA}"/>
                   </a:ext>
                 </a:extLst>
               </p:cNvPr>
@@ -22690,7 +23447,7 @@
               <p:cNvPr id="2" name="Título 1">
                 <a:extLst>
                   <a:ext uri="{FF2B5EF4-FFF2-40B4-BE49-F238E27FC236}">
-                    <a16:creationId xmlns:a16="http://schemas.microsoft.com/office/drawing/2014/main" xmlns="" id="{6F3810FD-8C1E-E235-CDF3-A845D40ED979}"/>
+                    <a16:creationId xmlns:a16="http://schemas.microsoft.com/office/drawing/2014/main" id="{6F3810FD-8C1E-E235-CDF3-A845D40ED979}"/>
                   </a:ext>
                 </a:extLst>
               </p:cNvPr>
@@ -22778,7 +23535,7 @@
               <p:cNvPr id="4" name="Table 4">
                 <a:extLst>
                   <a:ext uri="{FF2B5EF4-FFF2-40B4-BE49-F238E27FC236}">
-                    <a16:creationId xmlns:a16="http://schemas.microsoft.com/office/drawing/2014/main" xmlns="" id="{F549053F-BDE4-C8D3-A996-B46C550898B5}"/>
+                    <a16:creationId xmlns:a16="http://schemas.microsoft.com/office/drawing/2014/main" id="{F549053F-BDE4-C8D3-A996-B46C550898B5}"/>
                   </a:ext>
                 </a:extLst>
               </p:cNvPr>
@@ -22805,35 +23562,35 @@
                     <a:gridCol w="1083731">
                       <a:extLst>
                         <a:ext uri="{9D8B030D-6E8A-4147-A177-3AD203B41FA5}">
-                          <a16:colId xmlns:a16="http://schemas.microsoft.com/office/drawing/2014/main" xmlns="" val="20000"/>
+                          <a16:colId xmlns:a16="http://schemas.microsoft.com/office/drawing/2014/main" val="20000"/>
                         </a:ext>
                       </a:extLst>
                     </a:gridCol>
                     <a:gridCol w="740353">
                       <a:extLst>
                         <a:ext uri="{9D8B030D-6E8A-4147-A177-3AD203B41FA5}">
-                          <a16:colId xmlns:a16="http://schemas.microsoft.com/office/drawing/2014/main" xmlns="" val="20001"/>
+                          <a16:colId xmlns:a16="http://schemas.microsoft.com/office/drawing/2014/main" val="20001"/>
                         </a:ext>
                       </a:extLst>
                     </a:gridCol>
                     <a:gridCol w="1262164">
                       <a:extLst>
                         <a:ext uri="{9D8B030D-6E8A-4147-A177-3AD203B41FA5}">
-                          <a16:colId xmlns:a16="http://schemas.microsoft.com/office/drawing/2014/main" xmlns="" val="20002"/>
+                          <a16:colId xmlns:a16="http://schemas.microsoft.com/office/drawing/2014/main" val="20002"/>
                         </a:ext>
                       </a:extLst>
                     </a:gridCol>
                     <a:gridCol w="1262164">
                       <a:extLst>
                         <a:ext uri="{9D8B030D-6E8A-4147-A177-3AD203B41FA5}">
-                          <a16:colId xmlns:a16="http://schemas.microsoft.com/office/drawing/2014/main" xmlns="" val="20003"/>
+                          <a16:colId xmlns:a16="http://schemas.microsoft.com/office/drawing/2014/main" val="20003"/>
                         </a:ext>
                       </a:extLst>
                     </a:gridCol>
                     <a:gridCol w="1262164">
                       <a:extLst>
                         <a:ext uri="{9D8B030D-6E8A-4147-A177-3AD203B41FA5}">
-                          <a16:colId xmlns:a16="http://schemas.microsoft.com/office/drawing/2014/main" xmlns="" val="20004"/>
+                          <a16:colId xmlns:a16="http://schemas.microsoft.com/office/drawing/2014/main" val="20004"/>
                         </a:ext>
                       </a:extLst>
                     </a:gridCol>
@@ -23278,7 +24035,7 @@
                     </a:tc>
                     <a:extLst>
                       <a:ext uri="{0D108BD9-81ED-4DB2-BD59-A6C34878D82A}">
-                        <a16:rowId xmlns:a16="http://schemas.microsoft.com/office/drawing/2014/main" xmlns="" val="10000"/>
+                        <a16:rowId xmlns:a16="http://schemas.microsoft.com/office/drawing/2014/main" val="10000"/>
                       </a:ext>
                     </a:extLst>
                   </a:tr>
@@ -23668,7 +24425,7 @@
                     </a:tc>
                     <a:extLst>
                       <a:ext uri="{0D108BD9-81ED-4DB2-BD59-A6C34878D82A}">
-                        <a16:rowId xmlns:a16="http://schemas.microsoft.com/office/drawing/2014/main" xmlns="" val="10001"/>
+                        <a16:rowId xmlns:a16="http://schemas.microsoft.com/office/drawing/2014/main" val="10001"/>
                       </a:ext>
                     </a:extLst>
                   </a:tr>
@@ -24058,7 +24815,7 @@
                     </a:tc>
                     <a:extLst>
                       <a:ext uri="{0D108BD9-81ED-4DB2-BD59-A6C34878D82A}">
-                        <a16:rowId xmlns:a16="http://schemas.microsoft.com/office/drawing/2014/main" xmlns="" val="10002"/>
+                        <a16:rowId xmlns:a16="http://schemas.microsoft.com/office/drawing/2014/main" val="10002"/>
                       </a:ext>
                     </a:extLst>
                   </a:tr>
@@ -24416,7 +25173,7 @@
                     </a:tc>
                     <a:extLst>
                       <a:ext uri="{0D108BD9-81ED-4DB2-BD59-A6C34878D82A}">
-                        <a16:rowId xmlns:a16="http://schemas.microsoft.com/office/drawing/2014/main" xmlns="" val="10003"/>
+                        <a16:rowId xmlns:a16="http://schemas.microsoft.com/office/drawing/2014/main" val="10003"/>
                       </a:ext>
                     </a:extLst>
                   </a:tr>
@@ -24516,7 +25273,7 @@
                     </a:tc>
                     <a:extLst>
                       <a:ext uri="{0D108BD9-81ED-4DB2-BD59-A6C34878D82A}">
-                        <a16:rowId xmlns:a16="http://schemas.microsoft.com/office/drawing/2014/main" xmlns="" val="10004"/>
+                        <a16:rowId xmlns:a16="http://schemas.microsoft.com/office/drawing/2014/main" val="10004"/>
                       </a:ext>
                     </a:extLst>
                   </a:tr>
@@ -25974,7 +26731,7 @@
               <p:cNvPr id="6" name="CaixaDeTexto 5">
                 <a:extLst>
                   <a:ext uri="{FF2B5EF4-FFF2-40B4-BE49-F238E27FC236}">
-                    <a16:creationId xmlns:a16="http://schemas.microsoft.com/office/drawing/2014/main" xmlns="" id="{B7DCAE37-0B68-31FE-C4B4-15B3A38CF8F2}"/>
+                    <a16:creationId xmlns:a16="http://schemas.microsoft.com/office/drawing/2014/main" id="{B7DCAE37-0B68-31FE-C4B4-15B3A38CF8F2}"/>
                   </a:ext>
                 </a:extLst>
               </p:cNvPr>
@@ -26091,7 +26848,7 @@
               <p:cNvPr id="3" name="Espaço Reservado para Conteúdo 2">
                 <a:extLst>
                   <a:ext uri="{FF2B5EF4-FFF2-40B4-BE49-F238E27FC236}">
-                    <a16:creationId xmlns:a16="http://schemas.microsoft.com/office/drawing/2014/main" xmlns="" id="{AFB9017A-4D48-F779-0F83-6B9ADCB47688}"/>
+                    <a16:creationId xmlns:a16="http://schemas.microsoft.com/office/drawing/2014/main" id="{AFB9017A-4D48-F779-0F83-6B9ADCB47688}"/>
                   </a:ext>
                 </a:extLst>
               </p:cNvPr>
@@ -26325,7 +27082,7 @@
         <p:cNvPr id="1" name="">
           <a:extLst>
             <a:ext uri="{FF2B5EF4-FFF2-40B4-BE49-F238E27FC236}">
-              <a16:creationId xmlns:a16="http://schemas.microsoft.com/office/drawing/2014/main" xmlns="" id="{62563306-0FB6-57F4-8340-A91D68410238}"/>
+              <a16:creationId xmlns:a16="http://schemas.microsoft.com/office/drawing/2014/main" id="{62563306-0FB6-57F4-8340-A91D68410238}"/>
             </a:ext>
           </a:extLst>
         </p:cNvPr>
@@ -26347,7 +27104,7 @@
               <p:cNvPr id="2" name="Título 1">
                 <a:extLst>
                   <a:ext uri="{FF2B5EF4-FFF2-40B4-BE49-F238E27FC236}">
-                    <a16:creationId xmlns:a16="http://schemas.microsoft.com/office/drawing/2014/main" xmlns="" id="{29383E70-93A4-E908-802C-517D3ED3BE0B}"/>
+                    <a16:creationId xmlns:a16="http://schemas.microsoft.com/office/drawing/2014/main" id="{29383E70-93A4-E908-802C-517D3ED3BE0B}"/>
                   </a:ext>
                 </a:extLst>
               </p:cNvPr>
@@ -26435,7 +27192,7 @@
               <p:cNvPr id="5" name="Table 5">
                 <a:extLst>
                   <a:ext uri="{FF2B5EF4-FFF2-40B4-BE49-F238E27FC236}">
-                    <a16:creationId xmlns:a16="http://schemas.microsoft.com/office/drawing/2014/main" xmlns="" id="{7ECD143D-AF30-8E23-B045-8B71B6EDF91A}"/>
+                    <a16:creationId xmlns:a16="http://schemas.microsoft.com/office/drawing/2014/main" id="{7ECD143D-AF30-8E23-B045-8B71B6EDF91A}"/>
                   </a:ext>
                 </a:extLst>
               </p:cNvPr>
@@ -26462,35 +27219,35 @@
                     <a:gridCol w="1128888">
                       <a:extLst>
                         <a:ext uri="{9D8B030D-6E8A-4147-A177-3AD203B41FA5}">
-                          <a16:colId xmlns:a16="http://schemas.microsoft.com/office/drawing/2014/main" xmlns="" val="20000"/>
+                          <a16:colId xmlns:a16="http://schemas.microsoft.com/office/drawing/2014/main" val="20000"/>
                         </a:ext>
                       </a:extLst>
                     </a:gridCol>
                     <a:gridCol w="695197">
                       <a:extLst>
                         <a:ext uri="{9D8B030D-6E8A-4147-A177-3AD203B41FA5}">
-                          <a16:colId xmlns:a16="http://schemas.microsoft.com/office/drawing/2014/main" xmlns="" val="20001"/>
+                          <a16:colId xmlns:a16="http://schemas.microsoft.com/office/drawing/2014/main" val="20001"/>
                         </a:ext>
                       </a:extLst>
                     </a:gridCol>
                     <a:gridCol w="1262164">
                       <a:extLst>
                         <a:ext uri="{9D8B030D-6E8A-4147-A177-3AD203B41FA5}">
-                          <a16:colId xmlns:a16="http://schemas.microsoft.com/office/drawing/2014/main" xmlns="" val="20002"/>
+                          <a16:colId xmlns:a16="http://schemas.microsoft.com/office/drawing/2014/main" val="20002"/>
                         </a:ext>
                       </a:extLst>
                     </a:gridCol>
                     <a:gridCol w="1262164">
                       <a:extLst>
                         <a:ext uri="{9D8B030D-6E8A-4147-A177-3AD203B41FA5}">
-                          <a16:colId xmlns:a16="http://schemas.microsoft.com/office/drawing/2014/main" xmlns="" val="20003"/>
+                          <a16:colId xmlns:a16="http://schemas.microsoft.com/office/drawing/2014/main" val="20003"/>
                         </a:ext>
                       </a:extLst>
                     </a:gridCol>
                     <a:gridCol w="1262164">
                       <a:extLst>
                         <a:ext uri="{9D8B030D-6E8A-4147-A177-3AD203B41FA5}">
-                          <a16:colId xmlns:a16="http://schemas.microsoft.com/office/drawing/2014/main" xmlns="" val="20004"/>
+                          <a16:colId xmlns:a16="http://schemas.microsoft.com/office/drawing/2014/main" val="20004"/>
                         </a:ext>
                       </a:extLst>
                     </a:gridCol>
@@ -26951,7 +27708,7 @@
                     </a:tc>
                     <a:extLst>
                       <a:ext uri="{0D108BD9-81ED-4DB2-BD59-A6C34878D82A}">
-                        <a16:rowId xmlns:a16="http://schemas.microsoft.com/office/drawing/2014/main" xmlns="" val="10000"/>
+                        <a16:rowId xmlns:a16="http://schemas.microsoft.com/office/drawing/2014/main" val="10000"/>
                       </a:ext>
                     </a:extLst>
                   </a:tr>
@@ -27357,7 +28114,7 @@
                     </a:tc>
                     <a:extLst>
                       <a:ext uri="{0D108BD9-81ED-4DB2-BD59-A6C34878D82A}">
-                        <a16:rowId xmlns:a16="http://schemas.microsoft.com/office/drawing/2014/main" xmlns="" val="10001"/>
+                        <a16:rowId xmlns:a16="http://schemas.microsoft.com/office/drawing/2014/main" val="10001"/>
                       </a:ext>
                     </a:extLst>
                   </a:tr>
@@ -27763,7 +28520,7 @@
                     </a:tc>
                     <a:extLst>
                       <a:ext uri="{0D108BD9-81ED-4DB2-BD59-A6C34878D82A}">
-                        <a16:rowId xmlns:a16="http://schemas.microsoft.com/office/drawing/2014/main" xmlns="" val="10002"/>
+                        <a16:rowId xmlns:a16="http://schemas.microsoft.com/office/drawing/2014/main" val="10002"/>
                       </a:ext>
                     </a:extLst>
                   </a:tr>
@@ -28137,7 +28894,7 @@
                     </a:tc>
                     <a:extLst>
                       <a:ext uri="{0D108BD9-81ED-4DB2-BD59-A6C34878D82A}">
-                        <a16:rowId xmlns:a16="http://schemas.microsoft.com/office/drawing/2014/main" xmlns="" val="10003"/>
+                        <a16:rowId xmlns:a16="http://schemas.microsoft.com/office/drawing/2014/main" val="10003"/>
                       </a:ext>
                     </a:extLst>
                   </a:tr>
@@ -28237,7 +28994,7 @@
                     </a:tc>
                     <a:extLst>
                       <a:ext uri="{0D108BD9-81ED-4DB2-BD59-A6C34878D82A}">
-                        <a16:rowId xmlns:a16="http://schemas.microsoft.com/office/drawing/2014/main" xmlns="" val="10004"/>
+                        <a16:rowId xmlns:a16="http://schemas.microsoft.com/office/drawing/2014/main" val="10004"/>
                       </a:ext>
                     </a:extLst>
                   </a:tr>
@@ -29743,7 +30500,7 @@
               <p:cNvPr id="7" name="CaixaDeTexto 6">
                 <a:extLst>
                   <a:ext uri="{FF2B5EF4-FFF2-40B4-BE49-F238E27FC236}">
-                    <a16:creationId xmlns:a16="http://schemas.microsoft.com/office/drawing/2014/main" xmlns="" id="{A5330AE9-A322-005B-2219-EB4A7E59F328}"/>
+                    <a16:creationId xmlns:a16="http://schemas.microsoft.com/office/drawing/2014/main" id="{A5330AE9-A322-005B-2219-EB4A7E59F328}"/>
                   </a:ext>
                 </a:extLst>
               </p:cNvPr>
@@ -29866,7 +30623,7 @@
               <p:cNvPr id="3" name="Espaço Reservado para Conteúdo 2">
                 <a:extLst>
                   <a:ext uri="{FF2B5EF4-FFF2-40B4-BE49-F238E27FC236}">
-                    <a16:creationId xmlns:a16="http://schemas.microsoft.com/office/drawing/2014/main" xmlns="" id="{9DDD8A4E-6FAD-9F48-24F8-EBBD83CDE404}"/>
+                    <a16:creationId xmlns:a16="http://schemas.microsoft.com/office/drawing/2014/main" id="{9DDD8A4E-6FAD-9F48-24F8-EBBD83CDE404}"/>
                   </a:ext>
                 </a:extLst>
               </p:cNvPr>
@@ -30164,7 +30921,7 @@
           <p:cNvPr id="2" name="Title 1">
             <a:extLst>
               <a:ext uri="{FF2B5EF4-FFF2-40B4-BE49-F238E27FC236}">
-                <a16:creationId xmlns:a16="http://schemas.microsoft.com/office/drawing/2014/main" xmlns="" id="{9EA478C6-7197-E66C-805B-12C1C5C166DC}"/>
+                <a16:creationId xmlns:a16="http://schemas.microsoft.com/office/drawing/2014/main" id="{9EA478C6-7197-E66C-805B-12C1C5C166DC}"/>
               </a:ext>
             </a:extLst>
           </p:cNvPr>
@@ -30193,7 +30950,7 @@
           <p:cNvPr id="3" name="Content Placeholder 2">
             <a:extLst>
               <a:ext uri="{FF2B5EF4-FFF2-40B4-BE49-F238E27FC236}">
-                <a16:creationId xmlns:a16="http://schemas.microsoft.com/office/drawing/2014/main" xmlns="" id="{2B0A3077-842E-10B4-83E8-F6B58E0934BA}"/>
+                <a16:creationId xmlns:a16="http://schemas.microsoft.com/office/drawing/2014/main" id="{2B0A3077-842E-10B4-83E8-F6B58E0934BA}"/>
               </a:ext>
             </a:extLst>
           </p:cNvPr>
@@ -30229,7 +30986,7 @@
               <p:cNvPr id="4" name="CaixaDeTexto 3">
                 <a:extLst>
                   <a:ext uri="{FF2B5EF4-FFF2-40B4-BE49-F238E27FC236}">
-                    <a16:creationId xmlns:a16="http://schemas.microsoft.com/office/drawing/2014/main" xmlns="" id="{BCF716F4-6740-06F0-4F7F-43E81B6588C9}"/>
+                    <a16:creationId xmlns:a16="http://schemas.microsoft.com/office/drawing/2014/main" id="{BCF716F4-6740-06F0-4F7F-43E81B6588C9}"/>
                   </a:ext>
                 </a:extLst>
               </p:cNvPr>
@@ -30255,10 +31012,7 @@
                 <a:pPr/>
                 <a14:m>
                   <m:oMathPara xmlns:m="http://schemas.openxmlformats.org/officeDocument/2006/math">
-                    <m:oMathParaPr>
-                      <m:jc m:val="centerGroup"/>
-                    </m:oMathParaPr>
-                    <m:oMath xmlns:m="http://schemas.openxmlformats.org/officeDocument/2006/math">
+                    <m:oMath>
                       <m:r>
                         <m:rPr>
                           <m:sty m:val="p"/>
@@ -30301,7 +31055,7 @@
                       <m:f>
                         <m:fPr>
                           <m:ctrlPr>
-                            <a:rPr lang="pt-BR" sz="3200" b="0" i="1" smtClean="0">
+                            <a:rPr lang="pt-BR" sz="3200" b="0" i="0" smtClean="0">
                               <a:latin typeface="Cambria Math" panose="02040503050406030204" pitchFamily="18" charset="0"/>
                             </a:rPr>
                           </m:ctrlPr>
@@ -30558,7 +31312,7 @@
           <p:cNvPr id="5" name="Table 4">
             <a:extLst>
               <a:ext uri="{FF2B5EF4-FFF2-40B4-BE49-F238E27FC236}">
-                <a16:creationId xmlns:a16="http://schemas.microsoft.com/office/drawing/2014/main" xmlns="" id="{91DB5CB5-58D6-D6F0-CAE4-AE7FAAC84F35}"/>
+                <a16:creationId xmlns:a16="http://schemas.microsoft.com/office/drawing/2014/main" id="{91DB5CB5-58D6-D6F0-CAE4-AE7FAAC84F35}"/>
               </a:ext>
             </a:extLst>
           </p:cNvPr>
@@ -30587,21 +31341,21 @@
                 <a:gridCol w="863601">
                   <a:extLst>
                     <a:ext uri="{9D8B030D-6E8A-4147-A177-3AD203B41FA5}">
-                      <a16:colId xmlns:a16="http://schemas.microsoft.com/office/drawing/2014/main" xmlns="" val="3867026763"/>
+                      <a16:colId xmlns:a16="http://schemas.microsoft.com/office/drawing/2014/main" val="3867026763"/>
                     </a:ext>
                   </a:extLst>
                 </a:gridCol>
                 <a:gridCol w="863601">
                   <a:extLst>
                     <a:ext uri="{9D8B030D-6E8A-4147-A177-3AD203B41FA5}">
-                      <a16:colId xmlns:a16="http://schemas.microsoft.com/office/drawing/2014/main" xmlns="" val="2035180929"/>
+                      <a16:colId xmlns:a16="http://schemas.microsoft.com/office/drawing/2014/main" val="2035180929"/>
                     </a:ext>
                   </a:extLst>
                 </a:gridCol>
                 <a:gridCol w="863601">
                   <a:extLst>
                     <a:ext uri="{9D8B030D-6E8A-4147-A177-3AD203B41FA5}">
-                      <a16:colId xmlns:a16="http://schemas.microsoft.com/office/drawing/2014/main" xmlns="" val="1096411002"/>
+                      <a16:colId xmlns:a16="http://schemas.microsoft.com/office/drawing/2014/main" val="1096411002"/>
                     </a:ext>
                   </a:extLst>
                 </a:gridCol>
@@ -30774,7 +31528,7 @@
                 </a:tc>
                 <a:extLst>
                   <a:ext uri="{0D108BD9-81ED-4DB2-BD59-A6C34878D82A}">
-                    <a16:rowId xmlns:a16="http://schemas.microsoft.com/office/drawing/2014/main" xmlns="" val="3112607757"/>
+                    <a16:rowId xmlns:a16="http://schemas.microsoft.com/office/drawing/2014/main" val="3112607757"/>
                   </a:ext>
                 </a:extLst>
               </a:tr>
@@ -30960,7 +31714,7 @@
                 </a:tc>
                 <a:extLst>
                   <a:ext uri="{0D108BD9-81ED-4DB2-BD59-A6C34878D82A}">
-                    <a16:rowId xmlns:a16="http://schemas.microsoft.com/office/drawing/2014/main" xmlns="" val="324473955"/>
+                    <a16:rowId xmlns:a16="http://schemas.microsoft.com/office/drawing/2014/main" val="324473955"/>
                   </a:ext>
                 </a:extLst>
               </a:tr>
@@ -31132,7 +31886,7 @@
                 </a:tc>
                 <a:extLst>
                   <a:ext uri="{0D108BD9-81ED-4DB2-BD59-A6C34878D82A}">
-                    <a16:rowId xmlns:a16="http://schemas.microsoft.com/office/drawing/2014/main" xmlns="" val="493002121"/>
+                    <a16:rowId xmlns:a16="http://schemas.microsoft.com/office/drawing/2014/main" val="493002121"/>
                   </a:ext>
                 </a:extLst>
               </a:tr>
@@ -31145,7 +31899,7 @@
           <p:cNvPr id="6" name="TextBox 5">
             <a:extLst>
               <a:ext uri="{FF2B5EF4-FFF2-40B4-BE49-F238E27FC236}">
-                <a16:creationId xmlns:a16="http://schemas.microsoft.com/office/drawing/2014/main" xmlns="" id="{4FB9EF39-B90C-8E8A-FAA1-894F1357DF08}"/>
+                <a16:creationId xmlns:a16="http://schemas.microsoft.com/office/drawing/2014/main" id="{4FB9EF39-B90C-8E8A-FAA1-894F1357DF08}"/>
               </a:ext>
             </a:extLst>
           </p:cNvPr>
@@ -31181,7 +31935,7 @@
           <p:cNvPr id="7" name="TextBox 6">
             <a:extLst>
               <a:ext uri="{FF2B5EF4-FFF2-40B4-BE49-F238E27FC236}">
-                <a16:creationId xmlns:a16="http://schemas.microsoft.com/office/drawing/2014/main" xmlns="" id="{EE98951F-EC06-3600-8596-2C37C9D3F470}"/>
+                <a16:creationId xmlns:a16="http://schemas.microsoft.com/office/drawing/2014/main" id="{EE98951F-EC06-3600-8596-2C37C9D3F470}"/>
               </a:ext>
             </a:extLst>
           </p:cNvPr>
@@ -31217,7 +31971,7 @@
           <p:cNvPr id="8" name="TextBox 7">
             <a:extLst>
               <a:ext uri="{FF2B5EF4-FFF2-40B4-BE49-F238E27FC236}">
-                <a16:creationId xmlns:a16="http://schemas.microsoft.com/office/drawing/2014/main" xmlns="" id="{04A648ED-ACCF-A0E8-A7FF-A93266861237}"/>
+                <a16:creationId xmlns:a16="http://schemas.microsoft.com/office/drawing/2014/main" id="{04A648ED-ACCF-A0E8-A7FF-A93266861237}"/>
               </a:ext>
             </a:extLst>
           </p:cNvPr>
@@ -31253,7 +32007,7 @@
           <p:cNvPr id="9" name="TextBox 8">
             <a:extLst>
               <a:ext uri="{FF2B5EF4-FFF2-40B4-BE49-F238E27FC236}">
-                <a16:creationId xmlns:a16="http://schemas.microsoft.com/office/drawing/2014/main" xmlns="" id="{0F24060A-F1D6-9DB5-76BA-3A64C1CCFBA2}"/>
+                <a16:creationId xmlns:a16="http://schemas.microsoft.com/office/drawing/2014/main" id="{0F24060A-F1D6-9DB5-76BA-3A64C1CCFBA2}"/>
               </a:ext>
             </a:extLst>
           </p:cNvPr>
@@ -31289,7 +32043,7 @@
           <p:cNvPr id="10" name="TextBox 9">
             <a:extLst>
               <a:ext uri="{FF2B5EF4-FFF2-40B4-BE49-F238E27FC236}">
-                <a16:creationId xmlns:a16="http://schemas.microsoft.com/office/drawing/2014/main" xmlns="" id="{504D6480-6017-F7EF-CBF8-45BE5E5980C6}"/>
+                <a16:creationId xmlns:a16="http://schemas.microsoft.com/office/drawing/2014/main" id="{504D6480-6017-F7EF-CBF8-45BE5E5980C6}"/>
               </a:ext>
             </a:extLst>
           </p:cNvPr>
@@ -31325,7 +32079,7 @@
           <p:cNvPr id="11" name="TextBox 10">
             <a:extLst>
               <a:ext uri="{FF2B5EF4-FFF2-40B4-BE49-F238E27FC236}">
-                <a16:creationId xmlns:a16="http://schemas.microsoft.com/office/drawing/2014/main" xmlns="" id="{40EA34B0-3C80-7E6E-DB17-529180947558}"/>
+                <a16:creationId xmlns:a16="http://schemas.microsoft.com/office/drawing/2014/main" id="{40EA34B0-3C80-7E6E-DB17-529180947558}"/>
               </a:ext>
             </a:extLst>
           </p:cNvPr>
@@ -31383,10 +32137,7 @@
                 <a:pPr/>
                 <a14:m>
                   <m:oMathPara xmlns:m="http://schemas.openxmlformats.org/officeDocument/2006/math">
-                    <m:oMathParaPr>
-                      <m:jc m:val="centerGroup"/>
-                    </m:oMathParaPr>
-                    <m:oMath xmlns:m="http://schemas.openxmlformats.org/officeDocument/2006/math">
+                    <m:oMath>
                       <m:r>
                         <a:rPr lang="pt-BR" sz="2800" b="0" i="1" smtClean="0">
                           <a:latin typeface="Cambria Math" panose="02040503050406030204" pitchFamily="18" charset="0"/>
@@ -31481,7 +32232,7 @@
           <p:cNvPr id="3" name="Content Placeholder 2">
             <a:extLst>
               <a:ext uri="{FF2B5EF4-FFF2-40B4-BE49-F238E27FC236}">
-                <a16:creationId xmlns:a16="http://schemas.microsoft.com/office/drawing/2014/main" xmlns="" id="{21699DC6-5E81-1EFB-D850-9CA5951E88B7}"/>
+                <a16:creationId xmlns:a16="http://schemas.microsoft.com/office/drawing/2014/main" id="{21699DC6-5E81-1EFB-D850-9CA5951E88B7}"/>
               </a:ext>
             </a:extLst>
           </p:cNvPr>
@@ -31535,7 +32286,7 @@
           <p:cNvPr id="1026" name="Picture 2" descr="7 razões pelas quais você não deve se desesperar com a vigência imediata da  LGPD">
             <a:extLst>
               <a:ext uri="{FF2B5EF4-FFF2-40B4-BE49-F238E27FC236}">
-                <a16:creationId xmlns:a16="http://schemas.microsoft.com/office/drawing/2014/main" xmlns="" id="{3834F76E-882E-CE2E-2975-876D4AFD7AA4}"/>
+                <a16:creationId xmlns:a16="http://schemas.microsoft.com/office/drawing/2014/main" id="{3834F76E-882E-CE2E-2975-876D4AFD7AA4}"/>
               </a:ext>
             </a:extLst>
           </p:cNvPr>
@@ -31612,7 +32363,7 @@
           <p:cNvPr id="2" name="Title 1">
             <a:extLst>
               <a:ext uri="{FF2B5EF4-FFF2-40B4-BE49-F238E27FC236}">
-                <a16:creationId xmlns:a16="http://schemas.microsoft.com/office/drawing/2014/main" xmlns="" id="{F1CB30D0-D052-EC03-3C25-35C106AA1077}"/>
+                <a16:creationId xmlns:a16="http://schemas.microsoft.com/office/drawing/2014/main" id="{F1CB30D0-D052-EC03-3C25-35C106AA1077}"/>
               </a:ext>
             </a:extLst>
           </p:cNvPr>
@@ -31641,7 +32392,7 @@
           <p:cNvPr id="2050" name="Picture 2" descr="Validate me Constructive criticism permitted – @gallusrostromegalus on  Tumblr">
             <a:extLst>
               <a:ext uri="{FF2B5EF4-FFF2-40B4-BE49-F238E27FC236}">
-                <a16:creationId xmlns:a16="http://schemas.microsoft.com/office/drawing/2014/main" xmlns="" id="{A9C68C0F-3A42-8D60-0B8A-979695E4072E}"/>
+                <a16:creationId xmlns:a16="http://schemas.microsoft.com/office/drawing/2014/main" id="{A9C68C0F-3A42-8D60-0B8A-979695E4072E}"/>
               </a:ext>
             </a:extLst>
           </p:cNvPr>
@@ -31808,7 +32559,7 @@
           <p:cNvPr id="2" name="Título 1">
             <a:extLst>
               <a:ext uri="{FF2B5EF4-FFF2-40B4-BE49-F238E27FC236}">
-                <a16:creationId xmlns:a16="http://schemas.microsoft.com/office/drawing/2014/main" xmlns="" id="{9CD00B3E-85D7-8B25-6629-4A85FF36133A}"/>
+                <a16:creationId xmlns:a16="http://schemas.microsoft.com/office/drawing/2014/main" id="{9CD00B3E-85D7-8B25-6629-4A85FF36133A}"/>
               </a:ext>
             </a:extLst>
           </p:cNvPr>
@@ -31836,7 +32587,7 @@
           <p:cNvPr id="3" name="Espaço Reservado para Conteúdo 2">
             <a:extLst>
               <a:ext uri="{FF2B5EF4-FFF2-40B4-BE49-F238E27FC236}">
-                <a16:creationId xmlns:a16="http://schemas.microsoft.com/office/drawing/2014/main" xmlns="" id="{9730104F-E6BA-B308-644A-11A7E4939EBD}"/>
+                <a16:creationId xmlns:a16="http://schemas.microsoft.com/office/drawing/2014/main" id="{9730104F-E6BA-B308-644A-11A7E4939EBD}"/>
               </a:ext>
             </a:extLst>
           </p:cNvPr>
@@ -31872,7 +32623,7 @@
           <p:cNvPr id="2052" name="Picture 4" descr="Project Jupyter | Try Jupyter">
             <a:extLst>
               <a:ext uri="{FF2B5EF4-FFF2-40B4-BE49-F238E27FC236}">
-                <a16:creationId xmlns:a16="http://schemas.microsoft.com/office/drawing/2014/main" xmlns="" id="{FC70A9A5-A2C7-C005-C6C5-A9FF775654D9}"/>
+                <a16:creationId xmlns:a16="http://schemas.microsoft.com/office/drawing/2014/main" id="{FC70A9A5-A2C7-C005-C6C5-A9FF775654D9}"/>
               </a:ext>
             </a:extLst>
           </p:cNvPr>
@@ -31919,7 +32670,7 @@
           <p:cNvPr id="2056" name="Picture 8" descr="Google Colaboratory Colab - Guía Completa Español - Marketing Branding">
             <a:extLst>
               <a:ext uri="{FF2B5EF4-FFF2-40B4-BE49-F238E27FC236}">
-                <a16:creationId xmlns:a16="http://schemas.microsoft.com/office/drawing/2014/main" xmlns="" id="{8A007768-2032-FE11-22C9-9394A0EF02EF}"/>
+                <a16:creationId xmlns:a16="http://schemas.microsoft.com/office/drawing/2014/main" id="{8A007768-2032-FE11-22C9-9394A0EF02EF}"/>
               </a:ext>
             </a:extLst>
           </p:cNvPr>
@@ -31964,7 +32715,7 @@
           <p:cNvPr id="2058" name="Picture 10" descr="IT12A01: FUNDAMENTALS OF PYTHON PROGRAMMING (SF) (SYNCHRONOUS E-LEARNING) -  NTUC LearningHub">
             <a:extLst>
               <a:ext uri="{FF2B5EF4-FFF2-40B4-BE49-F238E27FC236}">
-                <a16:creationId xmlns:a16="http://schemas.microsoft.com/office/drawing/2014/main" xmlns="" id="{80EDF8DB-E749-8471-3ACA-2FFE3006FC46}"/>
+                <a16:creationId xmlns:a16="http://schemas.microsoft.com/office/drawing/2014/main" id="{80EDF8DB-E749-8471-3ACA-2FFE3006FC46}"/>
               </a:ext>
             </a:extLst>
           </p:cNvPr>
@@ -32009,7 +32760,7 @@
           <p:cNvPr id="10" name="Sinal de Adição 9">
             <a:extLst>
               <a:ext uri="{FF2B5EF4-FFF2-40B4-BE49-F238E27FC236}">
-                <a16:creationId xmlns:a16="http://schemas.microsoft.com/office/drawing/2014/main" xmlns="" id="{C6DC4B29-EABA-20F7-BB46-C33BEC93E2DD}"/>
+                <a16:creationId xmlns:a16="http://schemas.microsoft.com/office/drawing/2014/main" id="{C6DC4B29-EABA-20F7-BB46-C33BEC93E2DD}"/>
               </a:ext>
             </a:extLst>
           </p:cNvPr>
@@ -32057,7 +32808,7 @@
           <p:cNvPr id="11" name="Sinal de Adição 10">
             <a:extLst>
               <a:ext uri="{FF2B5EF4-FFF2-40B4-BE49-F238E27FC236}">
-                <a16:creationId xmlns:a16="http://schemas.microsoft.com/office/drawing/2014/main" xmlns="" id="{FF65B64B-136B-DCC4-8A01-509D3D5CD19F}"/>
+                <a16:creationId xmlns:a16="http://schemas.microsoft.com/office/drawing/2014/main" id="{FF65B64B-136B-DCC4-8A01-509D3D5CD19F}"/>
               </a:ext>
             </a:extLst>
           </p:cNvPr>
@@ -32135,7 +32886,7 @@
           <p:cNvPr id="2" name="Title 1">
             <a:extLst>
               <a:ext uri="{FF2B5EF4-FFF2-40B4-BE49-F238E27FC236}">
-                <a16:creationId xmlns:a16="http://schemas.microsoft.com/office/drawing/2014/main" xmlns="" id="{CF49AE95-3E0A-F9BB-A3FD-4C328EF25334}"/>
+                <a16:creationId xmlns:a16="http://schemas.microsoft.com/office/drawing/2014/main" id="{CF49AE95-3E0A-F9BB-A3FD-4C328EF25334}"/>
               </a:ext>
             </a:extLst>
           </p:cNvPr>
@@ -32164,7 +32915,7 @@
           <p:cNvPr id="3" name="Content Placeholder 2">
             <a:extLst>
               <a:ext uri="{FF2B5EF4-FFF2-40B4-BE49-F238E27FC236}">
-                <a16:creationId xmlns:a16="http://schemas.microsoft.com/office/drawing/2014/main" xmlns="" id="{A431927B-FE56-CB25-3ECF-AB5E92A7DC71}"/>
+                <a16:creationId xmlns:a16="http://schemas.microsoft.com/office/drawing/2014/main" id="{A431927B-FE56-CB25-3ECF-AB5E92A7DC71}"/>
               </a:ext>
             </a:extLst>
           </p:cNvPr>
@@ -32246,7 +32997,7 @@
           <p:cNvPr id="4" name="Título 1">
             <a:extLst>
               <a:ext uri="{FF2B5EF4-FFF2-40B4-BE49-F238E27FC236}">
-                <a16:creationId xmlns:a16="http://schemas.microsoft.com/office/drawing/2014/main" xmlns="" id="{32666AC8-2E17-4DB4-B0F5-60C640CCFD2E}"/>
+                <a16:creationId xmlns:a16="http://schemas.microsoft.com/office/drawing/2014/main" id="{32666AC8-2E17-4DB4-B0F5-60C640CCFD2E}"/>
               </a:ext>
             </a:extLst>
           </p:cNvPr>
@@ -32332,7 +33083,7 @@
           <p:cNvPr id="4" name="Título 1">
             <a:extLst>
               <a:ext uri="{FF2B5EF4-FFF2-40B4-BE49-F238E27FC236}">
-                <a16:creationId xmlns:a16="http://schemas.microsoft.com/office/drawing/2014/main" xmlns="" id="{32666AC8-2E17-4DB4-B0F5-60C640CCFD2E}"/>
+                <a16:creationId xmlns:a16="http://schemas.microsoft.com/office/drawing/2014/main" id="{32666AC8-2E17-4DB4-B0F5-60C640CCFD2E}"/>
               </a:ext>
             </a:extLst>
           </p:cNvPr>
@@ -32418,7 +33169,7 @@
           <p:cNvPr id="2" name="Título 1">
             <a:extLst>
               <a:ext uri="{FF2B5EF4-FFF2-40B4-BE49-F238E27FC236}">
-                <a16:creationId xmlns:a16="http://schemas.microsoft.com/office/drawing/2014/main" xmlns="" id="{C738E7C4-65BB-5A05-5DF4-FF60F520CB58}"/>
+                <a16:creationId xmlns:a16="http://schemas.microsoft.com/office/drawing/2014/main" id="{C738E7C4-65BB-5A05-5DF4-FF60F520CB58}"/>
               </a:ext>
             </a:extLst>
           </p:cNvPr>
@@ -32448,7 +33199,7 @@
               <p:cNvPr id="3" name="Espaço Reservado para Conteúdo 2">
                 <a:extLst>
                   <a:ext uri="{FF2B5EF4-FFF2-40B4-BE49-F238E27FC236}">
-                    <a16:creationId xmlns:a16="http://schemas.microsoft.com/office/drawing/2014/main" xmlns="" id="{40ABD154-3AFD-0036-3D3B-BDE0F6C2A332}"/>
+                    <a16:creationId xmlns:a16="http://schemas.microsoft.com/office/drawing/2014/main" id="{40ABD154-3AFD-0036-3D3B-BDE0F6C2A332}"/>
                   </a:ext>
                 </a:extLst>
               </p:cNvPr>
@@ -32644,7 +33395,7 @@
               <p:cNvPr id="5" name="CaixaDeTexto 4">
                 <a:extLst>
                   <a:ext uri="{FF2B5EF4-FFF2-40B4-BE49-F238E27FC236}">
-                    <a16:creationId xmlns:a16="http://schemas.microsoft.com/office/drawing/2014/main" xmlns="" id="{9FE2C07F-02D2-0345-E394-150F01C017C4}"/>
+                    <a16:creationId xmlns:a16="http://schemas.microsoft.com/office/drawing/2014/main" id="{9FE2C07F-02D2-0345-E394-150F01C017C4}"/>
                   </a:ext>
                 </a:extLst>
               </p:cNvPr>
@@ -32670,10 +33421,7 @@
                 <a:pPr/>
                 <a14:m>
                   <m:oMathPara xmlns:m="http://schemas.openxmlformats.org/officeDocument/2006/math">
-                    <m:oMathParaPr>
-                      <m:jc m:val="centerGroup"/>
-                    </m:oMathParaPr>
-                    <m:oMath xmlns:m="http://schemas.openxmlformats.org/officeDocument/2006/math">
+                    <m:oMath>
                       <m:r>
                         <a:rPr lang="pt-BR" sz="3200" b="1" i="1" smtClean="0">
                           <a:latin typeface="Cambria Math" panose="02040503050406030204" pitchFamily="18" charset="0"/>
@@ -33244,7 +33992,7 @@
           <p:cNvPr id="2" name="Título 1">
             <a:extLst>
               <a:ext uri="{FF2B5EF4-FFF2-40B4-BE49-F238E27FC236}">
-                <a16:creationId xmlns:a16="http://schemas.microsoft.com/office/drawing/2014/main" xmlns="" id="{C738E7C4-65BB-5A05-5DF4-FF60F520CB58}"/>
+                <a16:creationId xmlns:a16="http://schemas.microsoft.com/office/drawing/2014/main" id="{C738E7C4-65BB-5A05-5DF4-FF60F520CB58}"/>
               </a:ext>
             </a:extLst>
           </p:cNvPr>
@@ -33274,7 +34022,7 @@
               <p:cNvPr id="5" name="CaixaDeTexto 4">
                 <a:extLst>
                   <a:ext uri="{FF2B5EF4-FFF2-40B4-BE49-F238E27FC236}">
-                    <a16:creationId xmlns:a16="http://schemas.microsoft.com/office/drawing/2014/main" xmlns="" id="{9FE2C07F-02D2-0345-E394-150F01C017C4}"/>
+                    <a16:creationId xmlns:a16="http://schemas.microsoft.com/office/drawing/2014/main" id="{9FE2C07F-02D2-0345-E394-150F01C017C4}"/>
                   </a:ext>
                 </a:extLst>
               </p:cNvPr>
@@ -33300,10 +34048,7 @@
                 <a:pPr/>
                 <a14:m>
                   <m:oMathPara xmlns:m="http://schemas.openxmlformats.org/officeDocument/2006/math">
-                    <m:oMathParaPr>
-                      <m:jc m:val="centerGroup"/>
-                    </m:oMathParaPr>
-                    <m:oMath xmlns:m="http://schemas.openxmlformats.org/officeDocument/2006/math">
+                    <m:oMath>
                       <m:d>
                         <m:dPr>
                           <m:begChr m:val="["/>
@@ -33832,7 +34577,7 @@
           <p:cNvPr id="4" name="Chave Direita 3">
             <a:extLst>
               <a:ext uri="{FF2B5EF4-FFF2-40B4-BE49-F238E27FC236}">
-                <a16:creationId xmlns:a16="http://schemas.microsoft.com/office/drawing/2014/main" xmlns="" id="{314F6830-34E9-8654-9AF0-D69DE9FAE980}"/>
+                <a16:creationId xmlns:a16="http://schemas.microsoft.com/office/drawing/2014/main" id="{314F6830-34E9-8654-9AF0-D69DE9FAE980}"/>
               </a:ext>
             </a:extLst>
           </p:cNvPr>
@@ -33876,7 +34621,7 @@
           <p:cNvPr id="6" name="CaixaDeTexto 5">
             <a:extLst>
               <a:ext uri="{FF2B5EF4-FFF2-40B4-BE49-F238E27FC236}">
-                <a16:creationId xmlns:a16="http://schemas.microsoft.com/office/drawing/2014/main" xmlns="" id="{AA46DBC8-FBDE-250B-240D-193F0A609C0C}"/>
+                <a16:creationId xmlns:a16="http://schemas.microsoft.com/office/drawing/2014/main" id="{AA46DBC8-FBDE-250B-240D-193F0A609C0C}"/>
               </a:ext>
             </a:extLst>
           </p:cNvPr>
@@ -33886,7 +34631,7 @@
         <p:spPr>
           <a:xfrm>
             <a:off x="4844376" y="4846951"/>
-            <a:ext cx="3394955" cy="646331"/>
+            <a:ext cx="3394955" cy="923330"/>
           </a:xfrm>
           <a:prstGeom prst="rect">
             <a:avLst/>
@@ -33906,11 +34651,11 @@
                   <a:srgbClr val="00B050"/>
                 </a:solidFill>
               </a:rPr>
-              <a:t>Rótulos</a:t>
+              <a:t>Colunas representam os rótulos</a:t>
             </a:r>
             <a:r>
               <a:rPr lang="pt-BR" dirty="0"/>
-              <a:t>: classes a que realmente os exemplos pertencem</a:t>
+              <a:t>: classes a que os exemplos realmente pertencem</a:t>
             </a:r>
           </a:p>
         </p:txBody>
@@ -33920,7 +34665,7 @@
           <p:cNvPr id="7" name="Chave Direita 6">
             <a:extLst>
               <a:ext uri="{FF2B5EF4-FFF2-40B4-BE49-F238E27FC236}">
-                <a16:creationId xmlns:a16="http://schemas.microsoft.com/office/drawing/2014/main" xmlns="" id="{E94D5995-3604-C1B4-B485-9B393568D39B}"/>
+                <a16:creationId xmlns:a16="http://schemas.microsoft.com/office/drawing/2014/main" id="{E94D5995-3604-C1B4-B485-9B393568D39B}"/>
               </a:ext>
             </a:extLst>
           </p:cNvPr>
@@ -33964,7 +34709,7 @@
           <p:cNvPr id="8" name="CaixaDeTexto 7">
             <a:extLst>
               <a:ext uri="{FF2B5EF4-FFF2-40B4-BE49-F238E27FC236}">
-                <a16:creationId xmlns:a16="http://schemas.microsoft.com/office/drawing/2014/main" xmlns="" id="{AF3B44CB-FB5A-9774-1C6B-808D8FC9AA1C}"/>
+                <a16:creationId xmlns:a16="http://schemas.microsoft.com/office/drawing/2014/main" id="{AF3B44CB-FB5A-9774-1C6B-808D8FC9AA1C}"/>
               </a:ext>
             </a:extLst>
           </p:cNvPr>
@@ -33973,8 +34718,8 @@
         </p:nvSpPr>
         <p:spPr>
           <a:xfrm>
-            <a:off x="1381327" y="3105832"/>
-            <a:ext cx="2733414" cy="646331"/>
+            <a:off x="752475" y="2967333"/>
+            <a:ext cx="3362266" cy="923330"/>
           </a:xfrm>
           <a:prstGeom prst="rect">
             <a:avLst/>
@@ -33994,7 +34739,7 @@
                   <a:srgbClr val="00B050"/>
                 </a:solidFill>
               </a:rPr>
-              <a:t>Predições</a:t>
+              <a:t>Linhas representam as predições</a:t>
             </a:r>
             <a:r>
               <a:rPr lang="pt-BR" dirty="0"/>
@@ -34008,7 +34753,7 @@
           <p:cNvPr id="3" name="TextBox 2">
             <a:extLst>
               <a:ext uri="{FF2B5EF4-FFF2-40B4-BE49-F238E27FC236}">
-                <a16:creationId xmlns:a16="http://schemas.microsoft.com/office/drawing/2014/main" xmlns="" id="{B69DC4B7-28AE-3B52-6F26-3A317D0DAC53}"/>
+                <a16:creationId xmlns:a16="http://schemas.microsoft.com/office/drawing/2014/main" id="{B69DC4B7-28AE-3B52-6F26-3A317D0DAC53}"/>
               </a:ext>
             </a:extLst>
           </p:cNvPr>
@@ -34082,7 +34827,7 @@
           <p:cNvPr id="2" name="Título 1">
             <a:extLst>
               <a:ext uri="{FF2B5EF4-FFF2-40B4-BE49-F238E27FC236}">
-                <a16:creationId xmlns:a16="http://schemas.microsoft.com/office/drawing/2014/main" xmlns="" id="{C738E7C4-65BB-5A05-5DF4-FF60F520CB58}"/>
+                <a16:creationId xmlns:a16="http://schemas.microsoft.com/office/drawing/2014/main" id="{C738E7C4-65BB-5A05-5DF4-FF60F520CB58}"/>
               </a:ext>
             </a:extLst>
           </p:cNvPr>
@@ -34112,7 +34857,7 @@
               <p:cNvPr id="3" name="Espaço Reservado para Conteúdo 2">
                 <a:extLst>
                   <a:ext uri="{FF2B5EF4-FFF2-40B4-BE49-F238E27FC236}">
-                    <a16:creationId xmlns:a16="http://schemas.microsoft.com/office/drawing/2014/main" xmlns="" id="{40ABD154-3AFD-0036-3D3B-BDE0F6C2A332}"/>
+                    <a16:creationId xmlns:a16="http://schemas.microsoft.com/office/drawing/2014/main" id="{40ABD154-3AFD-0036-3D3B-BDE0F6C2A332}"/>
                   </a:ext>
                 </a:extLst>
               </p:cNvPr>
@@ -34396,7 +35141,7 @@
               <p:cNvPr id="5" name="CaixaDeTexto 4">
                 <a:extLst>
                   <a:ext uri="{FF2B5EF4-FFF2-40B4-BE49-F238E27FC236}">
-                    <a16:creationId xmlns:a16="http://schemas.microsoft.com/office/drawing/2014/main" xmlns="" id="{9FE2C07F-02D2-0345-E394-150F01C017C4}"/>
+                    <a16:creationId xmlns:a16="http://schemas.microsoft.com/office/drawing/2014/main" id="{9FE2C07F-02D2-0345-E394-150F01C017C4}"/>
                   </a:ext>
                 </a:extLst>
               </p:cNvPr>
@@ -34422,10 +35167,7 @@
                 <a:pPr/>
                 <a14:m>
                   <m:oMathPara xmlns:m="http://schemas.openxmlformats.org/officeDocument/2006/math">
-                    <m:oMathParaPr>
-                      <m:jc m:val="centerGroup"/>
-                    </m:oMathParaPr>
-                    <m:oMath xmlns:m="http://schemas.openxmlformats.org/officeDocument/2006/math">
+                    <m:oMath>
                       <m:r>
                         <a:rPr lang="pt-BR" sz="3200" b="1" i="1" smtClean="0">
                           <a:latin typeface="Cambria Math" panose="02040503050406030204" pitchFamily="18" charset="0"/>
@@ -34966,7 +35708,7 @@
           <p:cNvPr id="4" name="Oval 3">
             <a:extLst>
               <a:ext uri="{FF2B5EF4-FFF2-40B4-BE49-F238E27FC236}">
-                <a16:creationId xmlns:a16="http://schemas.microsoft.com/office/drawing/2014/main" xmlns="" id="{E3C2398C-FA6E-B604-0A4E-B8DC5CF24EF7}"/>
+                <a16:creationId xmlns:a16="http://schemas.microsoft.com/office/drawing/2014/main" id="{E3C2398C-FA6E-B604-0A4E-B8DC5CF24EF7}"/>
               </a:ext>
             </a:extLst>
           </p:cNvPr>
@@ -35018,7 +35760,7 @@
           <p:cNvPr id="6" name="Oval 5">
             <a:extLst>
               <a:ext uri="{FF2B5EF4-FFF2-40B4-BE49-F238E27FC236}">
-                <a16:creationId xmlns:a16="http://schemas.microsoft.com/office/drawing/2014/main" xmlns="" id="{4BBF1D53-FE8C-A737-118B-224A249F0F55}"/>
+                <a16:creationId xmlns:a16="http://schemas.microsoft.com/office/drawing/2014/main" id="{4BBF1D53-FE8C-A737-118B-224A249F0F55}"/>
               </a:ext>
             </a:extLst>
           </p:cNvPr>
@@ -35100,7 +35842,7 @@
           <p:cNvPr id="2" name="Título 1">
             <a:extLst>
               <a:ext uri="{FF2B5EF4-FFF2-40B4-BE49-F238E27FC236}">
-                <a16:creationId xmlns:a16="http://schemas.microsoft.com/office/drawing/2014/main" xmlns="" id="{C738E7C4-65BB-5A05-5DF4-FF60F520CB58}"/>
+                <a16:creationId xmlns:a16="http://schemas.microsoft.com/office/drawing/2014/main" id="{C738E7C4-65BB-5A05-5DF4-FF60F520CB58}"/>
               </a:ext>
             </a:extLst>
           </p:cNvPr>
@@ -35130,7 +35872,7 @@
               <p:cNvPr id="5" name="CaixaDeTexto 4">
                 <a:extLst>
                   <a:ext uri="{FF2B5EF4-FFF2-40B4-BE49-F238E27FC236}">
-                    <a16:creationId xmlns:a16="http://schemas.microsoft.com/office/drawing/2014/main" xmlns="" id="{9FE2C07F-02D2-0345-E394-150F01C017C4}"/>
+                    <a16:creationId xmlns:a16="http://schemas.microsoft.com/office/drawing/2014/main" id="{9FE2C07F-02D2-0345-E394-150F01C017C4}"/>
                   </a:ext>
                 </a:extLst>
               </p:cNvPr>
@@ -35156,10 +35898,7 @@
                 <a:pPr/>
                 <a14:m>
                   <m:oMathPara xmlns:m="http://schemas.openxmlformats.org/officeDocument/2006/math">
-                    <m:oMathParaPr>
-                      <m:jc m:val="centerGroup"/>
-                    </m:oMathParaPr>
-                    <m:oMath xmlns:m="http://schemas.openxmlformats.org/officeDocument/2006/math">
+                    <m:oMath>
                       <m:r>
                         <a:rPr lang="pt-BR" sz="3200" b="1" i="1" smtClean="0">
                           <a:latin typeface="Cambria Math" panose="02040503050406030204" pitchFamily="18" charset="0"/>
@@ -35700,7 +36439,7 @@
           <p:cNvPr id="6" name="Oval 3">
             <a:extLst>
               <a:ext uri="{FF2B5EF4-FFF2-40B4-BE49-F238E27FC236}">
-                <a16:creationId xmlns:a16="http://schemas.microsoft.com/office/drawing/2014/main" xmlns="" id="{E9839706-E14C-629A-7F56-18012BB99C3A}"/>
+                <a16:creationId xmlns:a16="http://schemas.microsoft.com/office/drawing/2014/main" id="{E9839706-E14C-629A-7F56-18012BB99C3A}"/>
               </a:ext>
             </a:extLst>
           </p:cNvPr>
@@ -35752,7 +36491,7 @@
           <p:cNvPr id="7" name="TextBox 4">
             <a:extLst>
               <a:ext uri="{FF2B5EF4-FFF2-40B4-BE49-F238E27FC236}">
-                <a16:creationId xmlns:a16="http://schemas.microsoft.com/office/drawing/2014/main" xmlns="" id="{6279C33D-9270-DC3C-212E-0FD57AC45F7D}"/>
+                <a16:creationId xmlns:a16="http://schemas.microsoft.com/office/drawing/2014/main" id="{6279C33D-9270-DC3C-212E-0FD57AC45F7D}"/>
               </a:ext>
             </a:extLst>
           </p:cNvPr>
@@ -35788,7 +36527,7 @@
           <p:cNvPr id="8" name="Oval 5">
             <a:extLst>
               <a:ext uri="{FF2B5EF4-FFF2-40B4-BE49-F238E27FC236}">
-                <a16:creationId xmlns:a16="http://schemas.microsoft.com/office/drawing/2014/main" xmlns="" id="{1BD26B11-37BD-057A-7642-8513680C0B09}"/>
+                <a16:creationId xmlns:a16="http://schemas.microsoft.com/office/drawing/2014/main" id="{1BD26B11-37BD-057A-7642-8513680C0B09}"/>
               </a:ext>
             </a:extLst>
           </p:cNvPr>
@@ -35840,7 +36579,7 @@
           <p:cNvPr id="9" name="Freeform 6">
             <a:extLst>
               <a:ext uri="{FF2B5EF4-FFF2-40B4-BE49-F238E27FC236}">
-                <a16:creationId xmlns:a16="http://schemas.microsoft.com/office/drawing/2014/main" xmlns="" id="{0F0FD986-F79E-DA0A-829E-1F5A7437324A}"/>
+                <a16:creationId xmlns:a16="http://schemas.microsoft.com/office/drawing/2014/main" id="{0F0FD986-F79E-DA0A-829E-1F5A7437324A}"/>
               </a:ext>
             </a:extLst>
           </p:cNvPr>
@@ -35932,7 +36671,7 @@
           <p:cNvPr id="10" name="TextBox 7">
             <a:extLst>
               <a:ext uri="{FF2B5EF4-FFF2-40B4-BE49-F238E27FC236}">
-                <a16:creationId xmlns:a16="http://schemas.microsoft.com/office/drawing/2014/main" xmlns="" id="{30228E55-A04A-15F3-F542-24A94935CB8F}"/>
+                <a16:creationId xmlns:a16="http://schemas.microsoft.com/office/drawing/2014/main" id="{30228E55-A04A-15F3-F542-24A94935CB8F}"/>
               </a:ext>
             </a:extLst>
           </p:cNvPr>
@@ -35968,7 +36707,7 @@
           <p:cNvPr id="11" name="Freeform 8">
             <a:extLst>
               <a:ext uri="{FF2B5EF4-FFF2-40B4-BE49-F238E27FC236}">
-                <a16:creationId xmlns:a16="http://schemas.microsoft.com/office/drawing/2014/main" xmlns="" id="{DE8EF324-A6C8-6014-6A79-6F6CD536E661}"/>
+                <a16:creationId xmlns:a16="http://schemas.microsoft.com/office/drawing/2014/main" id="{DE8EF324-A6C8-6014-6A79-6F6CD536E661}"/>
               </a:ext>
             </a:extLst>
           </p:cNvPr>
@@ -36052,7 +36791,7 @@
               <p:cNvPr id="12" name="Rectangle 9">
                 <a:extLst>
                   <a:ext uri="{FF2B5EF4-FFF2-40B4-BE49-F238E27FC236}">
-                    <a16:creationId xmlns:a16="http://schemas.microsoft.com/office/drawing/2014/main" xmlns="" id="{B0A8A935-42A2-46DB-34B6-70E5007CD2FA}"/>
+                    <a16:creationId xmlns:a16="http://schemas.microsoft.com/office/drawing/2014/main" id="{B0A8A935-42A2-46DB-34B6-70E5007CD2FA}"/>
                   </a:ext>
                 </a:extLst>
               </p:cNvPr>
@@ -36256,7 +36995,7 @@
               <p:cNvPr id="2" name="Título 1">
                 <a:extLst>
                   <a:ext uri="{FF2B5EF4-FFF2-40B4-BE49-F238E27FC236}">
-                    <a16:creationId xmlns:a16="http://schemas.microsoft.com/office/drawing/2014/main" xmlns="" id="{4EAC8C3E-AFB0-15A1-EDEF-475FA3643375}"/>
+                    <a16:creationId xmlns:a16="http://schemas.microsoft.com/office/drawing/2014/main" id="{4EAC8C3E-AFB0-15A1-EDEF-475FA3643375}"/>
                   </a:ext>
                 </a:extLst>
               </p:cNvPr>
@@ -36347,7 +37086,7 @@
               <p:cNvPr id="3" name="Espaço Reservado para Conteúdo 2">
                 <a:extLst>
                   <a:ext uri="{FF2B5EF4-FFF2-40B4-BE49-F238E27FC236}">
-                    <a16:creationId xmlns:a16="http://schemas.microsoft.com/office/drawing/2014/main" xmlns="" id="{6A052458-A5D6-9055-C748-5BFDB00FC77C}"/>
+                    <a16:creationId xmlns:a16="http://schemas.microsoft.com/office/drawing/2014/main" id="{6A052458-A5D6-9055-C748-5BFDB00FC77C}"/>
                   </a:ext>
                 </a:extLst>
               </p:cNvPr>
@@ -36562,7 +37301,7 @@
           <p:cNvPr id="5" name="Tabela 5">
             <a:extLst>
               <a:ext uri="{FF2B5EF4-FFF2-40B4-BE49-F238E27FC236}">
-                <a16:creationId xmlns:a16="http://schemas.microsoft.com/office/drawing/2014/main" xmlns="" id="{744D7738-C774-F8D0-DD85-76976F9C0032}"/>
+                <a16:creationId xmlns:a16="http://schemas.microsoft.com/office/drawing/2014/main" id="{744D7738-C774-F8D0-DD85-76976F9C0032}"/>
               </a:ext>
             </a:extLst>
           </p:cNvPr>
@@ -36591,14 +37330,14 @@
                 <a:gridCol w="1781769">
                   <a:extLst>
                     <a:ext uri="{9D8B030D-6E8A-4147-A177-3AD203B41FA5}">
-                      <a16:colId xmlns:a16="http://schemas.microsoft.com/office/drawing/2014/main" xmlns="" val="2780398905"/>
+                      <a16:colId xmlns:a16="http://schemas.microsoft.com/office/drawing/2014/main" val="2780398905"/>
                     </a:ext>
                   </a:extLst>
                 </a:gridCol>
                 <a:gridCol w="1781769">
                   <a:extLst>
                     <a:ext uri="{9D8B030D-6E8A-4147-A177-3AD203B41FA5}">
-                      <a16:colId xmlns:a16="http://schemas.microsoft.com/office/drawing/2014/main" xmlns="" val="1752542230"/>
+                      <a16:colId xmlns:a16="http://schemas.microsoft.com/office/drawing/2014/main" val="1752542230"/>
                     </a:ext>
                   </a:extLst>
                 </a:gridCol>
@@ -36795,7 +37534,7 @@
                 </a:tc>
                 <a:extLst>
                   <a:ext uri="{0D108BD9-81ED-4DB2-BD59-A6C34878D82A}">
-                    <a16:rowId xmlns:a16="http://schemas.microsoft.com/office/drawing/2014/main" xmlns="" val="3952155157"/>
+                    <a16:rowId xmlns:a16="http://schemas.microsoft.com/office/drawing/2014/main" val="3952155157"/>
                   </a:ext>
                 </a:extLst>
               </a:tr>
@@ -36997,7 +37736,7 @@
                 </a:tc>
                 <a:extLst>
                   <a:ext uri="{0D108BD9-81ED-4DB2-BD59-A6C34878D82A}">
-                    <a16:rowId xmlns:a16="http://schemas.microsoft.com/office/drawing/2014/main" xmlns="" val="2169341992"/>
+                    <a16:rowId xmlns:a16="http://schemas.microsoft.com/office/drawing/2014/main" val="2169341992"/>
                   </a:ext>
                 </a:extLst>
               </a:tr>
@@ -37010,7 +37749,7 @@
           <p:cNvPr id="7" name="CaixaDeTexto 6">
             <a:extLst>
               <a:ext uri="{FF2B5EF4-FFF2-40B4-BE49-F238E27FC236}">
-                <a16:creationId xmlns:a16="http://schemas.microsoft.com/office/drawing/2014/main" xmlns="" id="{44F3702B-0FE3-BDED-62A7-35438A8F3B75}"/>
+                <a16:creationId xmlns:a16="http://schemas.microsoft.com/office/drawing/2014/main" id="{44F3702B-0FE3-BDED-62A7-35438A8F3B75}"/>
               </a:ext>
             </a:extLst>
           </p:cNvPr>
@@ -37048,7 +37787,7 @@
           <p:cNvPr id="9" name="CaixaDeTexto 8">
             <a:extLst>
               <a:ext uri="{FF2B5EF4-FFF2-40B4-BE49-F238E27FC236}">
-                <a16:creationId xmlns:a16="http://schemas.microsoft.com/office/drawing/2014/main" xmlns="" id="{1FC82D3C-E180-54E3-CEFE-B2BD9B8D3E2A}"/>
+                <a16:creationId xmlns:a16="http://schemas.microsoft.com/office/drawing/2014/main" id="{1FC82D3C-E180-54E3-CEFE-B2BD9B8D3E2A}"/>
               </a:ext>
             </a:extLst>
           </p:cNvPr>
@@ -37088,7 +37827,7 @@
               <p:cNvPr id="11" name="CaixaDeTexto 10">
                 <a:extLst>
                   <a:ext uri="{FF2B5EF4-FFF2-40B4-BE49-F238E27FC236}">
-                    <a16:creationId xmlns:a16="http://schemas.microsoft.com/office/drawing/2014/main" xmlns="" id="{D618FE73-F69F-A4D4-3E14-7C80BD56C5C9}"/>
+                    <a16:creationId xmlns:a16="http://schemas.microsoft.com/office/drawing/2014/main" id="{D618FE73-F69F-A4D4-3E14-7C80BD56C5C9}"/>
                   </a:ext>
                 </a:extLst>
               </p:cNvPr>
@@ -37215,7 +37954,7 @@
               <p:cNvPr id="12" name="CaixaDeTexto 11">
                 <a:extLst>
                   <a:ext uri="{FF2B5EF4-FFF2-40B4-BE49-F238E27FC236}">
-                    <a16:creationId xmlns:a16="http://schemas.microsoft.com/office/drawing/2014/main" xmlns="" id="{64841025-C42C-FB64-87B6-62F7C4AD612E}"/>
+                    <a16:creationId xmlns:a16="http://schemas.microsoft.com/office/drawing/2014/main" id="{64841025-C42C-FB64-87B6-62F7C4AD612E}"/>
                   </a:ext>
                 </a:extLst>
               </p:cNvPr>
@@ -37346,7 +38085,7 @@
               <p:cNvPr id="13" name="CaixaDeTexto 12">
                 <a:extLst>
                   <a:ext uri="{FF2B5EF4-FFF2-40B4-BE49-F238E27FC236}">
-                    <a16:creationId xmlns:a16="http://schemas.microsoft.com/office/drawing/2014/main" xmlns="" id="{33FF584A-410C-DBCB-7735-A7CD30A88BC6}"/>
+                    <a16:creationId xmlns:a16="http://schemas.microsoft.com/office/drawing/2014/main" id="{33FF584A-410C-DBCB-7735-A7CD30A88BC6}"/>
                   </a:ext>
                 </a:extLst>
               </p:cNvPr>
@@ -37473,7 +38212,7 @@
               <p:cNvPr id="14" name="CaixaDeTexto 13">
                 <a:extLst>
                   <a:ext uri="{FF2B5EF4-FFF2-40B4-BE49-F238E27FC236}">
-                    <a16:creationId xmlns:a16="http://schemas.microsoft.com/office/drawing/2014/main" xmlns="" id="{01118442-F1CF-69E3-68DB-2A693775C8C5}"/>
+                    <a16:creationId xmlns:a16="http://schemas.microsoft.com/office/drawing/2014/main" id="{01118442-F1CF-69E3-68DB-2A693775C8C5}"/>
                   </a:ext>
                 </a:extLst>
               </p:cNvPr>
@@ -37627,137 +38366,60 @@
           <a:chExt cx="0" cy="0"/>
         </a:xfrm>
       </p:grpSpPr>
-      <mc:AlternateContent xmlns:mc="http://schemas.openxmlformats.org/markup-compatibility/2006" xmlns:a14="http://schemas.microsoft.com/office/drawing/2010/main">
-        <mc:Choice Requires="a14">
-          <p:sp>
-            <p:nvSpPr>
-              <p:cNvPr id="2" name="Título 1">
-                <a:extLst>
-                  <a:ext uri="{FF2B5EF4-FFF2-40B4-BE49-F238E27FC236}">
-                    <a16:creationId xmlns:a16="http://schemas.microsoft.com/office/drawing/2014/main" xmlns="" id="{2EDB17EF-5EC1-A178-3122-9310D2C0D3C6}"/>
-                  </a:ext>
-                </a:extLst>
-              </p:cNvPr>
-              <p:cNvSpPr>
-                <a:spLocks noGrp="1"/>
-              </p:cNvSpPr>
-              <p:nvPr>
-                <p:ph type="title"/>
-              </p:nvPr>
-            </p:nvSpPr>
-            <p:spPr/>
-            <p:txBody>
-              <a:bodyPr/>
-              <a:lstStyle/>
-              <a:p>
-                <a:r>
-                  <a:rPr lang="pt-BR" dirty="0"/>
-                  <a:t>Matriz de confusão para caso binário (</a:t>
-                </a:r>
-                <a14:m>
-                  <m:oMath xmlns:m="http://schemas.openxmlformats.org/officeDocument/2006/math">
-                    <m:r>
-                      <a:rPr lang="pt-BR" b="0" i="1" smtClean="0">
-                        <a:latin typeface="Cambria Math" panose="02040503050406030204" pitchFamily="18" charset="0"/>
-                      </a:rPr>
-                      <m:t>𝑄</m:t>
-                    </m:r>
-                    <m:r>
-                      <a:rPr lang="pt-BR" b="0" i="1" smtClean="0">
-                        <a:latin typeface="Cambria Math" panose="02040503050406030204" pitchFamily="18" charset="0"/>
-                      </a:rPr>
-                      <m:t>=2</m:t>
-                    </m:r>
-                  </m:oMath>
-                </a14:m>
-                <a:r>
-                  <a:rPr lang="pt-BR" dirty="0"/>
-                  <a:t>)</a:t>
-                </a:r>
-              </a:p>
-            </p:txBody>
-          </p:sp>
-        </mc:Choice>
-        <mc:Fallback xmlns="">
-          <p:sp>
-            <p:nvSpPr>
-              <p:cNvPr id="2" name="Título 1">
-                <a:extLst>
-                  <a:ext uri="{FF2B5EF4-FFF2-40B4-BE49-F238E27FC236}">
-                    <a16:creationId xmlns:a16="http://schemas.microsoft.com/office/drawing/2014/main" id="{2EDB17EF-5EC1-A178-3122-9310D2C0D3C6}"/>
-                  </a:ext>
-                </a:extLst>
-              </p:cNvPr>
-              <p:cNvSpPr>
-                <a:spLocks noGrp="1" noRot="1" noChangeAspect="1" noMove="1" noResize="1" noEditPoints="1" noAdjustHandles="1" noChangeArrowheads="1" noChangeShapeType="1" noTextEdit="1"/>
-              </p:cNvSpPr>
-              <p:nvPr>
-                <p:ph type="title"/>
-              </p:nvPr>
-            </p:nvSpPr>
-            <p:spPr>
-              <a:blipFill>
-                <a:blip r:embed="rId2"/>
-                <a:stretch>
-                  <a:fillRect l="-2377" r="-812"/>
-                </a:stretch>
-              </a:blipFill>
-            </p:spPr>
-            <p:txBody>
-              <a:bodyPr/>
-              <a:lstStyle/>
-              <a:p>
-                <a:r>
-                  <a:rPr lang="pt-BR">
-                    <a:noFill/>
-                  </a:rPr>
-                  <a:t> </a:t>
-                </a:r>
-              </a:p>
-            </p:txBody>
-          </p:sp>
-        </mc:Fallback>
-      </mc:AlternateContent>
-      <p:pic>
-        <p:nvPicPr>
-          <p:cNvPr id="22" name="Imagem 21">
+      <p:sp>
+        <p:nvSpPr>
+          <p:cNvPr id="3" name="Espaço Reservado para Conteúdo 2">
             <a:extLst>
               <a:ext uri="{FF2B5EF4-FFF2-40B4-BE49-F238E27FC236}">
-                <a16:creationId xmlns:a16="http://schemas.microsoft.com/office/drawing/2014/main" xmlns="" id="{43854156-1399-9016-BDBA-8C80710C3EC7}"/>
+                <a16:creationId xmlns:a16="http://schemas.microsoft.com/office/drawing/2014/main" id="{0F418656-538C-BBD9-47FA-40A924A669E5}"/>
               </a:ext>
             </a:extLst>
           </p:cNvPr>
-          <p:cNvPicPr>
-            <a:picLocks noChangeAspect="1"/>
-          </p:cNvPicPr>
-          <p:nvPr/>
-        </p:nvPicPr>
-        <p:blipFill>
-          <a:blip r:embed="rId3" cstate="print">
-            <a:extLst>
-              <a:ext uri="{28A0092B-C50C-407E-A947-70E740481C1C}">
-                <a14:useLocalDpi xmlns:a14="http://schemas.microsoft.com/office/drawing/2010/main" val="0"/>
-              </a:ext>
-            </a:extLst>
-          </a:blip>
-          <a:stretch>
-            <a:fillRect/>
-          </a:stretch>
-        </p:blipFill>
+          <p:cNvSpPr>
+            <a:spLocks noGrp="1"/>
+          </p:cNvSpPr>
+          <p:nvPr>
+            <p:ph idx="1"/>
+          </p:nvPr>
+        </p:nvSpPr>
         <p:spPr>
           <a:xfrm>
-            <a:off x="2885539" y="1611691"/>
-            <a:ext cx="6420922" cy="5235019"/>
+            <a:off x="838200" y="2028604"/>
+            <a:ext cx="10515600" cy="2800791"/>
           </a:xfrm>
-          <a:prstGeom prst="rect">
-            <a:avLst/>
-          </a:prstGeom>
         </p:spPr>
-      </p:pic>
+        <p:txBody>
+          <a:bodyPr>
+            <a:normAutofit/>
+          </a:bodyPr>
+          <a:lstStyle/>
+          <a:p>
+            <a:pPr marL="0" indent="0" algn="ctr">
+              <a:buNone/>
+            </a:pPr>
+            <a:r>
+              <a:rPr lang="pt-BR" sz="4800" dirty="0"/>
+              <a:t>Nós podemos calcular algumas métricas de desempenho importantes a partir das informações contidas na </a:t>
+            </a:r>
+            <a:r>
+              <a:rPr lang="pt-BR" sz="4800" b="1" dirty="0">
+                <a:solidFill>
+                  <a:srgbClr val="7030A0"/>
+                </a:solidFill>
+              </a:rPr>
+              <a:t>matriz de confusão binária</a:t>
+            </a:r>
+            <a:r>
+              <a:rPr lang="pt-BR" sz="4800" dirty="0"/>
+              <a:t>.</a:t>
+            </a:r>
+          </a:p>
+        </p:txBody>
+      </p:sp>
     </p:spTree>
     <p:extLst>
       <p:ext uri="{BB962C8B-B14F-4D97-AF65-F5344CB8AC3E}">
-        <p14:creationId xmlns:p14="http://schemas.microsoft.com/office/powerpoint/2010/main" val="3651511289"/>
+        <p14:creationId xmlns:p14="http://schemas.microsoft.com/office/powerpoint/2010/main" val="3609063348"/>
       </p:ext>
     </p:extLst>
   </p:cSld>
